--- a/AI-Deployment/AI_Deployment_Guide.pptx
+++ b/AI-Deployment/AI_Deployment_Guide.pptx
@@ -5,21 +5,18 @@
     <p:sldMasterId id="2147483648" r:id="rId1"/>
   </p:sldMasterIdLst>
   <p:sldIdLst>
-    <p:sldId id="256" r:id="rId2"/>
-    <p:sldId id="257" r:id="rId3"/>
-    <p:sldId id="258" r:id="rId4"/>
-    <p:sldId id="259" r:id="rId5"/>
-    <p:sldId id="260" r:id="rId6"/>
-    <p:sldId id="261" r:id="rId7"/>
-    <p:sldId id="262" r:id="rId8"/>
-    <p:sldId id="263" r:id="rId9"/>
-    <p:sldId id="264" r:id="rId10"/>
-    <p:sldId id="265" r:id="rId11"/>
-    <p:sldId id="266" r:id="rId12"/>
-    <p:sldId id="267" r:id="rId13"/>
-    <p:sldId id="268" r:id="rId14"/>
+    <p:sldId id="256" r:id="rId7"/>
+    <p:sldId id="257" r:id="rId8"/>
+    <p:sldId id="258" r:id="rId9"/>
+    <p:sldId id="259" r:id="rId10"/>
+    <p:sldId id="260" r:id="rId11"/>
+    <p:sldId id="261" r:id="rId12"/>
+    <p:sldId id="262" r:id="rId13"/>
+    <p:sldId id="263" r:id="rId14"/>
+    <p:sldId id="264" r:id="rId15"/>
+    <p:sldId id="265" r:id="rId16"/>
   </p:sldIdLst>
-  <p:sldSz cx="12188825" cy="6858000"/>
+  <p:sldSz cx="12188952" cy="6858000" type="screen4x3"/>
   <p:notesSz cx="6858000" cy="9144000"/>
   <p:defaultTextStyle>
     <a:defPPr>
@@ -116,22 +113,6 @@
       </a:defRPr>
     </a:lvl9pPr>
   </p:defaultTextStyle>
-  <p:extLst>
-    <p:ext uri="{EFAFB233-063F-42B5-8137-9DF3F51BA10A}">
-      <p15:sldGuideLst xmlns:p15="http://schemas.microsoft.com/office/powerpoint/2012/main">
-        <p15:guide id="1" orient="horz" pos="2160">
-          <p15:clr>
-            <a:srgbClr val="A4A3A4"/>
-          </p15:clr>
-        </p15:guide>
-        <p15:guide id="2" pos="2880">
-          <p15:clr>
-            <a:srgbClr val="A4A3A4"/>
-          </p15:clr>
-        </p15:guide>
-      </p15:sldGuideLst>
-    </p:ext>
-  </p:extLst>
 </p:presentation>
 </file>
 
@@ -173,9 +154,10 @@
           <a:lstStyle/>
           <a:p>
             <a:r>
-              <a:rPr lang="en-US"/>
+              <a:rPr lang="en-US" smtClean="0"/>
               <a:t>Click to edit Master title style</a:t>
             </a:r>
+            <a:endParaRPr lang="en-US"/>
           </a:p>
         </p:txBody>
       </p:sp>
@@ -291,9 +273,10 @@
           </a:lstStyle>
           <a:p>
             <a:r>
-              <a:rPr lang="en-US"/>
+              <a:rPr lang="en-US" smtClean="0"/>
               <a:t>Click to edit Master subtitle style</a:t>
             </a:r>
+            <a:endParaRPr lang="en-US"/>
           </a:p>
         </p:txBody>
       </p:sp>
@@ -314,7 +297,7 @@
           <a:p>
             <a:fld id="{5BCAD085-E8A6-8845-BD4E-CB4CCA059FC4}" type="datetimeFigureOut">
               <a:rPr lang="en-US" smtClean="0"/>
-              <a:t>6/24/2026</a:t>
+              <a:t>1/27/13</a:t>
             </a:fld>
             <a:endParaRPr lang="en-US"/>
           </a:p>
@@ -408,9 +391,10 @@
           <a:lstStyle/>
           <a:p>
             <a:r>
-              <a:rPr lang="en-US"/>
+              <a:rPr lang="en-US" smtClean="0"/>
               <a:t>Click to edit Master title style</a:t>
             </a:r>
+            <a:endParaRPr lang="en-US"/>
           </a:p>
         </p:txBody>
       </p:sp>
@@ -431,37 +415,38 @@
           <a:p>
             <a:pPr lvl="0"/>
             <a:r>
-              <a:rPr lang="en-US"/>
+              <a:rPr lang="en-US" smtClean="0"/>
               <a:t>Click to edit Master text styles</a:t>
             </a:r>
           </a:p>
           <a:p>
             <a:pPr lvl="1"/>
             <a:r>
-              <a:rPr lang="en-US"/>
+              <a:rPr lang="en-US" smtClean="0"/>
               <a:t>Second level</a:t>
             </a:r>
           </a:p>
           <a:p>
             <a:pPr lvl="2"/>
             <a:r>
-              <a:rPr lang="en-US"/>
+              <a:rPr lang="en-US" smtClean="0"/>
               <a:t>Third level</a:t>
             </a:r>
           </a:p>
           <a:p>
             <a:pPr lvl="3"/>
             <a:r>
-              <a:rPr lang="en-US"/>
+              <a:rPr lang="en-US" smtClean="0"/>
               <a:t>Fourth level</a:t>
             </a:r>
           </a:p>
           <a:p>
             <a:pPr lvl="4"/>
             <a:r>
-              <a:rPr lang="en-US"/>
+              <a:rPr lang="en-US" smtClean="0"/>
               <a:t>Fifth level</a:t>
             </a:r>
+            <a:endParaRPr lang="en-US"/>
           </a:p>
         </p:txBody>
       </p:sp>
@@ -482,7 +467,7 @@
           <a:p>
             <a:fld id="{5BCAD085-E8A6-8845-BD4E-CB4CCA059FC4}" type="datetimeFigureOut">
               <a:rPr lang="en-US" smtClean="0"/>
-              <a:t>6/24/2026</a:t>
+              <a:t>1/27/13</a:t>
             </a:fld>
             <a:endParaRPr lang="en-US"/>
           </a:p>
@@ -581,9 +566,10 @@
           <a:lstStyle/>
           <a:p>
             <a:r>
-              <a:rPr lang="en-US"/>
+              <a:rPr lang="en-US" smtClean="0"/>
               <a:t>Click to edit Master title style</a:t>
             </a:r>
+            <a:endParaRPr lang="en-US"/>
           </a:p>
         </p:txBody>
       </p:sp>
@@ -609,37 +595,38 @@
           <a:p>
             <a:pPr lvl="0"/>
             <a:r>
-              <a:rPr lang="en-US"/>
+              <a:rPr lang="en-US" smtClean="0"/>
               <a:t>Click to edit Master text styles</a:t>
             </a:r>
           </a:p>
           <a:p>
             <a:pPr lvl="1"/>
             <a:r>
-              <a:rPr lang="en-US"/>
+              <a:rPr lang="en-US" smtClean="0"/>
               <a:t>Second level</a:t>
             </a:r>
           </a:p>
           <a:p>
             <a:pPr lvl="2"/>
             <a:r>
-              <a:rPr lang="en-US"/>
+              <a:rPr lang="en-US" smtClean="0"/>
               <a:t>Third level</a:t>
             </a:r>
           </a:p>
           <a:p>
             <a:pPr lvl="3"/>
             <a:r>
-              <a:rPr lang="en-US"/>
+              <a:rPr lang="en-US" smtClean="0"/>
               <a:t>Fourth level</a:t>
             </a:r>
           </a:p>
           <a:p>
             <a:pPr lvl="4"/>
             <a:r>
-              <a:rPr lang="en-US"/>
+              <a:rPr lang="en-US" smtClean="0"/>
               <a:t>Fifth level</a:t>
             </a:r>
+            <a:endParaRPr lang="en-US"/>
           </a:p>
         </p:txBody>
       </p:sp>
@@ -660,7 +647,7 @@
           <a:p>
             <a:fld id="{5BCAD085-E8A6-8845-BD4E-CB4CCA059FC4}" type="datetimeFigureOut">
               <a:rPr lang="en-US" smtClean="0"/>
-              <a:t>6/24/2026</a:t>
+              <a:t>1/27/13</a:t>
             </a:fld>
             <a:endParaRPr lang="en-US"/>
           </a:p>
@@ -754,9 +741,10 @@
           <a:lstStyle/>
           <a:p>
             <a:r>
-              <a:rPr lang="en-US"/>
+              <a:rPr lang="en-US" smtClean="0"/>
               <a:t>Click to edit Master title style</a:t>
             </a:r>
+            <a:endParaRPr lang="en-US"/>
           </a:p>
         </p:txBody>
       </p:sp>
@@ -777,37 +765,38 @@
           <a:p>
             <a:pPr lvl="0"/>
             <a:r>
-              <a:rPr lang="en-US"/>
+              <a:rPr lang="en-US" smtClean="0"/>
               <a:t>Click to edit Master text styles</a:t>
             </a:r>
           </a:p>
           <a:p>
             <a:pPr lvl="1"/>
             <a:r>
-              <a:rPr lang="en-US"/>
+              <a:rPr lang="en-US" smtClean="0"/>
               <a:t>Second level</a:t>
             </a:r>
           </a:p>
           <a:p>
             <a:pPr lvl="2"/>
             <a:r>
-              <a:rPr lang="en-US"/>
+              <a:rPr lang="en-US" smtClean="0"/>
               <a:t>Third level</a:t>
             </a:r>
           </a:p>
           <a:p>
             <a:pPr lvl="3"/>
             <a:r>
-              <a:rPr lang="en-US"/>
+              <a:rPr lang="en-US" smtClean="0"/>
               <a:t>Fourth level</a:t>
             </a:r>
           </a:p>
           <a:p>
             <a:pPr lvl="4"/>
             <a:r>
-              <a:rPr lang="en-US"/>
+              <a:rPr lang="en-US" smtClean="0"/>
               <a:t>Fifth level</a:t>
             </a:r>
+            <a:endParaRPr lang="en-US"/>
           </a:p>
         </p:txBody>
       </p:sp>
@@ -828,7 +817,7 @@
           <a:p>
             <a:fld id="{5BCAD085-E8A6-8845-BD4E-CB4CCA059FC4}" type="datetimeFigureOut">
               <a:rPr lang="en-US" smtClean="0"/>
-              <a:t>6/24/2026</a:t>
+              <a:t>1/27/13</a:t>
             </a:fld>
             <a:endParaRPr lang="en-US"/>
           </a:p>
@@ -931,9 +920,10 @@
           </a:lstStyle>
           <a:p>
             <a:r>
-              <a:rPr lang="en-US"/>
+              <a:rPr lang="en-US" smtClean="0"/>
               <a:t>Click to edit Master title style</a:t>
             </a:r>
+            <a:endParaRPr lang="en-US"/>
           </a:p>
         </p:txBody>
       </p:sp>
@@ -1050,7 +1040,7 @@
           <a:p>
             <a:pPr lvl="0"/>
             <a:r>
-              <a:rPr lang="en-US"/>
+              <a:rPr lang="en-US" smtClean="0"/>
               <a:t>Click to edit Master text styles</a:t>
             </a:r>
           </a:p>
@@ -1073,7 +1063,7 @@
           <a:p>
             <a:fld id="{5BCAD085-E8A6-8845-BD4E-CB4CCA059FC4}" type="datetimeFigureOut">
               <a:rPr lang="en-US" smtClean="0"/>
-              <a:t>6/24/2026</a:t>
+              <a:t>1/27/13</a:t>
             </a:fld>
             <a:endParaRPr lang="en-US"/>
           </a:p>
@@ -1167,9 +1157,10 @@
           <a:lstStyle/>
           <a:p>
             <a:r>
-              <a:rPr lang="en-US"/>
+              <a:rPr lang="en-US" smtClean="0"/>
               <a:t>Click to edit Master title style</a:t>
             </a:r>
+            <a:endParaRPr lang="en-US"/>
           </a:p>
         </p:txBody>
       </p:sp>
@@ -1223,37 +1214,38 @@
           <a:p>
             <a:pPr lvl="0"/>
             <a:r>
-              <a:rPr lang="en-US"/>
+              <a:rPr lang="en-US" smtClean="0"/>
               <a:t>Click to edit Master text styles</a:t>
             </a:r>
           </a:p>
           <a:p>
             <a:pPr lvl="1"/>
             <a:r>
-              <a:rPr lang="en-US"/>
+              <a:rPr lang="en-US" smtClean="0"/>
               <a:t>Second level</a:t>
             </a:r>
           </a:p>
           <a:p>
             <a:pPr lvl="2"/>
             <a:r>
-              <a:rPr lang="en-US"/>
+              <a:rPr lang="en-US" smtClean="0"/>
               <a:t>Third level</a:t>
             </a:r>
           </a:p>
           <a:p>
             <a:pPr lvl="3"/>
             <a:r>
-              <a:rPr lang="en-US"/>
+              <a:rPr lang="en-US" smtClean="0"/>
               <a:t>Fourth level</a:t>
             </a:r>
           </a:p>
           <a:p>
             <a:pPr lvl="4"/>
             <a:r>
-              <a:rPr lang="en-US"/>
+              <a:rPr lang="en-US" smtClean="0"/>
               <a:t>Fifth level</a:t>
             </a:r>
+            <a:endParaRPr lang="en-US"/>
           </a:p>
         </p:txBody>
       </p:sp>
@@ -1307,37 +1299,38 @@
           <a:p>
             <a:pPr lvl="0"/>
             <a:r>
-              <a:rPr lang="en-US"/>
+              <a:rPr lang="en-US" smtClean="0"/>
               <a:t>Click to edit Master text styles</a:t>
             </a:r>
           </a:p>
           <a:p>
             <a:pPr lvl="1"/>
             <a:r>
-              <a:rPr lang="en-US"/>
+              <a:rPr lang="en-US" smtClean="0"/>
               <a:t>Second level</a:t>
             </a:r>
           </a:p>
           <a:p>
             <a:pPr lvl="2"/>
             <a:r>
-              <a:rPr lang="en-US"/>
+              <a:rPr lang="en-US" smtClean="0"/>
               <a:t>Third level</a:t>
             </a:r>
           </a:p>
           <a:p>
             <a:pPr lvl="3"/>
             <a:r>
-              <a:rPr lang="en-US"/>
+              <a:rPr lang="en-US" smtClean="0"/>
               <a:t>Fourth level</a:t>
             </a:r>
           </a:p>
           <a:p>
             <a:pPr lvl="4"/>
             <a:r>
-              <a:rPr lang="en-US"/>
+              <a:rPr lang="en-US" smtClean="0"/>
               <a:t>Fifth level</a:t>
             </a:r>
+            <a:endParaRPr lang="en-US"/>
           </a:p>
         </p:txBody>
       </p:sp>
@@ -1358,7 +1351,7 @@
           <a:p>
             <a:fld id="{5BCAD085-E8A6-8845-BD4E-CB4CCA059FC4}" type="datetimeFigureOut">
               <a:rPr lang="en-US" smtClean="0"/>
-              <a:t>6/24/2026</a:t>
+              <a:t>1/27/13</a:t>
             </a:fld>
             <a:endParaRPr lang="en-US"/>
           </a:p>
@@ -1456,9 +1449,10 @@
           </a:lstStyle>
           <a:p>
             <a:r>
-              <a:rPr lang="en-US"/>
+              <a:rPr lang="en-US" smtClean="0"/>
               <a:t>Click to edit Master title style</a:t>
             </a:r>
+            <a:endParaRPr lang="en-US"/>
           </a:p>
         </p:txBody>
       </p:sp>
@@ -1521,7 +1515,7 @@
           <a:p>
             <a:pPr lvl="0"/>
             <a:r>
-              <a:rPr lang="en-US"/>
+              <a:rPr lang="en-US" smtClean="0"/>
               <a:t>Click to edit Master text styles</a:t>
             </a:r>
           </a:p>
@@ -1577,37 +1571,38 @@
           <a:p>
             <a:pPr lvl="0"/>
             <a:r>
-              <a:rPr lang="en-US"/>
+              <a:rPr lang="en-US" smtClean="0"/>
               <a:t>Click to edit Master text styles</a:t>
             </a:r>
           </a:p>
           <a:p>
             <a:pPr lvl="1"/>
             <a:r>
-              <a:rPr lang="en-US"/>
+              <a:rPr lang="en-US" smtClean="0"/>
               <a:t>Second level</a:t>
             </a:r>
           </a:p>
           <a:p>
             <a:pPr lvl="2"/>
             <a:r>
-              <a:rPr lang="en-US"/>
+              <a:rPr lang="en-US" smtClean="0"/>
               <a:t>Third level</a:t>
             </a:r>
           </a:p>
           <a:p>
             <a:pPr lvl="3"/>
             <a:r>
-              <a:rPr lang="en-US"/>
+              <a:rPr lang="en-US" smtClean="0"/>
               <a:t>Fourth level</a:t>
             </a:r>
           </a:p>
           <a:p>
             <a:pPr lvl="4"/>
             <a:r>
-              <a:rPr lang="en-US"/>
+              <a:rPr lang="en-US" smtClean="0"/>
               <a:t>Fifth level</a:t>
             </a:r>
+            <a:endParaRPr lang="en-US"/>
           </a:p>
         </p:txBody>
       </p:sp>
@@ -1670,7 +1665,7 @@
           <a:p>
             <a:pPr lvl="0"/>
             <a:r>
-              <a:rPr lang="en-US"/>
+              <a:rPr lang="en-US" smtClean="0"/>
               <a:t>Click to edit Master text styles</a:t>
             </a:r>
           </a:p>
@@ -1726,37 +1721,38 @@
           <a:p>
             <a:pPr lvl="0"/>
             <a:r>
-              <a:rPr lang="en-US"/>
+              <a:rPr lang="en-US" smtClean="0"/>
               <a:t>Click to edit Master text styles</a:t>
             </a:r>
           </a:p>
           <a:p>
             <a:pPr lvl="1"/>
             <a:r>
-              <a:rPr lang="en-US"/>
+              <a:rPr lang="en-US" smtClean="0"/>
               <a:t>Second level</a:t>
             </a:r>
           </a:p>
           <a:p>
             <a:pPr lvl="2"/>
             <a:r>
-              <a:rPr lang="en-US"/>
+              <a:rPr lang="en-US" smtClean="0"/>
               <a:t>Third level</a:t>
             </a:r>
           </a:p>
           <a:p>
             <a:pPr lvl="3"/>
             <a:r>
-              <a:rPr lang="en-US"/>
+              <a:rPr lang="en-US" smtClean="0"/>
               <a:t>Fourth level</a:t>
             </a:r>
           </a:p>
           <a:p>
             <a:pPr lvl="4"/>
             <a:r>
-              <a:rPr lang="en-US"/>
+              <a:rPr lang="en-US" smtClean="0"/>
               <a:t>Fifth level</a:t>
             </a:r>
+            <a:endParaRPr lang="en-US"/>
           </a:p>
         </p:txBody>
       </p:sp>
@@ -1777,7 +1773,7 @@
           <a:p>
             <a:fld id="{5BCAD085-E8A6-8845-BD4E-CB4CCA059FC4}" type="datetimeFigureOut">
               <a:rPr lang="en-US" smtClean="0"/>
-              <a:t>6/24/2026</a:t>
+              <a:t>1/27/13</a:t>
             </a:fld>
             <a:endParaRPr lang="en-US"/>
           </a:p>
@@ -1871,9 +1867,10 @@
           <a:lstStyle/>
           <a:p>
             <a:r>
-              <a:rPr lang="en-US"/>
+              <a:rPr lang="en-US" smtClean="0"/>
               <a:t>Click to edit Master title style</a:t>
             </a:r>
+            <a:endParaRPr lang="en-US"/>
           </a:p>
         </p:txBody>
       </p:sp>
@@ -1894,7 +1891,7 @@
           <a:p>
             <a:fld id="{5BCAD085-E8A6-8845-BD4E-CB4CCA059FC4}" type="datetimeFigureOut">
               <a:rPr lang="en-US" smtClean="0"/>
-              <a:t>6/24/2026</a:t>
+              <a:t>1/27/13</a:t>
             </a:fld>
             <a:endParaRPr lang="en-US"/>
           </a:p>
@@ -1989,7 +1986,7 @@
           <a:p>
             <a:fld id="{5BCAD085-E8A6-8845-BD4E-CB4CCA059FC4}" type="datetimeFigureOut">
               <a:rPr lang="en-US" smtClean="0"/>
-              <a:t>6/24/2026</a:t>
+              <a:t>1/27/13</a:t>
             </a:fld>
             <a:endParaRPr lang="en-US"/>
           </a:p>
@@ -2092,9 +2089,10 @@
           </a:lstStyle>
           <a:p>
             <a:r>
-              <a:rPr lang="en-US"/>
+              <a:rPr lang="en-US" smtClean="0"/>
               <a:t>Click to edit Master title style</a:t>
             </a:r>
+            <a:endParaRPr lang="en-US"/>
           </a:p>
         </p:txBody>
       </p:sp>
@@ -2148,37 +2146,38 @@
           <a:p>
             <a:pPr lvl="0"/>
             <a:r>
-              <a:rPr lang="en-US"/>
+              <a:rPr lang="en-US" smtClean="0"/>
               <a:t>Click to edit Master text styles</a:t>
             </a:r>
           </a:p>
           <a:p>
             <a:pPr lvl="1"/>
             <a:r>
-              <a:rPr lang="en-US"/>
+              <a:rPr lang="en-US" smtClean="0"/>
               <a:t>Second level</a:t>
             </a:r>
           </a:p>
           <a:p>
             <a:pPr lvl="2"/>
             <a:r>
-              <a:rPr lang="en-US"/>
+              <a:rPr lang="en-US" smtClean="0"/>
               <a:t>Third level</a:t>
             </a:r>
           </a:p>
           <a:p>
             <a:pPr lvl="3"/>
             <a:r>
-              <a:rPr lang="en-US"/>
+              <a:rPr lang="en-US" smtClean="0"/>
               <a:t>Fourth level</a:t>
             </a:r>
           </a:p>
           <a:p>
             <a:pPr lvl="4"/>
             <a:r>
-              <a:rPr lang="en-US"/>
+              <a:rPr lang="en-US" smtClean="0"/>
               <a:t>Fifth level</a:t>
             </a:r>
+            <a:endParaRPr lang="en-US"/>
           </a:p>
         </p:txBody>
       </p:sp>
@@ -2241,7 +2240,7 @@
           <a:p>
             <a:pPr lvl="0"/>
             <a:r>
-              <a:rPr lang="en-US"/>
+              <a:rPr lang="en-US" smtClean="0"/>
               <a:t>Click to edit Master text styles</a:t>
             </a:r>
           </a:p>
@@ -2264,7 +2263,7 @@
           <a:p>
             <a:fld id="{5BCAD085-E8A6-8845-BD4E-CB4CCA059FC4}" type="datetimeFigureOut">
               <a:rPr lang="en-US" smtClean="0"/>
-              <a:t>6/24/2026</a:t>
+              <a:t>1/27/13</a:t>
             </a:fld>
             <a:endParaRPr lang="en-US"/>
           </a:p>
@@ -2367,9 +2366,10 @@
           </a:lstStyle>
           <a:p>
             <a:r>
-              <a:rPr lang="en-US"/>
+              <a:rPr lang="en-US" smtClean="0"/>
               <a:t>Click to edit Master title style</a:t>
             </a:r>
+            <a:endParaRPr lang="en-US"/>
           </a:p>
         </p:txBody>
       </p:sp>
@@ -2493,7 +2493,7 @@
           <a:p>
             <a:pPr lvl="0"/>
             <a:r>
-              <a:rPr lang="en-US"/>
+              <a:rPr lang="en-US" smtClean="0"/>
               <a:t>Click to edit Master text styles</a:t>
             </a:r>
           </a:p>
@@ -2516,7 +2516,7 @@
           <a:p>
             <a:fld id="{5BCAD085-E8A6-8845-BD4E-CB4CCA059FC4}" type="datetimeFigureOut">
               <a:rPr lang="en-US" smtClean="0"/>
-              <a:t>6/24/2026</a:t>
+              <a:t>1/27/13</a:t>
             </a:fld>
             <a:endParaRPr lang="en-US"/>
           </a:p>
@@ -2625,9 +2625,10 @@
           <a:lstStyle/>
           <a:p>
             <a:r>
-              <a:rPr lang="en-US"/>
+              <a:rPr lang="en-US" smtClean="0"/>
               <a:t>Click to edit Master title style</a:t>
             </a:r>
+            <a:endParaRPr lang="en-US"/>
           </a:p>
         </p:txBody>
       </p:sp>
@@ -2658,37 +2659,38 @@
           <a:p>
             <a:pPr lvl="0"/>
             <a:r>
-              <a:rPr lang="en-US"/>
+              <a:rPr lang="en-US" smtClean="0"/>
               <a:t>Click to edit Master text styles</a:t>
             </a:r>
           </a:p>
           <a:p>
             <a:pPr lvl="1"/>
             <a:r>
-              <a:rPr lang="en-US"/>
+              <a:rPr lang="en-US" smtClean="0"/>
               <a:t>Second level</a:t>
             </a:r>
           </a:p>
           <a:p>
             <a:pPr lvl="2"/>
             <a:r>
-              <a:rPr lang="en-US"/>
+              <a:rPr lang="en-US" smtClean="0"/>
               <a:t>Third level</a:t>
             </a:r>
           </a:p>
           <a:p>
             <a:pPr lvl="3"/>
             <a:r>
-              <a:rPr lang="en-US"/>
+              <a:rPr lang="en-US" smtClean="0"/>
               <a:t>Fourth level</a:t>
             </a:r>
           </a:p>
           <a:p>
             <a:pPr lvl="4"/>
             <a:r>
-              <a:rPr lang="en-US"/>
+              <a:rPr lang="en-US" smtClean="0"/>
               <a:t>Fifth level</a:t>
             </a:r>
+            <a:endParaRPr lang="en-US"/>
           </a:p>
         </p:txBody>
       </p:sp>
@@ -2727,7 +2729,7 @@
           <a:p>
             <a:fld id="{5BCAD085-E8A6-8845-BD4E-CB4CCA059FC4}" type="datetimeFigureOut">
               <a:rPr lang="en-US" smtClean="0"/>
-              <a:t>6/24/2026</a:t>
+              <a:t>1/27/13</a:t>
             </a:fld>
             <a:endParaRPr lang="en-US"/>
           </a:p>
@@ -3086,7 +3088,7 @@
 </file>
 
 <file path=ppt/slides/slide1.xml><?xml version="1.0" encoding="utf-8"?>
-<p:sld xmlns:a="http://schemas.openxmlformats.org/drawingml/2006/main" xmlns:r="http://schemas.openxmlformats.org/officeDocument/2006/relationships" xmlns:p="http://schemas.openxmlformats.org/presentationml/2006/main">
+<p:sld xmlns:a="http://schemas.openxmlformats.org/drawingml/2006/main" xmlns:p="http://schemas.openxmlformats.org/presentationml/2006/main" xmlns:r="http://schemas.openxmlformats.org/officeDocument/2006/relationships">
   <p:cSld>
     <p:bg>
       <p:bgPr>
@@ -3102,14 +3104,7 @@
         <p:cNvGrpSpPr/>
         <p:nvPr/>
       </p:nvGrpSpPr>
-      <p:grpSpPr>
-        <a:xfrm>
-          <a:off x="0" y="0"/>
-          <a:ext cx="0" cy="0"/>
-          <a:chOff x="0" y="0"/>
-          <a:chExt cx="0" cy="0"/>
-        </a:xfrm>
-      </p:grpSpPr>
+      <p:grpSpPr/>
       <p:sp>
         <p:nvSpPr>
           <p:cNvPr id="2" name="TextBox 1"/>
@@ -3144,7 +3139,7 @@
               </a:defRPr>
             </a:pPr>
             <a:r>
-              <a:t>PRODUCTION-GRADE PIPELINE</a:t>
+              <a:t>PRODUCTION PIPELINE FOR PRE-TRAINED MODELS</a:t>
             </a:r>
           </a:p>
           <a:p>
@@ -3157,7 +3152,7 @@
               </a:defRPr>
             </a:pPr>
             <a:r>
-              <a:t>AI Model Deployment Guide</a:t>
+              <a:t>Docker AI Deployment Guide</a:t>
             </a:r>
           </a:p>
           <a:p>
@@ -3173,7 +3168,7 @@
               </a:defRPr>
             </a:pPr>
             <a:r>
-              <a:t>Ubuntu Server &amp; RunPod Cloud GPUs</a:t>
+              <a:t>2-Step Guide: Standard Server &amp; RunPod Cloud GPUs</a:t>
             </a:r>
           </a:p>
         </p:txBody>
@@ -3209,7 +3204,7 @@
               </a:defRPr>
             </a:pPr>
             <a:r>
-              <a:t>Pothole Instance Segmentation Deployment Presentation • Streamlit + YOLO11</a:t>
+              <a:t>One Unified Dockerfile Setup • Clean Deployment Workspace</a:t>
             </a:r>
           </a:p>
         </p:txBody>
@@ -3223,7 +3218,7 @@
 </file>
 
 <file path=ppt/slides/slide10.xml><?xml version="1.0" encoding="utf-8"?>
-<p:sld xmlns:a="http://schemas.openxmlformats.org/drawingml/2006/main" xmlns:r="http://schemas.openxmlformats.org/officeDocument/2006/relationships" xmlns:p="http://schemas.openxmlformats.org/presentationml/2006/main">
+<p:sld xmlns:a="http://schemas.openxmlformats.org/drawingml/2006/main" xmlns:p="http://schemas.openxmlformats.org/presentationml/2006/main" xmlns:r="http://schemas.openxmlformats.org/officeDocument/2006/relationships">
   <p:cSld>
     <p:bg>
       <p:bgPr>
@@ -3239,14 +3234,7 @@
         <p:cNvGrpSpPr/>
         <p:nvPr/>
       </p:nvGrpSpPr>
-      <p:grpSpPr>
-        <a:xfrm>
-          <a:off x="0" y="0"/>
-          <a:ext cx="0" cy="0"/>
-          <a:chOff x="0" y="0"/>
-          <a:chExt cx="0" cy="0"/>
-        </a:xfrm>
-      </p:grpSpPr>
+      <p:grpSpPr/>
       <p:sp>
         <p:nvSpPr>
           <p:cNvPr id="2" name="TextBox 1"/>
@@ -3264,7 +3252,7 @@
           <a:noFill/>
         </p:spPr>
         <p:txBody>
-          <a:bodyPr wrap="square" lIns="0" tIns="0" rIns="0" bIns="0">
+          <a:bodyPr wrap="square" lIns="0" rIns="0" tIns="0" bIns="0">
             <a:spAutoFit/>
           </a:bodyPr>
           <a:lstStyle/>
@@ -3278,7 +3266,7 @@
               </a:defRPr>
             </a:pPr>
             <a:r>
-              <a:t>RUNPOD HOSTING</a:t>
+              <a:t>DEPLOYMENT SUMMARY</a:t>
             </a:r>
           </a:p>
         </p:txBody>
@@ -3300,7 +3288,7 @@
           <a:noFill/>
         </p:spPr>
         <p:txBody>
-          <a:bodyPr wrap="square" lIns="0" tIns="0" rIns="0" bIns="0">
+          <a:bodyPr wrap="square" lIns="0" rIns="0" tIns="0" bIns="0">
             <a:spAutoFit/>
           </a:bodyPr>
           <a:lstStyle/>
@@ -3314,7 +3302,7 @@
               </a:defRPr>
             </a:pPr>
             <a:r>
-              <a:t>GPU Selection and VRAM Guidelines</a:t>
+              <a:t>Summary Recommendations</a:t>
             </a:r>
           </a:p>
         </p:txBody>
@@ -3357,7 +3345,7 @@
           </a:fontRef>
         </p:style>
         <p:txBody>
-          <a:bodyPr wrap="square" lIns="274320" tIns="274320" rIns="274320" bIns="274320" rtlCol="0" anchor="ctr"/>
+          <a:bodyPr rtlCol="0" anchor="ctr" wrap="square" lIns="274320" rIns="274320" tIns="274320" bIns="274320"/>
           <a:lstStyle/>
           <a:p>
             <a:pPr algn="ctr">
@@ -3372,67 +3360,67 @@
               </a:defRPr>
             </a:pPr>
             <a:r>
-              <a:t>VRAM Allocations by Task</a:t>
-            </a:r>
-          </a:p>
-          <a:p>
-            <a:pPr>
-              <a:spcAft>
-                <a:spcPts val="800"/>
-              </a:spcAft>
-              <a:defRPr sz="1300">
-                <a:solidFill>
-                  <a:srgbClr val="F8FAFC"/>
-                </a:solidFill>
-                <a:latin typeface="Segoe UI"/>
-              </a:defRPr>
-            </a:pPr>
-            <a:r>
-              <a:t>• Computer Vision &amp; Light Models (YOLO, ResNet):</a:t>
+              <a:t>Deployment Quick Guide</a:t>
+            </a:r>
+          </a:p>
+          <a:p>
+            <a:pPr>
+              <a:spcAft>
+                <a:spcPts val="800"/>
+              </a:spcAft>
+              <a:defRPr sz="1300">
+                <a:solidFill>
+                  <a:srgbClr val="F8FAFC"/>
+                </a:solidFill>
+                <a:latin typeface="Segoe UI"/>
+              </a:defRPr>
+            </a:pPr>
+            <a:r>
+              <a:t>• Ubuntu Server (GPU):</a:t>
             </a:r>
             <a:br/>
             <a:r>
-              <a:t>Needs 8GB - 24GB VRAM (RTX 4090, L4 are perfect)</a:t>
-            </a:r>
-          </a:p>
-          <a:p>
-            <a:pPr>
-              <a:spcAft>
-                <a:spcPts val="800"/>
-              </a:spcAft>
-              <a:defRPr sz="1300">
-                <a:solidFill>
-                  <a:srgbClr val="F8FAFC"/>
-                </a:solidFill>
-                <a:latin typeface="Segoe UI"/>
-              </a:defRPr>
-            </a:pPr>
-            <a:r>
-              <a:t>• Medium LLMs / Diffusion (Llama 8B, SDXL):</a:t>
+              <a:t>Standard deployment path. Constant cost, high performance, full system settings control.</a:t>
+            </a:r>
+          </a:p>
+          <a:p>
+            <a:pPr>
+              <a:spcAft>
+                <a:spcPts val="800"/>
+              </a:spcAft>
+              <a:defRPr sz="1300">
+                <a:solidFill>
+                  <a:srgbClr val="F8FAFC"/>
+                </a:solidFill>
+                <a:latin typeface="Segoe UI"/>
+              </a:defRPr>
+            </a:pPr>
+            <a:r>
+              <a:t>• Ubuntu Server (CPU):</a:t>
             </a:r>
             <a:br/>
             <a:r>
-              <a:t>Needs 24GB - 48GB VRAM (RTX 4090, A6000)</a:t>
-            </a:r>
-          </a:p>
-          <a:p>
-            <a:pPr>
-              <a:spcAft>
-                <a:spcPts val="800"/>
-              </a:spcAft>
-              <a:defRPr sz="1300">
-                <a:solidFill>
-                  <a:srgbClr val="F8FAFC"/>
-                </a:solidFill>
-                <a:latin typeface="Segoe UI"/>
-              </a:defRPr>
-            </a:pPr>
-            <a:r>
-              <a:t>• Large Enterprise LLMs (Llama 70B, DeepSeek R1):</a:t>
+              <a:t>Low traffic fallback. Simplest config (just comment out compose deploy block), cheap instance sizes.</a:t>
+            </a:r>
+          </a:p>
+          <a:p>
+            <a:pPr>
+              <a:spcAft>
+                <a:spcPts val="800"/>
+              </a:spcAft>
+              <a:defRPr sz="1300">
+                <a:solidFill>
+                  <a:srgbClr val="F8FAFC"/>
+                </a:solidFill>
+                <a:latin typeface="Segoe UI"/>
+              </a:defRPr>
+            </a:pPr>
+            <a:r>
+              <a:t>• RunPod Pods:</a:t>
             </a:r>
             <a:br/>
             <a:r>
-              <a:t>Needs 80GB+ VRAM (A100 or H100 GPU)</a:t>
+              <a:t>Great for immediate UI dashboard testing and active model prototyping.</a:t>
             </a:r>
           </a:p>
         </p:txBody>
@@ -3475,7 +3463,7 @@
           </a:fontRef>
         </p:style>
         <p:txBody>
-          <a:bodyPr wrap="square" lIns="274320" tIns="274320" rIns="274320" bIns="274320" rtlCol="0" anchor="ctr"/>
+          <a:bodyPr rtlCol="0" anchor="ctr" wrap="square" lIns="274320" rIns="274320" tIns="274320" bIns="274320"/>
           <a:lstStyle/>
           <a:p>
             <a:pPr algn="ctr">
@@ -3484,93 +3472,73 @@
               </a:spcAft>
               <a:defRPr sz="1800" b="1">
                 <a:solidFill>
-                  <a:srgbClr val="38BDF8"/>
-                </a:solidFill>
-                <a:latin typeface="Segoe UI"/>
-              </a:defRPr>
-            </a:pPr>
-            <a:r>
-              <a:t>Pricing &amp; Clouds Selection</a:t>
-            </a:r>
-          </a:p>
-          <a:p>
-            <a:pPr>
-              <a:spcAft>
-                <a:spcPts val="800"/>
-              </a:spcAft>
-              <a:defRPr sz="1300">
-                <a:solidFill>
-                  <a:srgbClr val="F8FAFC"/>
-                </a:solidFill>
-                <a:latin typeface="Segoe UI"/>
-              </a:defRPr>
-            </a:pPr>
-            <a:r>
-              <a:t>• RTX 4090 / L4 (24GB):</a:t>
+                  <a:srgbClr val="22C55E"/>
+                </a:solidFill>
+                <a:latin typeface="Segoe UI"/>
+              </a:defRPr>
+            </a:pPr>
+            <a:r>
+              <a:t>Summary of Docker benefits</a:t>
+            </a:r>
+          </a:p>
+          <a:p>
+            <a:pPr>
+              <a:spcAft>
+                <a:spcPts val="800"/>
+              </a:spcAft>
+              <a:defRPr sz="1300">
+                <a:solidFill>
+                  <a:srgbClr val="F8FAFC"/>
+                </a:solidFill>
+                <a:latin typeface="Segoe UI"/>
+              </a:defRPr>
+            </a:pPr>
+            <a:r>
+              <a:t>• Single Configuration File:</a:t>
             </a:r>
             <a:br/>
             <a:r>
-              <a:t>~$0.55 - $0.89 per hour. Great value</a:t>
-            </a:r>
-          </a:p>
-          <a:p>
-            <a:pPr>
-              <a:spcAft>
-                <a:spcPts val="800"/>
-              </a:spcAft>
-              <a:defRPr sz="1300">
-                <a:solidFill>
-                  <a:srgbClr val="F8FAFC"/>
-                </a:solidFill>
-                <a:latin typeface="Segoe UI"/>
-              </a:defRPr>
-            </a:pPr>
-            <a:r>
-              <a:t>• A100 / H100 (80GB):</a:t>
+              <a:t>Same Dockerfile packages PyTorch, code, and weights for both AWS and RunPod.</a:t>
+            </a:r>
+          </a:p>
+          <a:p>
+            <a:pPr>
+              <a:spcAft>
+                <a:spcPts val="800"/>
+              </a:spcAft>
+              <a:defRPr sz="1300">
+                <a:solidFill>
+                  <a:srgbClr val="F8FAFC"/>
+                </a:solidFill>
+                <a:latin typeface="Segoe UI"/>
+              </a:defRPr>
+            </a:pPr>
+            <a:r>
+              <a:t>• Portability:</a:t>
             </a:r>
             <a:br/>
             <a:r>
-              <a:t>~$2.20 - $4.70 per hour. Peak performance</a:t>
-            </a:r>
-          </a:p>
-          <a:p>
-            <a:pPr>
-              <a:spcAft>
-                <a:spcPts val="800"/>
-              </a:spcAft>
-              <a:defRPr sz="1300">
-                <a:solidFill>
-                  <a:srgbClr val="F8FAFC"/>
-                </a:solidFill>
-                <a:latin typeface="Segoe UI"/>
-              </a:defRPr>
-            </a:pPr>
-            <a:r>
-              <a:t>• Secure Cloud:</a:t>
+              <a:t>No dependency conflicts between local test environments and cloud instances.</a:t>
+            </a:r>
+          </a:p>
+          <a:p>
+            <a:pPr>
+              <a:spcAft>
+                <a:spcPts val="800"/>
+              </a:spcAft>
+              <a:defRPr sz="1300">
+                <a:solidFill>
+                  <a:srgbClr val="F8FAFC"/>
+                </a:solidFill>
+                <a:latin typeface="Segoe UI"/>
+              </a:defRPr>
+            </a:pPr>
+            <a:r>
+              <a:t>• Speed:</a:t>
             </a:r>
             <a:br/>
             <a:r>
-              <a:t>Hosted in tier-3 enterprise data centers. Guaranteed uptime</a:t>
-            </a:r>
-          </a:p>
-          <a:p>
-            <a:pPr>
-              <a:spcAft>
-                <a:spcPts val="800"/>
-              </a:spcAft>
-              <a:defRPr sz="1300">
-                <a:solidFill>
-                  <a:srgbClr val="F8FAFC"/>
-                </a:solidFill>
-                <a:latin typeface="Segoe UI"/>
-              </a:defRPr>
-            </a:pPr>
-            <a:r>
-              <a:t>• Community Cloud:</a:t>
-            </a:r>
-            <a:br/>
-            <a:r>
-              <a:t>Peer-to-peer rented hardware. Up to 50% cheaper but slight interruption risk</a:t>
+              <a:t>Containers launch or re-compile in seconds, keeping production updates safe and simple.</a:t>
             </a:r>
           </a:p>
         </p:txBody>
@@ -3583,8 +3551,8 @@
 </p:sld>
 </file>
 
-<file path=ppt/slides/slide11.xml><?xml version="1.0" encoding="utf-8"?>
-<p:sld xmlns:a="http://schemas.openxmlformats.org/drawingml/2006/main" xmlns:r="http://schemas.openxmlformats.org/officeDocument/2006/relationships" xmlns:p="http://schemas.openxmlformats.org/presentationml/2006/main">
+<file path=ppt/slides/slide2.xml><?xml version="1.0" encoding="utf-8"?>
+<p:sld xmlns:a="http://schemas.openxmlformats.org/drawingml/2006/main" xmlns:p="http://schemas.openxmlformats.org/presentationml/2006/main" xmlns:r="http://schemas.openxmlformats.org/officeDocument/2006/relationships">
   <p:cSld>
     <p:bg>
       <p:bgPr>
@@ -3600,14 +3568,7 @@
         <p:cNvGrpSpPr/>
         <p:nvPr/>
       </p:nvGrpSpPr>
-      <p:grpSpPr>
-        <a:xfrm>
-          <a:off x="0" y="0"/>
-          <a:ext cx="0" cy="0"/>
-          <a:chOff x="0" y="0"/>
-          <a:chExt cx="0" cy="0"/>
-        </a:xfrm>
-      </p:grpSpPr>
+      <p:grpSpPr/>
       <p:sp>
         <p:nvSpPr>
           <p:cNvPr id="2" name="TextBox 1"/>
@@ -3625,7 +3586,7 @@
           <a:noFill/>
         </p:spPr>
         <p:txBody>
-          <a:bodyPr wrap="square" lIns="0" tIns="0" rIns="0" bIns="0">
+          <a:bodyPr wrap="square" lIns="0" rIns="0" tIns="0" bIns="0">
             <a:spAutoFit/>
           </a:bodyPr>
           <a:lstStyle/>
@@ -3639,7 +3600,7 @@
               </a:defRPr>
             </a:pPr>
             <a:r>
-              <a:t>RUNPOD HOSTING</a:t>
+              <a:t>DOCKER AI DEPLOYMENT</a:t>
             </a:r>
           </a:p>
         </p:txBody>
@@ -3661,7 +3622,7 @@
           <a:noFill/>
         </p:spPr>
         <p:txBody>
-          <a:bodyPr wrap="square" lIns="0" tIns="0" rIns="0" bIns="0">
+          <a:bodyPr wrap="square" lIns="0" rIns="0" tIns="0" bIns="0">
             <a:spAutoFit/>
           </a:bodyPr>
           <a:lstStyle/>
@@ -3675,7 +3636,7 @@
               </a:defRPr>
             </a:pPr>
             <a:r>
-              <a:t>Deploying RunPod Pods (Step-by-Step)</a:t>
+              <a:t>Presentation Agenda</a:t>
             </a:r>
           </a:p>
         </p:txBody>
@@ -3718,7 +3679,7 @@
           </a:fontRef>
         </p:style>
         <p:txBody>
-          <a:bodyPr wrap="square" lIns="274320" tIns="274320" rIns="274320" bIns="274320" rtlCol="0" anchor="ctr"/>
+          <a:bodyPr rtlCol="0" anchor="ctr" wrap="square" lIns="274320" rIns="274320" tIns="274320" bIns="274320"/>
           <a:lstStyle/>
           <a:p>
             <a:pPr algn="ctr">
@@ -3733,612 +3694,87 @@
               </a:defRPr>
             </a:pPr>
             <a:r>
-              <a:rPr dirty="0"/>
-              <a:t>1. Pod Template &amp; Provisioning</a:t>
-            </a:r>
-          </a:p>
-          <a:p>
-            <a:pPr>
-              <a:spcAft>
-                <a:spcPts val="800"/>
-              </a:spcAft>
-              <a:defRPr sz="1300">
-                <a:solidFill>
-                  <a:srgbClr val="F8FAFC"/>
-                </a:solidFill>
-                <a:latin typeface="Segoe UI"/>
-              </a:defRPr>
-            </a:pPr>
-            <a:r>
-              <a:rPr dirty="0"/>
-              <a:t>• Create Template in </a:t>
-            </a:r>
-            <a:r>
-              <a:rPr dirty="0" err="1"/>
-              <a:t>RunPod</a:t>
-            </a:r>
-            <a:r>
-              <a:rPr dirty="0"/>
-              <a:t> dashboard</a:t>
-            </a:r>
-          </a:p>
-          <a:p>
-            <a:pPr>
-              <a:spcAft>
-                <a:spcPts val="800"/>
-              </a:spcAft>
-              <a:defRPr sz="1300">
-                <a:solidFill>
-                  <a:srgbClr val="F8FAFC"/>
-                </a:solidFill>
-                <a:latin typeface="Segoe UI"/>
-              </a:defRPr>
-            </a:pPr>
-            <a:r>
-              <a:rPr dirty="0"/>
-              <a:t>• Base image:</a:t>
-            </a:r>
-            <a:br>
-              <a:rPr dirty="0"/>
-            </a:br>
-            <a:r>
-              <a:rPr dirty="0" err="1"/>
-              <a:t>runpod</a:t>
-            </a:r>
-            <a:r>
-              <a:rPr dirty="0"/>
-              <a:t>/pytorch:2.1.0-py3.10-cuda11.8.0-devel-ubuntu22.04</a:t>
-            </a:r>
-          </a:p>
-          <a:p>
-            <a:pPr>
-              <a:spcAft>
-                <a:spcPts val="800"/>
-              </a:spcAft>
-              <a:defRPr sz="1300">
-                <a:solidFill>
-                  <a:srgbClr val="F8FAFC"/>
-                </a:solidFill>
-                <a:latin typeface="Segoe UI"/>
-              </a:defRPr>
-            </a:pPr>
-            <a:r>
-              <a:rPr dirty="0"/>
-              <a:t>• Storage settings:</a:t>
-            </a:r>
-            <a:br>
-              <a:rPr dirty="0"/>
-            </a:br>
-            <a:r>
-              <a:rPr dirty="0"/>
-              <a:t>Allocate 20GB Container Disk &amp; 50GB Volume Disk</a:t>
-            </a:r>
-          </a:p>
-          <a:p>
-            <a:pPr>
-              <a:spcAft>
-                <a:spcPts val="800"/>
-              </a:spcAft>
-              <a:defRPr sz="1300">
-                <a:solidFill>
-                  <a:srgbClr val="F8FAFC"/>
-                </a:solidFill>
-                <a:latin typeface="Segoe UI"/>
-              </a:defRPr>
-            </a:pPr>
-            <a:r>
-              <a:rPr dirty="0"/>
-              <a:t>• Expose Ports:</a:t>
-            </a:r>
-            <a:br>
-              <a:rPr dirty="0"/>
-            </a:br>
-            <a:r>
-              <a:rPr dirty="0"/>
-              <a:t>Add Port 8501 to external route bindings</a:t>
-            </a:r>
-          </a:p>
-        </p:txBody>
-      </p:sp>
-      <p:sp>
-        <p:nvSpPr>
-          <p:cNvPr id="5" name="Rectangle 4"/>
-          <p:cNvSpPr/>
-          <p:nvPr/>
-        </p:nvSpPr>
-        <p:spPr>
-          <a:xfrm>
-            <a:off x="6094412" y="1645920"/>
-            <a:ext cx="5619052" cy="4114800"/>
-          </a:xfrm>
-          <a:prstGeom prst="rect">
-            <a:avLst/>
-          </a:prstGeom>
-          <a:solidFill>
-            <a:srgbClr val="1E293B"/>
-          </a:solidFill>
-          <a:ln>
-            <a:solidFill>
-              <a:srgbClr val="1E293B"/>
-            </a:solidFill>
-          </a:ln>
-        </p:spPr>
-        <p:style>
-          <a:lnRef idx="1">
-            <a:schemeClr val="accent1"/>
-          </a:lnRef>
-          <a:fillRef idx="3">
-            <a:schemeClr val="accent1"/>
-          </a:fillRef>
-          <a:effectRef idx="2">
-            <a:schemeClr val="accent1"/>
-          </a:effectRef>
-          <a:fontRef idx="minor">
-            <a:schemeClr val="lt1"/>
-          </a:fontRef>
-        </p:style>
-        <p:txBody>
-          <a:bodyPr wrap="square" lIns="274320" tIns="274320" rIns="274320" bIns="274320" rtlCol="0" anchor="ctr"/>
-          <a:lstStyle/>
-          <a:p>
-            <a:pPr algn="ctr">
-              <a:spcAft>
-                <a:spcPts val="1400"/>
-              </a:spcAft>
-              <a:defRPr sz="1800" b="1">
-                <a:solidFill>
-                  <a:srgbClr val="38BDF8"/>
-                </a:solidFill>
-                <a:latin typeface="Segoe UI"/>
-              </a:defRPr>
-            </a:pPr>
-            <a:r>
-              <a:rPr dirty="0"/>
-              <a:t>2. Code Deployment &amp; Execution</a:t>
-            </a:r>
-          </a:p>
-          <a:p>
-            <a:pPr>
-              <a:spcAft>
-                <a:spcPts val="800"/>
-              </a:spcAft>
-              <a:defRPr sz="1300">
-                <a:solidFill>
-                  <a:srgbClr val="F8FAFC"/>
-                </a:solidFill>
-                <a:latin typeface="Segoe UI"/>
-              </a:defRPr>
-            </a:pPr>
-            <a:r>
-              <a:rPr dirty="0"/>
-              <a:t>• Boot Pod on chosen GPU (e.g. RTX 4090)</a:t>
-            </a:r>
-          </a:p>
-          <a:p>
-            <a:pPr>
-              <a:spcAft>
-                <a:spcPts val="800"/>
-              </a:spcAft>
-              <a:defRPr sz="1300">
-                <a:solidFill>
-                  <a:srgbClr val="F8FAFC"/>
-                </a:solidFill>
-                <a:latin typeface="Segoe UI"/>
-              </a:defRPr>
-            </a:pPr>
-            <a:r>
-              <a:rPr dirty="0"/>
-              <a:t>• Connect to </a:t>
-            </a:r>
-            <a:r>
-              <a:rPr dirty="0" err="1"/>
-              <a:t>Jupyter</a:t>
-            </a:r>
-            <a:r>
-              <a:rPr dirty="0"/>
-              <a:t> Lab or connect via SSH</a:t>
-            </a:r>
-          </a:p>
-          <a:p>
-            <a:pPr>
-              <a:spcAft>
-                <a:spcPts val="800"/>
-              </a:spcAft>
-              <a:defRPr sz="1300">
-                <a:solidFill>
-                  <a:srgbClr val="F8FAFC"/>
-                </a:solidFill>
-                <a:latin typeface="Segoe UI"/>
-              </a:defRPr>
-            </a:pPr>
-            <a:r>
-              <a:rPr dirty="0"/>
-              <a:t>• Navigate to workspace network volume:</a:t>
-            </a:r>
-            <a:br>
-              <a:rPr dirty="0"/>
-            </a:br>
-            <a:r>
-              <a:rPr dirty="0"/>
-              <a:t>cd /workspace</a:t>
-            </a:r>
-          </a:p>
-          <a:p>
-            <a:pPr>
-              <a:spcAft>
-                <a:spcPts val="800"/>
-              </a:spcAft>
-              <a:defRPr sz="1300">
-                <a:solidFill>
-                  <a:srgbClr val="F8FAFC"/>
-                </a:solidFill>
-                <a:latin typeface="Segoe UI"/>
-              </a:defRPr>
-            </a:pPr>
-            <a:r>
-              <a:rPr dirty="0"/>
-              <a:t>• Clone repo &amp; install packages:</a:t>
-            </a:r>
-            <a:br>
-              <a:rPr dirty="0"/>
-            </a:br>
-            <a:r>
-              <a:rPr dirty="0"/>
-              <a:t>git clone &lt;repo&gt; &amp;&amp; pip install -r requirements.txt</a:t>
-            </a:r>
-          </a:p>
-          <a:p>
-            <a:pPr>
-              <a:spcAft>
-                <a:spcPts val="800"/>
-              </a:spcAft>
-              <a:defRPr sz="1300">
-                <a:solidFill>
-                  <a:srgbClr val="F8FAFC"/>
-                </a:solidFill>
-                <a:latin typeface="Segoe UI"/>
-              </a:defRPr>
-            </a:pPr>
-            <a:r>
-              <a:rPr dirty="0"/>
-              <a:t>• Run dashboard:</a:t>
-            </a:r>
-            <a:br>
-              <a:rPr dirty="0"/>
-            </a:br>
-            <a:r>
-              <a:rPr dirty="0" err="1"/>
-              <a:t>streamlit</a:t>
-            </a:r>
-            <a:r>
-              <a:rPr dirty="0"/>
-              <a:t> run pothole.py --</a:t>
-            </a:r>
-            <a:r>
-              <a:rPr dirty="0" err="1"/>
-              <a:t>server.port</a:t>
-            </a:r>
-            <a:r>
-              <a:rPr dirty="0"/>
-              <a:t> 8501</a:t>
-            </a:r>
-          </a:p>
-          <a:p>
-            <a:pPr>
-              <a:spcAft>
-                <a:spcPts val="800"/>
-              </a:spcAft>
-              <a:defRPr sz="1300">
-                <a:solidFill>
-                  <a:srgbClr val="F8FAFC"/>
-                </a:solidFill>
-                <a:latin typeface="Segoe UI"/>
-              </a:defRPr>
-            </a:pPr>
-            <a:r>
-              <a:rPr dirty="0"/>
-              <a:t>• Access app using the secure </a:t>
-            </a:r>
-            <a:r>
-              <a:rPr dirty="0" err="1"/>
-              <a:t>RunPod</a:t>
-            </a:r>
-            <a:r>
-              <a:rPr dirty="0"/>
-              <a:t> HTTPS proxy link</a:t>
-            </a:r>
-          </a:p>
-        </p:txBody>
-      </p:sp>
-    </p:spTree>
-  </p:cSld>
-  <p:clrMapOvr>
-    <a:masterClrMapping/>
-  </p:clrMapOvr>
-</p:sld>
-</file>
-
-<file path=ppt/slides/slide12.xml><?xml version="1.0" encoding="utf-8"?>
-<p:sld xmlns:a="http://schemas.openxmlformats.org/drawingml/2006/main" xmlns:r="http://schemas.openxmlformats.org/officeDocument/2006/relationships" xmlns:p="http://schemas.openxmlformats.org/presentationml/2006/main">
-  <p:cSld>
-    <p:bg>
-      <p:bgPr>
-        <a:solidFill>
-          <a:srgbClr val="0F172A"/>
-        </a:solidFill>
-        <a:effectLst/>
-      </p:bgPr>
-    </p:bg>
-    <p:spTree>
-      <p:nvGrpSpPr>
-        <p:cNvPr id="1" name=""/>
-        <p:cNvGrpSpPr/>
-        <p:nvPr/>
-      </p:nvGrpSpPr>
-      <p:grpSpPr>
-        <a:xfrm>
-          <a:off x="0" y="0"/>
-          <a:ext cx="0" cy="0"/>
-          <a:chOff x="0" y="0"/>
-          <a:chExt cx="0" cy="0"/>
-        </a:xfrm>
-      </p:grpSpPr>
-      <p:sp>
-        <p:nvSpPr>
-          <p:cNvPr id="2" name="TextBox 1"/>
-          <p:cNvSpPr txBox="1"/>
-          <p:nvPr/>
-        </p:nvSpPr>
-        <p:spPr>
-          <a:xfrm>
-            <a:off x="731520" y="365760"/>
-            <a:ext cx="10698480" cy="365760"/>
-          </a:xfrm>
-          <a:prstGeom prst="rect">
-            <a:avLst/>
-          </a:prstGeom>
-          <a:noFill/>
-        </p:spPr>
-        <p:txBody>
-          <a:bodyPr wrap="square" lIns="0" tIns="0" rIns="0" bIns="0">
-            <a:spAutoFit/>
-          </a:bodyPr>
-          <a:lstStyle/>
-          <a:p>
-            <a:pPr>
-              <a:defRPr sz="1000" b="1">
-                <a:solidFill>
-                  <a:srgbClr val="38BDF8"/>
-                </a:solidFill>
-                <a:latin typeface="Segoe UI"/>
-              </a:defRPr>
-            </a:pPr>
-            <a:r>
-              <a:t>RUNPOD HOSTING</a:t>
-            </a:r>
-          </a:p>
-        </p:txBody>
-      </p:sp>
-      <p:sp>
-        <p:nvSpPr>
-          <p:cNvPr id="3" name="TextBox 2"/>
-          <p:cNvSpPr txBox="1"/>
-          <p:nvPr/>
-        </p:nvSpPr>
-        <p:spPr>
-          <a:xfrm>
-            <a:off x="731520" y="640080"/>
-            <a:ext cx="10698480" cy="731520"/>
-          </a:xfrm>
-          <a:prstGeom prst="rect">
-            <a:avLst/>
-          </a:prstGeom>
-          <a:noFill/>
-        </p:spPr>
-        <p:txBody>
-          <a:bodyPr wrap="square" lIns="0" tIns="0" rIns="0" bIns="0">
-            <a:spAutoFit/>
-          </a:bodyPr>
-          <a:lstStyle/>
-          <a:p>
-            <a:pPr>
-              <a:defRPr sz="3200" b="1">
-                <a:solidFill>
-                  <a:srgbClr val="F8FAFC"/>
-                </a:solidFill>
-                <a:latin typeface="Segoe UI"/>
-              </a:defRPr>
-            </a:pPr>
-            <a:r>
-              <a:t>Deploying RunPod Serverless</a:t>
-            </a:r>
-          </a:p>
-        </p:txBody>
-      </p:sp>
-      <p:sp>
-        <p:nvSpPr>
-          <p:cNvPr id="4" name="Rectangle 3"/>
-          <p:cNvSpPr/>
-          <p:nvPr/>
-        </p:nvSpPr>
-        <p:spPr>
-          <a:xfrm>
-            <a:off x="356616" y="1645920"/>
-            <a:ext cx="5495544" cy="4114800"/>
-          </a:xfrm>
-          <a:prstGeom prst="rect">
-            <a:avLst/>
-          </a:prstGeom>
-          <a:solidFill>
-            <a:srgbClr val="1E293B"/>
-          </a:solidFill>
-          <a:ln>
-            <a:solidFill>
-              <a:srgbClr val="1E293B"/>
-            </a:solidFill>
-          </a:ln>
-        </p:spPr>
-        <p:style>
-          <a:lnRef idx="1">
-            <a:schemeClr val="accent1"/>
-          </a:lnRef>
-          <a:fillRef idx="3">
-            <a:schemeClr val="accent1"/>
-          </a:fillRef>
-          <a:effectRef idx="2">
-            <a:schemeClr val="accent1"/>
-          </a:effectRef>
-          <a:fontRef idx="minor">
-            <a:schemeClr val="lt1"/>
-          </a:fontRef>
-        </p:style>
-        <p:txBody>
-          <a:bodyPr wrap="square" lIns="274320" tIns="274320" rIns="274320" bIns="274320" rtlCol="0" anchor="ctr"/>
-          <a:lstStyle/>
-          <a:p>
-            <a:pPr algn="ctr">
-              <a:spcAft>
-                <a:spcPts val="1400"/>
-              </a:spcAft>
-              <a:defRPr sz="1800" b="1">
-                <a:solidFill>
-                  <a:srgbClr val="38BDF8"/>
-                </a:solidFill>
-                <a:latin typeface="Segoe UI"/>
-              </a:defRPr>
-            </a:pPr>
-            <a:r>
-              <a:rPr dirty="0"/>
-              <a:t>1. Handler Logic (handler.py)</a:t>
-            </a:r>
-          </a:p>
-          <a:p>
-            <a:pPr>
-              <a:spcAft>
-                <a:spcPts val="800"/>
-              </a:spcAft>
-              <a:defRPr sz="1300">
-                <a:solidFill>
-                  <a:srgbClr val="F8FAFC"/>
-                </a:solidFill>
-                <a:latin typeface="Segoe UI"/>
-              </a:defRPr>
-            </a:pPr>
-            <a:r>
-              <a:rPr dirty="0"/>
-              <a:t>• Create script integrating </a:t>
-            </a:r>
-            <a:r>
-              <a:rPr dirty="0" err="1"/>
-              <a:t>runpod</a:t>
-            </a:r>
-            <a:r>
-              <a:rPr dirty="0"/>
-              <a:t> SDK</a:t>
-            </a:r>
-          </a:p>
-          <a:p>
-            <a:pPr>
-              <a:spcAft>
-                <a:spcPts val="800"/>
-              </a:spcAft>
-              <a:defRPr sz="1300">
-                <a:solidFill>
-                  <a:srgbClr val="F8FAFC"/>
-                </a:solidFill>
-                <a:latin typeface="Segoe UI"/>
-              </a:defRPr>
-            </a:pPr>
-            <a:r>
-              <a:rPr dirty="0"/>
-              <a:t>• Load YOLO model weights globally during worker container boot</a:t>
-            </a:r>
-          </a:p>
-          <a:p>
-            <a:pPr>
-              <a:spcAft>
-                <a:spcPts val="800"/>
-              </a:spcAft>
-              <a:defRPr sz="1300">
-                <a:solidFill>
-                  <a:srgbClr val="F8FAFC"/>
-                </a:solidFill>
-                <a:latin typeface="Segoe UI"/>
-              </a:defRPr>
-            </a:pPr>
-            <a:r>
-              <a:rPr dirty="0"/>
-              <a:t>• Write handler function to receive JSON query data</a:t>
-            </a:r>
-          </a:p>
-          <a:p>
-            <a:pPr>
-              <a:spcAft>
-                <a:spcPts val="800"/>
-              </a:spcAft>
-              <a:defRPr sz="1300">
-                <a:solidFill>
-                  <a:srgbClr val="F8FAFC"/>
-                </a:solidFill>
-                <a:latin typeface="Segoe UI"/>
-              </a:defRPr>
-            </a:pPr>
-            <a:r>
-              <a:rPr dirty="0"/>
-              <a:t>• Extract base64-encoded image and decode bytes</a:t>
-            </a:r>
-          </a:p>
-          <a:p>
-            <a:pPr>
-              <a:spcAft>
-                <a:spcPts val="800"/>
-              </a:spcAft>
-              <a:defRPr sz="1300">
-                <a:solidFill>
-                  <a:srgbClr val="F8FAFC"/>
-                </a:solidFill>
-                <a:latin typeface="Segoe UI"/>
-              </a:defRPr>
-            </a:pPr>
-            <a:r>
-              <a:rPr dirty="0"/>
-              <a:t>• Execute model inference, format coordinates list, and return output</a:t>
-            </a:r>
-          </a:p>
-          <a:p>
-            <a:pPr>
-              <a:spcAft>
-                <a:spcPts val="800"/>
-              </a:spcAft>
-              <a:defRPr sz="1300">
-                <a:solidFill>
-                  <a:srgbClr val="F8FAFC"/>
-                </a:solidFill>
-                <a:latin typeface="Segoe UI"/>
-              </a:defRPr>
-            </a:pPr>
-            <a:r>
-              <a:rPr dirty="0"/>
-              <a:t>• Initialize loop:</a:t>
-            </a:r>
-            <a:br>
-              <a:rPr dirty="0"/>
-            </a:br>
-            <a:r>
-              <a:rPr dirty="0" err="1"/>
-              <a:t>runpod.serverless.start</a:t>
-            </a:r>
-            <a:r>
-              <a:rPr dirty="0"/>
-              <a:t>({'handler': </a:t>
-            </a:r>
-            <a:r>
-              <a:rPr dirty="0" err="1"/>
-              <a:t>run_inference</a:t>
-            </a:r>
-            <a:r>
-              <a:rPr dirty="0"/>
-              <a:t>})</a:t>
+              <a:t>Step 1: Deploy on a Server</a:t>
+            </a:r>
+          </a:p>
+          <a:p>
+            <a:pPr>
+              <a:spcAft>
+                <a:spcPts val="800"/>
+              </a:spcAft>
+              <a:defRPr sz="1300">
+                <a:solidFill>
+                  <a:srgbClr val="F8FAFC"/>
+                </a:solidFill>
+                <a:latin typeface="Segoe UI"/>
+              </a:defRPr>
+            </a:pPr>
+            <a:r>
+              <a:t>• Hardware check: GPU vs CPU hosts</a:t>
+            </a:r>
+          </a:p>
+          <a:p>
+            <a:pPr>
+              <a:spcAft>
+                <a:spcPts val="800"/>
+              </a:spcAft>
+              <a:defRPr sz="1300">
+                <a:solidFill>
+                  <a:srgbClr val="F8FAFC"/>
+                </a:solidFill>
+                <a:latin typeface="Segoe UI"/>
+              </a:defRPr>
+            </a:pPr>
+            <a:r>
+              <a:t>• NVIDIA Container Toolkit installation</a:t>
+            </a:r>
+          </a:p>
+          <a:p>
+            <a:pPr>
+              <a:spcAft>
+                <a:spcPts val="800"/>
+              </a:spcAft>
+              <a:defRPr sz="1300">
+                <a:solidFill>
+                  <a:srgbClr val="F8FAFC"/>
+                </a:solidFill>
+                <a:latin typeface="Segoe UI"/>
+              </a:defRPr>
+            </a:pPr>
+            <a:r>
+              <a:t>• Unified Dockerfile &amp; docker-compose configurations</a:t>
+            </a:r>
+          </a:p>
+          <a:p>
+            <a:pPr>
+              <a:spcAft>
+                <a:spcPts val="800"/>
+              </a:spcAft>
+              <a:defRPr sz="1300">
+                <a:solidFill>
+                  <a:srgbClr val="F8FAFC"/>
+                </a:solidFill>
+                <a:latin typeface="Segoe UI"/>
+              </a:defRPr>
+            </a:pPr>
+            <a:r>
+              <a:t>• Running the stack with container commands</a:t>
+            </a:r>
+          </a:p>
+          <a:p>
+            <a:pPr>
+              <a:spcAft>
+                <a:spcPts val="800"/>
+              </a:spcAft>
+              <a:defRPr sz="1300">
+                <a:solidFill>
+                  <a:srgbClr val="F8FAFC"/>
+                </a:solidFill>
+                <a:latin typeface="Segoe UI"/>
+              </a:defRPr>
+            </a:pPr>
+            <a:r>
+              <a:t>• Automatic CPU-only fallback options</a:t>
             </a:r>
           </a:p>
         </p:txBody>
@@ -4381,7 +3817,7 @@
           </a:fontRef>
         </p:style>
         <p:txBody>
-          <a:bodyPr wrap="square" lIns="274320" tIns="274320" rIns="274320" bIns="274320" rtlCol="0" anchor="ctr"/>
+          <a:bodyPr rtlCol="0" anchor="ctr" wrap="square" lIns="274320" rIns="274320" tIns="274320" bIns="274320"/>
           <a:lstStyle/>
           <a:p>
             <a:pPr algn="ctr">
@@ -4396,146 +3832,71 @@
               </a:defRPr>
             </a:pPr>
             <a:r>
-              <a:rPr dirty="0"/>
-              <a:t>2. Packaging &amp; Endpoint Creation</a:t>
-            </a:r>
-          </a:p>
-          <a:p>
-            <a:pPr>
-              <a:spcAft>
-                <a:spcPts val="800"/>
-              </a:spcAft>
-              <a:defRPr sz="1300">
-                <a:solidFill>
-                  <a:srgbClr val="F8FAFC"/>
-                </a:solidFill>
-                <a:latin typeface="Segoe UI"/>
-              </a:defRPr>
-            </a:pPr>
-            <a:r>
-              <a:rPr dirty="0"/>
-              <a:t>• Write custom </a:t>
-            </a:r>
-            <a:r>
-              <a:rPr dirty="0" err="1"/>
-              <a:t>Dockerfile</a:t>
-            </a:r>
-            <a:r>
-              <a:rPr dirty="0"/>
-              <a:t> with python-</a:t>
-            </a:r>
-            <a:r>
-              <a:rPr dirty="0" err="1"/>
-              <a:t>runpod</a:t>
-            </a:r>
-            <a:r>
-              <a:rPr dirty="0"/>
-              <a:t> </a:t>
-            </a:r>
-            <a:r>
-              <a:rPr dirty="0" err="1"/>
-              <a:t>sdk</a:t>
-            </a:r>
-            <a:endParaRPr dirty="0"/>
-          </a:p>
-          <a:p>
-            <a:pPr>
-              <a:spcAft>
-                <a:spcPts val="800"/>
-              </a:spcAft>
-              <a:defRPr sz="1300">
-                <a:solidFill>
-                  <a:srgbClr val="F8FAFC"/>
-                </a:solidFill>
-                <a:latin typeface="Segoe UI"/>
-              </a:defRPr>
-            </a:pPr>
-            <a:r>
-              <a:rPr dirty="0"/>
-              <a:t>• Bake model/best.pt weights directly into Docker image</a:t>
-            </a:r>
-          </a:p>
-          <a:p>
-            <a:pPr>
-              <a:spcAft>
-                <a:spcPts val="800"/>
-              </a:spcAft>
-              <a:defRPr sz="1300">
-                <a:solidFill>
-                  <a:srgbClr val="F8FAFC"/>
-                </a:solidFill>
-                <a:latin typeface="Segoe UI"/>
-              </a:defRPr>
-            </a:pPr>
-            <a:r>
-              <a:rPr dirty="0"/>
-              <a:t>• Build, tag, and push image to public registry (Docker Hub)</a:t>
-            </a:r>
-          </a:p>
-          <a:p>
-            <a:pPr>
-              <a:spcAft>
-                <a:spcPts val="800"/>
-              </a:spcAft>
-              <a:defRPr sz="1300">
-                <a:solidFill>
-                  <a:srgbClr val="F8FAFC"/>
-                </a:solidFill>
-                <a:latin typeface="Segoe UI"/>
-              </a:defRPr>
-            </a:pPr>
-            <a:r>
-              <a:rPr dirty="0"/>
-              <a:t>• Configure Serverless Endpoint in </a:t>
-            </a:r>
-            <a:r>
-              <a:rPr dirty="0" err="1"/>
-              <a:t>RunPod</a:t>
-            </a:r>
-            <a:r>
-              <a:rPr dirty="0"/>
-              <a:t> console</a:t>
-            </a:r>
-          </a:p>
-          <a:p>
-            <a:pPr>
-              <a:spcAft>
-                <a:spcPts val="800"/>
-              </a:spcAft>
-              <a:defRPr sz="1300">
-                <a:solidFill>
-                  <a:srgbClr val="F8FAFC"/>
-                </a:solidFill>
-                <a:latin typeface="Segoe UI"/>
-              </a:defRPr>
-            </a:pPr>
-            <a:r>
-              <a:rPr dirty="0"/>
-              <a:t>• Set scale parameters:</a:t>
-            </a:r>
-            <a:br>
-              <a:rPr dirty="0"/>
-            </a:br>
-            <a:r>
-              <a:rPr dirty="0"/>
-              <a:t>Min Workers: 0 (saves cost), Max Workers: 10</a:t>
-            </a:r>
-          </a:p>
-          <a:p>
-            <a:pPr>
-              <a:spcAft>
-                <a:spcPts val="800"/>
-              </a:spcAft>
-              <a:defRPr sz="1300">
-                <a:solidFill>
-                  <a:srgbClr val="F8FAFC"/>
-                </a:solidFill>
-                <a:latin typeface="Segoe UI"/>
-              </a:defRPr>
-            </a:pPr>
-            <a:r>
-              <a:rPr dirty="0"/>
-              <a:t>• Request jobs by posting JSON payload to endpoint URL</a:t>
+              <a:t>Step 2: Deploy on RunPod &amp; CI/CD</a:t>
+            </a:r>
+          </a:p>
+          <a:p>
+            <a:pPr>
+              <a:spcAft>
+                <a:spcPts val="800"/>
+              </a:spcAft>
+              <a:defRPr sz="1300">
+                <a:solidFill>
+                  <a:srgbClr val="F8FAFC"/>
+                </a:solidFill>
+                <a:latin typeface="Segoe UI"/>
+              </a:defRPr>
+            </a:pPr>
+            <a:r>
+              <a:t>• Interactive workspaces using RunPod Pods</a:t>
+            </a:r>
+          </a:p>
+          <a:p>
+            <a:pPr>
+              <a:spcAft>
+                <a:spcPts val="800"/>
+              </a:spcAft>
+              <a:defRPr sz="1300">
+                <a:solidFill>
+                  <a:srgbClr val="F8FAFC"/>
+                </a:solidFill>
+                <a:latin typeface="Segoe UI"/>
+              </a:defRPr>
+            </a:pPr>
+            <a:r>
+              <a:t>• On-Demand autoscaling with RunPod Serverless API</a:t>
+            </a:r>
+          </a:p>
+          <a:p>
+            <a:pPr>
+              <a:spcAft>
+                <a:spcPts val="800"/>
+              </a:spcAft>
+              <a:defRPr sz="1300">
+                <a:solidFill>
+                  <a:srgbClr val="F8FAFC"/>
+                </a:solidFill>
+                <a:latin typeface="Segoe UI"/>
+              </a:defRPr>
+            </a:pPr>
+            <a:r>
+              <a:t>• Building and deploying handler container wrappers</a:t>
+            </a:r>
+          </a:p>
+          <a:p>
+            <a:pPr>
+              <a:spcAft>
+                <a:spcPts val="800"/>
+              </a:spcAft>
+              <a:defRPr sz="1300">
+                <a:solidFill>
+                  <a:srgbClr val="F8FAFC"/>
+                </a:solidFill>
+                <a:latin typeface="Segoe UI"/>
+              </a:defRPr>
+            </a:pPr>
+            <a:r>
+              <a:t>• CI/CD workflow: Continuous Delivery for ML (CD4ML)</a:t>
             </a:r>
           </a:p>
         </p:txBody>
@@ -4548,8 +3909,8 @@
 </p:sld>
 </file>
 
-<file path=ppt/slides/slide13.xml><?xml version="1.0" encoding="utf-8"?>
-<p:sld xmlns:a="http://schemas.openxmlformats.org/drawingml/2006/main" xmlns:r="http://schemas.openxmlformats.org/officeDocument/2006/relationships" xmlns:p="http://schemas.openxmlformats.org/presentationml/2006/main">
+<file path=ppt/slides/slide3.xml><?xml version="1.0" encoding="utf-8"?>
+<p:sld xmlns:a="http://schemas.openxmlformats.org/drawingml/2006/main" xmlns:p="http://schemas.openxmlformats.org/presentationml/2006/main" xmlns:r="http://schemas.openxmlformats.org/officeDocument/2006/relationships">
   <p:cSld>
     <p:bg>
       <p:bgPr>
@@ -4565,14 +3926,7 @@
         <p:cNvGrpSpPr/>
         <p:nvPr/>
       </p:nvGrpSpPr>
-      <p:grpSpPr>
-        <a:xfrm>
-          <a:off x="0" y="0"/>
-          <a:ext cx="0" cy="0"/>
-          <a:chOff x="0" y="0"/>
-          <a:chExt cx="0" cy="0"/>
-        </a:xfrm>
-      </p:grpSpPr>
+      <p:grpSpPr/>
       <p:sp>
         <p:nvSpPr>
           <p:cNvPr id="2" name="TextBox 1"/>
@@ -4590,7 +3944,7 @@
           <a:noFill/>
         </p:spPr>
         <p:txBody>
-          <a:bodyPr wrap="square" lIns="0" tIns="0" rIns="0" bIns="0">
+          <a:bodyPr wrap="square" lIns="0" rIns="0" tIns="0" bIns="0">
             <a:spAutoFit/>
           </a:bodyPr>
           <a:lstStyle/>
@@ -4604,7 +3958,7 @@
               </a:defRPr>
             </a:pPr>
             <a:r>
-              <a:t>DEPLOYMENT SUMMARY</a:t>
+              <a:t>CONFIGURATION</a:t>
             </a:r>
           </a:p>
         </p:txBody>
@@ -4626,7 +3980,7 @@
           <a:noFill/>
         </p:spPr>
         <p:txBody>
-          <a:bodyPr wrap="square" lIns="0" tIns="0" rIns="0" bIns="0">
+          <a:bodyPr wrap="square" lIns="0" rIns="0" tIns="0" bIns="0">
             <a:spAutoFit/>
           </a:bodyPr>
           <a:lstStyle/>
@@ -4640,7 +3994,7 @@
               </a:defRPr>
             </a:pPr>
             <a:r>
-              <a:t>Deployment Decision Matrix</a:t>
+              <a:t>Unified Dockerfile</a:t>
             </a:r>
           </a:p>
         </p:txBody>
@@ -4683,7 +4037,7 @@
           </a:fontRef>
         </p:style>
         <p:txBody>
-          <a:bodyPr wrap="square" lIns="274320" tIns="274320" rIns="274320" bIns="274320" rtlCol="0" anchor="ctr"/>
+          <a:bodyPr rtlCol="0" anchor="ctr" wrap="square" lIns="274320" rIns="274320" tIns="274320" bIns="274320"/>
           <a:lstStyle/>
           <a:p>
             <a:pPr algn="ctr">
@@ -4698,67 +4052,75 @@
               </a:defRPr>
             </a:pPr>
             <a:r>
-              <a:t>Server vs Pod vs Serverless</a:t>
-            </a:r>
-          </a:p>
-          <a:p>
-            <a:pPr>
-              <a:spcAft>
-                <a:spcPts val="800"/>
-              </a:spcAft>
-              <a:defRPr sz="1300">
-                <a:solidFill>
-                  <a:srgbClr val="F8FAFC"/>
-                </a:solidFill>
-                <a:latin typeface="Segoe UI"/>
-              </a:defRPr>
-            </a:pPr>
-            <a:r>
-              <a:t>• Self-Hosted Docker:</a:t>
+              <a:t>Key Image Features</a:t>
+            </a:r>
+          </a:p>
+          <a:p>
+            <a:pPr>
+              <a:spcAft>
+                <a:spcPts val="800"/>
+              </a:spcAft>
+              <a:defRPr sz="1300">
+                <a:solidFill>
+                  <a:srgbClr val="F8FAFC"/>
+                </a:solidFill>
+                <a:latin typeface="Segoe UI"/>
+              </a:defRPr>
+            </a:pPr>
+            <a:r>
+              <a:t>• Base Image:</a:t>
             </a:r>
             <a:br/>
             <a:r>
-              <a:t>Fixed monthly cost, 100% idle charges. Manual scaling, zero cold start latency. Best for stable, predictable workloads.</a:t>
-            </a:r>
-          </a:p>
-          <a:p>
-            <a:pPr>
-              <a:spcAft>
-                <a:spcPts val="800"/>
-              </a:spcAft>
-              <a:defRPr sz="1300">
-                <a:solidFill>
-                  <a:srgbClr val="F8FAFC"/>
-                </a:solidFill>
-                <a:latin typeface="Segoe UI"/>
-              </a:defRPr>
-            </a:pPr>
-            <a:r>
-              <a:t>• RunPod Pods:</a:t>
-            </a:r>
-            <a:br/>
-            <a:r>
-              <a:t>Hourly charges. Great for interactive debugging, manual prototyping and running Streamlit panels dynamically.</a:t>
-            </a:r>
-          </a:p>
-          <a:p>
-            <a:pPr>
-              <a:spcAft>
-                <a:spcPts val="800"/>
-              </a:spcAft>
-              <a:defRPr sz="1300">
-                <a:solidFill>
-                  <a:srgbClr val="F8FAFC"/>
-                </a:solidFill>
-                <a:latin typeface="Segoe UI"/>
-              </a:defRPr>
-            </a:pPr>
-            <a:r>
-              <a:t>• RunPod Serverless:</a:t>
-            </a:r>
-            <a:br/>
-            <a:r>
-              <a:t>Pay-per-second, $0.00 idle cost. Fully automated scaling (scales to 0). Small cold-start latency when scaling up.</a:t>
+              <a:t>FROM pytorch/pytorch:2.1.0-cuda12.1-cudnn8-runtime</a:t>
+            </a:r>
+          </a:p>
+          <a:p>
+            <a:pPr>
+              <a:spcAft>
+                <a:spcPts val="800"/>
+              </a:spcAft>
+              <a:defRPr sz="1300">
+                <a:solidFill>
+                  <a:srgbClr val="F8FAFC"/>
+                </a:solidFill>
+                <a:latin typeface="Segoe UI"/>
+              </a:defRPr>
+            </a:pPr>
+            <a:r>
+              <a:t>• Built-in CUDA support which automatically runs on GPU when present, and seamlessly falls back to CPU on standard servers</a:t>
+            </a:r>
+          </a:p>
+          <a:p>
+            <a:pPr>
+              <a:spcAft>
+                <a:spcPts val="800"/>
+              </a:spcAft>
+              <a:defRPr sz="1300">
+                <a:solidFill>
+                  <a:srgbClr val="F8FAFC"/>
+                </a:solidFill>
+                <a:latin typeface="Segoe UI"/>
+              </a:defRPr>
+            </a:pPr>
+            <a:r>
+              <a:t>• Pre-installed system requirements for OpenCV graphics layers</a:t>
+            </a:r>
+          </a:p>
+          <a:p>
+            <a:pPr>
+              <a:spcAft>
+                <a:spcPts val="800"/>
+              </a:spcAft>
+              <a:defRPr sz="1300">
+                <a:solidFill>
+                  <a:srgbClr val="F8FAFC"/>
+                </a:solidFill>
+                <a:latin typeface="Segoe UI"/>
+              </a:defRPr>
+            </a:pPr>
+            <a:r>
+              <a:t>• Installs python dependencies via PIP cache mechanisms</a:t>
             </a:r>
           </a:p>
         </p:txBody>
@@ -4801,7 +4163,7 @@
           </a:fontRef>
         </p:style>
         <p:txBody>
-          <a:bodyPr wrap="square" lIns="274320" tIns="274320" rIns="274320" bIns="274320" rtlCol="0" anchor="ctr"/>
+          <a:bodyPr rtlCol="0" anchor="ctr" wrap="square" lIns="274320" rIns="274320" tIns="274320" bIns="274320"/>
           <a:lstStyle/>
           <a:p>
             <a:pPr algn="ctr">
@@ -4810,73 +4172,109 @@
               </a:spcAft>
               <a:defRPr sz="1800" b="1">
                 <a:solidFill>
-                  <a:srgbClr val="22C55E"/>
-                </a:solidFill>
-                <a:latin typeface="Segoe UI"/>
-              </a:defRPr>
-            </a:pPr>
-            <a:r>
-              <a:t>Core Recommendation</a:t>
-            </a:r>
-          </a:p>
-          <a:p>
-            <a:pPr>
-              <a:spcAft>
-                <a:spcPts val="800"/>
-              </a:spcAft>
-              <a:defRPr sz="1300">
-                <a:solidFill>
-                  <a:srgbClr val="F8FAFC"/>
-                </a:solidFill>
-                <a:latin typeface="Segoe UI"/>
-              </a:defRPr>
-            </a:pPr>
-            <a:r>
-              <a:t>• 1. For Development &amp; Prototyping:</a:t>
-            </a:r>
-            <a:br/>
-            <a:r>
-              <a:t>Use RunPod Pods (RTX 4090) for instant GPU iteration.</a:t>
-            </a:r>
-          </a:p>
-          <a:p>
-            <a:pPr>
-              <a:spcAft>
-                <a:spcPts val="800"/>
-              </a:spcAft>
-              <a:defRPr sz="1300">
-                <a:solidFill>
-                  <a:srgbClr val="F8FAFC"/>
-                </a:solidFill>
-                <a:latin typeface="Segoe UI"/>
-              </a:defRPr>
-            </a:pPr>
-            <a:r>
-              <a:t>• 2. For Consistent On-Premises Serving:</a:t>
-            </a:r>
-            <a:br/>
-            <a:r>
-              <a:t>Use Docker Compose on your Ubuntu Server with NVIDIA Container Toolkit.</a:t>
-            </a:r>
-          </a:p>
-          <a:p>
-            <a:pPr>
-              <a:spcAft>
-                <a:spcPts val="800"/>
-              </a:spcAft>
-              <a:defRPr sz="1300">
-                <a:solidFill>
-                  <a:srgbClr val="F8FAFC"/>
-                </a:solidFill>
-                <a:latin typeface="Segoe UI"/>
-              </a:defRPr>
-            </a:pPr>
-            <a:r>
-              <a:t>• 3. For Elastic APIs / High-Volume Web Apps:</a:t>
-            </a:r>
-            <a:br/>
-            <a:r>
-              <a:t>Use RunPod Serverless to keep running costs at a absolute minimum.</a:t>
+                  <a:srgbClr val="38BDF8"/>
+                </a:solidFill>
+                <a:latin typeface="Segoe UI"/>
+              </a:defRPr>
+            </a:pPr>
+            <a:r>
+              <a:t>Dockerfile Code Layout</a:t>
+            </a:r>
+          </a:p>
+          <a:p>
+            <a:pPr>
+              <a:spcAft>
+                <a:spcPts val="800"/>
+              </a:spcAft>
+              <a:defRPr sz="1300">
+                <a:solidFill>
+                  <a:srgbClr val="F8FAFC"/>
+                </a:solidFill>
+                <a:latin typeface="Segoe UI"/>
+              </a:defRPr>
+            </a:pPr>
+            <a:r>
+              <a:t>• Sets non-interactive environment headers</a:t>
+            </a:r>
+          </a:p>
+          <a:p>
+            <a:pPr>
+              <a:spcAft>
+                <a:spcPts val="800"/>
+              </a:spcAft>
+              <a:defRPr sz="1300">
+                <a:solidFill>
+                  <a:srgbClr val="F8FAFC"/>
+                </a:solidFill>
+                <a:latin typeface="Segoe UI"/>
+              </a:defRPr>
+            </a:pPr>
+            <a:r>
+              <a:t>• Installs mesa-glx and glib2.0 libraries</a:t>
+            </a:r>
+          </a:p>
+          <a:p>
+            <a:pPr>
+              <a:spcAft>
+                <a:spcPts val="800"/>
+              </a:spcAft>
+              <a:defRPr sz="1300">
+                <a:solidFill>
+                  <a:srgbClr val="F8FAFC"/>
+                </a:solidFill>
+                <a:latin typeface="Segoe UI"/>
+              </a:defRPr>
+            </a:pPr>
+            <a:r>
+              <a:t>• Copies pip requirements.txt file and installs packages</a:t>
+            </a:r>
+          </a:p>
+          <a:p>
+            <a:pPr>
+              <a:spcAft>
+                <a:spcPts val="800"/>
+              </a:spcAft>
+              <a:defRPr sz="1300">
+                <a:solidFill>
+                  <a:srgbClr val="F8FAFC"/>
+                </a:solidFill>
+                <a:latin typeface="Segoe UI"/>
+              </a:defRPr>
+            </a:pPr>
+            <a:r>
+              <a:t>• Copies local model/best.pt weights and pothole.py source</a:t>
+            </a:r>
+          </a:p>
+          <a:p>
+            <a:pPr>
+              <a:spcAft>
+                <a:spcPts val="800"/>
+              </a:spcAft>
+              <a:defRPr sz="1300">
+                <a:solidFill>
+                  <a:srgbClr val="F8FAFC"/>
+                </a:solidFill>
+                <a:latin typeface="Segoe UI"/>
+              </a:defRPr>
+            </a:pPr>
+            <a:r>
+              <a:t>• Exposes default Streamlit web client port: EXPOSE 8501</a:t>
+            </a:r>
+          </a:p>
+          <a:p>
+            <a:pPr>
+              <a:spcAft>
+                <a:spcPts val="800"/>
+              </a:spcAft>
+              <a:defRPr sz="1300">
+                <a:solidFill>
+                  <a:srgbClr val="F8FAFC"/>
+                </a:solidFill>
+                <a:latin typeface="Segoe UI"/>
+              </a:defRPr>
+            </a:pPr>
+            <a:r>
+              <a:t>• Launches application using CMD streamlit commands</a:t>
             </a:r>
           </a:p>
         </p:txBody>
@@ -4889,8 +4287,8 @@
 </p:sld>
 </file>
 
-<file path=ppt/slides/slide2.xml><?xml version="1.0" encoding="utf-8"?>
-<p:sld xmlns:a="http://schemas.openxmlformats.org/drawingml/2006/main" xmlns:r="http://schemas.openxmlformats.org/officeDocument/2006/relationships" xmlns:p="http://schemas.openxmlformats.org/presentationml/2006/main">
+<file path=ppt/slides/slide4.xml><?xml version="1.0" encoding="utf-8"?>
+<p:sld xmlns:a="http://schemas.openxmlformats.org/drawingml/2006/main" xmlns:p="http://schemas.openxmlformats.org/presentationml/2006/main" xmlns:r="http://schemas.openxmlformats.org/officeDocument/2006/relationships">
   <p:cSld>
     <p:bg>
       <p:bgPr>
@@ -4906,14 +4304,7 @@
         <p:cNvGrpSpPr/>
         <p:nvPr/>
       </p:nvGrpSpPr>
-      <p:grpSpPr>
-        <a:xfrm>
-          <a:off x="0" y="0"/>
-          <a:ext cx="0" cy="0"/>
-          <a:chOff x="0" y="0"/>
-          <a:chExt cx="0" cy="0"/>
-        </a:xfrm>
-      </p:grpSpPr>
+      <p:grpSpPr/>
       <p:sp>
         <p:nvSpPr>
           <p:cNvPr id="2" name="TextBox 1"/>
@@ -4931,7 +4322,7 @@
           <a:noFill/>
         </p:spPr>
         <p:txBody>
-          <a:bodyPr wrap="square" lIns="0" tIns="0" rIns="0" bIns="0">
+          <a:bodyPr wrap="square" lIns="0" rIns="0" tIns="0" bIns="0">
             <a:spAutoFit/>
           </a:bodyPr>
           <a:lstStyle/>
@@ -4945,7 +4336,7 @@
               </a:defRPr>
             </a:pPr>
             <a:r>
-              <a:t>AI MODEL DEPLOYMENT</a:t>
+              <a:t>CONFIGURATION</a:t>
             </a:r>
           </a:p>
         </p:txBody>
@@ -4967,7 +4358,7 @@
           <a:noFill/>
         </p:spPr>
         <p:txBody>
-          <a:bodyPr wrap="square" lIns="0" tIns="0" rIns="0" bIns="0">
+          <a:bodyPr wrap="square" lIns="0" rIns="0" tIns="0" bIns="0">
             <a:spAutoFit/>
           </a:bodyPr>
           <a:lstStyle/>
@@ -4981,7 +4372,7 @@
               </a:defRPr>
             </a:pPr>
             <a:r>
-              <a:t>Presentation Agenda</a:t>
+              <a:t>Unified docker-compose.yml</a:t>
             </a:r>
           </a:p>
         </p:txBody>
@@ -5024,7 +4415,7 @@
           </a:fontRef>
         </p:style>
         <p:txBody>
-          <a:bodyPr wrap="square" lIns="274320" tIns="274320" rIns="274320" bIns="274320" rtlCol="0" anchor="ctr"/>
+          <a:bodyPr rtlCol="0" anchor="ctr" wrap="square" lIns="274320" rIns="274320" tIns="274320" bIns="274320"/>
           <a:lstStyle/>
           <a:p>
             <a:pPr algn="ctr">
@@ -5039,87 +4430,87 @@
               </a:defRPr>
             </a:pPr>
             <a:r>
-              <a:t>1. Self-Hosted Ubuntu Server</a:t>
-            </a:r>
-          </a:p>
-          <a:p>
-            <a:pPr>
-              <a:spcAft>
-                <a:spcPts val="800"/>
-              </a:spcAft>
-              <a:defRPr sz="1300">
-                <a:solidFill>
-                  <a:srgbClr val="F8FAFC"/>
-                </a:solidFill>
-                <a:latin typeface="Segoe UI"/>
-              </a:defRPr>
-            </a:pPr>
-            <a:r>
-              <a:t>• Hardware and OS pre-requirements</a:t>
-            </a:r>
-          </a:p>
-          <a:p>
-            <a:pPr>
-              <a:spcAft>
-                <a:spcPts val="800"/>
-              </a:spcAft>
-              <a:defRPr sz="1300">
-                <a:solidFill>
-                  <a:srgbClr val="F8FAFC"/>
-                </a:solidFill>
-                <a:latin typeface="Segoe UI"/>
-              </a:defRPr>
-            </a:pPr>
-            <a:r>
-              <a:t>• NVIDIA graphics driver installations on Host</a:t>
-            </a:r>
-          </a:p>
-          <a:p>
-            <a:pPr>
-              <a:spcAft>
-                <a:spcPts val="800"/>
-              </a:spcAft>
-              <a:defRPr sz="1300">
-                <a:solidFill>
-                  <a:srgbClr val="F8FAFC"/>
-                </a:solidFill>
-                <a:latin typeface="Segoe UI"/>
-              </a:defRPr>
-            </a:pPr>
-            <a:r>
-              <a:t>• Docker-Based GPU Deployment (Recommended)</a:t>
-            </a:r>
-          </a:p>
-          <a:p>
-            <a:pPr>
-              <a:spcAft>
-                <a:spcPts val="800"/>
-              </a:spcAft>
-              <a:defRPr sz="1300">
-                <a:solidFill>
-                  <a:srgbClr val="F8FAFC"/>
-                </a:solidFill>
-                <a:latin typeface="Segoe UI"/>
-              </a:defRPr>
-            </a:pPr>
-            <a:r>
-              <a:t>• Bare-Metal setup using Conda and Systemd</a:t>
-            </a:r>
-          </a:p>
-          <a:p>
-            <a:pPr>
-              <a:spcAft>
-                <a:spcPts val="800"/>
-              </a:spcAft>
-              <a:defRPr sz="1300">
-                <a:solidFill>
-                  <a:srgbClr val="F8FAFC"/>
-                </a:solidFill>
-                <a:latin typeface="Segoe UI"/>
-              </a:defRPr>
-            </a:pPr>
-            <a:r>
-              <a:t>• Nginx reverse proxy and SSL securing via Certbot</a:t>
+              <a:t>Unified Compose Configuration</a:t>
+            </a:r>
+          </a:p>
+          <a:p>
+            <a:pPr>
+              <a:spcAft>
+                <a:spcPts val="800"/>
+              </a:spcAft>
+              <a:defRPr sz="1300">
+                <a:solidFill>
+                  <a:srgbClr val="F8FAFC"/>
+                </a:solidFill>
+                <a:latin typeface="Segoe UI"/>
+              </a:defRPr>
+            </a:pPr>
+            <a:r>
+              <a:t>• Build Settings:</a:t>
+            </a:r>
+            <a:br/>
+            <a:r>
+              <a:t>Points directly to current directory and local Dockerfile</a:t>
+            </a:r>
+          </a:p>
+          <a:p>
+            <a:pPr>
+              <a:spcAft>
+                <a:spcPts val="800"/>
+              </a:spcAft>
+              <a:defRPr sz="1300">
+                <a:solidFill>
+                  <a:srgbClr val="F8FAFC"/>
+                </a:solidFill>
+                <a:latin typeface="Segoe UI"/>
+              </a:defRPr>
+            </a:pPr>
+            <a:r>
+              <a:t>• Port Mapping:</a:t>
+            </a:r>
+            <a:br/>
+            <a:r>
+              <a:t>Maps container port 8501 to host port 8501</a:t>
+            </a:r>
+          </a:p>
+          <a:p>
+            <a:pPr>
+              <a:spcAft>
+                <a:spcPts val="800"/>
+              </a:spcAft>
+              <a:defRPr sz="1300">
+                <a:solidFill>
+                  <a:srgbClr val="F8FAFC"/>
+                </a:solidFill>
+                <a:latin typeface="Segoe UI"/>
+              </a:defRPr>
+            </a:pPr>
+            <a:r>
+              <a:t>• Restart Policy:</a:t>
+            </a:r>
+            <a:br/>
+            <a:r>
+              <a:t>Set to 'always' for crash recovery and boot starts</a:t>
+            </a:r>
+          </a:p>
+          <a:p>
+            <a:pPr>
+              <a:spcAft>
+                <a:spcPts val="800"/>
+              </a:spcAft>
+              <a:defRPr sz="1300">
+                <a:solidFill>
+                  <a:srgbClr val="F8FAFC"/>
+                </a:solidFill>
+                <a:latin typeface="Segoe UI"/>
+              </a:defRPr>
+            </a:pPr>
+            <a:r>
+              <a:t>• Memory optimizations:</a:t>
+            </a:r>
+            <a:br/>
+            <a:r>
+              <a:t>Defines PYTORCH_CUDA_ALLOC_CONF settings</a:t>
             </a:r>
           </a:p>
         </p:txBody>
@@ -5162,7 +4553,7 @@
           </a:fontRef>
         </p:style>
         <p:txBody>
-          <a:bodyPr wrap="square" lIns="274320" tIns="274320" rIns="274320" bIns="274320" rtlCol="0" anchor="ctr"/>
+          <a:bodyPr rtlCol="0" anchor="ctr" wrap="square" lIns="274320" rIns="274320" tIns="274320" bIns="274320"/>
           <a:lstStyle/>
           <a:p>
             <a:pPr algn="ctr">
@@ -5177,103 +4568,71 @@
               </a:defRPr>
             </a:pPr>
             <a:r>
-              <a:t>2. RunPod Cloud GPU Platform</a:t>
-            </a:r>
-          </a:p>
-          <a:p>
-            <a:pPr>
-              <a:spcAft>
-                <a:spcPts val="800"/>
-              </a:spcAft>
-              <a:defRPr sz="1300">
-                <a:solidFill>
-                  <a:srgbClr val="F8FAFC"/>
-                </a:solidFill>
-                <a:latin typeface="Segoe UI"/>
-              </a:defRPr>
-            </a:pPr>
-            <a:r>
-              <a:t>• Platform features and host architecture</a:t>
-            </a:r>
-          </a:p>
-          <a:p>
-            <a:pPr>
-              <a:spcAft>
-                <a:spcPts val="800"/>
-              </a:spcAft>
-              <a:defRPr sz="1300">
-                <a:solidFill>
-                  <a:srgbClr val="F8FAFC"/>
-                </a:solidFill>
-                <a:latin typeface="Segoe UI"/>
-              </a:defRPr>
-            </a:pPr>
-            <a:r>
-              <a:t>• GPU VRAM selection guidelines and pricing model</a:t>
-            </a:r>
-          </a:p>
-          <a:p>
-            <a:pPr>
-              <a:spcAft>
-                <a:spcPts val="800"/>
-              </a:spcAft>
-              <a:defRPr sz="1300">
-                <a:solidFill>
-                  <a:srgbClr val="F8FAFC"/>
-                </a:solidFill>
-                <a:latin typeface="Segoe UI"/>
-              </a:defRPr>
-            </a:pPr>
-            <a:r>
-              <a:t>• Method A: Persistent GPU instances (Pods)</a:t>
-            </a:r>
-          </a:p>
-          <a:p>
-            <a:pPr>
-              <a:spcAft>
-                <a:spcPts val="800"/>
-              </a:spcAft>
-              <a:defRPr sz="1300">
-                <a:solidFill>
-                  <a:srgbClr val="F8FAFC"/>
-                </a:solidFill>
-                <a:latin typeface="Segoe UI"/>
-              </a:defRPr>
-            </a:pPr>
-            <a:r>
-              <a:t>• Method B: Autoscaling API (RunPod Serverless)</a:t>
-            </a:r>
-          </a:p>
-          <a:p>
-            <a:pPr>
-              <a:spcAft>
-                <a:spcPts val="800"/>
-              </a:spcAft>
-              <a:defRPr sz="1300">
-                <a:solidFill>
-                  <a:srgbClr val="F8FAFC"/>
-                </a:solidFill>
-                <a:latin typeface="Segoe UI"/>
-              </a:defRPr>
-            </a:pPr>
-            <a:r>
-              <a:t>• Containerization and Dockerfile structures</a:t>
-            </a:r>
-          </a:p>
-          <a:p>
-            <a:pPr>
-              <a:spcAft>
-                <a:spcPts val="800"/>
-              </a:spcAft>
-              <a:defRPr sz="1300">
-                <a:solidFill>
-                  <a:srgbClr val="F8FAFC"/>
-                </a:solidFill>
-                <a:latin typeface="Segoe UI"/>
-              </a:defRPr>
-            </a:pPr>
-            <a:r>
-              <a:t>• Deployment options and selection matrix</a:t>
+              <a:t>Multi-Hardware Bridging</a:t>
+            </a:r>
+          </a:p>
+          <a:p>
+            <a:pPr>
+              <a:spcAft>
+                <a:spcPts val="800"/>
+              </a:spcAft>
+              <a:defRPr sz="1300">
+                <a:solidFill>
+                  <a:srgbClr val="F8FAFC"/>
+                </a:solidFill>
+                <a:latin typeface="Segoe UI"/>
+              </a:defRPr>
+            </a:pPr>
+            <a:r>
+              <a:t>• GPU Pass-through reservation details:</a:t>
+            </a:r>
+            <a:br/>
+            <a:r>
+              <a:t>deploy:</a:t>
+            </a:r>
+            <a:br/>
+            <a:r>
+              <a:t>  resources:</a:t>
+            </a:r>
+            <a:br/>
+            <a:r>
+              <a:t>    reservations:</a:t>
+            </a:r>
+            <a:br/>
+            <a:r>
+              <a:t>      devices:</a:t>
+            </a:r>
+            <a:br/>
+            <a:r>
+              <a:t>        - driver: nvidia</a:t>
+            </a:r>
+            <a:br/>
+            <a:r>
+              <a:t>          count: all</a:t>
+            </a:r>
+            <a:br/>
+            <a:r>
+              <a:t>          capabilities: [gpu]</a:t>
+            </a:r>
+          </a:p>
+          <a:p>
+            <a:pPr>
+              <a:spcAft>
+                <a:spcPts val="800"/>
+              </a:spcAft>
+              <a:defRPr sz="1300">
+                <a:solidFill>
+                  <a:srgbClr val="F8FAFC"/>
+                </a:solidFill>
+                <a:latin typeface="Segoe UI"/>
+              </a:defRPr>
+            </a:pPr>
+            <a:r>
+              <a:t>• CPU-Only Fallback:</a:t>
+            </a:r>
+            <a:br/>
+            <a:r>
+              <a:t>If hosting on standard CPU server, simply comment out or delete the 'deploy' section. No other changes are needed!</a:t>
             </a:r>
           </a:p>
         </p:txBody>
@@ -5286,8 +4645,8 @@
 </p:sld>
 </file>
 
-<file path=ppt/slides/slide3.xml><?xml version="1.0" encoding="utf-8"?>
-<p:sld xmlns:a="http://schemas.openxmlformats.org/drawingml/2006/main" xmlns:r="http://schemas.openxmlformats.org/officeDocument/2006/relationships" xmlns:p="http://schemas.openxmlformats.org/presentationml/2006/main">
+<file path=ppt/slides/slide5.xml><?xml version="1.0" encoding="utf-8"?>
+<p:sld xmlns:a="http://schemas.openxmlformats.org/drawingml/2006/main" xmlns:p="http://schemas.openxmlformats.org/presentationml/2006/main" xmlns:r="http://schemas.openxmlformats.org/officeDocument/2006/relationships">
   <p:cSld>
     <p:bg>
       <p:bgPr>
@@ -5303,14 +4662,7 @@
         <p:cNvGrpSpPr/>
         <p:nvPr/>
       </p:nvGrpSpPr>
-      <p:grpSpPr>
-        <a:xfrm>
-          <a:off x="0" y="0"/>
-          <a:ext cx="0" cy="0"/>
-          <a:chOff x="0" y="0"/>
-          <a:chExt cx="0" cy="0"/>
-        </a:xfrm>
-      </p:grpSpPr>
+      <p:grpSpPr/>
       <p:sp>
         <p:nvSpPr>
           <p:cNvPr id="2" name="TextBox 1"/>
@@ -5328,7 +4680,7 @@
           <a:noFill/>
         </p:spPr>
         <p:txBody>
-          <a:bodyPr wrap="square" lIns="0" tIns="0" rIns="0" bIns="0">
+          <a:bodyPr wrap="square" lIns="0" rIns="0" tIns="0" bIns="0">
             <a:spAutoFit/>
           </a:bodyPr>
           <a:lstStyle/>
@@ -5364,7 +4716,7 @@
           <a:noFill/>
         </p:spPr>
         <p:txBody>
-          <a:bodyPr wrap="square" lIns="0" tIns="0" rIns="0" bIns="0">
+          <a:bodyPr wrap="square" lIns="0" rIns="0" tIns="0" bIns="0">
             <a:spAutoFit/>
           </a:bodyPr>
           <a:lstStyle/>
@@ -5378,7 +4730,7 @@
               </a:defRPr>
             </a:pPr>
             <a:r>
-              <a:t>Ubuntu Server Pre-requirements</a:t>
+              <a:t>Step 1: Host Server Installation</a:t>
             </a:r>
           </a:p>
         </p:txBody>
@@ -5391,8 +4743,8 @@
         </p:nvSpPr>
         <p:spPr>
           <a:xfrm>
-            <a:off x="137160" y="1645920"/>
-            <a:ext cx="3886200" cy="4114800"/>
+            <a:off x="731520" y="1645920"/>
+            <a:ext cx="5120640" cy="4114800"/>
           </a:xfrm>
           <a:prstGeom prst="rect">
             <a:avLst/>
@@ -5421,7 +4773,7 @@
           </a:fontRef>
         </p:style>
         <p:txBody>
-          <a:bodyPr wrap="square" lIns="274320" tIns="274320" rIns="274320" bIns="274320" rtlCol="0" anchor="ctr"/>
+          <a:bodyPr rtlCol="0" anchor="ctr" wrap="square" lIns="274320" rIns="274320" tIns="274320" bIns="274320"/>
           <a:lstStyle/>
           <a:p>
             <a:pPr algn="ctr">
@@ -5436,1558 +4788,91 @@
               </a:defRPr>
             </a:pPr>
             <a:r>
-              <a:rPr dirty="0"/>
-              <a:t>OS &amp; CPU</a:t>
-            </a:r>
-          </a:p>
-          <a:p>
-            <a:pPr>
-              <a:spcAft>
-                <a:spcPts val="800"/>
-              </a:spcAft>
-              <a:defRPr sz="1300">
-                <a:solidFill>
-                  <a:srgbClr val="F8FAFC"/>
-                </a:solidFill>
-                <a:latin typeface="Segoe UI"/>
-              </a:defRPr>
-            </a:pPr>
-            <a:r>
-              <a:rPr dirty="0"/>
-              <a:t>• Operating System:</a:t>
-            </a:r>
-            <a:br>
-              <a:rPr dirty="0"/>
-            </a:br>
-            <a:r>
-              <a:rPr dirty="0"/>
-              <a:t>Ubuntu 22.04 / 24.04 LTS</a:t>
-            </a:r>
-          </a:p>
-          <a:p>
-            <a:pPr>
-              <a:spcAft>
-                <a:spcPts val="800"/>
-              </a:spcAft>
-              <a:defRPr sz="1300">
-                <a:solidFill>
-                  <a:srgbClr val="F8FAFC"/>
-                </a:solidFill>
-                <a:latin typeface="Segoe UI"/>
-              </a:defRPr>
-            </a:pPr>
-            <a:r>
-              <a:rPr dirty="0"/>
-              <a:t>• LTS releases ensure packages are secure and stable</a:t>
-            </a:r>
-          </a:p>
-          <a:p>
-            <a:pPr>
-              <a:spcAft>
-                <a:spcPts val="800"/>
-              </a:spcAft>
-              <a:defRPr sz="1300">
-                <a:solidFill>
-                  <a:srgbClr val="F8FAFC"/>
-                </a:solidFill>
-                <a:latin typeface="Segoe UI"/>
-              </a:defRPr>
-            </a:pPr>
-            <a:r>
-              <a:rPr dirty="0"/>
-              <a:t>• CPU Requirements:</a:t>
-            </a:r>
-            <a:br>
-              <a:rPr dirty="0"/>
-            </a:br>
-            <a:r>
-              <a:rPr dirty="0"/>
-              <a:t>4 to 8+ vCPUs minimum</a:t>
-            </a:r>
-          </a:p>
-          <a:p>
-            <a:pPr>
-              <a:spcAft>
-                <a:spcPts val="800"/>
-              </a:spcAft>
-              <a:defRPr sz="1300">
-                <a:solidFill>
-                  <a:srgbClr val="F8FAFC"/>
-                </a:solidFill>
-                <a:latin typeface="Segoe UI"/>
-              </a:defRPr>
-            </a:pPr>
-            <a:r>
-              <a:rPr dirty="0"/>
-              <a:t>• Crucial for request routing, data preprocessing and pipeline logic</a:t>
-            </a:r>
-          </a:p>
-        </p:txBody>
-      </p:sp>
-      <p:sp>
-        <p:nvSpPr>
-          <p:cNvPr id="5" name="Rectangle 4"/>
-          <p:cNvSpPr/>
-          <p:nvPr/>
-        </p:nvSpPr>
-        <p:spPr>
-          <a:xfrm>
-            <a:off x="4224528" y="1645920"/>
-            <a:ext cx="3648456" cy="4114800"/>
-          </a:xfrm>
-          <a:prstGeom prst="rect">
-            <a:avLst/>
-          </a:prstGeom>
-          <a:solidFill>
-            <a:srgbClr val="1E293B"/>
-          </a:solidFill>
-          <a:ln>
-            <a:solidFill>
-              <a:srgbClr val="1E293B"/>
-            </a:solidFill>
-          </a:ln>
-        </p:spPr>
-        <p:style>
-          <a:lnRef idx="1">
-            <a:schemeClr val="accent1"/>
-          </a:lnRef>
-          <a:fillRef idx="3">
-            <a:schemeClr val="accent1"/>
-          </a:fillRef>
-          <a:effectRef idx="2">
-            <a:schemeClr val="accent1"/>
-          </a:effectRef>
-          <a:fontRef idx="minor">
-            <a:schemeClr val="lt1"/>
-          </a:fontRef>
-        </p:style>
-        <p:txBody>
-          <a:bodyPr wrap="square" lIns="274320" tIns="274320" rIns="274320" bIns="274320" rtlCol="0" anchor="ctr"/>
-          <a:lstStyle/>
-          <a:p>
-            <a:pPr algn="ctr">
-              <a:spcAft>
-                <a:spcPts val="1400"/>
-              </a:spcAft>
-              <a:defRPr sz="1800" b="1">
-                <a:solidFill>
-                  <a:srgbClr val="38BDF8"/>
-                </a:solidFill>
-                <a:latin typeface="Segoe UI"/>
-              </a:defRPr>
-            </a:pPr>
-            <a:r>
-              <a:t>RAM &amp; NVMe SSD</a:t>
-            </a:r>
-          </a:p>
-          <a:p>
-            <a:pPr>
-              <a:spcAft>
-                <a:spcPts val="800"/>
-              </a:spcAft>
-              <a:defRPr sz="1300">
-                <a:solidFill>
-                  <a:srgbClr val="F8FAFC"/>
-                </a:solidFill>
-                <a:latin typeface="Segoe UI"/>
-              </a:defRPr>
-            </a:pPr>
-            <a:r>
-              <a:t>• RAM Requirements:</a:t>
+              <a:t>Option A: Host Has NVIDIA GPU</a:t>
+            </a:r>
+          </a:p>
+          <a:p>
+            <a:pPr>
+              <a:spcAft>
+                <a:spcPts val="800"/>
+              </a:spcAft>
+              <a:defRPr sz="1300">
+                <a:solidFill>
+                  <a:srgbClr val="F8FAFC"/>
+                </a:solidFill>
+                <a:latin typeface="Segoe UI"/>
+              </a:defRPr>
+            </a:pPr>
+            <a:r>
+              <a:t>• 1. Install proprietary NVIDIA graphics driver:</a:t>
             </a:r>
             <a:br/>
             <a:r>
-              <a:t>16GB Minimum (32GB+ Rec.)</a:t>
-            </a:r>
-          </a:p>
-          <a:p>
-            <a:pPr>
-              <a:spcAft>
-                <a:spcPts val="800"/>
-              </a:spcAft>
-              <a:defRPr sz="1300">
-                <a:solidFill>
-                  <a:srgbClr val="F8FAFC"/>
-                </a:solidFill>
-                <a:latin typeface="Segoe UI"/>
-              </a:defRPr>
-            </a:pPr>
-            <a:r>
-              <a:t>• Models are loaded into system memory before being copied to GPU VRAM</a:t>
-            </a:r>
-          </a:p>
-          <a:p>
-            <a:pPr>
-              <a:spcAft>
-                <a:spcPts val="800"/>
-              </a:spcAft>
-              <a:defRPr sz="1300">
-                <a:solidFill>
-                  <a:srgbClr val="F8FAFC"/>
-                </a:solidFill>
-                <a:latin typeface="Segoe UI"/>
-              </a:defRPr>
-            </a:pPr>
-            <a:r>
-              <a:t>• Storage Space:</a:t>
+              <a:t>sudo ubuntu-drivers install &amp;&amp; sudo reboot</a:t>
+            </a:r>
+          </a:p>
+          <a:p>
+            <a:pPr>
+              <a:spcAft>
+                <a:spcPts val="800"/>
+              </a:spcAft>
+              <a:defRPr sz="1300">
+                <a:solidFill>
+                  <a:srgbClr val="F8FAFC"/>
+                </a:solidFill>
+                <a:latin typeface="Segoe UI"/>
+              </a:defRPr>
+            </a:pPr>
+            <a:r>
+              <a:t>• 2. Install Docker runtime engine:</a:t>
             </a:r>
             <a:br/>
             <a:r>
-              <a:t>100GB+ NVMe SSD</a:t>
-            </a:r>
-          </a:p>
-          <a:p>
-            <a:pPr>
-              <a:spcAft>
-                <a:spcPts val="800"/>
-              </a:spcAft>
-              <a:defRPr sz="1300">
-                <a:solidFill>
-                  <a:srgbClr val="F8FAFC"/>
-                </a:solidFill>
-                <a:latin typeface="Segoe UI"/>
-              </a:defRPr>
-            </a:pPr>
-            <a:r>
-              <a:t>• PyTorch, CUDA dependencies, and Docker layers consume substantial disk space</a:t>
-            </a:r>
-          </a:p>
-        </p:txBody>
-      </p:sp>
-      <p:sp>
-        <p:nvSpPr>
-          <p:cNvPr id="6" name="Rectangle 5"/>
-          <p:cNvSpPr/>
-          <p:nvPr/>
-        </p:nvSpPr>
-        <p:spPr>
-          <a:xfrm>
-            <a:off x="8046720" y="1645920"/>
-            <a:ext cx="3840480" cy="4114800"/>
-          </a:xfrm>
-          <a:prstGeom prst="rect">
-            <a:avLst/>
-          </a:prstGeom>
-          <a:solidFill>
-            <a:srgbClr val="1E293B"/>
-          </a:solidFill>
-          <a:ln>
-            <a:solidFill>
-              <a:srgbClr val="1E293B"/>
-            </a:solidFill>
-          </a:ln>
-        </p:spPr>
-        <p:style>
-          <a:lnRef idx="1">
-            <a:schemeClr val="accent1"/>
-          </a:lnRef>
-          <a:fillRef idx="3">
-            <a:schemeClr val="accent1"/>
-          </a:fillRef>
-          <a:effectRef idx="2">
-            <a:schemeClr val="accent1"/>
-          </a:effectRef>
-          <a:fontRef idx="minor">
-            <a:schemeClr val="lt1"/>
-          </a:fontRef>
-        </p:style>
-        <p:txBody>
-          <a:bodyPr wrap="square" lIns="274320" tIns="274320" rIns="274320" bIns="274320" rtlCol="0" anchor="ctr"/>
-          <a:lstStyle/>
-          <a:p>
-            <a:pPr algn="ctr">
-              <a:spcAft>
-                <a:spcPts val="1400"/>
-              </a:spcAft>
-              <a:defRPr sz="1800" b="1">
-                <a:solidFill>
-                  <a:srgbClr val="38BDF8"/>
-                </a:solidFill>
-                <a:latin typeface="Segoe UI"/>
-              </a:defRPr>
-            </a:pPr>
-            <a:r>
-              <a:rPr dirty="0"/>
-              <a:t>GPU &amp; Network</a:t>
-            </a:r>
-          </a:p>
-          <a:p>
-            <a:pPr>
-              <a:spcAft>
-                <a:spcPts val="800"/>
-              </a:spcAft>
-              <a:defRPr sz="1300">
-                <a:solidFill>
-                  <a:srgbClr val="F8FAFC"/>
-                </a:solidFill>
-                <a:latin typeface="Segoe UI"/>
-              </a:defRPr>
-            </a:pPr>
-            <a:r>
-              <a:rPr dirty="0"/>
-              <a:t>• GPU Accelerator:</a:t>
-            </a:r>
-            <a:br>
-              <a:rPr dirty="0"/>
-            </a:br>
-            <a:r>
-              <a:rPr dirty="0"/>
-              <a:t>NVIDIA GPU with modern CUDA</a:t>
-            </a:r>
-          </a:p>
-          <a:p>
-            <a:pPr>
-              <a:spcAft>
-                <a:spcPts val="800"/>
-              </a:spcAft>
-              <a:defRPr sz="1300">
-                <a:solidFill>
-                  <a:srgbClr val="F8FAFC"/>
-                </a:solidFill>
-                <a:latin typeface="Segoe UI"/>
-              </a:defRPr>
-            </a:pPr>
-            <a:r>
-              <a:rPr dirty="0"/>
-              <a:t>• Proprietary drivers must be loaded directly onto the host kernel</a:t>
-            </a:r>
-          </a:p>
-          <a:p>
-            <a:pPr>
-              <a:spcAft>
-                <a:spcPts val="800"/>
-              </a:spcAft>
-              <a:defRPr sz="1300">
-                <a:solidFill>
-                  <a:srgbClr val="F8FAFC"/>
-                </a:solidFill>
-                <a:latin typeface="Segoe UI"/>
-              </a:defRPr>
-            </a:pPr>
-            <a:r>
-              <a:rPr dirty="0"/>
-              <a:t>• Network Bandwidth:</a:t>
-            </a:r>
-            <a:br>
-              <a:rPr dirty="0"/>
-            </a:br>
-            <a:r>
-              <a:rPr dirty="0"/>
-              <a:t>100 Mbps (1 Gbps+ Rec.)</a:t>
-            </a:r>
-          </a:p>
-          <a:p>
-            <a:pPr>
-              <a:spcAft>
-                <a:spcPts val="800"/>
-              </a:spcAft>
-              <a:defRPr sz="1300">
-                <a:solidFill>
-                  <a:srgbClr val="F8FAFC"/>
-                </a:solidFill>
-                <a:latin typeface="Segoe UI"/>
-              </a:defRPr>
-            </a:pPr>
-            <a:r>
-              <a:rPr dirty="0"/>
-              <a:t>• Symmetric bandwidth allows fast model weight downloads and low latency serving</a:t>
-            </a:r>
-          </a:p>
-        </p:txBody>
-      </p:sp>
-    </p:spTree>
-  </p:cSld>
-  <p:clrMapOvr>
-    <a:masterClrMapping/>
-  </p:clrMapOvr>
-</p:sld>
-</file>
-
-<file path=ppt/slides/slide4.xml><?xml version="1.0" encoding="utf-8"?>
-<p:sld xmlns:a="http://schemas.openxmlformats.org/drawingml/2006/main" xmlns:r="http://schemas.openxmlformats.org/officeDocument/2006/relationships" xmlns:p="http://schemas.openxmlformats.org/presentationml/2006/main">
-  <p:cSld>
-    <p:bg>
-      <p:bgPr>
-        <a:solidFill>
-          <a:srgbClr val="0F172A"/>
-        </a:solidFill>
-        <a:effectLst/>
-      </p:bgPr>
-    </p:bg>
-    <p:spTree>
-      <p:nvGrpSpPr>
-        <p:cNvPr id="1" name=""/>
-        <p:cNvGrpSpPr/>
-        <p:nvPr/>
-      </p:nvGrpSpPr>
-      <p:grpSpPr>
-        <a:xfrm>
-          <a:off x="0" y="0"/>
-          <a:ext cx="0" cy="0"/>
-          <a:chOff x="0" y="0"/>
-          <a:chExt cx="0" cy="0"/>
-        </a:xfrm>
-      </p:grpSpPr>
-      <p:sp>
-        <p:nvSpPr>
-          <p:cNvPr id="2" name="TextBox 1"/>
-          <p:cNvSpPr txBox="1"/>
-          <p:nvPr/>
-        </p:nvSpPr>
-        <p:spPr>
-          <a:xfrm>
-            <a:off x="731520" y="365760"/>
-            <a:ext cx="10698480" cy="365760"/>
-          </a:xfrm>
-          <a:prstGeom prst="rect">
-            <a:avLst/>
-          </a:prstGeom>
-          <a:noFill/>
-        </p:spPr>
-        <p:txBody>
-          <a:bodyPr wrap="square" lIns="0" tIns="0" rIns="0" bIns="0">
-            <a:spAutoFit/>
-          </a:bodyPr>
-          <a:lstStyle/>
-          <a:p>
-            <a:pPr>
-              <a:defRPr sz="1000" b="1">
-                <a:solidFill>
-                  <a:srgbClr val="38BDF8"/>
-                </a:solidFill>
-                <a:latin typeface="Segoe UI"/>
-              </a:defRPr>
-            </a:pPr>
-            <a:r>
-              <a:t>UBUNTU DEPLOYMENT</a:t>
-            </a:r>
-          </a:p>
-        </p:txBody>
-      </p:sp>
-      <p:sp>
-        <p:nvSpPr>
-          <p:cNvPr id="3" name="TextBox 2"/>
-          <p:cNvSpPr txBox="1"/>
-          <p:nvPr/>
-        </p:nvSpPr>
-        <p:spPr>
-          <a:xfrm>
-            <a:off x="731520" y="640080"/>
-            <a:ext cx="10698480" cy="731520"/>
-          </a:xfrm>
-          <a:prstGeom prst="rect">
-            <a:avLst/>
-          </a:prstGeom>
-          <a:noFill/>
-        </p:spPr>
-        <p:txBody>
-          <a:bodyPr wrap="square" lIns="0" tIns="0" rIns="0" bIns="0">
-            <a:spAutoFit/>
-          </a:bodyPr>
-          <a:lstStyle/>
-          <a:p>
-            <a:pPr>
-              <a:defRPr sz="3200" b="1">
-                <a:solidFill>
-                  <a:srgbClr val="F8FAFC"/>
-                </a:solidFill>
-                <a:latin typeface="Segoe UI"/>
-              </a:defRPr>
-            </a:pPr>
-            <a:r>
-              <a:t>NVIDIA GPU Driver Installation</a:t>
-            </a:r>
-          </a:p>
-        </p:txBody>
-      </p:sp>
-      <p:sp>
-        <p:nvSpPr>
-          <p:cNvPr id="4" name="Rectangle 3"/>
-          <p:cNvSpPr/>
-          <p:nvPr/>
-        </p:nvSpPr>
-        <p:spPr>
-          <a:xfrm>
-            <a:off x="374904" y="1645920"/>
-            <a:ext cx="5477256" cy="4114800"/>
-          </a:xfrm>
-          <a:prstGeom prst="rect">
-            <a:avLst/>
-          </a:prstGeom>
-          <a:solidFill>
-            <a:srgbClr val="1E293B"/>
-          </a:solidFill>
-          <a:ln>
-            <a:solidFill>
-              <a:srgbClr val="1E293B"/>
-            </a:solidFill>
-          </a:ln>
-        </p:spPr>
-        <p:style>
-          <a:lnRef idx="1">
-            <a:schemeClr val="accent1"/>
-          </a:lnRef>
-          <a:fillRef idx="3">
-            <a:schemeClr val="accent1"/>
-          </a:fillRef>
-          <a:effectRef idx="2">
-            <a:schemeClr val="accent1"/>
-          </a:effectRef>
-          <a:fontRef idx="minor">
-            <a:schemeClr val="lt1"/>
-          </a:fontRef>
-        </p:style>
-        <p:txBody>
-          <a:bodyPr wrap="square" lIns="274320" tIns="274320" rIns="274320" bIns="274320" rtlCol="0" anchor="ctr"/>
-          <a:lstStyle/>
-          <a:p>
-            <a:pPr algn="ctr">
-              <a:spcAft>
-                <a:spcPts val="1400"/>
-              </a:spcAft>
-              <a:defRPr sz="1800" b="1">
-                <a:solidFill>
-                  <a:srgbClr val="38BDF8"/>
-                </a:solidFill>
-                <a:latin typeface="Segoe UI"/>
-              </a:defRPr>
-            </a:pPr>
-            <a:r>
-              <a:rPr dirty="0"/>
-              <a:t>Installation Commands</a:t>
-            </a:r>
-          </a:p>
-          <a:p>
-            <a:pPr>
-              <a:spcAft>
-                <a:spcPts val="800"/>
-              </a:spcAft>
-              <a:defRPr sz="1300">
-                <a:solidFill>
-                  <a:srgbClr val="F8FAFC"/>
-                </a:solidFill>
-                <a:latin typeface="Segoe UI"/>
-              </a:defRPr>
-            </a:pPr>
-            <a:r>
-              <a:rPr dirty="0"/>
-              <a:t>• Clean previous drivers:</a:t>
-            </a:r>
-            <a:br>
-              <a:rPr dirty="0"/>
-            </a:br>
-            <a:r>
-              <a:rPr dirty="0" err="1"/>
-              <a:t>sudo</a:t>
-            </a:r>
-            <a:r>
-              <a:rPr dirty="0"/>
-              <a:t> apt-get purge </a:t>
-            </a:r>
-            <a:r>
-              <a:rPr dirty="0" err="1"/>
-              <a:t>nvidia</a:t>
-            </a:r>
-            <a:r>
-              <a:rPr dirty="0"/>
-              <a:t>* -y &amp;&amp; </a:t>
-            </a:r>
-            <a:r>
-              <a:rPr dirty="0" err="1"/>
-              <a:t>sudo</a:t>
-            </a:r>
-            <a:r>
-              <a:rPr dirty="0"/>
-              <a:t> apt-get </a:t>
-            </a:r>
-            <a:r>
-              <a:rPr dirty="0" err="1"/>
-              <a:t>autoremove</a:t>
-            </a:r>
-            <a:r>
-              <a:rPr dirty="0"/>
-              <a:t> -y</a:t>
-            </a:r>
-          </a:p>
-          <a:p>
-            <a:pPr>
-              <a:spcAft>
-                <a:spcPts val="800"/>
-              </a:spcAft>
-              <a:defRPr sz="1300">
-                <a:solidFill>
-                  <a:srgbClr val="F8FAFC"/>
-                </a:solidFill>
-                <a:latin typeface="Segoe UI"/>
-              </a:defRPr>
-            </a:pPr>
-            <a:r>
-              <a:rPr dirty="0"/>
-              <a:t>• Update and review hardware:</a:t>
-            </a:r>
-            <a:br>
-              <a:rPr dirty="0"/>
-            </a:br>
-            <a:r>
-              <a:rPr dirty="0" err="1"/>
-              <a:t>sudo</a:t>
-            </a:r>
-            <a:r>
-              <a:rPr dirty="0"/>
-              <a:t> apt update &amp;&amp; ubuntu-drivers devices</a:t>
-            </a:r>
-          </a:p>
-          <a:p>
-            <a:pPr>
-              <a:spcAft>
-                <a:spcPts val="800"/>
-              </a:spcAft>
-              <a:defRPr sz="1300">
-                <a:solidFill>
-                  <a:srgbClr val="F8FAFC"/>
-                </a:solidFill>
-                <a:latin typeface="Segoe UI"/>
-              </a:defRPr>
-            </a:pPr>
-            <a:r>
-              <a:rPr dirty="0"/>
-              <a:t>• Install driver:</a:t>
-            </a:r>
-            <a:br>
-              <a:rPr dirty="0"/>
-            </a:br>
-            <a:r>
-              <a:rPr dirty="0" err="1"/>
-              <a:t>sudo</a:t>
-            </a:r>
-            <a:r>
-              <a:rPr dirty="0"/>
-              <a:t> ubuntu-drivers install</a:t>
-            </a:r>
-          </a:p>
-          <a:p>
-            <a:pPr>
-              <a:spcAft>
-                <a:spcPts val="800"/>
-              </a:spcAft>
-              <a:defRPr sz="1300">
-                <a:solidFill>
-                  <a:srgbClr val="F8FAFC"/>
-                </a:solidFill>
-                <a:latin typeface="Segoe UI"/>
-              </a:defRPr>
-            </a:pPr>
-            <a:r>
-              <a:rPr dirty="0"/>
-              <a:t>• Reboot machine to load modules:</a:t>
-            </a:r>
-            <a:br>
-              <a:rPr dirty="0"/>
-            </a:br>
-            <a:r>
-              <a:rPr dirty="0" err="1"/>
-              <a:t>sudo</a:t>
-            </a:r>
-            <a:r>
-              <a:rPr dirty="0"/>
-              <a:t> reboot</a:t>
-            </a:r>
-          </a:p>
-        </p:txBody>
-      </p:sp>
-      <p:sp>
-        <p:nvSpPr>
-          <p:cNvPr id="5" name="Rectangle 4"/>
-          <p:cNvSpPr/>
-          <p:nvPr/>
-        </p:nvSpPr>
-        <p:spPr>
-          <a:xfrm>
-            <a:off x="6309359" y="1645920"/>
-            <a:ext cx="5504561" cy="4114800"/>
-          </a:xfrm>
-          <a:prstGeom prst="rect">
-            <a:avLst/>
-          </a:prstGeom>
-          <a:solidFill>
-            <a:srgbClr val="1E293B"/>
-          </a:solidFill>
-          <a:ln>
-            <a:solidFill>
-              <a:srgbClr val="1E293B"/>
-            </a:solidFill>
-          </a:ln>
-        </p:spPr>
-        <p:style>
-          <a:lnRef idx="1">
-            <a:schemeClr val="accent1"/>
-          </a:lnRef>
-          <a:fillRef idx="3">
-            <a:schemeClr val="accent1"/>
-          </a:fillRef>
-          <a:effectRef idx="2">
-            <a:schemeClr val="accent1"/>
-          </a:effectRef>
-          <a:fontRef idx="minor">
-            <a:schemeClr val="lt1"/>
-          </a:fontRef>
-        </p:style>
-        <p:txBody>
-          <a:bodyPr wrap="square" lIns="274320" tIns="274320" rIns="274320" bIns="274320" rtlCol="0" anchor="ctr"/>
-          <a:lstStyle/>
-          <a:p>
-            <a:pPr algn="ctr">
-              <a:spcAft>
-                <a:spcPts val="1400"/>
-              </a:spcAft>
-              <a:defRPr sz="1800" b="1">
-                <a:solidFill>
-                  <a:srgbClr val="38BDF8"/>
-                </a:solidFill>
-                <a:latin typeface="Segoe UI"/>
-              </a:defRPr>
-            </a:pPr>
-            <a:r>
-              <a:rPr dirty="0"/>
-              <a:t>Verification &amp; Core Command</a:t>
-            </a:r>
-          </a:p>
-          <a:p>
-            <a:pPr>
-              <a:spcAft>
-                <a:spcPts val="800"/>
-              </a:spcAft>
-              <a:defRPr sz="1300">
-                <a:solidFill>
-                  <a:srgbClr val="F8FAFC"/>
-                </a:solidFill>
-                <a:latin typeface="Segoe UI"/>
-              </a:defRPr>
-            </a:pPr>
-            <a:r>
-              <a:rPr dirty="0"/>
-              <a:t>• Verification Command:</a:t>
-            </a:r>
-            <a:br>
-              <a:rPr dirty="0"/>
-            </a:br>
-            <a:r>
-              <a:rPr dirty="0" err="1"/>
-              <a:t>nvidia-smi</a:t>
-            </a:r>
-            <a:endParaRPr dirty="0"/>
-          </a:p>
-          <a:p>
-            <a:pPr>
-              <a:spcAft>
-                <a:spcPts val="800"/>
-              </a:spcAft>
-              <a:defRPr sz="1300">
-                <a:solidFill>
-                  <a:srgbClr val="F8FAFC"/>
-                </a:solidFill>
-                <a:latin typeface="Segoe UI"/>
-              </a:defRPr>
-            </a:pPr>
-            <a:r>
-              <a:rPr dirty="0"/>
-              <a:t>• Checks host kernel recognition, VRAM, and running processes</a:t>
-            </a:r>
-          </a:p>
-          <a:p>
-            <a:pPr>
-              <a:spcAft>
-                <a:spcPts val="800"/>
-              </a:spcAft>
-              <a:defRPr sz="1300">
-                <a:solidFill>
-                  <a:srgbClr val="F8FAFC"/>
-                </a:solidFill>
-                <a:latin typeface="Segoe UI"/>
-              </a:defRPr>
-            </a:pPr>
-            <a:r>
-              <a:rPr dirty="0"/>
-              <a:t>• Driver recommendations:</a:t>
-            </a:r>
-            <a:br>
-              <a:rPr dirty="0"/>
-            </a:br>
-            <a:r>
-              <a:rPr dirty="0"/>
-              <a:t>Always use the proprietary, tested branch (e.g. v550+)</a:t>
-            </a:r>
-          </a:p>
-          <a:p>
-            <a:pPr>
-              <a:spcAft>
-                <a:spcPts val="800"/>
-              </a:spcAft>
-              <a:defRPr sz="1300">
-                <a:solidFill>
-                  <a:srgbClr val="F8FAFC"/>
-                </a:solidFill>
-                <a:latin typeface="Segoe UI"/>
-              </a:defRPr>
-            </a:pPr>
-            <a:r>
-              <a:rPr dirty="0"/>
-              <a:t>• Crucial foundation before configuring container runtimes</a:t>
-            </a:r>
-          </a:p>
-        </p:txBody>
-      </p:sp>
-    </p:spTree>
-  </p:cSld>
-  <p:clrMapOvr>
-    <a:masterClrMapping/>
-  </p:clrMapOvr>
-</p:sld>
-</file>
-
-<file path=ppt/slides/slide5.xml><?xml version="1.0" encoding="utf-8"?>
-<p:sld xmlns:a="http://schemas.openxmlformats.org/drawingml/2006/main" xmlns:r="http://schemas.openxmlformats.org/officeDocument/2006/relationships" xmlns:p="http://schemas.openxmlformats.org/presentationml/2006/main">
-  <p:cSld>
-    <p:bg>
-      <p:bgPr>
-        <a:solidFill>
-          <a:srgbClr val="0F172A"/>
-        </a:solidFill>
-        <a:effectLst/>
-      </p:bgPr>
-    </p:bg>
-    <p:spTree>
-      <p:nvGrpSpPr>
-        <p:cNvPr id="1" name=""/>
-        <p:cNvGrpSpPr/>
-        <p:nvPr/>
-      </p:nvGrpSpPr>
-      <p:grpSpPr>
-        <a:xfrm>
-          <a:off x="0" y="0"/>
-          <a:ext cx="0" cy="0"/>
-          <a:chOff x="0" y="0"/>
-          <a:chExt cx="0" cy="0"/>
-        </a:xfrm>
-      </p:grpSpPr>
-      <p:sp>
-        <p:nvSpPr>
-          <p:cNvPr id="2" name="TextBox 1"/>
-          <p:cNvSpPr txBox="1"/>
-          <p:nvPr/>
-        </p:nvSpPr>
-        <p:spPr>
-          <a:xfrm>
-            <a:off x="731520" y="365760"/>
-            <a:ext cx="10698480" cy="365760"/>
-          </a:xfrm>
-          <a:prstGeom prst="rect">
-            <a:avLst/>
-          </a:prstGeom>
-          <a:noFill/>
-        </p:spPr>
-        <p:txBody>
-          <a:bodyPr wrap="square" lIns="0" tIns="0" rIns="0" bIns="0">
-            <a:spAutoFit/>
-          </a:bodyPr>
-          <a:lstStyle/>
-          <a:p>
-            <a:pPr>
-              <a:defRPr sz="1000" b="1">
-                <a:solidFill>
-                  <a:srgbClr val="38BDF8"/>
-                </a:solidFill>
-                <a:latin typeface="Segoe UI"/>
-              </a:defRPr>
-            </a:pPr>
-            <a:r>
-              <a:t>RECOMMENDED PATH</a:t>
-            </a:r>
-          </a:p>
-        </p:txBody>
-      </p:sp>
-      <p:sp>
-        <p:nvSpPr>
-          <p:cNvPr id="3" name="TextBox 2"/>
-          <p:cNvSpPr txBox="1"/>
-          <p:nvPr/>
-        </p:nvSpPr>
-        <p:spPr>
-          <a:xfrm>
-            <a:off x="731520" y="640080"/>
-            <a:ext cx="10698480" cy="731520"/>
-          </a:xfrm>
-          <a:prstGeom prst="rect">
-            <a:avLst/>
-          </a:prstGeom>
-          <a:noFill/>
-        </p:spPr>
-        <p:txBody>
-          <a:bodyPr wrap="square" lIns="0" tIns="0" rIns="0" bIns="0">
-            <a:spAutoFit/>
-          </a:bodyPr>
-          <a:lstStyle/>
-          <a:p>
-            <a:pPr>
-              <a:defRPr sz="3200" b="1">
-                <a:solidFill>
-                  <a:srgbClr val="F8FAFC"/>
-                </a:solidFill>
-                <a:latin typeface="Segoe UI"/>
-              </a:defRPr>
-            </a:pPr>
-            <a:r>
-              <a:t>NVIDIA Container Toolkit (Docker Setup)</a:t>
-            </a:r>
-          </a:p>
-        </p:txBody>
-      </p:sp>
-      <p:sp>
-        <p:nvSpPr>
-          <p:cNvPr id="4" name="Rectangle 3"/>
-          <p:cNvSpPr/>
-          <p:nvPr/>
-        </p:nvSpPr>
-        <p:spPr>
-          <a:xfrm>
-            <a:off x="164592" y="1645920"/>
-            <a:ext cx="5687568" cy="4114800"/>
-          </a:xfrm>
-          <a:prstGeom prst="rect">
-            <a:avLst/>
-          </a:prstGeom>
-          <a:solidFill>
-            <a:srgbClr val="1E293B"/>
-          </a:solidFill>
-          <a:ln>
-            <a:solidFill>
-              <a:srgbClr val="1E293B"/>
-            </a:solidFill>
-          </a:ln>
-        </p:spPr>
-        <p:style>
-          <a:lnRef idx="1">
-            <a:schemeClr val="accent1"/>
-          </a:lnRef>
-          <a:fillRef idx="3">
-            <a:schemeClr val="accent1"/>
-          </a:fillRef>
-          <a:effectRef idx="2">
-            <a:schemeClr val="accent1"/>
-          </a:effectRef>
-          <a:fontRef idx="minor">
-            <a:schemeClr val="lt1"/>
-          </a:fontRef>
-        </p:style>
-        <p:txBody>
-          <a:bodyPr wrap="square" lIns="274320" tIns="274320" rIns="274320" bIns="274320" rtlCol="0" anchor="ctr"/>
-          <a:lstStyle/>
-          <a:p>
-            <a:pPr algn="ctr">
-              <a:spcAft>
-                <a:spcPts val="1400"/>
-              </a:spcAft>
-              <a:defRPr sz="1800" b="1">
-                <a:solidFill>
-                  <a:srgbClr val="38BDF8"/>
-                </a:solidFill>
-                <a:latin typeface="Segoe UI"/>
-              </a:defRPr>
-            </a:pPr>
-            <a:r>
-              <a:rPr dirty="0"/>
-              <a:t>Why Choose Docker?</a:t>
-            </a:r>
-          </a:p>
-          <a:p>
-            <a:pPr>
-              <a:spcAft>
-                <a:spcPts val="800"/>
-              </a:spcAft>
-              <a:defRPr sz="1300">
-                <a:solidFill>
-                  <a:srgbClr val="F8FAFC"/>
-                </a:solidFill>
-                <a:latin typeface="Segoe UI"/>
-              </a:defRPr>
-            </a:pPr>
-            <a:r>
-              <a:rPr dirty="0"/>
-              <a:t>• Dependency Isolation:</a:t>
-            </a:r>
-            <a:br>
-              <a:rPr dirty="0"/>
-            </a:br>
-            <a:r>
-              <a:rPr dirty="0"/>
-              <a:t>No CUDA version clashes, no </a:t>
-            </a:r>
-            <a:r>
-              <a:rPr dirty="0" err="1"/>
-              <a:t>conda</a:t>
-            </a:r>
-            <a:r>
-              <a:rPr dirty="0"/>
-              <a:t> package conflicts</a:t>
-            </a:r>
-          </a:p>
-          <a:p>
-            <a:pPr>
-              <a:spcAft>
-                <a:spcPts val="800"/>
-              </a:spcAft>
-              <a:defRPr sz="1300">
-                <a:solidFill>
-                  <a:srgbClr val="F8FAFC"/>
-                </a:solidFill>
-                <a:latin typeface="Segoe UI"/>
-              </a:defRPr>
-            </a:pPr>
-            <a:r>
-              <a:rPr dirty="0"/>
-              <a:t>• Host Simplification:</a:t>
-            </a:r>
-            <a:br>
-              <a:rPr dirty="0"/>
-            </a:br>
-            <a:r>
-              <a:rPr dirty="0"/>
-              <a:t>Host server only needs the NVIDIA driver + Docker + Toolkit</a:t>
-            </a:r>
-          </a:p>
-          <a:p>
-            <a:pPr>
-              <a:spcAft>
-                <a:spcPts val="800"/>
-              </a:spcAft>
-              <a:defRPr sz="1300">
-                <a:solidFill>
-                  <a:srgbClr val="F8FAFC"/>
-                </a:solidFill>
-                <a:latin typeface="Segoe UI"/>
-              </a:defRPr>
-            </a:pPr>
-            <a:r>
-              <a:rPr dirty="0"/>
-              <a:t>• Portability:</a:t>
-            </a:r>
-            <a:br>
-              <a:rPr dirty="0"/>
-            </a:br>
-            <a:r>
-              <a:rPr dirty="0"/>
-              <a:t>Same container image runs on local Ubuntu, AWS, or </a:t>
-            </a:r>
-            <a:r>
-              <a:rPr dirty="0" err="1"/>
-              <a:t>RunPod</a:t>
-            </a:r>
-            <a:r>
-              <a:rPr dirty="0"/>
-              <a:t> Serverless</a:t>
-            </a:r>
-          </a:p>
-          <a:p>
-            <a:pPr>
-              <a:spcAft>
-                <a:spcPts val="800"/>
-              </a:spcAft>
-              <a:defRPr sz="1300">
-                <a:solidFill>
-                  <a:srgbClr val="F8FAFC"/>
-                </a:solidFill>
-                <a:latin typeface="Segoe UI"/>
-              </a:defRPr>
-            </a:pPr>
-            <a:r>
-              <a:rPr dirty="0"/>
-              <a:t>• Reboots are clean and start in seconds</a:t>
-            </a:r>
-          </a:p>
-        </p:txBody>
-      </p:sp>
-      <p:sp>
-        <p:nvSpPr>
-          <p:cNvPr id="5" name="Rectangle 4"/>
-          <p:cNvSpPr/>
-          <p:nvPr/>
-        </p:nvSpPr>
-        <p:spPr>
-          <a:xfrm>
-            <a:off x="6309360" y="1645920"/>
-            <a:ext cx="5605272" cy="4114800"/>
-          </a:xfrm>
-          <a:prstGeom prst="rect">
-            <a:avLst/>
-          </a:prstGeom>
-          <a:solidFill>
-            <a:srgbClr val="1E293B"/>
-          </a:solidFill>
-          <a:ln>
-            <a:solidFill>
-              <a:srgbClr val="1E293B"/>
-            </a:solidFill>
-          </a:ln>
-        </p:spPr>
-        <p:style>
-          <a:lnRef idx="1">
-            <a:schemeClr val="accent1"/>
-          </a:lnRef>
-          <a:fillRef idx="3">
-            <a:schemeClr val="accent1"/>
-          </a:fillRef>
-          <a:effectRef idx="2">
-            <a:schemeClr val="accent1"/>
-          </a:effectRef>
-          <a:fontRef idx="minor">
-            <a:schemeClr val="lt1"/>
-          </a:fontRef>
-        </p:style>
-        <p:txBody>
-          <a:bodyPr wrap="square" lIns="274320" tIns="274320" rIns="274320" bIns="274320" rtlCol="0" anchor="ctr"/>
-          <a:lstStyle/>
-          <a:p>
-            <a:pPr algn="ctr">
-              <a:spcAft>
-                <a:spcPts val="1400"/>
-              </a:spcAft>
-              <a:defRPr sz="1800" b="1">
-                <a:solidFill>
-                  <a:srgbClr val="38BDF8"/>
-                </a:solidFill>
-                <a:latin typeface="Segoe UI"/>
-              </a:defRPr>
-            </a:pPr>
-            <a:r>
-              <a:t>Installation Steps</a:t>
-            </a:r>
-          </a:p>
-          <a:p>
-            <a:pPr>
-              <a:spcAft>
-                <a:spcPts val="800"/>
-              </a:spcAft>
-              <a:defRPr sz="1300">
-                <a:solidFill>
-                  <a:srgbClr val="F8FAFC"/>
-                </a:solidFill>
-                <a:latin typeface="Segoe UI"/>
-              </a:defRPr>
-            </a:pPr>
-            <a:r>
-              <a:t>• 1. Install standard Docker:</a:t>
+              <a:t>sudo apt install -y docker.io</a:t>
+            </a:r>
+          </a:p>
+          <a:p>
+            <a:pPr>
+              <a:spcAft>
+                <a:spcPts val="800"/>
+              </a:spcAft>
+              <a:defRPr sz="1300">
+                <a:solidFill>
+                  <a:srgbClr val="F8FAFC"/>
+                </a:solidFill>
+                <a:latin typeface="Segoe UI"/>
+              </a:defRPr>
+            </a:pPr>
+            <a:r>
+              <a:t>• 3. Configure repository &amp; install NVIDIA Container Toolkit:</a:t>
             </a:r>
             <a:br/>
             <a:r>
-              <a:t>sudo apt install -y docker.io</a:t>
-            </a:r>
-          </a:p>
-          <a:p>
-            <a:pPr>
-              <a:spcAft>
-                <a:spcPts val="800"/>
-              </a:spcAft>
-              <a:defRPr sz="1300">
-                <a:solidFill>
-                  <a:srgbClr val="F8FAFC"/>
-                </a:solidFill>
-                <a:latin typeface="Segoe UI"/>
-              </a:defRPr>
-            </a:pPr>
-            <a:r>
-              <a:t>• 2. Add NVIDIA Toolkit package repository keys</a:t>
-            </a:r>
-          </a:p>
-          <a:p>
-            <a:pPr>
-              <a:spcAft>
-                <a:spcPts val="800"/>
-              </a:spcAft>
-              <a:defRPr sz="1300">
-                <a:solidFill>
-                  <a:srgbClr val="F8FAFC"/>
-                </a:solidFill>
-                <a:latin typeface="Segoe UI"/>
-              </a:defRPr>
-            </a:pPr>
-            <a:r>
-              <a:t>• 3. Install toolkit package:</a:t>
+              <a:t>sudo apt install nvidia-container-toolkit</a:t>
+            </a:r>
+          </a:p>
+          <a:p>
+            <a:pPr>
+              <a:spcAft>
+                <a:spcPts val="800"/>
+              </a:spcAft>
+              <a:defRPr sz="1300">
+                <a:solidFill>
+                  <a:srgbClr val="F8FAFC"/>
+                </a:solidFill>
+                <a:latin typeface="Segoe UI"/>
+              </a:defRPr>
+            </a:pPr>
+            <a:r>
+              <a:t>• 4. Configure runtime &amp; restart Docker:</a:t>
             </a:r>
             <a:br/>
             <a:r>
-              <a:t>sudo apt-get install nvidia-container-toolkit</a:t>
-            </a:r>
-          </a:p>
-          <a:p>
-            <a:pPr>
-              <a:spcAft>
-                <a:spcPts val="800"/>
-              </a:spcAft>
-              <a:defRPr sz="1300">
-                <a:solidFill>
-                  <a:srgbClr val="F8FAFC"/>
-                </a:solidFill>
-                <a:latin typeface="Segoe UI"/>
-              </a:defRPr>
-            </a:pPr>
-            <a:r>
-              <a:t>• 4. Configure Docker daemon runtime:</a:t>
+              <a:t>sudo nvidia-ctk runtime configure --runtime=docker</a:t>
             </a:r>
             <a:br/>
             <a:r>
-              <a:t>sudo nvidia-ctk runtime configure --runtime=docker</a:t>
-            </a:r>
-          </a:p>
-          <a:p>
-            <a:pPr>
-              <a:spcAft>
-                <a:spcPts val="800"/>
-              </a:spcAft>
-              <a:defRPr sz="1300">
-                <a:solidFill>
-                  <a:srgbClr val="F8FAFC"/>
-                </a:solidFill>
-                <a:latin typeface="Segoe UI"/>
-              </a:defRPr>
-            </a:pPr>
-            <a:r>
-              <a:t>• 5. Restart service:</a:t>
-            </a:r>
-            <a:br/>
-            <a:r>
               <a:t>sudo systemctl restart docker</a:t>
-            </a:r>
-          </a:p>
-        </p:txBody>
-      </p:sp>
-    </p:spTree>
-  </p:cSld>
-  <p:clrMapOvr>
-    <a:masterClrMapping/>
-  </p:clrMapOvr>
-</p:sld>
-</file>
-
-<file path=ppt/slides/slide6.xml><?xml version="1.0" encoding="utf-8"?>
-<p:sld xmlns:a="http://schemas.openxmlformats.org/drawingml/2006/main" xmlns:r="http://schemas.openxmlformats.org/officeDocument/2006/relationships" xmlns:p="http://schemas.openxmlformats.org/presentationml/2006/main">
-  <p:cSld>
-    <p:bg>
-      <p:bgPr>
-        <a:solidFill>
-          <a:srgbClr val="0F172A"/>
-        </a:solidFill>
-        <a:effectLst/>
-      </p:bgPr>
-    </p:bg>
-    <p:spTree>
-      <p:nvGrpSpPr>
-        <p:cNvPr id="1" name=""/>
-        <p:cNvGrpSpPr/>
-        <p:nvPr/>
-      </p:nvGrpSpPr>
-      <p:grpSpPr>
-        <a:xfrm>
-          <a:off x="0" y="0"/>
-          <a:ext cx="0" cy="0"/>
-          <a:chOff x="0" y="0"/>
-          <a:chExt cx="0" cy="0"/>
-        </a:xfrm>
-      </p:grpSpPr>
-      <p:sp>
-        <p:nvSpPr>
-          <p:cNvPr id="2" name="TextBox 1"/>
-          <p:cNvSpPr txBox="1"/>
-          <p:nvPr/>
-        </p:nvSpPr>
-        <p:spPr>
-          <a:xfrm>
-            <a:off x="731520" y="365760"/>
-            <a:ext cx="10698480" cy="365760"/>
-          </a:xfrm>
-          <a:prstGeom prst="rect">
-            <a:avLst/>
-          </a:prstGeom>
-          <a:noFill/>
-        </p:spPr>
-        <p:txBody>
-          <a:bodyPr wrap="square" lIns="0" tIns="0" rIns="0" bIns="0">
-            <a:spAutoFit/>
-          </a:bodyPr>
-          <a:lstStyle/>
-          <a:p>
-            <a:pPr>
-              <a:defRPr sz="1000" b="1">
-                <a:solidFill>
-                  <a:srgbClr val="38BDF8"/>
-                </a:solidFill>
-                <a:latin typeface="Segoe UI"/>
-              </a:defRPr>
-            </a:pPr>
-            <a:r>
-              <a:t>RECOMMENDED PATH</a:t>
-            </a:r>
-          </a:p>
-        </p:txBody>
-      </p:sp>
-      <p:sp>
-        <p:nvSpPr>
-          <p:cNvPr id="3" name="TextBox 2"/>
-          <p:cNvSpPr txBox="1"/>
-          <p:nvPr/>
-        </p:nvSpPr>
-        <p:spPr>
-          <a:xfrm>
-            <a:off x="731520" y="640080"/>
-            <a:ext cx="10698480" cy="731520"/>
-          </a:xfrm>
-          <a:prstGeom prst="rect">
-            <a:avLst/>
-          </a:prstGeom>
-          <a:noFill/>
-        </p:spPr>
-        <p:txBody>
-          <a:bodyPr wrap="square" lIns="0" tIns="0" rIns="0" bIns="0">
-            <a:spAutoFit/>
-          </a:bodyPr>
-          <a:lstStyle/>
-          <a:p>
-            <a:pPr>
-              <a:defRPr sz="3200" b="1">
-                <a:solidFill>
-                  <a:srgbClr val="F8FAFC"/>
-                </a:solidFill>
-                <a:latin typeface="Segoe UI"/>
-              </a:defRPr>
-            </a:pPr>
-            <a:r>
-              <a:t>Docker Deployment Configuration</a:t>
-            </a:r>
-          </a:p>
-        </p:txBody>
-      </p:sp>
-      <p:sp>
-        <p:nvSpPr>
-          <p:cNvPr id="4" name="Rectangle 3"/>
-          <p:cNvSpPr/>
-          <p:nvPr/>
-        </p:nvSpPr>
-        <p:spPr>
-          <a:xfrm>
-            <a:off x="475488" y="1645920"/>
-            <a:ext cx="5376672" cy="4114800"/>
-          </a:xfrm>
-          <a:prstGeom prst="rect">
-            <a:avLst/>
-          </a:prstGeom>
-          <a:solidFill>
-            <a:srgbClr val="1E293B"/>
-          </a:solidFill>
-          <a:ln>
-            <a:solidFill>
-              <a:srgbClr val="1E293B"/>
-            </a:solidFill>
-          </a:ln>
-        </p:spPr>
-        <p:style>
-          <a:lnRef idx="1">
-            <a:schemeClr val="accent1"/>
-          </a:lnRef>
-          <a:fillRef idx="3">
-            <a:schemeClr val="accent1"/>
-          </a:fillRef>
-          <a:effectRef idx="2">
-            <a:schemeClr val="accent1"/>
-          </a:effectRef>
-          <a:fontRef idx="minor">
-            <a:schemeClr val="lt1"/>
-          </a:fontRef>
-        </p:style>
-        <p:txBody>
-          <a:bodyPr wrap="square" lIns="274320" tIns="274320" rIns="274320" bIns="274320" rtlCol="0" anchor="ctr"/>
-          <a:lstStyle/>
-          <a:p>
-            <a:pPr algn="ctr">
-              <a:spcAft>
-                <a:spcPts val="1400"/>
-              </a:spcAft>
-              <a:defRPr sz="1800" b="1">
-                <a:solidFill>
-                  <a:srgbClr val="38BDF8"/>
-                </a:solidFill>
-                <a:latin typeface="Segoe UI"/>
-              </a:defRPr>
-            </a:pPr>
-            <a:r>
-              <a:rPr dirty="0" err="1"/>
-              <a:t>Dockerfile</a:t>
-            </a:r>
-            <a:r>
-              <a:rPr dirty="0"/>
-              <a:t> Structure</a:t>
-            </a:r>
-          </a:p>
-          <a:p>
-            <a:pPr>
-              <a:spcAft>
-                <a:spcPts val="800"/>
-              </a:spcAft>
-              <a:defRPr sz="1300">
-                <a:solidFill>
-                  <a:srgbClr val="F8FAFC"/>
-                </a:solidFill>
-                <a:latin typeface="Segoe UI"/>
-              </a:defRPr>
-            </a:pPr>
-            <a:r>
-              <a:rPr dirty="0"/>
-              <a:t>• Base Image:</a:t>
-            </a:r>
-            <a:br>
-              <a:rPr dirty="0"/>
-            </a:br>
-            <a:r>
-              <a:rPr dirty="0"/>
-              <a:t>FROM </a:t>
-            </a:r>
-            <a:r>
-              <a:rPr dirty="0" err="1"/>
-              <a:t>pytorch</a:t>
-            </a:r>
-            <a:r>
-              <a:rPr dirty="0"/>
-              <a:t>/pytorch:2.1.0-cuda12.1-cudnn8-runtime</a:t>
-            </a:r>
-          </a:p>
-          <a:p>
-            <a:pPr>
-              <a:spcAft>
-                <a:spcPts val="800"/>
-              </a:spcAft>
-              <a:defRPr sz="1300">
-                <a:solidFill>
-                  <a:srgbClr val="F8FAFC"/>
-                </a:solidFill>
-                <a:latin typeface="Segoe UI"/>
-              </a:defRPr>
-            </a:pPr>
-            <a:r>
-              <a:rPr dirty="0"/>
-              <a:t>• System Libs:</a:t>
-            </a:r>
-            <a:br>
-              <a:rPr dirty="0"/>
-            </a:br>
-            <a:r>
-              <a:rPr dirty="0"/>
-              <a:t>Install mesa-</a:t>
-            </a:r>
-            <a:r>
-              <a:rPr dirty="0" err="1"/>
-              <a:t>glx</a:t>
-            </a:r>
-            <a:r>
-              <a:rPr dirty="0"/>
-              <a:t> and glib2.0 for OpenCV support</a:t>
-            </a:r>
-          </a:p>
-          <a:p>
-            <a:pPr>
-              <a:spcAft>
-                <a:spcPts val="800"/>
-              </a:spcAft>
-              <a:defRPr sz="1300">
-                <a:solidFill>
-                  <a:srgbClr val="F8FAFC"/>
-                </a:solidFill>
-                <a:latin typeface="Segoe UI"/>
-              </a:defRPr>
-            </a:pPr>
-            <a:r>
-              <a:rPr dirty="0"/>
-              <a:t>• Dependencies:</a:t>
-            </a:r>
-            <a:br>
-              <a:rPr dirty="0"/>
-            </a:br>
-            <a:r>
-              <a:rPr dirty="0"/>
-              <a:t>RUN pip install -r requirements.txt</a:t>
-            </a:r>
-          </a:p>
-          <a:p>
-            <a:pPr>
-              <a:spcAft>
-                <a:spcPts val="800"/>
-              </a:spcAft>
-              <a:defRPr sz="1300">
-                <a:solidFill>
-                  <a:srgbClr val="F8FAFC"/>
-                </a:solidFill>
-                <a:latin typeface="Segoe UI"/>
-              </a:defRPr>
-            </a:pPr>
-            <a:r>
-              <a:rPr dirty="0"/>
-              <a:t>• Source:</a:t>
-            </a:r>
-            <a:br>
-              <a:rPr dirty="0"/>
-            </a:br>
-            <a:r>
-              <a:rPr dirty="0"/>
-              <a:t>Copy model/best.pt and pothole.py</a:t>
-            </a:r>
-          </a:p>
-          <a:p>
-            <a:pPr>
-              <a:spcAft>
-                <a:spcPts val="800"/>
-              </a:spcAft>
-              <a:defRPr sz="1300">
-                <a:solidFill>
-                  <a:srgbClr val="F8FAFC"/>
-                </a:solidFill>
-                <a:latin typeface="Segoe UI"/>
-              </a:defRPr>
-            </a:pPr>
-            <a:r>
-              <a:rPr dirty="0"/>
-              <a:t>• Port:</a:t>
-            </a:r>
-            <a:br>
-              <a:rPr dirty="0"/>
-            </a:br>
-            <a:r>
-              <a:rPr dirty="0"/>
-              <a:t>EXPOSE 8501</a:t>
-            </a:r>
-          </a:p>
-          <a:p>
-            <a:pPr>
-              <a:spcAft>
-                <a:spcPts val="800"/>
-              </a:spcAft>
-              <a:defRPr sz="1300">
-                <a:solidFill>
-                  <a:srgbClr val="F8FAFC"/>
-                </a:solidFill>
-                <a:latin typeface="Segoe UI"/>
-              </a:defRPr>
-            </a:pPr>
-            <a:r>
-              <a:rPr dirty="0"/>
-              <a:t>• Run CMD:</a:t>
-            </a:r>
-            <a:br>
-              <a:rPr dirty="0"/>
-            </a:br>
-            <a:r>
-              <a:rPr dirty="0" err="1"/>
-              <a:t>Streamlit</a:t>
-            </a:r>
-            <a:r>
-              <a:rPr dirty="0"/>
-              <a:t> execution command</a:t>
             </a:r>
           </a:p>
         </p:txBody>
@@ -7030,7 +4915,7 @@
           </a:fontRef>
         </p:style>
         <p:txBody>
-          <a:bodyPr wrap="square" lIns="274320" tIns="274320" rIns="274320" bIns="274320" rtlCol="0" anchor="ctr"/>
+          <a:bodyPr rtlCol="0" anchor="ctr" wrap="square" lIns="274320" rIns="274320" tIns="274320" bIns="274320"/>
           <a:lstStyle/>
           <a:p>
             <a:pPr algn="ctr">
@@ -7045,99 +4930,83 @@
               </a:defRPr>
             </a:pPr>
             <a:r>
-              <a:t>Docker Compose Config (GPU Mapping)</a:t>
-            </a:r>
-          </a:p>
-          <a:p>
-            <a:pPr>
-              <a:spcAft>
-                <a:spcPts val="800"/>
-              </a:spcAft>
-              <a:defRPr sz="1300">
-                <a:solidFill>
-                  <a:srgbClr val="F8FAFC"/>
-                </a:solidFill>
-                <a:latin typeface="Segoe UI"/>
-              </a:defRPr>
-            </a:pPr>
-            <a:r>
-              <a:t>• Port Binding:</a:t>
+              <a:t>Option B: Host is CPU-Only</a:t>
+            </a:r>
+          </a:p>
+          <a:p>
+            <a:pPr>
+              <a:spcAft>
+                <a:spcPts val="800"/>
+              </a:spcAft>
+              <a:defRPr sz="1300">
+                <a:solidFill>
+                  <a:srgbClr val="F8FAFC"/>
+                </a:solidFill>
+                <a:latin typeface="Segoe UI"/>
+              </a:defRPr>
+            </a:pPr>
+            <a:r>
+              <a:t>• 1. No graphics drivers or toolkits required on host</a:t>
+            </a:r>
+          </a:p>
+          <a:p>
+            <a:pPr>
+              <a:spcAft>
+                <a:spcPts val="800"/>
+              </a:spcAft>
+              <a:defRPr sz="1300">
+                <a:solidFill>
+                  <a:srgbClr val="F8FAFC"/>
+                </a:solidFill>
+                <a:latin typeface="Segoe UI"/>
+              </a:defRPr>
+            </a:pPr>
+            <a:r>
+              <a:t>• 2. Update apt repository cache:</a:t>
             </a:r>
             <a:br/>
             <a:r>
-              <a:t>- 8501:8501 maps Streamlit web client</a:t>
-            </a:r>
-          </a:p>
-          <a:p>
-            <a:pPr>
-              <a:spcAft>
-                <a:spcPts val="800"/>
-              </a:spcAft>
-              <a:defRPr sz="1300">
-                <a:solidFill>
-                  <a:srgbClr val="F8FAFC"/>
-                </a:solidFill>
-                <a:latin typeface="Segoe UI"/>
-              </a:defRPr>
-            </a:pPr>
-            <a:r>
-              <a:t>• Restart Policy:</a:t>
+              <a:t>sudo apt update</a:t>
+            </a:r>
+          </a:p>
+          <a:p>
+            <a:pPr>
+              <a:spcAft>
+                <a:spcPts val="800"/>
+              </a:spcAft>
+              <a:defRPr sz="1300">
+                <a:solidFill>
+                  <a:srgbClr val="F8FAFC"/>
+                </a:solidFill>
+                <a:latin typeface="Segoe UI"/>
+              </a:defRPr>
+            </a:pPr>
+            <a:r>
+              <a:t>• 3. Install standard Docker runtime:</a:t>
             </a:r>
             <a:br/>
             <a:r>
-              <a:t>restart: always restarts container on boot or crash</a:t>
-            </a:r>
-          </a:p>
-          <a:p>
-            <a:pPr>
-              <a:spcAft>
-                <a:spcPts val="800"/>
-              </a:spcAft>
-              <a:defRPr sz="1300">
-                <a:solidFill>
-                  <a:srgbClr val="F8FAFC"/>
-                </a:solidFill>
-                <a:latin typeface="Segoe UI"/>
-              </a:defRPr>
-            </a:pPr>
-            <a:r>
-              <a:t>• NVIDIA GPU Integration:</a:t>
+              <a:t>sudo apt install -y docker.io</a:t>
+            </a:r>
+          </a:p>
+          <a:p>
+            <a:pPr>
+              <a:spcAft>
+                <a:spcPts val="800"/>
+              </a:spcAft>
+              <a:defRPr sz="1300">
+                <a:solidFill>
+                  <a:srgbClr val="F8FAFC"/>
+                </a:solidFill>
+                <a:latin typeface="Segoe UI"/>
+              </a:defRPr>
+            </a:pPr>
+            <a:r>
+              <a:t>• 4. Start Docker system service daemon:</a:t>
             </a:r>
             <a:br/>
             <a:r>
-              <a:t>deploy.resources.reservations.devices:</a:t>
-            </a:r>
-            <a:br/>
-            <a:r>
-              <a:t>  - driver: nvidia</a:t>
-            </a:r>
-            <a:br/>
-            <a:r>
-              <a:t>    capabilities: [gpu]</a:t>
-            </a:r>
-            <a:br/>
-            <a:r>
-              <a:t>    count: all</a:t>
-            </a:r>
-          </a:p>
-          <a:p>
-            <a:pPr>
-              <a:spcAft>
-                <a:spcPts val="800"/>
-              </a:spcAft>
-              <a:defRPr sz="1300">
-                <a:solidFill>
-                  <a:srgbClr val="F8FAFC"/>
-                </a:solidFill>
-                <a:latin typeface="Segoe UI"/>
-              </a:defRPr>
-            </a:pPr>
-            <a:r>
-              <a:t>• Start command:</a:t>
-            </a:r>
-            <a:br/>
-            <a:r>
-              <a:t>docker compose up -d --build</a:t>
+              <a:t>sudo systemctl enable --now docker</a:t>
             </a:r>
           </a:p>
         </p:txBody>
@@ -7150,8 +5019,8 @@
 </p:sld>
 </file>
 
-<file path=ppt/slides/slide7.xml><?xml version="1.0" encoding="utf-8"?>
-<p:sld xmlns:a="http://schemas.openxmlformats.org/drawingml/2006/main" xmlns:r="http://schemas.openxmlformats.org/officeDocument/2006/relationships" xmlns:p="http://schemas.openxmlformats.org/presentationml/2006/main">
+<file path=ppt/slides/slide6.xml><?xml version="1.0" encoding="utf-8"?>
+<p:sld xmlns:a="http://schemas.openxmlformats.org/drawingml/2006/main" xmlns:p="http://schemas.openxmlformats.org/presentationml/2006/main" xmlns:r="http://schemas.openxmlformats.org/officeDocument/2006/relationships">
   <p:cSld>
     <p:bg>
       <p:bgPr>
@@ -7167,14 +5036,7 @@
         <p:cNvGrpSpPr/>
         <p:nvPr/>
       </p:nvGrpSpPr>
-      <p:grpSpPr>
-        <a:xfrm>
-          <a:off x="0" y="0"/>
-          <a:ext cx="0" cy="0"/>
-          <a:chOff x="0" y="0"/>
-          <a:chExt cx="0" cy="0"/>
-        </a:xfrm>
-      </p:grpSpPr>
+      <p:grpSpPr/>
       <p:sp>
         <p:nvSpPr>
           <p:cNvPr id="2" name="TextBox 1"/>
@@ -7192,7 +5054,7 @@
           <a:noFill/>
         </p:spPr>
         <p:txBody>
-          <a:bodyPr wrap="square" lIns="0" tIns="0" rIns="0" bIns="0">
+          <a:bodyPr wrap="square" lIns="0" rIns="0" tIns="0" bIns="0">
             <a:spAutoFit/>
           </a:bodyPr>
           <a:lstStyle/>
@@ -7206,7 +5068,7 @@
               </a:defRPr>
             </a:pPr>
             <a:r>
-              <a:t>ALTERNATIVE PATH</a:t>
+              <a:t>UBUNTU DEPLOYMENT</a:t>
             </a:r>
           </a:p>
         </p:txBody>
@@ -7228,7 +5090,7 @@
           <a:noFill/>
         </p:spPr>
         <p:txBody>
-          <a:bodyPr wrap="square" lIns="0" tIns="0" rIns="0" bIns="0">
+          <a:bodyPr wrap="square" lIns="0" rIns="0" tIns="0" bIns="0">
             <a:spAutoFit/>
           </a:bodyPr>
           <a:lstStyle/>
@@ -7242,7 +5104,7 @@
               </a:defRPr>
             </a:pPr>
             <a:r>
-              <a:t>Alternative Path: Bare-Metal Setup</a:t>
+              <a:t>Step 1: Running the App on Your Server</a:t>
             </a:r>
           </a:p>
         </p:txBody>
@@ -7285,7 +5147,7 @@
           </a:fontRef>
         </p:style>
         <p:txBody>
-          <a:bodyPr wrap="square" lIns="274320" tIns="274320" rIns="274320" bIns="274320" rtlCol="0" anchor="ctr"/>
+          <a:bodyPr rtlCol="0" anchor="ctr" wrap="square" lIns="274320" rIns="274320" tIns="274320" bIns="274320"/>
           <a:lstStyle/>
           <a:p>
             <a:pPr algn="ctr">
@@ -7300,75 +5162,91 @@
               </a:defRPr>
             </a:pPr>
             <a:r>
-              <a:t>Conda Environment &amp; PyTorch</a:t>
-            </a:r>
-          </a:p>
-          <a:p>
-            <a:pPr>
-              <a:spcAft>
-                <a:spcPts val="800"/>
-              </a:spcAft>
-              <a:defRPr sz="1300">
-                <a:solidFill>
-                  <a:srgbClr val="F8FAFC"/>
-                </a:solidFill>
-                <a:latin typeface="Segoe UI"/>
-              </a:defRPr>
-            </a:pPr>
-            <a:r>
-              <a:t>• Install Miniconda package manager on host</a:t>
-            </a:r>
-          </a:p>
-          <a:p>
-            <a:pPr>
-              <a:spcAft>
-                <a:spcPts val="800"/>
-              </a:spcAft>
-              <a:defRPr sz="1300">
-                <a:solidFill>
-                  <a:srgbClr val="F8FAFC"/>
-                </a:solidFill>
-                <a:latin typeface="Segoe UI"/>
-              </a:defRPr>
-            </a:pPr>
-            <a:r>
-              <a:t>• Create dedicated Python 3.10 virtual space</a:t>
-            </a:r>
-          </a:p>
-          <a:p>
-            <a:pPr>
-              <a:spcAft>
-                <a:spcPts val="800"/>
-              </a:spcAft>
-              <a:defRPr sz="1300">
-                <a:solidFill>
-                  <a:srgbClr val="F8FAFC"/>
-                </a:solidFill>
-                <a:latin typeface="Segoe UI"/>
-              </a:defRPr>
-            </a:pPr>
-            <a:r>
-              <a:t>• Install PyTorch with GPU compatibility:</a:t>
+              <a:t>Directory &amp; Run Steps</a:t>
+            </a:r>
+          </a:p>
+          <a:p>
+            <a:pPr>
+              <a:spcAft>
+                <a:spcPts val="800"/>
+              </a:spcAft>
+              <a:defRPr sz="1300">
+                <a:solidFill>
+                  <a:srgbClr val="F8FAFC"/>
+                </a:solidFill>
+                <a:latin typeface="Segoe UI"/>
+              </a:defRPr>
+            </a:pPr>
+            <a:r>
+              <a:t>• 1. SSH into the server</a:t>
+            </a:r>
+          </a:p>
+          <a:p>
+            <a:pPr>
+              <a:spcAft>
+                <a:spcPts val="800"/>
+              </a:spcAft>
+              <a:defRPr sz="1300">
+                <a:solidFill>
+                  <a:srgbClr val="F8FAFC"/>
+                </a:solidFill>
+                <a:latin typeface="Segoe UI"/>
+              </a:defRPr>
+            </a:pPr>
+            <a:r>
+              <a:t>• 2. Clone your model git repository into the system workspace</a:t>
+            </a:r>
+          </a:p>
+          <a:p>
+            <a:pPr>
+              <a:spcAft>
+                <a:spcPts val="800"/>
+              </a:spcAft>
+              <a:defRPr sz="1300">
+                <a:solidFill>
+                  <a:srgbClr val="F8FAFC"/>
+                </a:solidFill>
+                <a:latin typeface="Segoe UI"/>
+              </a:defRPr>
+            </a:pPr>
+            <a:r>
+              <a:t>• 3. Ensure the folder has model/best.pt and pothole.py files</a:t>
+            </a:r>
+          </a:p>
+          <a:p>
+            <a:pPr>
+              <a:spcAft>
+                <a:spcPts val="800"/>
+              </a:spcAft>
+              <a:defRPr sz="1300">
+                <a:solidFill>
+                  <a:srgbClr val="F8FAFC"/>
+                </a:solidFill>
+                <a:latin typeface="Segoe UI"/>
+              </a:defRPr>
+            </a:pPr>
+            <a:r>
+              <a:t>• 4. Place your Dockerfile &amp; docker-compose.yml in project root</a:t>
+            </a:r>
+          </a:p>
+          <a:p>
+            <a:pPr>
+              <a:spcAft>
+                <a:spcPts val="800"/>
+              </a:spcAft>
+              <a:defRPr sz="1300">
+                <a:solidFill>
+                  <a:srgbClr val="F8FAFC"/>
+                </a:solidFill>
+                <a:latin typeface="Segoe UI"/>
+              </a:defRPr>
+            </a:pPr>
+            <a:r>
+              <a:t>• 5. Build and launch container stack:</a:t>
             </a:r>
             <a:br/>
             <a:r>
-              <a:t>pip3 install torch torchvision --index-url https://download.pytorch.org/whl/cu121</a:t>
-            </a:r>
-          </a:p>
-          <a:p>
-            <a:pPr>
-              <a:spcAft>
-                <a:spcPts val="800"/>
-              </a:spcAft>
-              <a:defRPr sz="1300">
-                <a:solidFill>
-                  <a:srgbClr val="F8FAFC"/>
-                </a:solidFill>
-                <a:latin typeface="Segoe UI"/>
-              </a:defRPr>
-            </a:pPr>
-            <a:r>
-              <a:t>• Install requirements: streamlit, ultralytics, etc.</a:t>
+              <a:t>docker compose up -d --build</a:t>
             </a:r>
           </a:p>
         </p:txBody>
@@ -7411,7 +5289,7 @@
           </a:fontRef>
         </p:style>
         <p:txBody>
-          <a:bodyPr wrap="square" lIns="274320" tIns="274320" rIns="274320" bIns="274320" rtlCol="0" anchor="ctr"/>
+          <a:bodyPr rtlCol="0" anchor="ctr" wrap="square" lIns="274320" rIns="274320" tIns="274320" bIns="274320"/>
           <a:lstStyle/>
           <a:p>
             <a:pPr algn="ctr">
@@ -7426,99 +5304,67 @@
               </a:defRPr>
             </a:pPr>
             <a:r>
-              <a:t>Systemd Background Manager</a:t>
-            </a:r>
-          </a:p>
-          <a:p>
-            <a:pPr>
-              <a:spcAft>
-                <a:spcPts val="800"/>
-              </a:spcAft>
-              <a:defRPr sz="1300">
-                <a:solidFill>
-                  <a:srgbClr val="F8FAFC"/>
-                </a:solidFill>
-                <a:latin typeface="Segoe UI"/>
-              </a:defRPr>
-            </a:pPr>
-            <a:r>
-              <a:t>• Unit File: /etc/systemd/system/pothole-streamlit.service</a:t>
-            </a:r>
-          </a:p>
-          <a:p>
-            <a:pPr>
-              <a:spcAft>
-                <a:spcPts val="800"/>
-              </a:spcAft>
-              <a:defRPr sz="1300">
-                <a:solidFill>
-                  <a:srgbClr val="F8FAFC"/>
-                </a:solidFill>
-                <a:latin typeface="Segoe UI"/>
-              </a:defRPr>
-            </a:pPr>
-            <a:r>
-              <a:t>• Set WorkingDirectory and correct env binary Path</a:t>
-            </a:r>
-          </a:p>
-          <a:p>
-            <a:pPr>
-              <a:spcAft>
-                <a:spcPts val="800"/>
-              </a:spcAft>
-              <a:defRPr sz="1300">
-                <a:solidFill>
-                  <a:srgbClr val="F8FAFC"/>
-                </a:solidFill>
-                <a:latin typeface="Segoe UI"/>
-              </a:defRPr>
-            </a:pPr>
-            <a:r>
-              <a:t>• Add environment parameters:</a:t>
+              <a:t>Verification Commands</a:t>
+            </a:r>
+          </a:p>
+          <a:p>
+            <a:pPr>
+              <a:spcAft>
+                <a:spcPts val="800"/>
+              </a:spcAft>
+              <a:defRPr sz="1300">
+                <a:solidFill>
+                  <a:srgbClr val="F8FAFC"/>
+                </a:solidFill>
+                <a:latin typeface="Segoe UI"/>
+              </a:defRPr>
+            </a:pPr>
+            <a:r>
+              <a:t>• Verify container status is active:</a:t>
             </a:r>
             <a:br/>
             <a:r>
-              <a:t>PYTORCH_CUDA_ALLOC_CONF=expandable_segments:True</a:t>
-            </a:r>
-          </a:p>
-          <a:p>
-            <a:pPr>
-              <a:spcAft>
-                <a:spcPts val="800"/>
-              </a:spcAft>
-              <a:defRPr sz="1300">
-                <a:solidFill>
-                  <a:srgbClr val="F8FAFC"/>
-                </a:solidFill>
-                <a:latin typeface="Segoe UI"/>
-              </a:defRPr>
-            </a:pPr>
-            <a:r>
-              <a:t>• ExecStart:</a:t>
+              <a:t>docker ps</a:t>
+            </a:r>
+          </a:p>
+          <a:p>
+            <a:pPr>
+              <a:spcAft>
+                <a:spcPts val="800"/>
+              </a:spcAft>
+              <a:defRPr sz="1300">
+                <a:solidFill>
+                  <a:srgbClr val="F8FAFC"/>
+                </a:solidFill>
+                <a:latin typeface="Segoe UI"/>
+              </a:defRPr>
+            </a:pPr>
+            <a:r>
+              <a:t>• Monitor container execution logs:</a:t>
             </a:r>
             <a:br/>
             <a:r>
-              <a:t>streamlit run pothole.py --server.port 8501</a:t>
-            </a:r>
-          </a:p>
-          <a:p>
-            <a:pPr>
-              <a:spcAft>
-                <a:spcPts val="800"/>
-              </a:spcAft>
-              <a:defRPr sz="1300">
-                <a:solidFill>
-                  <a:srgbClr val="F8FAFC"/>
-                </a:solidFill>
-                <a:latin typeface="Segoe UI"/>
-              </a:defRPr>
-            </a:pPr>
-            <a:r>
-              <a:t>• Control service:</a:t>
+              <a:t>docker logs pothole-segmentation-app</a:t>
+            </a:r>
+          </a:p>
+          <a:p>
+            <a:pPr>
+              <a:spcAft>
+                <a:spcPts val="800"/>
+              </a:spcAft>
+              <a:defRPr sz="1300">
+                <a:solidFill>
+                  <a:srgbClr val="F8FAFC"/>
+                </a:solidFill>
+                <a:latin typeface="Segoe UI"/>
+              </a:defRPr>
+            </a:pPr>
+            <a:r>
+              <a:t>• Verify GPU acceleration is loaded:</a:t>
             </a:r>
             <a:br/>
             <a:r>
-              <a:t>systemctl start/enable/status pothole-streamlit</a:t>
+              <a:t>docker exec -it pothole-segmentation-app python -c "import torch; print(torch.cuda.is_available())"</a:t>
             </a:r>
           </a:p>
         </p:txBody>
@@ -7531,8 +5377,8 @@
 </p:sld>
 </file>
 
-<file path=ppt/slides/slide8.xml><?xml version="1.0" encoding="utf-8"?>
-<p:sld xmlns:a="http://schemas.openxmlformats.org/drawingml/2006/main" xmlns:r="http://schemas.openxmlformats.org/officeDocument/2006/relationships" xmlns:p="http://schemas.openxmlformats.org/presentationml/2006/main">
+<file path=ppt/slides/slide7.xml><?xml version="1.0" encoding="utf-8"?>
+<p:sld xmlns:a="http://schemas.openxmlformats.org/drawingml/2006/main" xmlns:p="http://schemas.openxmlformats.org/presentationml/2006/main" xmlns:r="http://schemas.openxmlformats.org/officeDocument/2006/relationships">
   <p:cSld>
     <p:bg>
       <p:bgPr>
@@ -7548,14 +5394,7 @@
         <p:cNvGrpSpPr/>
         <p:nvPr/>
       </p:nvGrpSpPr>
-      <p:grpSpPr>
-        <a:xfrm>
-          <a:off x="0" y="0"/>
-          <a:ext cx="0" cy="0"/>
-          <a:chOff x="0" y="0"/>
-          <a:chExt cx="0" cy="0"/>
-        </a:xfrm>
-      </p:grpSpPr>
+      <p:grpSpPr/>
       <p:sp>
         <p:nvSpPr>
           <p:cNvPr id="2" name="TextBox 1"/>
@@ -7573,7 +5412,7 @@
           <a:noFill/>
         </p:spPr>
         <p:txBody>
-          <a:bodyPr wrap="square" lIns="0" tIns="0" rIns="0" bIns="0">
+          <a:bodyPr wrap="square" lIns="0" rIns="0" tIns="0" bIns="0">
             <a:spAutoFit/>
           </a:bodyPr>
           <a:lstStyle/>
@@ -7587,7 +5426,7 @@
               </a:defRPr>
             </a:pPr>
             <a:r>
-              <a:t>NGINX SERVER</a:t>
+              <a:t>RUNPOD DEPLOYMENT</a:t>
             </a:r>
           </a:p>
         </p:txBody>
@@ -7609,7 +5448,7 @@
           <a:noFill/>
         </p:spPr>
         <p:txBody>
-          <a:bodyPr wrap="square" lIns="0" tIns="0" rIns="0" bIns="0">
+          <a:bodyPr wrap="square" lIns="0" rIns="0" tIns="0" bIns="0">
             <a:spAutoFit/>
           </a:bodyPr>
           <a:lstStyle/>
@@ -7623,7 +5462,7 @@
               </a:defRPr>
             </a:pPr>
             <a:r>
-              <a:t>Reverse Proxy &amp; SSL Automation</a:t>
+              <a:t>Step 2: Deploying on RunPod Cloud</a:t>
             </a:r>
           </a:p>
         </p:txBody>
@@ -7666,7 +5505,7 @@
           </a:fontRef>
         </p:style>
         <p:txBody>
-          <a:bodyPr wrap="square" lIns="274320" tIns="274320" rIns="274320" bIns="274320" rtlCol="0" anchor="ctr"/>
+          <a:bodyPr rtlCol="0" anchor="ctr" wrap="square" lIns="274320" rIns="274320" tIns="274320" bIns="274320"/>
           <a:lstStyle/>
           <a:p>
             <a:pPr algn="ctr">
@@ -7681,99 +5520,71 @@
               </a:defRPr>
             </a:pPr>
             <a:r>
-              <a:t>Nginx Configuration Block</a:t>
-            </a:r>
-          </a:p>
-          <a:p>
-            <a:pPr>
-              <a:spcAft>
-                <a:spcPts val="800"/>
-              </a:spcAft>
-              <a:defRPr sz="1300">
-                <a:solidFill>
-                  <a:srgbClr val="F8FAFC"/>
-                </a:solidFill>
-                <a:latin typeface="Segoe UI"/>
-              </a:defRPr>
-            </a:pPr>
-            <a:r>
-              <a:t>• Exposes app on standard HTTP port 80</a:t>
-            </a:r>
-          </a:p>
-          <a:p>
-            <a:pPr>
-              <a:spcAft>
-                <a:spcPts val="800"/>
-              </a:spcAft>
-              <a:defRPr sz="1300">
-                <a:solidFill>
-                  <a:srgbClr val="F8FAFC"/>
-                </a:solidFill>
-                <a:latin typeface="Segoe UI"/>
-              </a:defRPr>
-            </a:pPr>
-            <a:r>
-              <a:t>• File: /etc/nginx/sites-available/pothole-app</a:t>
-            </a:r>
-          </a:p>
-          <a:p>
-            <a:pPr>
-              <a:spcAft>
-                <a:spcPts val="800"/>
-              </a:spcAft>
-              <a:defRPr sz="1300">
-                <a:solidFill>
-                  <a:srgbClr val="F8FAFC"/>
-                </a:solidFill>
-                <a:latin typeface="Segoe UI"/>
-              </a:defRPr>
-            </a:pPr>
-            <a:r>
-              <a:t>• Proxy Pass:</a:t>
-            </a:r>
-            <a:br/>
-            <a:r>
-              <a:t>proxy_pass http://127.0.0.1:8501;</a:t>
-            </a:r>
-          </a:p>
-          <a:p>
-            <a:pPr>
-              <a:spcAft>
-                <a:spcPts val="800"/>
-              </a:spcAft>
-              <a:defRPr sz="1300">
-                <a:solidFill>
-                  <a:srgbClr val="F8FAFC"/>
-                </a:solidFill>
-                <a:latin typeface="Segoe UI"/>
-              </a:defRPr>
-            </a:pPr>
-            <a:r>
-              <a:t>• Upload Sizes:</a:t>
-            </a:r>
-            <a:br/>
-            <a:r>
-              <a:t>client_max_body_size 50M; (essential for large computer vision images)</a:t>
-            </a:r>
-          </a:p>
-          <a:p>
-            <a:pPr>
-              <a:spcAft>
-                <a:spcPts val="800"/>
-              </a:spcAft>
-              <a:defRPr sz="1300">
-                <a:solidFill>
-                  <a:srgbClr val="F8FAFC"/>
-                </a:solidFill>
-                <a:latin typeface="Segoe UI"/>
-              </a:defRPr>
-            </a:pPr>
-            <a:r>
-              <a:t>• Headers:</a:t>
-            </a:r>
-            <a:br/>
-            <a:r>
-              <a:t>Configure Upgrade &amp; Connection headers to support Streamlit WebSockets</a:t>
+              <a:t>RunPod Pods (Interactive Mode)</a:t>
+            </a:r>
+          </a:p>
+          <a:p>
+            <a:pPr>
+              <a:spcAft>
+                <a:spcPts val="800"/>
+              </a:spcAft>
+              <a:defRPr sz="1300">
+                <a:solidFill>
+                  <a:srgbClr val="F8FAFC"/>
+                </a:solidFill>
+                <a:latin typeface="Segoe UI"/>
+              </a:defRPr>
+            </a:pPr>
+            <a:r>
+              <a:t>• Features: Full terminal access, Jupyter environment, GPU instances</a:t>
+            </a:r>
+          </a:p>
+          <a:p>
+            <a:pPr>
+              <a:spcAft>
+                <a:spcPts val="800"/>
+              </a:spcAft>
+              <a:defRPr sz="1300">
+                <a:solidFill>
+                  <a:srgbClr val="F8FAFC"/>
+                </a:solidFill>
+                <a:latin typeface="Segoe UI"/>
+              </a:defRPr>
+            </a:pPr>
+            <a:r>
+              <a:t>• Storage: Persistent Network Volumes keep model files safe during restarts</a:t>
+            </a:r>
+          </a:p>
+          <a:p>
+            <a:pPr>
+              <a:spcAft>
+                <a:spcPts val="800"/>
+              </a:spcAft>
+              <a:defRPr sz="1300">
+                <a:solidFill>
+                  <a:srgbClr val="F8FAFC"/>
+                </a:solidFill>
+                <a:latin typeface="Segoe UI"/>
+              </a:defRPr>
+            </a:pPr>
+            <a:r>
+              <a:t>• Port Exposure: Routes internal container port 8501 out securely</a:t>
+            </a:r>
+          </a:p>
+          <a:p>
+            <a:pPr>
+              <a:spcAft>
+                <a:spcPts val="800"/>
+              </a:spcAft>
+              <a:defRPr sz="1300">
+                <a:solidFill>
+                  <a:srgbClr val="F8FAFC"/>
+                </a:solidFill>
+                <a:latin typeface="Segoe UI"/>
+              </a:defRPr>
+            </a:pPr>
+            <a:r>
+              <a:t>• Best for: Interactive interfaces, client dashboard checks, active testing</a:t>
             </a:r>
           </a:p>
         </p:txBody>
@@ -7816,7 +5627,7 @@
           </a:fontRef>
         </p:style>
         <p:txBody>
-          <a:bodyPr wrap="square" lIns="274320" tIns="274320" rIns="274320" bIns="274320" rtlCol="0" anchor="ctr"/>
+          <a:bodyPr rtlCol="0" anchor="ctr" wrap="square" lIns="274320" rIns="274320" tIns="274320" bIns="274320"/>
           <a:lstStyle/>
           <a:p>
             <a:pPr algn="ctr">
@@ -7831,83 +5642,71 @@
               </a:defRPr>
             </a:pPr>
             <a:r>
-              <a:t>Let's Encrypt SSL Securing</a:t>
-            </a:r>
-          </a:p>
-          <a:p>
-            <a:pPr>
-              <a:spcAft>
-                <a:spcPts val="800"/>
-              </a:spcAft>
-              <a:defRPr sz="1300">
-                <a:solidFill>
-                  <a:srgbClr val="F8FAFC"/>
-                </a:solidFill>
-                <a:latin typeface="Segoe UI"/>
-              </a:defRPr>
-            </a:pPr>
-            <a:r>
-              <a:t>• Install Certbot tool:</a:t>
-            </a:r>
-            <a:br/>
-            <a:r>
-              <a:t>sudo apt install certbot python3-certbot-nginx</a:t>
-            </a:r>
-          </a:p>
-          <a:p>
-            <a:pPr>
-              <a:spcAft>
-                <a:spcPts val="800"/>
-              </a:spcAft>
-              <a:defRPr sz="1300">
-                <a:solidFill>
-                  <a:srgbClr val="F8FAFC"/>
-                </a:solidFill>
-                <a:latin typeface="Segoe UI"/>
-              </a:defRPr>
-            </a:pPr>
-            <a:r>
-              <a:t>• Run Certbot auto-installer:</a:t>
-            </a:r>
-            <a:br/>
-            <a:r>
-              <a:t>sudo certbot --nginx -d app.yourdomain.com</a:t>
-            </a:r>
-          </a:p>
-          <a:p>
-            <a:pPr>
-              <a:spcAft>
-                <a:spcPts val="800"/>
-              </a:spcAft>
-              <a:defRPr sz="1300">
-                <a:solidFill>
-                  <a:srgbClr val="F8FAFC"/>
-                </a:solidFill>
-                <a:latin typeface="Segoe UI"/>
-              </a:defRPr>
-            </a:pPr>
-            <a:r>
-              <a:t>• Automated Redirects:</a:t>
-            </a:r>
-            <a:br/>
-            <a:r>
-              <a:t>Certbot will auto-route HTTP port 80 requests to secure HTTPS port 443</a:t>
-            </a:r>
-          </a:p>
-          <a:p>
-            <a:pPr>
-              <a:spcAft>
-                <a:spcPts val="800"/>
-              </a:spcAft>
-              <a:defRPr sz="1300">
-                <a:solidFill>
-                  <a:srgbClr val="F8FAFC"/>
-                </a:solidFill>
-                <a:latin typeface="Segoe UI"/>
-              </a:defRPr>
-            </a:pPr>
-            <a:r>
-              <a:t>• Auto-renewal checks are set up via a system cron job</a:t>
+              <a:t>RunPod Serverless (Elastic API)</a:t>
+            </a:r>
+          </a:p>
+          <a:p>
+            <a:pPr>
+              <a:spcAft>
+                <a:spcPts val="800"/>
+              </a:spcAft>
+              <a:defRPr sz="1300">
+                <a:solidFill>
+                  <a:srgbClr val="F8FAFC"/>
+                </a:solidFill>
+                <a:latin typeface="Segoe UI"/>
+              </a:defRPr>
+            </a:pPr>
+            <a:r>
+              <a:t>• Features: Scales container workers automatically based on traffic</a:t>
+            </a:r>
+          </a:p>
+          <a:p>
+            <a:pPr>
+              <a:spcAft>
+                <a:spcPts val="800"/>
+              </a:spcAft>
+              <a:defRPr sz="1300">
+                <a:solidFill>
+                  <a:srgbClr val="F8FAFC"/>
+                </a:solidFill>
+                <a:latin typeface="Segoe UI"/>
+              </a:defRPr>
+            </a:pPr>
+            <a:r>
+              <a:t>• Autoscaling limits: 0 to N worker containers</a:t>
+            </a:r>
+          </a:p>
+          <a:p>
+            <a:pPr>
+              <a:spcAft>
+                <a:spcPts val="800"/>
+              </a:spcAft>
+              <a:defRPr sz="1300">
+                <a:solidFill>
+                  <a:srgbClr val="F8FAFC"/>
+                </a:solidFill>
+                <a:latin typeface="Segoe UI"/>
+              </a:defRPr>
+            </a:pPr>
+            <a:r>
+              <a:t>• Idle Cost: $0.00 when system has no requests in queue</a:t>
+            </a:r>
+          </a:p>
+          <a:p>
+            <a:pPr>
+              <a:spcAft>
+                <a:spcPts val="800"/>
+              </a:spcAft>
+              <a:defRPr sz="1300">
+                <a:solidFill>
+                  <a:srgbClr val="F8FAFC"/>
+                </a:solidFill>
+                <a:latin typeface="Segoe UI"/>
+              </a:defRPr>
+            </a:pPr>
+            <a:r>
+              <a:t>• Requires: Building custom API wrapper (handler.py) and pushing image to Docker Hub</a:t>
             </a:r>
           </a:p>
         </p:txBody>
@@ -7920,8 +5719,8 @@
 </p:sld>
 </file>
 
-<file path=ppt/slides/slide9.xml><?xml version="1.0" encoding="utf-8"?>
-<p:sld xmlns:a="http://schemas.openxmlformats.org/drawingml/2006/main" xmlns:r="http://schemas.openxmlformats.org/officeDocument/2006/relationships" xmlns:p="http://schemas.openxmlformats.org/presentationml/2006/main">
+<file path=ppt/slides/slide8.xml><?xml version="1.0" encoding="utf-8"?>
+<p:sld xmlns:a="http://schemas.openxmlformats.org/drawingml/2006/main" xmlns:p="http://schemas.openxmlformats.org/presentationml/2006/main" xmlns:r="http://schemas.openxmlformats.org/officeDocument/2006/relationships">
   <p:cSld>
     <p:bg>
       <p:bgPr>
@@ -7937,14 +5736,7 @@
         <p:cNvGrpSpPr/>
         <p:nvPr/>
       </p:nvGrpSpPr>
-      <p:grpSpPr>
-        <a:xfrm>
-          <a:off x="0" y="0"/>
-          <a:ext cx="0" cy="0"/>
-          <a:chOff x="0" y="0"/>
-          <a:chExt cx="0" cy="0"/>
-        </a:xfrm>
-      </p:grpSpPr>
+      <p:grpSpPr/>
       <p:sp>
         <p:nvSpPr>
           <p:cNvPr id="2" name="TextBox 1"/>
@@ -7962,7 +5754,7 @@
           <a:noFill/>
         </p:spPr>
         <p:txBody>
-          <a:bodyPr wrap="square" lIns="0" tIns="0" rIns="0" bIns="0">
+          <a:bodyPr wrap="square" lIns="0" rIns="0" tIns="0" bIns="0">
             <a:spAutoFit/>
           </a:bodyPr>
           <a:lstStyle/>
@@ -7976,7 +5768,7 @@
               </a:defRPr>
             </a:pPr>
             <a:r>
-              <a:t>RUNPOD HOSTING</a:t>
+              <a:t>RUNPOD DEPLOYMENT</a:t>
             </a:r>
           </a:p>
         </p:txBody>
@@ -7998,7 +5790,7 @@
           <a:noFill/>
         </p:spPr>
         <p:txBody>
-          <a:bodyPr wrap="square" lIns="0" tIns="0" rIns="0" bIns="0">
+          <a:bodyPr wrap="square" lIns="0" rIns="0" tIns="0" bIns="0">
             <a:spAutoFit/>
           </a:bodyPr>
           <a:lstStyle/>
@@ -8012,7 +5804,7 @@
               </a:defRPr>
             </a:pPr>
             <a:r>
-              <a:t>RunPod Platform Hosting Modes</a:t>
+              <a:t>RunPod Serverless Deployment Steps</a:t>
             </a:r>
           </a:p>
         </p:txBody>
@@ -8025,8 +5817,8 @@
         </p:nvSpPr>
         <p:spPr>
           <a:xfrm>
-            <a:off x="155321" y="1645920"/>
-            <a:ext cx="5440807" cy="4114800"/>
+            <a:off x="731520" y="1645920"/>
+            <a:ext cx="5120640" cy="4114800"/>
           </a:xfrm>
           <a:prstGeom prst="rect">
             <a:avLst/>
@@ -8055,7 +5847,7 @@
           </a:fontRef>
         </p:style>
         <p:txBody>
-          <a:bodyPr wrap="square" lIns="274320" tIns="274320" rIns="274320" bIns="274320" rtlCol="0" anchor="ctr"/>
+          <a:bodyPr rtlCol="0" anchor="ctr" wrap="square" lIns="274320" rIns="274320" tIns="274320" bIns="274320"/>
           <a:lstStyle/>
           <a:p>
             <a:pPr algn="ctr">
@@ -8070,120 +5862,91 @@
               </a:defRPr>
             </a:pPr>
             <a:r>
-              <a:rPr dirty="0"/>
-              <a:t>Method A: </a:t>
-            </a:r>
-            <a:r>
-              <a:rPr dirty="0" err="1"/>
-              <a:t>RunPod</a:t>
-            </a:r>
-            <a:r>
-              <a:rPr dirty="0"/>
-              <a:t> Pods (Persistent)</a:t>
-            </a:r>
-          </a:p>
-          <a:p>
-            <a:pPr>
-              <a:spcAft>
-                <a:spcPts val="800"/>
-              </a:spcAft>
-              <a:defRPr sz="1300">
-                <a:solidFill>
-                  <a:srgbClr val="F8FAFC"/>
-                </a:solidFill>
-                <a:latin typeface="Segoe UI"/>
-              </a:defRPr>
-            </a:pPr>
-            <a:r>
-              <a:rPr dirty="0"/>
-              <a:t>• Billing Model:</a:t>
-            </a:r>
-            <a:br>
-              <a:rPr dirty="0"/>
-            </a:br>
-            <a:r>
-              <a:rPr dirty="0"/>
-              <a:t>Rented compute instances charged hourly</a:t>
-            </a:r>
-          </a:p>
-          <a:p>
-            <a:pPr>
-              <a:spcAft>
-                <a:spcPts val="800"/>
-              </a:spcAft>
-              <a:defRPr sz="1300">
-                <a:solidFill>
-                  <a:srgbClr val="F8FAFC"/>
-                </a:solidFill>
-                <a:latin typeface="Segoe UI"/>
-              </a:defRPr>
-            </a:pPr>
-            <a:r>
-              <a:rPr dirty="0"/>
-              <a:t>• Storage System:</a:t>
-            </a:r>
-            <a:br>
-              <a:rPr dirty="0"/>
-            </a:br>
-            <a:r>
-              <a:rPr dirty="0"/>
-              <a:t>Persistent network volume mounted, preserving data on pod restart</a:t>
-            </a:r>
-          </a:p>
-          <a:p>
-            <a:pPr>
-              <a:spcAft>
-                <a:spcPts val="800"/>
-              </a:spcAft>
-              <a:defRPr sz="1300">
-                <a:solidFill>
-                  <a:srgbClr val="F8FAFC"/>
-                </a:solidFill>
-                <a:latin typeface="Segoe UI"/>
-              </a:defRPr>
-            </a:pPr>
-            <a:r>
-              <a:rPr dirty="0"/>
-              <a:t>• Access Modes:</a:t>
-            </a:r>
-            <a:br>
-              <a:rPr dirty="0"/>
-            </a:br>
-            <a:r>
-              <a:rPr dirty="0"/>
-              <a:t>Includes built-in </a:t>
-            </a:r>
-            <a:r>
-              <a:rPr dirty="0" err="1"/>
-              <a:t>Jupyter</a:t>
-            </a:r>
-            <a:r>
-              <a:rPr dirty="0"/>
-              <a:t> Lab and direct SSH terminals</a:t>
-            </a:r>
-          </a:p>
-          <a:p>
-            <a:pPr>
-              <a:spcAft>
-                <a:spcPts val="800"/>
-              </a:spcAft>
-              <a:defRPr sz="1300">
-                <a:solidFill>
-                  <a:srgbClr val="F8FAFC"/>
-                </a:solidFill>
-                <a:latin typeface="Segoe UI"/>
-              </a:defRPr>
-            </a:pPr>
-            <a:r>
-              <a:rPr dirty="0"/>
-              <a:t>• Best Used For:</a:t>
-            </a:r>
-            <a:br>
-              <a:rPr dirty="0"/>
-            </a:br>
-            <a:r>
-              <a:rPr dirty="0"/>
-              <a:t>Active model development, debugging, and continuous web dashboard hosting</a:t>
+              <a:t>1. API Handler (handler.py)</a:t>
+            </a:r>
+          </a:p>
+          <a:p>
+            <a:pPr>
+              <a:spcAft>
+                <a:spcPts val="800"/>
+              </a:spcAft>
+              <a:defRPr sz="1300">
+                <a:solidFill>
+                  <a:srgbClr val="F8FAFC"/>
+                </a:solidFill>
+                <a:latin typeface="Segoe UI"/>
+              </a:defRPr>
+            </a:pPr>
+            <a:r>
+              <a:t>• Add python script using runpod SDK</a:t>
+            </a:r>
+          </a:p>
+          <a:p>
+            <a:pPr>
+              <a:spcAft>
+                <a:spcPts val="800"/>
+              </a:spcAft>
+              <a:defRPr sz="1300">
+                <a:solidFill>
+                  <a:srgbClr val="F8FAFC"/>
+                </a:solidFill>
+                <a:latin typeface="Segoe UI"/>
+              </a:defRPr>
+            </a:pPr>
+            <a:r>
+              <a:t>• Load YOLO11 model weights globally at container start</a:t>
+            </a:r>
+          </a:p>
+          <a:p>
+            <a:pPr>
+              <a:spcAft>
+                <a:spcPts val="800"/>
+              </a:spcAft>
+              <a:defRPr sz="1300">
+                <a:solidFill>
+                  <a:srgbClr val="F8FAFC"/>
+                </a:solidFill>
+                <a:latin typeface="Segoe UI"/>
+              </a:defRPr>
+            </a:pPr>
+            <a:r>
+              <a:t>• Define inference method to extract request data</a:t>
+            </a:r>
+          </a:p>
+          <a:p>
+            <a:pPr>
+              <a:spcAft>
+                <a:spcPts val="800"/>
+              </a:spcAft>
+              <a:defRPr sz="1300">
+                <a:solidFill>
+                  <a:srgbClr val="F8FAFC"/>
+                </a:solidFill>
+                <a:latin typeface="Segoe UI"/>
+              </a:defRPr>
+            </a:pPr>
+            <a:r>
+              <a:t>• Receive base64 input image, decode, run inference, format output coordinates, and return results</a:t>
+            </a:r>
+          </a:p>
+          <a:p>
+            <a:pPr>
+              <a:spcAft>
+                <a:spcPts val="800"/>
+              </a:spcAft>
+              <a:defRPr sz="1300">
+                <a:solidFill>
+                  <a:srgbClr val="F8FAFC"/>
+                </a:solidFill>
+                <a:latin typeface="Segoe UI"/>
+              </a:defRPr>
+            </a:pPr>
+            <a:r>
+              <a:t>• Call worker agent:</a:t>
+            </a:r>
+            <a:br/>
+            <a:r>
+              <a:t>runpod.serverless.start({'handler': run_inference})</a:t>
             </a:r>
           </a:p>
         </p:txBody>
@@ -8196,8 +5959,8 @@
         </p:nvSpPr>
         <p:spPr>
           <a:xfrm>
-            <a:off x="5678424" y="1645920"/>
-            <a:ext cx="6355080" cy="4114800"/>
+            <a:off x="6309360" y="1645920"/>
+            <a:ext cx="5120640" cy="4114800"/>
           </a:xfrm>
           <a:prstGeom prst="rect">
             <a:avLst/>
@@ -8226,7 +5989,7 @@
           </a:fontRef>
         </p:style>
         <p:txBody>
-          <a:bodyPr wrap="square" lIns="274320" tIns="274320" rIns="274320" bIns="274320" rtlCol="0" anchor="ctr"/>
+          <a:bodyPr rtlCol="0" anchor="ctr" wrap="square" lIns="274320" rIns="274320" tIns="274320" bIns="274320"/>
           <a:lstStyle/>
           <a:p>
             <a:pPr algn="ctr">
@@ -8241,112 +6004,473 @@
               </a:defRPr>
             </a:pPr>
             <a:r>
-              <a:rPr dirty="0"/>
-              <a:t>Method B: </a:t>
-            </a:r>
-            <a:r>
-              <a:rPr dirty="0" err="1"/>
-              <a:t>RunPod</a:t>
-            </a:r>
-            <a:r>
-              <a:rPr dirty="0"/>
-              <a:t> Serverless (Autoscaling)</a:t>
-            </a:r>
-          </a:p>
-          <a:p>
-            <a:pPr>
-              <a:spcAft>
-                <a:spcPts val="800"/>
-              </a:spcAft>
-              <a:defRPr sz="1300">
-                <a:solidFill>
-                  <a:srgbClr val="F8FAFC"/>
-                </a:solidFill>
-                <a:latin typeface="Segoe UI"/>
-              </a:defRPr>
-            </a:pPr>
-            <a:r>
-              <a:rPr dirty="0"/>
-              <a:t>• Billing Model:</a:t>
-            </a:r>
-            <a:br>
-              <a:rPr dirty="0"/>
-            </a:br>
-            <a:r>
-              <a:rPr dirty="0"/>
-              <a:t>Charged per-second of execution time. Billed only when handling active queries</a:t>
-            </a:r>
-          </a:p>
-          <a:p>
-            <a:pPr>
-              <a:spcAft>
-                <a:spcPts val="800"/>
-              </a:spcAft>
-              <a:defRPr sz="1300">
-                <a:solidFill>
-                  <a:srgbClr val="F8FAFC"/>
-                </a:solidFill>
-                <a:latin typeface="Segoe UI"/>
-              </a:defRPr>
-            </a:pPr>
-            <a:r>
-              <a:rPr dirty="0"/>
-              <a:t>• Idle Cost:</a:t>
-            </a:r>
-            <a:br>
-              <a:rPr dirty="0"/>
-            </a:br>
-            <a:r>
-              <a:rPr dirty="0"/>
-              <a:t>$0.00 when system has no requests in queue</a:t>
-            </a:r>
-          </a:p>
-          <a:p>
-            <a:pPr>
-              <a:spcAft>
-                <a:spcPts val="800"/>
-              </a:spcAft>
-              <a:defRPr sz="1300">
-                <a:solidFill>
-                  <a:srgbClr val="F8FAFC"/>
-                </a:solidFill>
-                <a:latin typeface="Segoe UI"/>
-              </a:defRPr>
-            </a:pPr>
-            <a:r>
-              <a:rPr dirty="0"/>
-              <a:t>• Autoscaling:</a:t>
-            </a:r>
-            <a:br>
-              <a:rPr dirty="0"/>
-            </a:br>
-            <a:r>
-              <a:rPr dirty="0"/>
-              <a:t>Automatically scales workers from 0 to N based on traffic demand</a:t>
-            </a:r>
-          </a:p>
-          <a:p>
-            <a:pPr>
-              <a:spcAft>
-                <a:spcPts val="800"/>
-              </a:spcAft>
-              <a:defRPr sz="1300">
-                <a:solidFill>
-                  <a:srgbClr val="F8FAFC"/>
-                </a:solidFill>
-                <a:latin typeface="Segoe UI"/>
-              </a:defRPr>
-            </a:pPr>
-            <a:r>
-              <a:rPr dirty="0"/>
-              <a:t>• Best Used For:</a:t>
-            </a:r>
-            <a:br>
-              <a:rPr dirty="0"/>
-            </a:br>
-            <a:r>
-              <a:rPr dirty="0"/>
-              <a:t>High-volume production APIs and sporadic, cost-sensitive web backends</a:t>
+              <a:t>2. Container Pushing &amp; Configuration</a:t>
+            </a:r>
+          </a:p>
+          <a:p>
+            <a:pPr>
+              <a:spcAft>
+                <a:spcPts val="800"/>
+              </a:spcAft>
+              <a:defRPr sz="1300">
+                <a:solidFill>
+                  <a:srgbClr val="F8FAFC"/>
+                </a:solidFill>
+                <a:latin typeface="Segoe UI"/>
+              </a:defRPr>
+            </a:pPr>
+            <a:r>
+              <a:t>• Create Dockerfile with handler script and weights</a:t>
+            </a:r>
+          </a:p>
+          <a:p>
+            <a:pPr>
+              <a:spcAft>
+                <a:spcPts val="800"/>
+              </a:spcAft>
+              <a:defRPr sz="1300">
+                <a:solidFill>
+                  <a:srgbClr val="F8FAFC"/>
+                </a:solidFill>
+                <a:latin typeface="Segoe UI"/>
+              </a:defRPr>
+            </a:pPr>
+            <a:r>
+              <a:t>• Build and tag image: docker build -t username/yolo-app:latest .</a:t>
+            </a:r>
+          </a:p>
+          <a:p>
+            <a:pPr>
+              <a:spcAft>
+                <a:spcPts val="800"/>
+              </a:spcAft>
+              <a:defRPr sz="1300">
+                <a:solidFill>
+                  <a:srgbClr val="F8FAFC"/>
+                </a:solidFill>
+                <a:latin typeface="Segoe UI"/>
+              </a:defRPr>
+            </a:pPr>
+            <a:r>
+              <a:t>• Push image to Docker Hub registry</a:t>
+            </a:r>
+          </a:p>
+          <a:p>
+            <a:pPr>
+              <a:spcAft>
+                <a:spcPts val="800"/>
+              </a:spcAft>
+              <a:defRPr sz="1300">
+                <a:solidFill>
+                  <a:srgbClr val="F8FAFC"/>
+                </a:solidFill>
+                <a:latin typeface="Segoe UI"/>
+              </a:defRPr>
+            </a:pPr>
+            <a:r>
+              <a:t>• Create Serverless Endpoint in RunPod console using image name</a:t>
+            </a:r>
+          </a:p>
+          <a:p>
+            <a:pPr>
+              <a:spcAft>
+                <a:spcPts val="800"/>
+              </a:spcAft>
+              <a:defRPr sz="1300">
+                <a:solidFill>
+                  <a:srgbClr val="F8FAFC"/>
+                </a:solidFill>
+                <a:latin typeface="Segoe UI"/>
+              </a:defRPr>
+            </a:pPr>
+            <a:r>
+              <a:t>• Set scale boundaries: Min Workers: 0, Max Workers: 10</a:t>
+            </a:r>
+          </a:p>
+          <a:p>
+            <a:pPr>
+              <a:spcAft>
+                <a:spcPts val="800"/>
+              </a:spcAft>
+              <a:defRPr sz="1300">
+                <a:solidFill>
+                  <a:srgbClr val="F8FAFC"/>
+                </a:solidFill>
+                <a:latin typeface="Segoe UI"/>
+              </a:defRPr>
+            </a:pPr>
+            <a:r>
+              <a:t>• API calls are billed per second and autoscale instantly</a:t>
+            </a:r>
+          </a:p>
+        </p:txBody>
+      </p:sp>
+    </p:spTree>
+  </p:cSld>
+  <p:clrMapOvr>
+    <a:masterClrMapping/>
+  </p:clrMapOvr>
+</p:sld>
+</file>
+
+<file path=ppt/slides/slide9.xml><?xml version="1.0" encoding="utf-8"?>
+<p:sld xmlns:a="http://schemas.openxmlformats.org/drawingml/2006/main" xmlns:p="http://schemas.openxmlformats.org/presentationml/2006/main" xmlns:r="http://schemas.openxmlformats.org/officeDocument/2006/relationships">
+  <p:cSld>
+    <p:bg>
+      <p:bgPr>
+        <a:solidFill>
+          <a:srgbClr val="0F172A"/>
+        </a:solidFill>
+        <a:effectLst/>
+      </p:bgPr>
+    </p:bg>
+    <p:spTree>
+      <p:nvGrpSpPr>
+        <p:cNvPr id="1" name=""/>
+        <p:cNvGrpSpPr/>
+        <p:nvPr/>
+      </p:nvGrpSpPr>
+      <p:grpSpPr/>
+      <p:sp>
+        <p:nvSpPr>
+          <p:cNvPr id="2" name="TextBox 1"/>
+          <p:cNvSpPr txBox="1"/>
+          <p:nvPr/>
+        </p:nvSpPr>
+        <p:spPr>
+          <a:xfrm>
+            <a:off x="731520" y="365760"/>
+            <a:ext cx="10698480" cy="365760"/>
+          </a:xfrm>
+          <a:prstGeom prst="rect">
+            <a:avLst/>
+          </a:prstGeom>
+          <a:noFill/>
+        </p:spPr>
+        <p:txBody>
+          <a:bodyPr wrap="square" lIns="0" rIns="0" tIns="0" bIns="0">
+            <a:spAutoFit/>
+          </a:bodyPr>
+          <a:lstStyle/>
+          <a:p>
+            <a:pPr>
+              <a:defRPr sz="1000" b="1">
+                <a:solidFill>
+                  <a:srgbClr val="38BDF8"/>
+                </a:solidFill>
+                <a:latin typeface="Segoe UI"/>
+              </a:defRPr>
+            </a:pPr>
+            <a:r>
+              <a:t>MLOPS PIPELINES</a:t>
+            </a:r>
+          </a:p>
+        </p:txBody>
+      </p:sp>
+      <p:sp>
+        <p:nvSpPr>
+          <p:cNvPr id="3" name="TextBox 2"/>
+          <p:cNvSpPr txBox="1"/>
+          <p:nvPr/>
+        </p:nvSpPr>
+        <p:spPr>
+          <a:xfrm>
+            <a:off x="731520" y="640080"/>
+            <a:ext cx="10698480" cy="731520"/>
+          </a:xfrm>
+          <a:prstGeom prst="rect">
+            <a:avLst/>
+          </a:prstGeom>
+          <a:noFill/>
+        </p:spPr>
+        <p:txBody>
+          <a:bodyPr wrap="square" lIns="0" rIns="0" tIns="0" bIns="0">
+            <a:spAutoFit/>
+          </a:bodyPr>
+          <a:lstStyle/>
+          <a:p>
+            <a:pPr>
+              <a:defRPr sz="3200" b="1">
+                <a:solidFill>
+                  <a:srgbClr val="F8FAFC"/>
+                </a:solidFill>
+                <a:latin typeface="Segoe UI"/>
+              </a:defRPr>
+            </a:pPr>
+            <a:r>
+              <a:t>CI/CD Pipeline (Continuous Delivery for ML)</a:t>
+            </a:r>
+          </a:p>
+        </p:txBody>
+      </p:sp>
+      <p:sp>
+        <p:nvSpPr>
+          <p:cNvPr id="4" name="Rectangle 3"/>
+          <p:cNvSpPr/>
+          <p:nvPr/>
+        </p:nvSpPr>
+        <p:spPr>
+          <a:xfrm>
+            <a:off x="731520" y="1645920"/>
+            <a:ext cx="5120640" cy="4114800"/>
+          </a:xfrm>
+          <a:prstGeom prst="rect">
+            <a:avLst/>
+          </a:prstGeom>
+          <a:solidFill>
+            <a:srgbClr val="1E293B"/>
+          </a:solidFill>
+          <a:ln>
+            <a:solidFill>
+              <a:srgbClr val="1E293B"/>
+            </a:solidFill>
+          </a:ln>
+        </p:spPr>
+        <p:style>
+          <a:lnRef idx="1">
+            <a:schemeClr val="accent1"/>
+          </a:lnRef>
+          <a:fillRef idx="3">
+            <a:schemeClr val="accent1"/>
+          </a:fillRef>
+          <a:effectRef idx="2">
+            <a:schemeClr val="accent1"/>
+          </a:effectRef>
+          <a:fontRef idx="minor">
+            <a:schemeClr val="lt1"/>
+          </a:fontRef>
+        </p:style>
+        <p:txBody>
+          <a:bodyPr rtlCol="0" anchor="ctr" wrap="square" lIns="274320" rIns="274320" tIns="274320" bIns="274320"/>
+          <a:lstStyle/>
+          <a:p>
+            <a:pPr algn="ctr">
+              <a:spcAft>
+                <a:spcPts val="1400"/>
+              </a:spcAft>
+              <a:defRPr sz="1800" b="1">
+                <a:solidFill>
+                  <a:srgbClr val="38BDF8"/>
+                </a:solidFill>
+                <a:latin typeface="Segoe UI"/>
+              </a:defRPr>
+            </a:pPr>
+            <a:r>
+              <a:t>CI/CD Workflow Steps</a:t>
+            </a:r>
+          </a:p>
+          <a:p>
+            <a:pPr>
+              <a:spcAft>
+                <a:spcPts val="800"/>
+              </a:spcAft>
+              <a:defRPr sz="1300">
+                <a:solidFill>
+                  <a:srgbClr val="F8FAFC"/>
+                </a:solidFill>
+                <a:latin typeface="Segoe UI"/>
+              </a:defRPr>
+            </a:pPr>
+            <a:r>
+              <a:t>• 1. Push Code:</a:t>
+            </a:r>
+            <a:br/>
+            <a:r>
+              <a:t>Developer pushes edits or references to Git</a:t>
+            </a:r>
+          </a:p>
+          <a:p>
+            <a:pPr>
+              <a:spcAft>
+                <a:spcPts val="800"/>
+              </a:spcAft>
+              <a:defRPr sz="1300">
+                <a:solidFill>
+                  <a:srgbClr val="F8FAFC"/>
+                </a:solidFill>
+                <a:latin typeface="Segoe UI"/>
+              </a:defRPr>
+            </a:pPr>
+            <a:r>
+              <a:t>• 2. Test Model:</a:t>
+            </a:r>
+            <a:br/>
+            <a:r>
+              <a:t>CI runs python tests verifying model weights load successfully</a:t>
+            </a:r>
+          </a:p>
+          <a:p>
+            <a:pPr>
+              <a:spcAft>
+                <a:spcPts val="800"/>
+              </a:spcAft>
+              <a:defRPr sz="1300">
+                <a:solidFill>
+                  <a:srgbClr val="F8FAFC"/>
+                </a:solidFill>
+                <a:latin typeface="Segoe UI"/>
+              </a:defRPr>
+            </a:pPr>
+            <a:r>
+              <a:t>• 3. Package Container:</a:t>
+            </a:r>
+            <a:br/>
+            <a:r>
+              <a:t>Builds the Docker image caching the weights file</a:t>
+            </a:r>
+          </a:p>
+          <a:p>
+            <a:pPr>
+              <a:spcAft>
+                <a:spcPts val="800"/>
+              </a:spcAft>
+              <a:defRPr sz="1300">
+                <a:solidFill>
+                  <a:srgbClr val="F8FAFC"/>
+                </a:solidFill>
+                <a:latin typeface="Segoe UI"/>
+              </a:defRPr>
+            </a:pPr>
+            <a:r>
+              <a:t>• 4. Publish Image:</a:t>
+            </a:r>
+            <a:br/>
+            <a:r>
+              <a:t>Docker image is pushed to central Docker Hub</a:t>
+            </a:r>
+          </a:p>
+          <a:p>
+            <a:pPr>
+              <a:spcAft>
+                <a:spcPts val="800"/>
+              </a:spcAft>
+              <a:defRPr sz="1300">
+                <a:solidFill>
+                  <a:srgbClr val="F8FAFC"/>
+                </a:solidFill>
+                <a:latin typeface="Segoe UI"/>
+              </a:defRPr>
+            </a:pPr>
+            <a:r>
+              <a:t>• 5. Deploy Server:</a:t>
+            </a:r>
+            <a:br/>
+            <a:r>
+              <a:t>SSH command triggers target server to pull and restart</a:t>
+            </a:r>
+          </a:p>
+        </p:txBody>
+      </p:sp>
+      <p:sp>
+        <p:nvSpPr>
+          <p:cNvPr id="5" name="Rectangle 4"/>
+          <p:cNvSpPr/>
+          <p:nvPr/>
+        </p:nvSpPr>
+        <p:spPr>
+          <a:xfrm>
+            <a:off x="6309360" y="1645920"/>
+            <a:ext cx="5120640" cy="4114800"/>
+          </a:xfrm>
+          <a:prstGeom prst="rect">
+            <a:avLst/>
+          </a:prstGeom>
+          <a:solidFill>
+            <a:srgbClr val="1E293B"/>
+          </a:solidFill>
+          <a:ln>
+            <a:solidFill>
+              <a:srgbClr val="1E293B"/>
+            </a:solidFill>
+          </a:ln>
+        </p:spPr>
+        <p:style>
+          <a:lnRef idx="1">
+            <a:schemeClr val="accent1"/>
+          </a:lnRef>
+          <a:fillRef idx="3">
+            <a:schemeClr val="accent1"/>
+          </a:fillRef>
+          <a:effectRef idx="2">
+            <a:schemeClr val="accent1"/>
+          </a:effectRef>
+          <a:fontRef idx="minor">
+            <a:schemeClr val="lt1"/>
+          </a:fontRef>
+        </p:style>
+        <p:txBody>
+          <a:bodyPr rtlCol="0" anchor="ctr" wrap="square" lIns="274320" rIns="274320" tIns="274320" bIns="274320"/>
+          <a:lstStyle/>
+          <a:p>
+            <a:pPr algn="ctr">
+              <a:spcAft>
+                <a:spcPts val="1400"/>
+              </a:spcAft>
+              <a:defRPr sz="1800" b="1">
+                <a:solidFill>
+                  <a:srgbClr val="38BDF8"/>
+                </a:solidFill>
+                <a:latin typeface="Segoe UI"/>
+              </a:defRPr>
+            </a:pPr>
+            <a:r>
+              <a:t>Handling Model Weights</a:t>
+            </a:r>
+          </a:p>
+          <a:p>
+            <a:pPr>
+              <a:spcAft>
+                <a:spcPts val="800"/>
+              </a:spcAft>
+              <a:defRPr sz="1300">
+                <a:solidFill>
+                  <a:srgbClr val="F8FAFC"/>
+                </a:solidFill>
+                <a:latin typeface="Segoe UI"/>
+              </a:defRPr>
+            </a:pPr>
+            <a:r>
+              <a:t>• Weights files (.pt) are too large for GitHub repositories</a:t>
+            </a:r>
+          </a:p>
+          <a:p>
+            <a:pPr>
+              <a:spcAft>
+                <a:spcPts val="800"/>
+              </a:spcAft>
+              <a:defRPr sz="1300">
+                <a:solidFill>
+                  <a:srgbClr val="F8FAFC"/>
+                </a:solidFill>
+                <a:latin typeface="Segoe UI"/>
+              </a:defRPr>
+            </a:pPr>
+            <a:r>
+              <a:t>• S3 / DVC integration:</a:t>
+            </a:r>
+            <a:br/>
+            <a:r>
+              <a:t>Store weights files in S3 or Google Cloud storage</a:t>
+            </a:r>
+          </a:p>
+          <a:p>
+            <a:pPr>
+              <a:spcAft>
+                <a:spcPts val="800"/>
+              </a:spcAft>
+              <a:defRPr sz="1300">
+                <a:solidFill>
+                  <a:srgbClr val="F8FAFC"/>
+                </a:solidFill>
+                <a:latin typeface="Segoe UI"/>
+              </a:defRPr>
+            </a:pPr>
+            <a:r>
+              <a:t>• Build-time fetch:</a:t>
+            </a:r>
+            <a:br/>
+            <a:r>
+              <a:t>The GitHub Actions build runner downloads the weights from storage and bakes them directly into the Docker image before pushing to the hub.</a:t>
             </a:r>
           </a:p>
         </p:txBody>

--- a/AI-Deployment/AI_Deployment_Guide.pptx
+++ b/AI-Deployment/AI_Deployment_Guide.pptx
@@ -15,6 +15,7 @@
     <p:sldId id="263" r:id="rId14"/>
     <p:sldId id="264" r:id="rId15"/>
     <p:sldId id="265" r:id="rId16"/>
+    <p:sldId id="266" r:id="rId17"/>
   </p:sldIdLst>
   <p:sldSz cx="12188952" cy="6858000" type="screen4x3"/>
   <p:notesSz cx="6858000" cy="9144000"/>
@@ -3113,8 +3114,8 @@
         </p:nvSpPr>
         <p:spPr>
           <a:xfrm>
-            <a:off x="914400" y="2011680"/>
-            <a:ext cx="10332720" cy="2286000"/>
+            <a:off x="914400" y="1920240"/>
+            <a:ext cx="10332720" cy="2743200"/>
           </a:xfrm>
           <a:prstGeom prst="rect">
             <a:avLst/>
@@ -3131,7 +3132,7 @@
               <a:spcAft>
                 <a:spcPts val="1000"/>
               </a:spcAft>
-              <a:defRPr sz="1400" b="1">
+              <a:defRPr sz="1300" b="1">
                 <a:solidFill>
                   <a:srgbClr val="38BDF8"/>
                 </a:solidFill>
@@ -3139,12 +3140,12 @@
               </a:defRPr>
             </a:pPr>
             <a:r>
-              <a:t>PRODUCTION PIPELINE FOR PRE-TRAINED MODELS</a:t>
-            </a:r>
-          </a:p>
-          <a:p>
-            <a:pPr>
-              <a:defRPr sz="5400" b="1">
+              <a:t>PRODUCTION PIPELINE FOR PRE-TRAINED AI MODELS</a:t>
+            </a:r>
+          </a:p>
+          <a:p>
+            <a:pPr>
+              <a:defRPr sz="5200" b="1">
                 <a:solidFill>
                   <a:srgbClr val="F8FAFC"/>
                 </a:solidFill>
@@ -3158,9 +3159,9 @@
           <a:p>
             <a:pPr>
               <a:spcBef>
-                <a:spcPts val="500"/>
+                <a:spcPts val="600"/>
               </a:spcBef>
-              <a:defRPr sz="2800">
+              <a:defRPr sz="2200">
                 <a:solidFill>
                   <a:srgbClr val="94A3B8"/>
                 </a:solidFill>
@@ -3168,7 +3169,7 @@
               </a:defRPr>
             </a:pPr>
             <a:r>
-              <a:t>2-Step Guide: Standard Server &amp; RunPod Cloud GPUs</a:t>
+              <a:t>Ubuntu Server  |  RunPod Cloud GPU  |  CI/CD Automation</a:t>
             </a:r>
           </a:p>
         </p:txBody>
@@ -3181,8 +3182,8 @@
         </p:nvSpPr>
         <p:spPr>
           <a:xfrm>
-            <a:off x="914400" y="5303520"/>
-            <a:ext cx="10332720" cy="731520"/>
+            <a:off x="914400" y="5394960"/>
+            <a:ext cx="10332720" cy="548640"/>
           </a:xfrm>
           <a:prstGeom prst="rect">
             <a:avLst/>
@@ -3204,7 +3205,7 @@
               </a:defRPr>
             </a:pPr>
             <a:r>
-              <a:t>One Unified Dockerfile Setup • Clean Deployment Workspace</a:t>
+              <a:t>Streamlit + YOLO11  |  One Unified Dockerfile  |  Nginx + SSL</a:t>
             </a:r>
           </a:p>
         </p:txBody>
@@ -3243,7 +3244,7 @@
         </p:nvSpPr>
         <p:spPr>
           <a:xfrm>
-            <a:off x="731520" y="365760"/>
+            <a:off x="731520" y="320040"/>
             <a:ext cx="10698480" cy="365760"/>
           </a:xfrm>
           <a:prstGeom prst="rect">
@@ -3252,7 +3253,7 @@
           <a:noFill/>
         </p:spPr>
         <p:txBody>
-          <a:bodyPr wrap="square" lIns="0" rIns="0" tIns="0" bIns="0">
+          <a:bodyPr wrap="none">
             <a:spAutoFit/>
           </a:bodyPr>
           <a:lstStyle/>
@@ -3266,7 +3267,7 @@
               </a:defRPr>
             </a:pPr>
             <a:r>
-              <a:t>DEPLOYMENT SUMMARY</a:t>
+              <a:t>MLOPS : GITHUB ACTIONS</a:t>
             </a:r>
           </a:p>
         </p:txBody>
@@ -3279,8 +3280,8 @@
         </p:nvSpPr>
         <p:spPr>
           <a:xfrm>
-            <a:off x="731520" y="640080"/>
-            <a:ext cx="10698480" cy="731520"/>
+            <a:off x="731520" y="658368"/>
+            <a:ext cx="10698480" cy="777240"/>
           </a:xfrm>
           <a:prstGeom prst="rect">
             <a:avLst/>
@@ -3288,21 +3289,21 @@
           <a:noFill/>
         </p:spPr>
         <p:txBody>
-          <a:bodyPr wrap="square" lIns="0" rIns="0" tIns="0" bIns="0">
+          <a:bodyPr wrap="square">
             <a:spAutoFit/>
           </a:bodyPr>
           <a:lstStyle/>
           <a:p>
             <a:pPr>
-              <a:defRPr sz="3200" b="1">
-                <a:solidFill>
-                  <a:srgbClr val="F8FAFC"/>
-                </a:solidFill>
-                <a:latin typeface="Segoe UI"/>
-              </a:defRPr>
-            </a:pPr>
-            <a:r>
-              <a:t>Summary Recommendations</a:t>
+              <a:defRPr sz="3100" b="1">
+                <a:solidFill>
+                  <a:srgbClr val="F8FAFC"/>
+                </a:solidFill>
+                <a:latin typeface="Segoe UI"/>
+              </a:defRPr>
+            </a:pPr>
+            <a:r>
+              <a:t>CI/CD Pipeline for AI Deployment</a:t>
             </a:r>
           </a:p>
         </p:txBody>
@@ -3315,8 +3316,8 @@
         </p:nvSpPr>
         <p:spPr>
           <a:xfrm>
-            <a:off x="731520" y="1645920"/>
-            <a:ext cx="5120640" cy="4114800"/>
+            <a:off x="731520" y="1600200"/>
+            <a:ext cx="5120640" cy="4297680"/>
           </a:xfrm>
           <a:prstGeom prst="rect">
             <a:avLst/>
@@ -3345,14 +3346,14 @@
           </a:fontRef>
         </p:style>
         <p:txBody>
-          <a:bodyPr rtlCol="0" anchor="ctr" wrap="square" lIns="274320" rIns="274320" tIns="274320" bIns="274320"/>
+          <a:bodyPr rtlCol="0" anchor="ctr" wrap="square" lIns="256032" rIns="256032" tIns="201168" bIns="201168"/>
           <a:lstStyle/>
           <a:p>
             <a:pPr algn="ctr">
               <a:spcAft>
-                <a:spcPts val="1400"/>
-              </a:spcAft>
-              <a:defRPr sz="1800" b="1">
+                <a:spcPts val="1200"/>
+              </a:spcAft>
+              <a:defRPr sz="1700" b="1">
                 <a:solidFill>
                   <a:srgbClr val="38BDF8"/>
                 </a:solidFill>
@@ -3360,67 +3361,87 @@
               </a:defRPr>
             </a:pPr>
             <a:r>
-              <a:t>Deployment Quick Guide</a:t>
-            </a:r>
-          </a:p>
-          <a:p>
-            <a:pPr>
-              <a:spcAft>
-                <a:spcPts val="800"/>
-              </a:spcAft>
-              <a:defRPr sz="1300">
-                <a:solidFill>
-                  <a:srgbClr val="F8FAFC"/>
-                </a:solidFill>
-                <a:latin typeface="Segoe UI"/>
-              </a:defRPr>
-            </a:pPr>
-            <a:r>
-              <a:t>• Ubuntu Server (GPU):</a:t>
-            </a:r>
-            <a:br/>
-            <a:r>
-              <a:t>Standard deployment path. Constant cost, high performance, full system settings control.</a:t>
-            </a:r>
-          </a:p>
-          <a:p>
-            <a:pPr>
-              <a:spcAft>
-                <a:spcPts val="800"/>
-              </a:spcAft>
-              <a:defRPr sz="1300">
-                <a:solidFill>
-                  <a:srgbClr val="F8FAFC"/>
-                </a:solidFill>
-                <a:latin typeface="Segoe UI"/>
-              </a:defRPr>
-            </a:pPr>
-            <a:r>
-              <a:t>• Ubuntu Server (CPU):</a:t>
-            </a:r>
-            <a:br/>
-            <a:r>
-              <a:t>Low traffic fallback. Simplest config (just comment out compose deploy block), cheap instance sizes.</a:t>
-            </a:r>
-          </a:p>
-          <a:p>
-            <a:pPr>
-              <a:spcAft>
-                <a:spcPts val="800"/>
-              </a:spcAft>
-              <a:defRPr sz="1300">
-                <a:solidFill>
-                  <a:srgbClr val="F8FAFC"/>
-                </a:solidFill>
-                <a:latin typeface="Segoe UI"/>
-              </a:defRPr>
-            </a:pPr>
-            <a:r>
-              <a:t>• RunPod Pods:</a:t>
-            </a:r>
-            <a:br/>
-            <a:r>
-              <a:t>Great for immediate UI dashboard testing and active model prototyping.</a:t>
+              <a:t>3-Job GitHub Actions Workflow</a:t>
+            </a:r>
+          </a:p>
+          <a:p>
+            <a:pPr>
+              <a:spcAft>
+                <a:spcPts val="700"/>
+              </a:spcAft>
+              <a:defRPr sz="1250">
+                <a:solidFill>
+                  <a:srgbClr val="F8FAFC"/>
+                </a:solidFill>
+                <a:latin typeface="Segoe UI"/>
+              </a:defRPr>
+            </a:pPr>
+            <a:r>
+              <a:t>• Trigger: push to main branch</a:t>
+            </a:r>
+          </a:p>
+          <a:p>
+            <a:pPr>
+              <a:spcAft>
+                <a:spcPts val="700"/>
+              </a:spcAft>
+              <a:defRPr sz="1250">
+                <a:solidFill>
+                  <a:srgbClr val="F8FAFC"/>
+                </a:solidFill>
+                <a:latin typeface="Segoe UI"/>
+              </a:defRPr>
+            </a:pPr>
+            <a:r>
+              <a:t>• Job 1 - Test Model: load weights, run pytest</a:t>
+            </a:r>
+          </a:p>
+          <a:p>
+            <a:pPr>
+              <a:spcAft>
+                <a:spcPts val="700"/>
+              </a:spcAft>
+              <a:defRPr sz="1250">
+                <a:solidFill>
+                  <a:srgbClr val="F8FAFC"/>
+                </a:solidFill>
+                <a:latin typeface="Segoe UI"/>
+              </a:defRPr>
+            </a:pPr>
+            <a:r>
+              <a:t>• Job 2 - Build Docker: login, build, push to Docker Hub</a:t>
+            </a:r>
+          </a:p>
+          <a:p>
+            <a:pPr>
+              <a:spcAft>
+                <a:spcPts val="700"/>
+              </a:spcAft>
+              <a:defRPr sz="1250">
+                <a:solidFill>
+                  <a:srgbClr val="F8FAFC"/>
+                </a:solidFill>
+                <a:latin typeface="Segoe UI"/>
+              </a:defRPr>
+            </a:pPr>
+            <a:r>
+              <a:t>• Job 3 - Deploy via SSH: git pull, docker compose pull, restart</a:t>
+            </a:r>
+          </a:p>
+          <a:p>
+            <a:pPr>
+              <a:spcAft>
+                <a:spcPts val="700"/>
+              </a:spcAft>
+              <a:defRPr sz="1250">
+                <a:solidFill>
+                  <a:srgbClr val="F8FAFC"/>
+                </a:solidFill>
+                <a:latin typeface="Segoe UI"/>
+              </a:defRPr>
+            </a:pPr>
+            <a:r>
+              <a:t>• File: .github/workflows/deploy.yml</a:t>
             </a:r>
           </a:p>
         </p:txBody>
@@ -3433,8 +3454,8 @@
         </p:nvSpPr>
         <p:spPr>
           <a:xfrm>
-            <a:off x="6309360" y="1645920"/>
-            <a:ext cx="5120640" cy="4114800"/>
+            <a:off x="6309360" y="1600200"/>
+            <a:ext cx="5120640" cy="4297680"/>
           </a:xfrm>
           <a:prstGeom prst="rect">
             <a:avLst/>
@@ -3463,82 +3484,102 @@
           </a:fontRef>
         </p:style>
         <p:txBody>
-          <a:bodyPr rtlCol="0" anchor="ctr" wrap="square" lIns="274320" rIns="274320" tIns="274320" bIns="274320"/>
+          <a:bodyPr rtlCol="0" anchor="ctr" wrap="square" lIns="256032" rIns="256032" tIns="201168" bIns="201168"/>
           <a:lstStyle/>
           <a:p>
             <a:pPr algn="ctr">
               <a:spcAft>
-                <a:spcPts val="1400"/>
-              </a:spcAft>
-              <a:defRPr sz="1800" b="1">
-                <a:solidFill>
-                  <a:srgbClr val="22C55E"/>
-                </a:solidFill>
-                <a:latin typeface="Segoe UI"/>
-              </a:defRPr>
-            </a:pPr>
-            <a:r>
-              <a:t>Summary of Docker benefits</a:t>
-            </a:r>
-          </a:p>
-          <a:p>
-            <a:pPr>
-              <a:spcAft>
-                <a:spcPts val="800"/>
-              </a:spcAft>
-              <a:defRPr sz="1300">
-                <a:solidFill>
-                  <a:srgbClr val="F8FAFC"/>
-                </a:solidFill>
-                <a:latin typeface="Segoe UI"/>
-              </a:defRPr>
-            </a:pPr>
-            <a:r>
-              <a:t>• Single Configuration File:</a:t>
-            </a:r>
-            <a:br/>
-            <a:r>
-              <a:t>Same Dockerfile packages PyTorch, code, and weights for both AWS and RunPod.</a:t>
-            </a:r>
-          </a:p>
-          <a:p>
-            <a:pPr>
-              <a:spcAft>
-                <a:spcPts val="800"/>
-              </a:spcAft>
-              <a:defRPr sz="1300">
-                <a:solidFill>
-                  <a:srgbClr val="F8FAFC"/>
-                </a:solidFill>
-                <a:latin typeface="Segoe UI"/>
-              </a:defRPr>
-            </a:pPr>
-            <a:r>
-              <a:t>• Portability:</a:t>
-            </a:r>
-            <a:br/>
-            <a:r>
-              <a:t>No dependency conflicts between local test environments and cloud instances.</a:t>
-            </a:r>
-          </a:p>
-          <a:p>
-            <a:pPr>
-              <a:spcAft>
-                <a:spcPts val="800"/>
-              </a:spcAft>
-              <a:defRPr sz="1300">
-                <a:solidFill>
-                  <a:srgbClr val="F8FAFC"/>
-                </a:solidFill>
-                <a:latin typeface="Segoe UI"/>
-              </a:defRPr>
-            </a:pPr>
-            <a:r>
-              <a:t>• Speed:</a:t>
-            </a:r>
-            <a:br/>
-            <a:r>
-              <a:t>Containers launch or re-compile in seconds, keeping production updates safe and simple.</a:t>
+                <a:spcPts val="1200"/>
+              </a:spcAft>
+              <a:defRPr sz="1700" b="1">
+                <a:solidFill>
+                  <a:srgbClr val="38BDF8"/>
+                </a:solidFill>
+                <a:latin typeface="Segoe UI"/>
+              </a:defRPr>
+            </a:pPr>
+            <a:r>
+              <a:t>Model Weights Best Practices</a:t>
+            </a:r>
+          </a:p>
+          <a:p>
+            <a:pPr>
+              <a:spcAft>
+                <a:spcPts val="700"/>
+              </a:spcAft>
+              <a:defRPr sz="1250">
+                <a:solidFill>
+                  <a:srgbClr val="F8FAFC"/>
+                </a:solidFill>
+                <a:latin typeface="Segoe UI"/>
+              </a:defRPr>
+            </a:pPr>
+            <a:r>
+              <a:t>• Never push .pt files to GitHub (too large, slow Git)</a:t>
+            </a:r>
+          </a:p>
+          <a:p>
+            <a:pPr>
+              <a:spcAft>
+                <a:spcPts val="700"/>
+              </a:spcAft>
+              <a:defRPr sz="1250">
+                <a:solidFill>
+                  <a:srgbClr val="F8FAFC"/>
+                </a:solidFill>
+                <a:latin typeface="Segoe UI"/>
+              </a:defRPr>
+            </a:pPr>
+            <a:r>
+              <a:t>• Store weights in AWS S3 or Google Cloud Storage</a:t>
+            </a:r>
+          </a:p>
+          <a:p>
+            <a:pPr>
+              <a:spcAft>
+                <a:spcPts val="700"/>
+              </a:spcAft>
+              <a:defRPr sz="1250">
+                <a:solidFill>
+                  <a:srgbClr val="F8FAFC"/>
+                </a:solidFill>
+                <a:latin typeface="Segoe UI"/>
+              </a:defRPr>
+            </a:pPr>
+            <a:r>
+              <a:t>• In CI, runner downloads weights at build time</a:t>
+            </a:r>
+          </a:p>
+          <a:p>
+            <a:pPr>
+              <a:spcAft>
+                <a:spcPts val="700"/>
+              </a:spcAft>
+              <a:defRPr sz="1250">
+                <a:solidFill>
+                  <a:srgbClr val="F8FAFC"/>
+                </a:solidFill>
+                <a:latin typeface="Segoe UI"/>
+              </a:defRPr>
+            </a:pPr>
+            <a:r>
+              <a:t>• Weights are baked into the Docker image before pushing</a:t>
+            </a:r>
+          </a:p>
+          <a:p>
+            <a:pPr>
+              <a:spcAft>
+                <a:spcPts val="700"/>
+              </a:spcAft>
+              <a:defRPr sz="1250">
+                <a:solidFill>
+                  <a:srgbClr val="F8FAFC"/>
+                </a:solidFill>
+                <a:latin typeface="Segoe UI"/>
+              </a:defRPr>
+            </a:pPr>
+            <a:r>
+              <a:t>• Secrets managed via GitHub Repository Secrets</a:t>
             </a:r>
           </a:p>
         </p:txBody>
@@ -3551,7 +3592,7 @@
 </p:sld>
 </file>
 
-<file path=ppt/slides/slide2.xml><?xml version="1.0" encoding="utf-8"?>
+<file path=ppt/slides/slide11.xml><?xml version="1.0" encoding="utf-8"?>
 <p:sld xmlns:a="http://schemas.openxmlformats.org/drawingml/2006/main" xmlns:p="http://schemas.openxmlformats.org/presentationml/2006/main" xmlns:r="http://schemas.openxmlformats.org/officeDocument/2006/relationships">
   <p:cSld>
     <p:bg>
@@ -3577,7 +3618,7 @@
         </p:nvSpPr>
         <p:spPr>
           <a:xfrm>
-            <a:off x="731520" y="365760"/>
+            <a:off x="731520" y="320040"/>
             <a:ext cx="10698480" cy="365760"/>
           </a:xfrm>
           <a:prstGeom prst="rect">
@@ -3586,7 +3627,7 @@
           <a:noFill/>
         </p:spPr>
         <p:txBody>
-          <a:bodyPr wrap="square" lIns="0" rIns="0" tIns="0" bIns="0">
+          <a:bodyPr wrap="none">
             <a:spAutoFit/>
           </a:bodyPr>
           <a:lstStyle/>
@@ -3600,7 +3641,7 @@
               </a:defRPr>
             </a:pPr>
             <a:r>
-              <a:t>DOCKER AI DEPLOYMENT</a:t>
+              <a:t>SUMMARY</a:t>
             </a:r>
           </a:p>
         </p:txBody>
@@ -3613,8 +3654,8 @@
         </p:nvSpPr>
         <p:spPr>
           <a:xfrm>
-            <a:off x="731520" y="640080"/>
-            <a:ext cx="10698480" cy="731520"/>
+            <a:off x="731520" y="658368"/>
+            <a:ext cx="10698480" cy="777240"/>
           </a:xfrm>
           <a:prstGeom prst="rect">
             <a:avLst/>
@@ -3622,21 +3663,21 @@
           <a:noFill/>
         </p:spPr>
         <p:txBody>
-          <a:bodyPr wrap="square" lIns="0" rIns="0" tIns="0" bIns="0">
+          <a:bodyPr wrap="square">
             <a:spAutoFit/>
           </a:bodyPr>
           <a:lstStyle/>
           <a:p>
             <a:pPr>
-              <a:defRPr sz="3200" b="1">
-                <a:solidFill>
-                  <a:srgbClr val="F8FAFC"/>
-                </a:solidFill>
-                <a:latin typeface="Segoe UI"/>
-              </a:defRPr>
-            </a:pPr>
-            <a:r>
-              <a:t>Presentation Agenda</a:t>
+              <a:defRPr sz="3100" b="1">
+                <a:solidFill>
+                  <a:srgbClr val="F8FAFC"/>
+                </a:solidFill>
+                <a:latin typeface="Segoe UI"/>
+              </a:defRPr>
+            </a:pPr>
+            <a:r>
+              <a:t>Deployment Decision Matrix</a:t>
             </a:r>
           </a:p>
         </p:txBody>
@@ -3649,8 +3690,8 @@
         </p:nvSpPr>
         <p:spPr>
           <a:xfrm>
-            <a:off x="731520" y="1645920"/>
-            <a:ext cx="5120640" cy="4114800"/>
+            <a:off x="731520" y="1600200"/>
+            <a:ext cx="5120640" cy="4297680"/>
           </a:xfrm>
           <a:prstGeom prst="rect">
             <a:avLst/>
@@ -3679,14 +3720,14 @@
           </a:fontRef>
         </p:style>
         <p:txBody>
-          <a:bodyPr rtlCol="0" anchor="ctr" wrap="square" lIns="274320" rIns="274320" tIns="274320" bIns="274320"/>
+          <a:bodyPr rtlCol="0" anchor="ctr" wrap="square" lIns="256032" rIns="256032" tIns="201168" bIns="201168"/>
           <a:lstStyle/>
           <a:p>
             <a:pPr algn="ctr">
               <a:spcAft>
-                <a:spcPts val="1400"/>
-              </a:spcAft>
-              <a:defRPr sz="1800" b="1">
+                <a:spcPts val="1200"/>
+              </a:spcAft>
+              <a:defRPr sz="1700" b="1">
                 <a:solidFill>
                   <a:srgbClr val="38BDF8"/>
                 </a:solidFill>
@@ -3694,87 +3735,87 @@
               </a:defRPr>
             </a:pPr>
             <a:r>
-              <a:t>Step 1: Deploy on a Server</a:t>
-            </a:r>
-          </a:p>
-          <a:p>
-            <a:pPr>
-              <a:spcAft>
-                <a:spcPts val="800"/>
-              </a:spcAft>
-              <a:defRPr sz="1300">
-                <a:solidFill>
-                  <a:srgbClr val="F8FAFC"/>
-                </a:solidFill>
-                <a:latin typeface="Segoe UI"/>
-              </a:defRPr>
-            </a:pPr>
-            <a:r>
-              <a:t>• Hardware check: GPU vs CPU hosts</a:t>
-            </a:r>
-          </a:p>
-          <a:p>
-            <a:pPr>
-              <a:spcAft>
-                <a:spcPts val="800"/>
-              </a:spcAft>
-              <a:defRPr sz="1300">
-                <a:solidFill>
-                  <a:srgbClr val="F8FAFC"/>
-                </a:solidFill>
-                <a:latin typeface="Segoe UI"/>
-              </a:defRPr>
-            </a:pPr>
-            <a:r>
-              <a:t>• NVIDIA Container Toolkit installation</a:t>
-            </a:r>
-          </a:p>
-          <a:p>
-            <a:pPr>
-              <a:spcAft>
-                <a:spcPts val="800"/>
-              </a:spcAft>
-              <a:defRPr sz="1300">
-                <a:solidFill>
-                  <a:srgbClr val="F8FAFC"/>
-                </a:solidFill>
-                <a:latin typeface="Segoe UI"/>
-              </a:defRPr>
-            </a:pPr>
-            <a:r>
-              <a:t>• Unified Dockerfile &amp; docker-compose configurations</a:t>
-            </a:r>
-          </a:p>
-          <a:p>
-            <a:pPr>
-              <a:spcAft>
-                <a:spcPts val="800"/>
-              </a:spcAft>
-              <a:defRPr sz="1300">
-                <a:solidFill>
-                  <a:srgbClr val="F8FAFC"/>
-                </a:solidFill>
-                <a:latin typeface="Segoe UI"/>
-              </a:defRPr>
-            </a:pPr>
-            <a:r>
-              <a:t>• Running the stack with container commands</a:t>
-            </a:r>
-          </a:p>
-          <a:p>
-            <a:pPr>
-              <a:spcAft>
-                <a:spcPts val="800"/>
-              </a:spcAft>
-              <a:defRPr sz="1300">
-                <a:solidFill>
-                  <a:srgbClr val="F8FAFC"/>
-                </a:solidFill>
-                <a:latin typeface="Segoe UI"/>
-              </a:defRPr>
-            </a:pPr>
-            <a:r>
-              <a:t>• Automatic CPU-only fallback options</a:t>
+              <a:t>Speed &amp; Cost Comparison</a:t>
+            </a:r>
+          </a:p>
+          <a:p>
+            <a:pPr>
+              <a:spcAft>
+                <a:spcPts val="700"/>
+              </a:spcAft>
+              <a:defRPr sz="1250">
+                <a:solidFill>
+                  <a:srgbClr val="F8FAFC"/>
+                </a:solidFill>
+                <a:latin typeface="Segoe UI"/>
+              </a:defRPr>
+            </a:pPr>
+            <a:r>
+              <a:t>• GPU Server: ~10-30ms / image  |  $40-$100+/mo fixed</a:t>
+            </a:r>
+          </a:p>
+          <a:p>
+            <a:pPr>
+              <a:spcAft>
+                <a:spcPts val="700"/>
+              </a:spcAft>
+              <a:defRPr sz="1250">
+                <a:solidFill>
+                  <a:srgbClr val="F8FAFC"/>
+                </a:solidFill>
+                <a:latin typeface="Segoe UI"/>
+              </a:defRPr>
+            </a:pPr>
+            <a:r>
+              <a:t>• CPU Server: ~100-300ms / image  |  $5-$20/mo fixed</a:t>
+            </a:r>
+          </a:p>
+          <a:p>
+            <a:pPr>
+              <a:spcAft>
+                <a:spcPts val="700"/>
+              </a:spcAft>
+              <a:defRPr sz="1250">
+                <a:solidFill>
+                  <a:srgbClr val="F8FAFC"/>
+                </a:solidFill>
+                <a:latin typeface="Segoe UI"/>
+              </a:defRPr>
+            </a:pPr>
+            <a:r>
+              <a:t>• RunPod Pods: ~10-30ms  |  hourly billing</a:t>
+            </a:r>
+          </a:p>
+          <a:p>
+            <a:pPr>
+              <a:spcAft>
+                <a:spcPts val="700"/>
+              </a:spcAft>
+              <a:defRPr sz="1250">
+                <a:solidFill>
+                  <a:srgbClr val="F8FAFC"/>
+                </a:solidFill>
+                <a:latin typeface="Segoe UI"/>
+              </a:defRPr>
+            </a:pPr>
+            <a:r>
+              <a:t>• RunPod Serverless: ~10-30ms  |  pay-per-second, $0 idle</a:t>
+            </a:r>
+          </a:p>
+          <a:p>
+            <a:pPr>
+              <a:spcAft>
+                <a:spcPts val="700"/>
+              </a:spcAft>
+              <a:defRPr sz="1250">
+                <a:solidFill>
+                  <a:srgbClr val="F8FAFC"/>
+                </a:solidFill>
+                <a:latin typeface="Segoe UI"/>
+              </a:defRPr>
+            </a:pPr>
+            <a:r>
+              <a:t>• All methods use one unified Dockerfile</a:t>
             </a:r>
           </a:p>
         </p:txBody>
@@ -3787,8 +3828,8 @@
         </p:nvSpPr>
         <p:spPr>
           <a:xfrm>
-            <a:off x="6309360" y="1645920"/>
-            <a:ext cx="5120640" cy="4114800"/>
+            <a:off x="6309360" y="1600200"/>
+            <a:ext cx="5120640" cy="4297680"/>
           </a:xfrm>
           <a:prstGeom prst="rect">
             <a:avLst/>
@@ -3817,86 +3858,102 @@
           </a:fontRef>
         </p:style>
         <p:txBody>
-          <a:bodyPr rtlCol="0" anchor="ctr" wrap="square" lIns="274320" rIns="274320" tIns="274320" bIns="274320"/>
+          <a:bodyPr rtlCol="0" anchor="ctr" wrap="square" lIns="256032" rIns="256032" tIns="201168" bIns="201168"/>
           <a:lstStyle/>
           <a:p>
             <a:pPr algn="ctr">
               <a:spcAft>
-                <a:spcPts val="1400"/>
-              </a:spcAft>
-              <a:defRPr sz="1800" b="1">
-                <a:solidFill>
-                  <a:srgbClr val="38BDF8"/>
-                </a:solidFill>
-                <a:latin typeface="Segoe UI"/>
-              </a:defRPr>
-            </a:pPr>
-            <a:r>
-              <a:t>Step 2: Deploy on RunPod &amp; CI/CD</a:t>
-            </a:r>
-          </a:p>
-          <a:p>
-            <a:pPr>
-              <a:spcAft>
-                <a:spcPts val="800"/>
-              </a:spcAft>
-              <a:defRPr sz="1300">
-                <a:solidFill>
-                  <a:srgbClr val="F8FAFC"/>
-                </a:solidFill>
-                <a:latin typeface="Segoe UI"/>
-              </a:defRPr>
-            </a:pPr>
-            <a:r>
-              <a:t>• Interactive workspaces using RunPod Pods</a:t>
-            </a:r>
-          </a:p>
-          <a:p>
-            <a:pPr>
-              <a:spcAft>
-                <a:spcPts val="800"/>
-              </a:spcAft>
-              <a:defRPr sz="1300">
-                <a:solidFill>
-                  <a:srgbClr val="F8FAFC"/>
-                </a:solidFill>
-                <a:latin typeface="Segoe UI"/>
-              </a:defRPr>
-            </a:pPr>
-            <a:r>
-              <a:t>• On-Demand autoscaling with RunPod Serverless API</a:t>
-            </a:r>
-          </a:p>
-          <a:p>
-            <a:pPr>
-              <a:spcAft>
-                <a:spcPts val="800"/>
-              </a:spcAft>
-              <a:defRPr sz="1300">
-                <a:solidFill>
-                  <a:srgbClr val="F8FAFC"/>
-                </a:solidFill>
-                <a:latin typeface="Segoe UI"/>
-              </a:defRPr>
-            </a:pPr>
-            <a:r>
-              <a:t>• Building and deploying handler container wrappers</a:t>
-            </a:r>
-          </a:p>
-          <a:p>
-            <a:pPr>
-              <a:spcAft>
-                <a:spcPts val="800"/>
-              </a:spcAft>
-              <a:defRPr sz="1300">
-                <a:solidFill>
-                  <a:srgbClr val="F8FAFC"/>
-                </a:solidFill>
-                <a:latin typeface="Segoe UI"/>
-              </a:defRPr>
-            </a:pPr>
-            <a:r>
-              <a:t>• CI/CD workflow: Continuous Delivery for ML (CD4ML)</a:t>
+                <a:spcPts val="1200"/>
+              </a:spcAft>
+              <a:defRPr sz="1700" b="1">
+                <a:solidFill>
+                  <a:srgbClr val="22C55E"/>
+                </a:solidFill>
+                <a:latin typeface="Segoe UI"/>
+              </a:defRPr>
+            </a:pPr>
+            <a:r>
+              <a:t>Which Option Should You Choose?</a:t>
+            </a:r>
+          </a:p>
+          <a:p>
+            <a:pPr>
+              <a:spcAft>
+                <a:spcPts val="700"/>
+              </a:spcAft>
+              <a:defRPr sz="1250">
+                <a:solidFill>
+                  <a:srgbClr val="F8FAFC"/>
+                </a:solidFill>
+                <a:latin typeface="Segoe UI"/>
+              </a:defRPr>
+            </a:pPr>
+            <a:r>
+              <a:t>• Low traffic / budget: CPU Server ($5-$20/mo)</a:t>
+            </a:r>
+          </a:p>
+          <a:p>
+            <a:pPr>
+              <a:spcAft>
+                <a:spcPts val="700"/>
+              </a:spcAft>
+              <a:defRPr sz="1250">
+                <a:solidFill>
+                  <a:srgbClr val="F8FAFC"/>
+                </a:solidFill>
+                <a:latin typeface="Segoe UI"/>
+              </a:defRPr>
+            </a:pPr>
+            <a:r>
+              <a:t>• High traffic / live video: GPU Server or RunPod Pods</a:t>
+            </a:r>
+          </a:p>
+          <a:p>
+            <a:pPr>
+              <a:spcAft>
+                <a:spcPts val="700"/>
+              </a:spcAft>
+              <a:defRPr sz="1250">
+                <a:solidFill>
+                  <a:srgbClr val="F8FAFC"/>
+                </a:solidFill>
+                <a:latin typeface="Segoe UI"/>
+              </a:defRPr>
+            </a:pPr>
+            <a:r>
+              <a:t>• Variable API traffic: RunPod Serverless (most cost-efficient)</a:t>
+            </a:r>
+          </a:p>
+          <a:p>
+            <a:pPr>
+              <a:spcAft>
+                <a:spcPts val="700"/>
+              </a:spcAft>
+              <a:defRPr sz="1250">
+                <a:solidFill>
+                  <a:srgbClr val="F8FAFC"/>
+                </a:solidFill>
+                <a:latin typeface="Segoe UI"/>
+              </a:defRPr>
+            </a:pPr>
+            <a:r>
+              <a:t>• Active development: RunPod Pods (fast iteration)</a:t>
+            </a:r>
+          </a:p>
+          <a:p>
+            <a:pPr>
+              <a:spcAft>
+                <a:spcPts val="700"/>
+              </a:spcAft>
+              <a:defRPr sz="1250">
+                <a:solidFill>
+                  <a:srgbClr val="F8FAFC"/>
+                </a:solidFill>
+                <a:latin typeface="Segoe UI"/>
+              </a:defRPr>
+            </a:pPr>
+            <a:r>
+              <a:t>• Team workflow: add CI/CD from day one</a:t>
             </a:r>
           </a:p>
         </p:txBody>
@@ -3909,7 +3966,7 @@
 </p:sld>
 </file>
 
-<file path=ppt/slides/slide3.xml><?xml version="1.0" encoding="utf-8"?>
+<file path=ppt/slides/slide2.xml><?xml version="1.0" encoding="utf-8"?>
 <p:sld xmlns:a="http://schemas.openxmlformats.org/drawingml/2006/main" xmlns:p="http://schemas.openxmlformats.org/presentationml/2006/main" xmlns:r="http://schemas.openxmlformats.org/officeDocument/2006/relationships">
   <p:cSld>
     <p:bg>
@@ -3935,7 +3992,7 @@
         </p:nvSpPr>
         <p:spPr>
           <a:xfrm>
-            <a:off x="731520" y="365760"/>
+            <a:off x="731520" y="320040"/>
             <a:ext cx="10698480" cy="365760"/>
           </a:xfrm>
           <a:prstGeom prst="rect">
@@ -3944,7 +4001,7 @@
           <a:noFill/>
         </p:spPr>
         <p:txBody>
-          <a:bodyPr wrap="square" lIns="0" rIns="0" tIns="0" bIns="0">
+          <a:bodyPr wrap="none">
             <a:spAutoFit/>
           </a:bodyPr>
           <a:lstStyle/>
@@ -3958,7 +4015,7 @@
               </a:defRPr>
             </a:pPr>
             <a:r>
-              <a:t>CONFIGURATION</a:t>
+              <a:t>DOCKER AI DEPLOYMENT</a:t>
             </a:r>
           </a:p>
         </p:txBody>
@@ -3971,8 +4028,8 @@
         </p:nvSpPr>
         <p:spPr>
           <a:xfrm>
-            <a:off x="731520" y="640080"/>
-            <a:ext cx="10698480" cy="731520"/>
+            <a:off x="731520" y="658368"/>
+            <a:ext cx="10698480" cy="777240"/>
           </a:xfrm>
           <a:prstGeom prst="rect">
             <a:avLst/>
@@ -3980,21 +4037,21 @@
           <a:noFill/>
         </p:spPr>
         <p:txBody>
-          <a:bodyPr wrap="square" lIns="0" rIns="0" tIns="0" bIns="0">
+          <a:bodyPr wrap="square">
             <a:spAutoFit/>
           </a:bodyPr>
           <a:lstStyle/>
           <a:p>
             <a:pPr>
-              <a:defRPr sz="3200" b="1">
-                <a:solidFill>
-                  <a:srgbClr val="F8FAFC"/>
-                </a:solidFill>
-                <a:latin typeface="Segoe UI"/>
-              </a:defRPr>
-            </a:pPr>
-            <a:r>
-              <a:t>Unified Dockerfile</a:t>
+              <a:defRPr sz="3100" b="1">
+                <a:solidFill>
+                  <a:srgbClr val="F8FAFC"/>
+                </a:solidFill>
+                <a:latin typeface="Segoe UI"/>
+              </a:defRPr>
+            </a:pPr>
+            <a:r>
+              <a:t>Presentation Agenda</a:t>
             </a:r>
           </a:p>
         </p:txBody>
@@ -4007,8 +4064,8 @@
         </p:nvSpPr>
         <p:spPr>
           <a:xfrm>
-            <a:off x="731520" y="1645920"/>
-            <a:ext cx="5120640" cy="4114800"/>
+            <a:off x="731520" y="1600200"/>
+            <a:ext cx="5120640" cy="4297680"/>
           </a:xfrm>
           <a:prstGeom prst="rect">
             <a:avLst/>
@@ -4037,14 +4094,14 @@
           </a:fontRef>
         </p:style>
         <p:txBody>
-          <a:bodyPr rtlCol="0" anchor="ctr" wrap="square" lIns="274320" rIns="274320" tIns="274320" bIns="274320"/>
+          <a:bodyPr rtlCol="0" anchor="ctr" wrap="square" lIns="256032" rIns="256032" tIns="201168" bIns="201168"/>
           <a:lstStyle/>
           <a:p>
             <a:pPr algn="ctr">
               <a:spcAft>
-                <a:spcPts val="1400"/>
-              </a:spcAft>
-              <a:defRPr sz="1800" b="1">
+                <a:spcPts val="1200"/>
+              </a:spcAft>
+              <a:defRPr sz="1700" b="1">
                 <a:solidFill>
                   <a:srgbClr val="38BDF8"/>
                 </a:solidFill>
@@ -4052,75 +4109,103 @@
               </a:defRPr>
             </a:pPr>
             <a:r>
-              <a:t>Key Image Features</a:t>
-            </a:r>
-          </a:p>
-          <a:p>
-            <a:pPr>
-              <a:spcAft>
-                <a:spcPts val="800"/>
-              </a:spcAft>
-              <a:defRPr sz="1300">
-                <a:solidFill>
-                  <a:srgbClr val="F8FAFC"/>
-                </a:solidFill>
-                <a:latin typeface="Segoe UI"/>
-              </a:defRPr>
-            </a:pPr>
-            <a:r>
-              <a:t>• Base Image:</a:t>
-            </a:r>
-            <a:br/>
-            <a:r>
-              <a:t>FROM pytorch/pytorch:2.1.0-cuda12.1-cudnn8-runtime</a:t>
-            </a:r>
-          </a:p>
-          <a:p>
-            <a:pPr>
-              <a:spcAft>
-                <a:spcPts val="800"/>
-              </a:spcAft>
-              <a:defRPr sz="1300">
-                <a:solidFill>
-                  <a:srgbClr val="F8FAFC"/>
-                </a:solidFill>
-                <a:latin typeface="Segoe UI"/>
-              </a:defRPr>
-            </a:pPr>
-            <a:r>
-              <a:t>• Built-in CUDA support which automatically runs on GPU when present, and seamlessly falls back to CPU on standard servers</a:t>
-            </a:r>
-          </a:p>
-          <a:p>
-            <a:pPr>
-              <a:spcAft>
-                <a:spcPts val="800"/>
-              </a:spcAft>
-              <a:defRPr sz="1300">
-                <a:solidFill>
-                  <a:srgbClr val="F8FAFC"/>
-                </a:solidFill>
-                <a:latin typeface="Segoe UI"/>
-              </a:defRPr>
-            </a:pPr>
-            <a:r>
-              <a:t>• Pre-installed system requirements for OpenCV graphics layers</a:t>
-            </a:r>
-          </a:p>
-          <a:p>
-            <a:pPr>
-              <a:spcAft>
-                <a:spcPts val="800"/>
-              </a:spcAft>
-              <a:defRPr sz="1300">
-                <a:solidFill>
-                  <a:srgbClr val="F8FAFC"/>
-                </a:solidFill>
-                <a:latin typeface="Segoe UI"/>
-              </a:defRPr>
-            </a:pPr>
-            <a:r>
-              <a:t>• Installs python dependencies via PIP cache mechanisms</a:t>
+              <a:t>Option 1 - Self-Hosted Server</a:t>
+            </a:r>
+          </a:p>
+          <a:p>
+            <a:pPr>
+              <a:spcAft>
+                <a:spcPts val="700"/>
+              </a:spcAft>
+              <a:defRPr sz="1250">
+                <a:solidFill>
+                  <a:srgbClr val="F8FAFC"/>
+                </a:solidFill>
+                <a:latin typeface="Segoe UI"/>
+              </a:defRPr>
+            </a:pPr>
+            <a:r>
+              <a:t>• Step 1: Install Docker (GPU or CPU path)</a:t>
+            </a:r>
+          </a:p>
+          <a:p>
+            <a:pPr>
+              <a:spcAft>
+                <a:spcPts val="700"/>
+              </a:spcAft>
+              <a:defRPr sz="1250">
+                <a:solidFill>
+                  <a:srgbClr val="F8FAFC"/>
+                </a:solidFill>
+                <a:latin typeface="Segoe UI"/>
+              </a:defRPr>
+            </a:pPr>
+            <a:r>
+              <a:t>• Step 2: Build &amp; launch app with Docker Compose</a:t>
+            </a:r>
+          </a:p>
+          <a:p>
+            <a:pPr>
+              <a:spcAft>
+                <a:spcPts val="700"/>
+              </a:spcAft>
+              <a:defRPr sz="1250">
+                <a:solidFill>
+                  <a:srgbClr val="F8FAFC"/>
+                </a:solidFill>
+                <a:latin typeface="Segoe UI"/>
+              </a:defRPr>
+            </a:pPr>
+            <a:r>
+              <a:t>• Step 3: Install Nginx &amp; Certbot</a:t>
+            </a:r>
+          </a:p>
+          <a:p>
+            <a:pPr>
+              <a:spcAft>
+                <a:spcPts val="700"/>
+              </a:spcAft>
+              <a:defRPr sz="1250">
+                <a:solidFill>
+                  <a:srgbClr val="F8FAFC"/>
+                </a:solidFill>
+                <a:latin typeface="Segoe UI"/>
+              </a:defRPr>
+            </a:pPr>
+            <a:r>
+              <a:t>• Step 4: Create Nginx server block config</a:t>
+            </a:r>
+          </a:p>
+          <a:p>
+            <a:pPr>
+              <a:spcAft>
+                <a:spcPts val="700"/>
+              </a:spcAft>
+              <a:defRPr sz="1250">
+                <a:solidFill>
+                  <a:srgbClr val="F8FAFC"/>
+                </a:solidFill>
+                <a:latin typeface="Segoe UI"/>
+              </a:defRPr>
+            </a:pPr>
+            <a:r>
+              <a:t>• Step 5: Enable site &amp; restart Nginx</a:t>
+            </a:r>
+          </a:p>
+          <a:p>
+            <a:pPr>
+              <a:spcAft>
+                <a:spcPts val="700"/>
+              </a:spcAft>
+              <a:defRPr sz="1250">
+                <a:solidFill>
+                  <a:srgbClr val="F8FAFC"/>
+                </a:solidFill>
+                <a:latin typeface="Segoe UI"/>
+              </a:defRPr>
+            </a:pPr>
+            <a:r>
+              <a:t>• Step 6: Issue SSL certificate with Certbot</a:t>
             </a:r>
           </a:p>
         </p:txBody>
@@ -4133,8 +4218,8 @@
         </p:nvSpPr>
         <p:spPr>
           <a:xfrm>
-            <a:off x="6309360" y="1645920"/>
-            <a:ext cx="5120640" cy="4114800"/>
+            <a:off x="6309360" y="1600200"/>
+            <a:ext cx="5120640" cy="4297680"/>
           </a:xfrm>
           <a:prstGeom prst="rect">
             <a:avLst/>
@@ -4163,14 +4248,14 @@
           </a:fontRef>
         </p:style>
         <p:txBody>
-          <a:bodyPr rtlCol="0" anchor="ctr" wrap="square" lIns="274320" rIns="274320" tIns="274320" bIns="274320"/>
+          <a:bodyPr rtlCol="0" anchor="ctr" wrap="square" lIns="256032" rIns="256032" tIns="201168" bIns="201168"/>
           <a:lstStyle/>
           <a:p>
             <a:pPr algn="ctr">
               <a:spcAft>
-                <a:spcPts val="1400"/>
-              </a:spcAft>
-              <a:defRPr sz="1800" b="1">
+                <a:spcPts val="1200"/>
+              </a:spcAft>
+              <a:defRPr sz="1700" b="1">
                 <a:solidFill>
                   <a:srgbClr val="38BDF8"/>
                 </a:solidFill>
@@ -4178,103 +4263,87 @@
               </a:defRPr>
             </a:pPr>
             <a:r>
-              <a:t>Dockerfile Code Layout</a:t>
-            </a:r>
-          </a:p>
-          <a:p>
-            <a:pPr>
-              <a:spcAft>
-                <a:spcPts val="800"/>
-              </a:spcAft>
-              <a:defRPr sz="1300">
-                <a:solidFill>
-                  <a:srgbClr val="F8FAFC"/>
-                </a:solidFill>
-                <a:latin typeface="Segoe UI"/>
-              </a:defRPr>
-            </a:pPr>
-            <a:r>
-              <a:t>• Sets non-interactive environment headers</a:t>
-            </a:r>
-          </a:p>
-          <a:p>
-            <a:pPr>
-              <a:spcAft>
-                <a:spcPts val="800"/>
-              </a:spcAft>
-              <a:defRPr sz="1300">
-                <a:solidFill>
-                  <a:srgbClr val="F8FAFC"/>
-                </a:solidFill>
-                <a:latin typeface="Segoe UI"/>
-              </a:defRPr>
-            </a:pPr>
-            <a:r>
-              <a:t>• Installs mesa-glx and glib2.0 libraries</a:t>
-            </a:r>
-          </a:p>
-          <a:p>
-            <a:pPr>
-              <a:spcAft>
-                <a:spcPts val="800"/>
-              </a:spcAft>
-              <a:defRPr sz="1300">
-                <a:solidFill>
-                  <a:srgbClr val="F8FAFC"/>
-                </a:solidFill>
-                <a:latin typeface="Segoe UI"/>
-              </a:defRPr>
-            </a:pPr>
-            <a:r>
-              <a:t>• Copies pip requirements.txt file and installs packages</a:t>
-            </a:r>
-          </a:p>
-          <a:p>
-            <a:pPr>
-              <a:spcAft>
-                <a:spcPts val="800"/>
-              </a:spcAft>
-              <a:defRPr sz="1300">
-                <a:solidFill>
-                  <a:srgbClr val="F8FAFC"/>
-                </a:solidFill>
-                <a:latin typeface="Segoe UI"/>
-              </a:defRPr>
-            </a:pPr>
-            <a:r>
-              <a:t>• Copies local model/best.pt weights and pothole.py source</a:t>
-            </a:r>
-          </a:p>
-          <a:p>
-            <a:pPr>
-              <a:spcAft>
-                <a:spcPts val="800"/>
-              </a:spcAft>
-              <a:defRPr sz="1300">
-                <a:solidFill>
-                  <a:srgbClr val="F8FAFC"/>
-                </a:solidFill>
-                <a:latin typeface="Segoe UI"/>
-              </a:defRPr>
-            </a:pPr>
-            <a:r>
-              <a:t>• Exposes default Streamlit web client port: EXPOSE 8501</a:t>
-            </a:r>
-          </a:p>
-          <a:p>
-            <a:pPr>
-              <a:spcAft>
-                <a:spcPts val="800"/>
-              </a:spcAft>
-              <a:defRPr sz="1300">
-                <a:solidFill>
-                  <a:srgbClr val="F8FAFC"/>
-                </a:solidFill>
-                <a:latin typeface="Segoe UI"/>
-              </a:defRPr>
-            </a:pPr>
-            <a:r>
-              <a:t>• Launches application using CMD streamlit commands</a:t>
+              <a:t>Option 2 - RunPod + CI/CD</a:t>
+            </a:r>
+          </a:p>
+          <a:p>
+            <a:pPr>
+              <a:spcAft>
+                <a:spcPts val="700"/>
+              </a:spcAft>
+              <a:defRPr sz="1250">
+                <a:solidFill>
+                  <a:srgbClr val="F8FAFC"/>
+                </a:solidFill>
+                <a:latin typeface="Segoe UI"/>
+              </a:defRPr>
+            </a:pPr>
+            <a:r>
+              <a:t>• RunPod Pods: Persistent GPU workspaces</a:t>
+            </a:r>
+          </a:p>
+          <a:p>
+            <a:pPr>
+              <a:spcAft>
+                <a:spcPts val="700"/>
+              </a:spcAft>
+              <a:defRPr sz="1250">
+                <a:solidFill>
+                  <a:srgbClr val="F8FAFC"/>
+                </a:solidFill>
+                <a:latin typeface="Segoe UI"/>
+              </a:defRPr>
+            </a:pPr>
+            <a:r>
+              <a:t>• RunPod Serverless: Autoscaling pay-per-second API</a:t>
+            </a:r>
+          </a:p>
+          <a:p>
+            <a:pPr>
+              <a:spcAft>
+                <a:spcPts val="700"/>
+              </a:spcAft>
+              <a:defRPr sz="1250">
+                <a:solidFill>
+                  <a:srgbClr val="F8FAFC"/>
+                </a:solidFill>
+                <a:latin typeface="Segoe UI"/>
+              </a:defRPr>
+            </a:pPr>
+            <a:r>
+              <a:t>• CI/CD: GitHub Actions workflow for ML</a:t>
+            </a:r>
+          </a:p>
+          <a:p>
+            <a:pPr>
+              <a:spcAft>
+                <a:spcPts val="700"/>
+              </a:spcAft>
+              <a:defRPr sz="1250">
+                <a:solidFill>
+                  <a:srgbClr val="F8FAFC"/>
+                </a:solidFill>
+                <a:latin typeface="Segoe UI"/>
+              </a:defRPr>
+            </a:pPr>
+            <a:r>
+              <a:t>• Model weight storage best practices</a:t>
+            </a:r>
+          </a:p>
+          <a:p>
+            <a:pPr>
+              <a:spcAft>
+                <a:spcPts val="700"/>
+              </a:spcAft>
+              <a:defRPr sz="1250">
+                <a:solidFill>
+                  <a:srgbClr val="F8FAFC"/>
+                </a:solidFill>
+                <a:latin typeface="Segoe UI"/>
+              </a:defRPr>
+            </a:pPr>
+            <a:r>
+              <a:t>• Automated build, test, and deploy pipeline</a:t>
             </a:r>
           </a:p>
         </p:txBody>
@@ -4287,7 +4356,7 @@
 </p:sld>
 </file>
 
-<file path=ppt/slides/slide4.xml><?xml version="1.0" encoding="utf-8"?>
+<file path=ppt/slides/slide3.xml><?xml version="1.0" encoding="utf-8"?>
 <p:sld xmlns:a="http://schemas.openxmlformats.org/drawingml/2006/main" xmlns:p="http://schemas.openxmlformats.org/presentationml/2006/main" xmlns:r="http://schemas.openxmlformats.org/officeDocument/2006/relationships">
   <p:cSld>
     <p:bg>
@@ -4313,7 +4382,7 @@
         </p:nvSpPr>
         <p:spPr>
           <a:xfrm>
-            <a:off x="731520" y="365760"/>
+            <a:off x="731520" y="320040"/>
             <a:ext cx="10698480" cy="365760"/>
           </a:xfrm>
           <a:prstGeom prst="rect">
@@ -4322,7 +4391,7 @@
           <a:noFill/>
         </p:spPr>
         <p:txBody>
-          <a:bodyPr wrap="square" lIns="0" rIns="0" tIns="0" bIns="0">
+          <a:bodyPr wrap="none">
             <a:spAutoFit/>
           </a:bodyPr>
           <a:lstStyle/>
@@ -4349,8 +4418,8 @@
         </p:nvSpPr>
         <p:spPr>
           <a:xfrm>
-            <a:off x="731520" y="640080"/>
-            <a:ext cx="10698480" cy="731520"/>
+            <a:off x="731520" y="658368"/>
+            <a:ext cx="10698480" cy="777240"/>
           </a:xfrm>
           <a:prstGeom prst="rect">
             <a:avLst/>
@@ -4358,21 +4427,21 @@
           <a:noFill/>
         </p:spPr>
         <p:txBody>
-          <a:bodyPr wrap="square" lIns="0" rIns="0" tIns="0" bIns="0">
+          <a:bodyPr wrap="square">
             <a:spAutoFit/>
           </a:bodyPr>
           <a:lstStyle/>
           <a:p>
             <a:pPr>
-              <a:defRPr sz="3200" b="1">
-                <a:solidFill>
-                  <a:srgbClr val="F8FAFC"/>
-                </a:solidFill>
-                <a:latin typeface="Segoe UI"/>
-              </a:defRPr>
-            </a:pPr>
-            <a:r>
-              <a:t>Unified docker-compose.yml</a:t>
+              <a:defRPr sz="3100" b="1">
+                <a:solidFill>
+                  <a:srgbClr val="F8FAFC"/>
+                </a:solidFill>
+                <a:latin typeface="Segoe UI"/>
+              </a:defRPr>
+            </a:pPr>
+            <a:r>
+              <a:t>Unified Configuration Files</a:t>
             </a:r>
           </a:p>
         </p:txBody>
@@ -4385,8 +4454,8 @@
         </p:nvSpPr>
         <p:spPr>
           <a:xfrm>
-            <a:off x="731520" y="1645920"/>
-            <a:ext cx="5120640" cy="4114800"/>
+            <a:off x="731520" y="1600200"/>
+            <a:ext cx="5120640" cy="4297680"/>
           </a:xfrm>
           <a:prstGeom prst="rect">
             <a:avLst/>
@@ -4415,14 +4484,14 @@
           </a:fontRef>
         </p:style>
         <p:txBody>
-          <a:bodyPr rtlCol="0" anchor="ctr" wrap="square" lIns="274320" rIns="274320" tIns="274320" bIns="274320"/>
+          <a:bodyPr rtlCol="0" anchor="ctr" wrap="square" lIns="256032" rIns="256032" tIns="201168" bIns="201168"/>
           <a:lstStyle/>
           <a:p>
             <a:pPr algn="ctr">
               <a:spcAft>
-                <a:spcPts val="1400"/>
-              </a:spcAft>
-              <a:defRPr sz="1800" b="1">
+                <a:spcPts val="1200"/>
+              </a:spcAft>
+              <a:defRPr sz="1700" b="1">
                 <a:solidFill>
                   <a:srgbClr val="38BDF8"/>
                 </a:solidFill>
@@ -4430,87 +4499,103 @@
               </a:defRPr>
             </a:pPr>
             <a:r>
-              <a:t>Unified Compose Configuration</a:t>
-            </a:r>
-          </a:p>
-          <a:p>
-            <a:pPr>
-              <a:spcAft>
-                <a:spcPts val="800"/>
-              </a:spcAft>
-              <a:defRPr sz="1300">
-                <a:solidFill>
-                  <a:srgbClr val="F8FAFC"/>
-                </a:solidFill>
-                <a:latin typeface="Segoe UI"/>
-              </a:defRPr>
-            </a:pPr>
-            <a:r>
-              <a:t>• Build Settings:</a:t>
-            </a:r>
-            <a:br/>
-            <a:r>
-              <a:t>Points directly to current directory and local Dockerfile</a:t>
-            </a:r>
-          </a:p>
-          <a:p>
-            <a:pPr>
-              <a:spcAft>
-                <a:spcPts val="800"/>
-              </a:spcAft>
-              <a:defRPr sz="1300">
-                <a:solidFill>
-                  <a:srgbClr val="F8FAFC"/>
-                </a:solidFill>
-                <a:latin typeface="Segoe UI"/>
-              </a:defRPr>
-            </a:pPr>
-            <a:r>
-              <a:t>• Port Mapping:</a:t>
-            </a:r>
-            <a:br/>
-            <a:r>
-              <a:t>Maps container port 8501 to host port 8501</a:t>
-            </a:r>
-          </a:p>
-          <a:p>
-            <a:pPr>
-              <a:spcAft>
-                <a:spcPts val="800"/>
-              </a:spcAft>
-              <a:defRPr sz="1300">
-                <a:solidFill>
-                  <a:srgbClr val="F8FAFC"/>
-                </a:solidFill>
-                <a:latin typeface="Segoe UI"/>
-              </a:defRPr>
-            </a:pPr>
-            <a:r>
-              <a:t>• Restart Policy:</a:t>
-            </a:r>
-            <a:br/>
-            <a:r>
-              <a:t>Set to 'always' for crash recovery and boot starts</a:t>
-            </a:r>
-          </a:p>
-          <a:p>
-            <a:pPr>
-              <a:spcAft>
-                <a:spcPts val="800"/>
-              </a:spcAft>
-              <a:defRPr sz="1300">
-                <a:solidFill>
-                  <a:srgbClr val="F8FAFC"/>
-                </a:solidFill>
-                <a:latin typeface="Segoe UI"/>
-              </a:defRPr>
-            </a:pPr>
-            <a:r>
-              <a:t>• Memory optimizations:</a:t>
-            </a:r>
-            <a:br/>
-            <a:r>
-              <a:t>Defines PYTORCH_CUDA_ALLOC_CONF settings</a:t>
+              <a:t>Dockerfile Highlights</a:t>
+            </a:r>
+          </a:p>
+          <a:p>
+            <a:pPr>
+              <a:spcAft>
+                <a:spcPts val="700"/>
+              </a:spcAft>
+              <a:defRPr sz="1250">
+                <a:solidFill>
+                  <a:srgbClr val="F8FAFC"/>
+                </a:solidFill>
+                <a:latin typeface="Segoe UI"/>
+              </a:defRPr>
+            </a:pPr>
+            <a:r>
+              <a:t>• Base: pytorch/pytorch:2.1.0-cuda12.1-cudnn8-runtime</a:t>
+            </a:r>
+          </a:p>
+          <a:p>
+            <a:pPr>
+              <a:spcAft>
+                <a:spcPts val="700"/>
+              </a:spcAft>
+              <a:defRPr sz="1250">
+                <a:solidFill>
+                  <a:srgbClr val="F8FAFC"/>
+                </a:solidFill>
+                <a:latin typeface="Segoe UI"/>
+              </a:defRPr>
+            </a:pPr>
+            <a:r>
+              <a:t>• Works on GPU servers AND CPU-only servers</a:t>
+            </a:r>
+          </a:p>
+          <a:p>
+            <a:pPr>
+              <a:spcAft>
+                <a:spcPts val="700"/>
+              </a:spcAft>
+              <a:defRPr sz="1250">
+                <a:solidFill>
+                  <a:srgbClr val="F8FAFC"/>
+                </a:solidFill>
+                <a:latin typeface="Segoe UI"/>
+              </a:defRPr>
+            </a:pPr>
+            <a:r>
+              <a:t>• Installs mesa-glx + glib2.0 for OpenCV support</a:t>
+            </a:r>
+          </a:p>
+          <a:p>
+            <a:pPr>
+              <a:spcAft>
+                <a:spcPts val="700"/>
+              </a:spcAft>
+              <a:defRPr sz="1250">
+                <a:solidFill>
+                  <a:srgbClr val="F8FAFC"/>
+                </a:solidFill>
+                <a:latin typeface="Segoe UI"/>
+              </a:defRPr>
+            </a:pPr>
+            <a:r>
+              <a:t>• pip install from requirements.txt</a:t>
+            </a:r>
+          </a:p>
+          <a:p>
+            <a:pPr>
+              <a:spcAft>
+                <a:spcPts val="700"/>
+              </a:spcAft>
+              <a:defRPr sz="1250">
+                <a:solidFill>
+                  <a:srgbClr val="F8FAFC"/>
+                </a:solidFill>
+                <a:latin typeface="Segoe UI"/>
+              </a:defRPr>
+            </a:pPr>
+            <a:r>
+              <a:t>• Copies model/best.pt + pothole.py into image</a:t>
+            </a:r>
+          </a:p>
+          <a:p>
+            <a:pPr>
+              <a:spcAft>
+                <a:spcPts val="700"/>
+              </a:spcAft>
+              <a:defRPr sz="1250">
+                <a:solidFill>
+                  <a:srgbClr val="F8FAFC"/>
+                </a:solidFill>
+                <a:latin typeface="Segoe UI"/>
+              </a:defRPr>
+            </a:pPr>
+            <a:r>
+              <a:t>• EXPOSE 8501 (Streamlit port)</a:t>
             </a:r>
           </a:p>
         </p:txBody>
@@ -4523,8 +4608,8 @@
         </p:nvSpPr>
         <p:spPr>
           <a:xfrm>
-            <a:off x="6309360" y="1645920"/>
-            <a:ext cx="5120640" cy="4114800"/>
+            <a:off x="6309360" y="1600200"/>
+            <a:ext cx="5120640" cy="4297680"/>
           </a:xfrm>
           <a:prstGeom prst="rect">
             <a:avLst/>
@@ -4553,14 +4638,14 @@
           </a:fontRef>
         </p:style>
         <p:txBody>
-          <a:bodyPr rtlCol="0" anchor="ctr" wrap="square" lIns="274320" rIns="274320" tIns="274320" bIns="274320"/>
+          <a:bodyPr rtlCol="0" anchor="ctr" wrap="square" lIns="256032" rIns="256032" tIns="201168" bIns="201168"/>
           <a:lstStyle/>
           <a:p>
             <a:pPr algn="ctr">
               <a:spcAft>
-                <a:spcPts val="1400"/>
-              </a:spcAft>
-              <a:defRPr sz="1800" b="1">
+                <a:spcPts val="1200"/>
+              </a:spcAft>
+              <a:defRPr sz="1700" b="1">
                 <a:solidFill>
                   <a:srgbClr val="38BDF8"/>
                 </a:solidFill>
@@ -4568,71 +4653,87 @@
               </a:defRPr>
             </a:pPr>
             <a:r>
-              <a:t>Multi-Hardware Bridging</a:t>
-            </a:r>
-          </a:p>
-          <a:p>
-            <a:pPr>
-              <a:spcAft>
-                <a:spcPts val="800"/>
-              </a:spcAft>
-              <a:defRPr sz="1300">
-                <a:solidFill>
-                  <a:srgbClr val="F8FAFC"/>
-                </a:solidFill>
-                <a:latin typeface="Segoe UI"/>
-              </a:defRPr>
-            </a:pPr>
-            <a:r>
-              <a:t>• GPU Pass-through reservation details:</a:t>
-            </a:r>
-            <a:br/>
-            <a:r>
-              <a:t>deploy:</a:t>
-            </a:r>
-            <a:br/>
-            <a:r>
-              <a:t>  resources:</a:t>
-            </a:r>
-            <a:br/>
-            <a:r>
-              <a:t>    reservations:</a:t>
-            </a:r>
-            <a:br/>
-            <a:r>
-              <a:t>      devices:</a:t>
-            </a:r>
-            <a:br/>
-            <a:r>
-              <a:t>        - driver: nvidia</a:t>
-            </a:r>
-            <a:br/>
-            <a:r>
-              <a:t>          count: all</a:t>
-            </a:r>
-            <a:br/>
-            <a:r>
-              <a:t>          capabilities: [gpu]</a:t>
-            </a:r>
-          </a:p>
-          <a:p>
-            <a:pPr>
-              <a:spcAft>
-                <a:spcPts val="800"/>
-              </a:spcAft>
-              <a:defRPr sz="1300">
-                <a:solidFill>
-                  <a:srgbClr val="F8FAFC"/>
-                </a:solidFill>
-                <a:latin typeface="Segoe UI"/>
-              </a:defRPr>
-            </a:pPr>
-            <a:r>
-              <a:t>• CPU-Only Fallback:</a:t>
-            </a:r>
-            <a:br/>
-            <a:r>
-              <a:t>If hosting on standard CPU server, simply comment out or delete the 'deploy' section. No other changes are needed!</a:t>
+              <a:t>docker-compose.yml Highlights</a:t>
+            </a:r>
+          </a:p>
+          <a:p>
+            <a:pPr>
+              <a:spcAft>
+                <a:spcPts val="700"/>
+              </a:spcAft>
+              <a:defRPr sz="1250">
+                <a:solidFill>
+                  <a:srgbClr val="F8FAFC"/>
+                </a:solidFill>
+                <a:latin typeface="Segoe UI"/>
+              </a:defRPr>
+            </a:pPr>
+            <a:r>
+              <a:t>• Maps port 8501:8501 to host</a:t>
+            </a:r>
+          </a:p>
+          <a:p>
+            <a:pPr>
+              <a:spcAft>
+                <a:spcPts val="700"/>
+              </a:spcAft>
+              <a:defRPr sz="1250">
+                <a:solidFill>
+                  <a:srgbClr val="F8FAFC"/>
+                </a:solidFill>
+                <a:latin typeface="Segoe UI"/>
+              </a:defRPr>
+            </a:pPr>
+            <a:r>
+              <a:t>• restart: always - auto-restarts on crash or reboot</a:t>
+            </a:r>
+          </a:p>
+          <a:p>
+            <a:pPr>
+              <a:spcAft>
+                <a:spcPts val="700"/>
+              </a:spcAft>
+              <a:defRPr sz="1250">
+                <a:solidFill>
+                  <a:srgbClr val="F8FAFC"/>
+                </a:solidFill>
+                <a:latin typeface="Segoe UI"/>
+              </a:defRPr>
+            </a:pPr>
+            <a:r>
+              <a:t>• PYTORCH_CUDA_ALLOC_CONF env var for memory safety</a:t>
+            </a:r>
+          </a:p>
+          <a:p>
+            <a:pPr>
+              <a:spcAft>
+                <a:spcPts val="700"/>
+              </a:spcAft>
+              <a:defRPr sz="1250">
+                <a:solidFill>
+                  <a:srgbClr val="F8FAFC"/>
+                </a:solidFill>
+                <a:latin typeface="Segoe UI"/>
+              </a:defRPr>
+            </a:pPr>
+            <a:r>
+              <a:t>• GPU pass-through via deploy.resources.reservations</a:t>
+            </a:r>
+          </a:p>
+          <a:p>
+            <a:pPr>
+              <a:spcAft>
+                <a:spcPts val="700"/>
+              </a:spcAft>
+              <a:defRPr sz="1250">
+                <a:solidFill>
+                  <a:srgbClr val="F8FAFC"/>
+                </a:solidFill>
+                <a:latin typeface="Segoe UI"/>
+              </a:defRPr>
+            </a:pPr>
+            <a:r>
+              <a:t>• CPU-Only: remove deploy block - nothing else changes</a:t>
             </a:r>
           </a:p>
         </p:txBody>
@@ -4645,7 +4746,7 @@
 </p:sld>
 </file>
 
-<file path=ppt/slides/slide5.xml><?xml version="1.0" encoding="utf-8"?>
+<file path=ppt/slides/slide4.xml><?xml version="1.0" encoding="utf-8"?>
 <p:sld xmlns:a="http://schemas.openxmlformats.org/drawingml/2006/main" xmlns:p="http://schemas.openxmlformats.org/presentationml/2006/main" xmlns:r="http://schemas.openxmlformats.org/officeDocument/2006/relationships">
   <p:cSld>
     <p:bg>
@@ -4671,7 +4772,7 @@
         </p:nvSpPr>
         <p:spPr>
           <a:xfrm>
-            <a:off x="731520" y="365760"/>
+            <a:off x="731520" y="320040"/>
             <a:ext cx="10698480" cy="365760"/>
           </a:xfrm>
           <a:prstGeom prst="rect">
@@ -4680,7 +4781,7 @@
           <a:noFill/>
         </p:spPr>
         <p:txBody>
-          <a:bodyPr wrap="square" lIns="0" rIns="0" tIns="0" bIns="0">
+          <a:bodyPr wrap="none">
             <a:spAutoFit/>
           </a:bodyPr>
           <a:lstStyle/>
@@ -4694,7 +4795,7 @@
               </a:defRPr>
             </a:pPr>
             <a:r>
-              <a:t>UBUNTU DEPLOYMENT</a:t>
+              <a:t>OPTION 1 : UBUNTU SERVER</a:t>
             </a:r>
           </a:p>
         </p:txBody>
@@ -4707,8 +4808,8 @@
         </p:nvSpPr>
         <p:spPr>
           <a:xfrm>
-            <a:off x="731520" y="640080"/>
-            <a:ext cx="10698480" cy="731520"/>
+            <a:off x="731520" y="658368"/>
+            <a:ext cx="10698480" cy="777240"/>
           </a:xfrm>
           <a:prstGeom prst="rect">
             <a:avLst/>
@@ -4716,21 +4817,21 @@
           <a:noFill/>
         </p:spPr>
         <p:txBody>
-          <a:bodyPr wrap="square" lIns="0" rIns="0" tIns="0" bIns="0">
+          <a:bodyPr wrap="square">
             <a:spAutoFit/>
           </a:bodyPr>
           <a:lstStyle/>
           <a:p>
             <a:pPr>
-              <a:defRPr sz="3200" b="1">
-                <a:solidFill>
-                  <a:srgbClr val="F8FAFC"/>
-                </a:solidFill>
-                <a:latin typeface="Segoe UI"/>
-              </a:defRPr>
-            </a:pPr>
-            <a:r>
-              <a:t>Step 1: Host Server Installation</a:t>
+              <a:defRPr sz="3100" b="1">
+                <a:solidFill>
+                  <a:srgbClr val="F8FAFC"/>
+                </a:solidFill>
+                <a:latin typeface="Segoe UI"/>
+              </a:defRPr>
+            </a:pPr>
+            <a:r>
+              <a:t>Step 1 - Install Docker on the Host</a:t>
             </a:r>
           </a:p>
         </p:txBody>
@@ -4743,8 +4844,8 @@
         </p:nvSpPr>
         <p:spPr>
           <a:xfrm>
-            <a:off x="731520" y="1645920"/>
-            <a:ext cx="5120640" cy="4114800"/>
+            <a:off x="731520" y="1600200"/>
+            <a:ext cx="5120640" cy="4297680"/>
           </a:xfrm>
           <a:prstGeom prst="rect">
             <a:avLst/>
@@ -4773,106 +4874,118 @@
           </a:fontRef>
         </p:style>
         <p:txBody>
-          <a:bodyPr rtlCol="0" anchor="ctr" wrap="square" lIns="274320" rIns="274320" tIns="274320" bIns="274320"/>
+          <a:bodyPr rtlCol="0" anchor="ctr" wrap="square" lIns="256032" rIns="256032" tIns="201168" bIns="201168"/>
           <a:lstStyle/>
           <a:p>
             <a:pPr algn="ctr">
               <a:spcAft>
-                <a:spcPts val="1400"/>
-              </a:spcAft>
-              <a:defRPr sz="1800" b="1">
-                <a:solidFill>
-                  <a:srgbClr val="38BDF8"/>
-                </a:solidFill>
-                <a:latin typeface="Segoe UI"/>
-              </a:defRPr>
-            </a:pPr>
-            <a:r>
-              <a:t>Option A: Host Has NVIDIA GPU</a:t>
-            </a:r>
-          </a:p>
-          <a:p>
-            <a:pPr>
-              <a:spcAft>
-                <a:spcPts val="800"/>
-              </a:spcAft>
-              <a:defRPr sz="1300">
-                <a:solidFill>
-                  <a:srgbClr val="F8FAFC"/>
-                </a:solidFill>
-                <a:latin typeface="Segoe UI"/>
-              </a:defRPr>
-            </a:pPr>
-            <a:r>
-              <a:t>• 1. Install proprietary NVIDIA graphics driver:</a:t>
-            </a:r>
-            <a:br/>
-            <a:r>
-              <a:t>sudo ubuntu-drivers install &amp;&amp; sudo reboot</a:t>
-            </a:r>
-          </a:p>
-          <a:p>
-            <a:pPr>
-              <a:spcAft>
-                <a:spcPts val="800"/>
-              </a:spcAft>
-              <a:defRPr sz="1300">
-                <a:solidFill>
-                  <a:srgbClr val="F8FAFC"/>
-                </a:solidFill>
-                <a:latin typeface="Segoe UI"/>
-              </a:defRPr>
-            </a:pPr>
-            <a:r>
-              <a:t>• 2. Install Docker runtime engine:</a:t>
-            </a:r>
-            <a:br/>
-            <a:r>
-              <a:t>sudo apt install -y docker.io</a:t>
-            </a:r>
-          </a:p>
-          <a:p>
-            <a:pPr>
-              <a:spcAft>
-                <a:spcPts val="800"/>
-              </a:spcAft>
-              <a:defRPr sz="1300">
-                <a:solidFill>
-                  <a:srgbClr val="F8FAFC"/>
-                </a:solidFill>
-                <a:latin typeface="Segoe UI"/>
-              </a:defRPr>
-            </a:pPr>
-            <a:r>
-              <a:t>• 3. Configure repository &amp; install NVIDIA Container Toolkit:</a:t>
-            </a:r>
-            <a:br/>
-            <a:r>
-              <a:t>sudo apt install nvidia-container-toolkit</a:t>
-            </a:r>
-          </a:p>
-          <a:p>
-            <a:pPr>
-              <a:spcAft>
-                <a:spcPts val="800"/>
-              </a:spcAft>
-              <a:defRPr sz="1300">
-                <a:solidFill>
-                  <a:srgbClr val="F8FAFC"/>
-                </a:solidFill>
-                <a:latin typeface="Segoe UI"/>
-              </a:defRPr>
-            </a:pPr>
-            <a:r>
-              <a:t>• 4. Configure runtime &amp; restart Docker:</a:t>
-            </a:r>
-            <a:br/>
-            <a:r>
-              <a:t>sudo nvidia-ctk runtime configure --runtime=docker</a:t>
-            </a:r>
-            <a:br/>
-            <a:r>
-              <a:t>sudo systemctl restart docker</a:t>
+                <a:spcPts val="1200"/>
+              </a:spcAft>
+              <a:defRPr sz="1700" b="1">
+                <a:solidFill>
+                  <a:srgbClr val="22C55E"/>
+                </a:solidFill>
+                <a:latin typeface="Segoe UI"/>
+              </a:defRPr>
+            </a:pPr>
+            <a:r>
+              <a:t>GPU Server (NVIDIA)</a:t>
+            </a:r>
+          </a:p>
+          <a:p>
+            <a:pPr>
+              <a:spcAft>
+                <a:spcPts val="700"/>
+              </a:spcAft>
+              <a:defRPr sz="1250">
+                <a:solidFill>
+                  <a:srgbClr val="F8FAFC"/>
+                </a:solidFill>
+                <a:latin typeface="Segoe UI"/>
+              </a:defRPr>
+            </a:pPr>
+            <a:r>
+              <a:t>• sudo ubuntu-drivers install &amp;&amp; sudo reboot</a:t>
+            </a:r>
+          </a:p>
+          <a:p>
+            <a:pPr>
+              <a:spcAft>
+                <a:spcPts val="700"/>
+              </a:spcAft>
+              <a:defRPr sz="1250">
+                <a:solidFill>
+                  <a:srgbClr val="F8FAFC"/>
+                </a:solidFill>
+                <a:latin typeface="Segoe UI"/>
+              </a:defRPr>
+            </a:pPr>
+            <a:r>
+              <a:t>• sudo apt install -y docker.io</a:t>
+            </a:r>
+          </a:p>
+          <a:p>
+            <a:pPr>
+              <a:spcAft>
+                <a:spcPts val="700"/>
+              </a:spcAft>
+              <a:defRPr sz="1250">
+                <a:solidFill>
+                  <a:srgbClr val="F8FAFC"/>
+                </a:solidFill>
+                <a:latin typeface="Segoe UI"/>
+              </a:defRPr>
+            </a:pPr>
+            <a:r>
+              <a:t>• Add NVIDIA Container Toolkit repo keys</a:t>
+            </a:r>
+          </a:p>
+          <a:p>
+            <a:pPr>
+              <a:spcAft>
+                <a:spcPts val="700"/>
+              </a:spcAft>
+              <a:defRPr sz="1250">
+                <a:solidFill>
+                  <a:srgbClr val="F8FAFC"/>
+                </a:solidFill>
+                <a:latin typeface="Segoe UI"/>
+              </a:defRPr>
+            </a:pPr>
+            <a:r>
+              <a:t>• sudo apt install nvidia-container-toolkit</a:t>
+            </a:r>
+          </a:p>
+          <a:p>
+            <a:pPr>
+              <a:spcAft>
+                <a:spcPts val="700"/>
+              </a:spcAft>
+              <a:defRPr sz="1250">
+                <a:solidFill>
+                  <a:srgbClr val="F8FAFC"/>
+                </a:solidFill>
+                <a:latin typeface="Segoe UI"/>
+              </a:defRPr>
+            </a:pPr>
+            <a:r>
+              <a:t>• sudo nvidia-ctk runtime configure --runtime=docker</a:t>
+            </a:r>
+          </a:p>
+          <a:p>
+            <a:pPr>
+              <a:spcAft>
+                <a:spcPts val="700"/>
+              </a:spcAft>
+              <a:defRPr sz="1250">
+                <a:solidFill>
+                  <a:srgbClr val="F8FAFC"/>
+                </a:solidFill>
+                <a:latin typeface="Segoe UI"/>
+              </a:defRPr>
+            </a:pPr>
+            <a:r>
+              <a:t>• sudo systemctl restart docker</a:t>
             </a:r>
           </a:p>
         </p:txBody>
@@ -4885,8 +4998,8 @@
         </p:nvSpPr>
         <p:spPr>
           <a:xfrm>
-            <a:off x="6309360" y="1645920"/>
-            <a:ext cx="5120640" cy="4114800"/>
+            <a:off x="6309360" y="1600200"/>
+            <a:ext cx="5120640" cy="4297680"/>
           </a:xfrm>
           <a:prstGeom prst="rect">
             <a:avLst/>
@@ -4915,98 +5028,118 @@
           </a:fontRef>
         </p:style>
         <p:txBody>
-          <a:bodyPr rtlCol="0" anchor="ctr" wrap="square" lIns="274320" rIns="274320" tIns="274320" bIns="274320"/>
+          <a:bodyPr rtlCol="0" anchor="ctr" wrap="square" lIns="256032" rIns="256032" tIns="201168" bIns="201168"/>
           <a:lstStyle/>
           <a:p>
             <a:pPr algn="ctr">
               <a:spcAft>
-                <a:spcPts val="1400"/>
-              </a:spcAft>
-              <a:defRPr sz="1800" b="1">
-                <a:solidFill>
-                  <a:srgbClr val="38BDF8"/>
-                </a:solidFill>
-                <a:latin typeface="Segoe UI"/>
-              </a:defRPr>
-            </a:pPr>
-            <a:r>
-              <a:t>Option B: Host is CPU-Only</a:t>
-            </a:r>
-          </a:p>
-          <a:p>
-            <a:pPr>
-              <a:spcAft>
-                <a:spcPts val="800"/>
-              </a:spcAft>
-              <a:defRPr sz="1300">
-                <a:solidFill>
-                  <a:srgbClr val="F8FAFC"/>
-                </a:solidFill>
-                <a:latin typeface="Segoe UI"/>
-              </a:defRPr>
-            </a:pPr>
-            <a:r>
-              <a:t>• 1. No graphics drivers or toolkits required on host</a:t>
-            </a:r>
-          </a:p>
-          <a:p>
-            <a:pPr>
-              <a:spcAft>
-                <a:spcPts val="800"/>
-              </a:spcAft>
-              <a:defRPr sz="1300">
-                <a:solidFill>
-                  <a:srgbClr val="F8FAFC"/>
-                </a:solidFill>
-                <a:latin typeface="Segoe UI"/>
-              </a:defRPr>
-            </a:pPr>
-            <a:r>
-              <a:t>• 2. Update apt repository cache:</a:t>
-            </a:r>
-            <a:br/>
-            <a:r>
-              <a:t>sudo apt update</a:t>
-            </a:r>
-          </a:p>
-          <a:p>
-            <a:pPr>
-              <a:spcAft>
-                <a:spcPts val="800"/>
-              </a:spcAft>
-              <a:defRPr sz="1300">
-                <a:solidFill>
-                  <a:srgbClr val="F8FAFC"/>
-                </a:solidFill>
-                <a:latin typeface="Segoe UI"/>
-              </a:defRPr>
-            </a:pPr>
-            <a:r>
-              <a:t>• 3. Install standard Docker runtime:</a:t>
-            </a:r>
-            <a:br/>
-            <a:r>
-              <a:t>sudo apt install -y docker.io</a:t>
-            </a:r>
-          </a:p>
-          <a:p>
-            <a:pPr>
-              <a:spcAft>
-                <a:spcPts val="800"/>
-              </a:spcAft>
-              <a:defRPr sz="1300">
-                <a:solidFill>
-                  <a:srgbClr val="F8FAFC"/>
-                </a:solidFill>
-                <a:latin typeface="Segoe UI"/>
-              </a:defRPr>
-            </a:pPr>
-            <a:r>
-              <a:t>• 4. Start Docker system service daemon:</a:t>
-            </a:r>
-            <a:br/>
-            <a:r>
-              <a:t>sudo systemctl enable --now docker</a:t>
+                <a:spcPts val="1200"/>
+              </a:spcAft>
+              <a:defRPr sz="1700" b="1">
+                <a:solidFill>
+                  <a:srgbClr val="FB923C"/>
+                </a:solidFill>
+                <a:latin typeface="Segoe UI"/>
+              </a:defRPr>
+            </a:pPr>
+            <a:r>
+              <a:t>CPU-Only Server</a:t>
+            </a:r>
+          </a:p>
+          <a:p>
+            <a:pPr>
+              <a:spcAft>
+                <a:spcPts val="700"/>
+              </a:spcAft>
+              <a:defRPr sz="1250">
+                <a:solidFill>
+                  <a:srgbClr val="F8FAFC"/>
+                </a:solidFill>
+                <a:latin typeface="Segoe UI"/>
+              </a:defRPr>
+            </a:pPr>
+            <a:r>
+              <a:t>• No NVIDIA drivers or toolkit needed</a:t>
+            </a:r>
+          </a:p>
+          <a:p>
+            <a:pPr>
+              <a:spcAft>
+                <a:spcPts val="700"/>
+              </a:spcAft>
+              <a:defRPr sz="1250">
+                <a:solidFill>
+                  <a:srgbClr val="F8FAFC"/>
+                </a:solidFill>
+                <a:latin typeface="Segoe UI"/>
+              </a:defRPr>
+            </a:pPr>
+            <a:r>
+              <a:t>• sudo apt update</a:t>
+            </a:r>
+          </a:p>
+          <a:p>
+            <a:pPr>
+              <a:spcAft>
+                <a:spcPts val="700"/>
+              </a:spcAft>
+              <a:defRPr sz="1250">
+                <a:solidFill>
+                  <a:srgbClr val="F8FAFC"/>
+                </a:solidFill>
+                <a:latin typeface="Segoe UI"/>
+              </a:defRPr>
+            </a:pPr>
+            <a:r>
+              <a:t>• sudo apt install -y docker.io</a:t>
+            </a:r>
+          </a:p>
+          <a:p>
+            <a:pPr>
+              <a:spcAft>
+                <a:spcPts val="700"/>
+              </a:spcAft>
+              <a:defRPr sz="1250">
+                <a:solidFill>
+                  <a:srgbClr val="F8FAFC"/>
+                </a:solidFill>
+                <a:latin typeface="Segoe UI"/>
+              </a:defRPr>
+            </a:pPr>
+            <a:r>
+              <a:t>• sudo systemctl enable --now docker</a:t>
+            </a:r>
+          </a:p>
+          <a:p>
+            <a:pPr>
+              <a:spcAft>
+                <a:spcPts val="700"/>
+              </a:spcAft>
+              <a:defRPr sz="1250">
+                <a:solidFill>
+                  <a:srgbClr val="F8FAFC"/>
+                </a:solidFill>
+                <a:latin typeface="Segoe UI"/>
+              </a:defRPr>
+            </a:pPr>
+            <a:r>
+              <a:t>• Comment out the deploy: block in docker-compose.yml</a:t>
+            </a:r>
+          </a:p>
+          <a:p>
+            <a:pPr>
+              <a:spcAft>
+                <a:spcPts val="700"/>
+              </a:spcAft>
+              <a:defRPr sz="1250">
+                <a:solidFill>
+                  <a:srgbClr val="F8FAFC"/>
+                </a:solidFill>
+                <a:latin typeface="Segoe UI"/>
+              </a:defRPr>
+            </a:pPr>
+            <a:r>
+              <a:t>• PyTorch auto-falls back to CPU - no code changes</a:t>
             </a:r>
           </a:p>
         </p:txBody>
@@ -5019,7 +5152,7 @@
 </p:sld>
 </file>
 
-<file path=ppt/slides/slide6.xml><?xml version="1.0" encoding="utf-8"?>
+<file path=ppt/slides/slide5.xml><?xml version="1.0" encoding="utf-8"?>
 <p:sld xmlns:a="http://schemas.openxmlformats.org/drawingml/2006/main" xmlns:p="http://schemas.openxmlformats.org/presentationml/2006/main" xmlns:r="http://schemas.openxmlformats.org/officeDocument/2006/relationships">
   <p:cSld>
     <p:bg>
@@ -5045,7 +5178,7 @@
         </p:nvSpPr>
         <p:spPr>
           <a:xfrm>
-            <a:off x="731520" y="365760"/>
+            <a:off x="731520" y="320040"/>
             <a:ext cx="10698480" cy="365760"/>
           </a:xfrm>
           <a:prstGeom prst="rect">
@@ -5054,7 +5187,7 @@
           <a:noFill/>
         </p:spPr>
         <p:txBody>
-          <a:bodyPr wrap="square" lIns="0" rIns="0" tIns="0" bIns="0">
+          <a:bodyPr wrap="none">
             <a:spAutoFit/>
           </a:bodyPr>
           <a:lstStyle/>
@@ -5068,7 +5201,7 @@
               </a:defRPr>
             </a:pPr>
             <a:r>
-              <a:t>UBUNTU DEPLOYMENT</a:t>
+              <a:t>OPTION 1 : UBUNTU SERVER</a:t>
             </a:r>
           </a:p>
         </p:txBody>
@@ -5081,8 +5214,8 @@
         </p:nvSpPr>
         <p:spPr>
           <a:xfrm>
-            <a:off x="731520" y="640080"/>
-            <a:ext cx="10698480" cy="731520"/>
+            <a:off x="731520" y="658368"/>
+            <a:ext cx="10698480" cy="777240"/>
           </a:xfrm>
           <a:prstGeom prst="rect">
             <a:avLst/>
@@ -5090,21 +5223,21 @@
           <a:noFill/>
         </p:spPr>
         <p:txBody>
-          <a:bodyPr wrap="square" lIns="0" rIns="0" tIns="0" bIns="0">
+          <a:bodyPr wrap="square">
             <a:spAutoFit/>
           </a:bodyPr>
           <a:lstStyle/>
           <a:p>
             <a:pPr>
-              <a:defRPr sz="3200" b="1">
-                <a:solidFill>
-                  <a:srgbClr val="F8FAFC"/>
-                </a:solidFill>
-                <a:latin typeface="Segoe UI"/>
-              </a:defRPr>
-            </a:pPr>
-            <a:r>
-              <a:t>Step 1: Running the App on Your Server</a:t>
+              <a:defRPr sz="3100" b="1">
+                <a:solidFill>
+                  <a:srgbClr val="F8FAFC"/>
+                </a:solidFill>
+                <a:latin typeface="Segoe UI"/>
+              </a:defRPr>
+            </a:pPr>
+            <a:r>
+              <a:t>Step 2 - Build &amp; Launch the Application</a:t>
             </a:r>
           </a:p>
         </p:txBody>
@@ -5117,8 +5250,8 @@
         </p:nvSpPr>
         <p:spPr>
           <a:xfrm>
-            <a:off x="731520" y="1645920"/>
-            <a:ext cx="5120640" cy="4114800"/>
+            <a:off x="731520" y="1600200"/>
+            <a:ext cx="5120640" cy="4297680"/>
           </a:xfrm>
           <a:prstGeom prst="rect">
             <a:avLst/>
@@ -5147,14 +5280,14 @@
           </a:fontRef>
         </p:style>
         <p:txBody>
-          <a:bodyPr rtlCol="0" anchor="ctr" wrap="square" lIns="274320" rIns="274320" tIns="274320" bIns="274320"/>
+          <a:bodyPr rtlCol="0" anchor="ctr" wrap="square" lIns="256032" rIns="256032" tIns="201168" bIns="201168"/>
           <a:lstStyle/>
           <a:p>
             <a:pPr algn="ctr">
               <a:spcAft>
-                <a:spcPts val="1400"/>
-              </a:spcAft>
-              <a:defRPr sz="1800" b="1">
+                <a:spcPts val="1200"/>
+              </a:spcAft>
+              <a:defRPr sz="1700" b="1">
                 <a:solidFill>
                   <a:srgbClr val="38BDF8"/>
                 </a:solidFill>
@@ -5162,91 +5295,87 @@
               </a:defRPr>
             </a:pPr>
             <a:r>
-              <a:t>Directory &amp; Run Steps</a:t>
-            </a:r>
-          </a:p>
-          <a:p>
-            <a:pPr>
-              <a:spcAft>
-                <a:spcPts val="800"/>
-              </a:spcAft>
-              <a:defRPr sz="1300">
-                <a:solidFill>
-                  <a:srgbClr val="F8FAFC"/>
-                </a:solidFill>
-                <a:latin typeface="Segoe UI"/>
-              </a:defRPr>
-            </a:pPr>
-            <a:r>
-              <a:t>• 1. SSH into the server</a:t>
-            </a:r>
-          </a:p>
-          <a:p>
-            <a:pPr>
-              <a:spcAft>
-                <a:spcPts val="800"/>
-              </a:spcAft>
-              <a:defRPr sz="1300">
-                <a:solidFill>
-                  <a:srgbClr val="F8FAFC"/>
-                </a:solidFill>
-                <a:latin typeface="Segoe UI"/>
-              </a:defRPr>
-            </a:pPr>
-            <a:r>
-              <a:t>• 2. Clone your model git repository into the system workspace</a:t>
-            </a:r>
-          </a:p>
-          <a:p>
-            <a:pPr>
-              <a:spcAft>
-                <a:spcPts val="800"/>
-              </a:spcAft>
-              <a:defRPr sz="1300">
-                <a:solidFill>
-                  <a:srgbClr val="F8FAFC"/>
-                </a:solidFill>
-                <a:latin typeface="Segoe UI"/>
-              </a:defRPr>
-            </a:pPr>
-            <a:r>
-              <a:t>• 3. Ensure the folder has model/best.pt and pothole.py files</a:t>
-            </a:r>
-          </a:p>
-          <a:p>
-            <a:pPr>
-              <a:spcAft>
-                <a:spcPts val="800"/>
-              </a:spcAft>
-              <a:defRPr sz="1300">
-                <a:solidFill>
-                  <a:srgbClr val="F8FAFC"/>
-                </a:solidFill>
-                <a:latin typeface="Segoe UI"/>
-              </a:defRPr>
-            </a:pPr>
-            <a:r>
-              <a:t>• 4. Place your Dockerfile &amp; docker-compose.yml in project root</a:t>
-            </a:r>
-          </a:p>
-          <a:p>
-            <a:pPr>
-              <a:spcAft>
-                <a:spcPts val="800"/>
-              </a:spcAft>
-              <a:defRPr sz="1300">
-                <a:solidFill>
-                  <a:srgbClr val="F8FAFC"/>
-                </a:solidFill>
-                <a:latin typeface="Segoe UI"/>
-              </a:defRPr>
-            </a:pPr>
-            <a:r>
-              <a:t>• 5. Build and launch container stack:</a:t>
-            </a:r>
-            <a:br/>
-            <a:r>
-              <a:t>docker compose up -d --build</a:t>
+              <a:t>Deploy Commands</a:t>
+            </a:r>
+          </a:p>
+          <a:p>
+            <a:pPr>
+              <a:spcAft>
+                <a:spcPts val="700"/>
+              </a:spcAft>
+              <a:defRPr sz="1250">
+                <a:solidFill>
+                  <a:srgbClr val="F8FAFC"/>
+                </a:solidFill>
+                <a:latin typeface="Segoe UI"/>
+              </a:defRPr>
+            </a:pPr>
+            <a:r>
+              <a:t>• SSH into the server</a:t>
+            </a:r>
+          </a:p>
+          <a:p>
+            <a:pPr>
+              <a:spcAft>
+                <a:spcPts val="700"/>
+              </a:spcAft>
+              <a:defRPr sz="1250">
+                <a:solidFill>
+                  <a:srgbClr val="F8FAFC"/>
+                </a:solidFill>
+                <a:latin typeface="Segoe UI"/>
+              </a:defRPr>
+            </a:pPr>
+            <a:r>
+              <a:t>• git clone https://github.com/.../your-ai-project.git</a:t>
+            </a:r>
+          </a:p>
+          <a:p>
+            <a:pPr>
+              <a:spcAft>
+                <a:spcPts val="700"/>
+              </a:spcAft>
+              <a:defRPr sz="1250">
+                <a:solidFill>
+                  <a:srgbClr val="F8FAFC"/>
+                </a:solidFill>
+                <a:latin typeface="Segoe UI"/>
+              </a:defRPr>
+            </a:pPr>
+            <a:r>
+              <a:t>• cd your-ai-project</a:t>
+            </a:r>
+          </a:p>
+          <a:p>
+            <a:pPr>
+              <a:spcAft>
+                <a:spcPts val="700"/>
+              </a:spcAft>
+              <a:defRPr sz="1250">
+                <a:solidFill>
+                  <a:srgbClr val="F8FAFC"/>
+                </a:solidFill>
+                <a:latin typeface="Segoe UI"/>
+              </a:defRPr>
+            </a:pPr>
+            <a:r>
+              <a:t>• docker compose up -d --build</a:t>
+            </a:r>
+          </a:p>
+          <a:p>
+            <a:pPr>
+              <a:spcAft>
+                <a:spcPts val="700"/>
+              </a:spcAft>
+              <a:defRPr sz="1250">
+                <a:solidFill>
+                  <a:srgbClr val="F8FAFC"/>
+                </a:solidFill>
+                <a:latin typeface="Segoe UI"/>
+              </a:defRPr>
+            </a:pPr>
+            <a:r>
+              <a:t>• -d = background, --build = rebuild image</a:t>
             </a:r>
           </a:p>
         </p:txBody>
@@ -5259,8 +5388,8 @@
         </p:nvSpPr>
         <p:spPr>
           <a:xfrm>
-            <a:off x="6309360" y="1645920"/>
-            <a:ext cx="5120640" cy="4114800"/>
+            <a:off x="6309360" y="1600200"/>
+            <a:ext cx="5120640" cy="4297680"/>
           </a:xfrm>
           <a:prstGeom prst="rect">
             <a:avLst/>
@@ -5289,14 +5418,14 @@
           </a:fontRef>
         </p:style>
         <p:txBody>
-          <a:bodyPr rtlCol="0" anchor="ctr" wrap="square" lIns="274320" rIns="274320" tIns="274320" bIns="274320"/>
+          <a:bodyPr rtlCol="0" anchor="ctr" wrap="square" lIns="256032" rIns="256032" tIns="201168" bIns="201168"/>
           <a:lstStyle/>
           <a:p>
             <a:pPr algn="ctr">
               <a:spcAft>
-                <a:spcPts val="1400"/>
-              </a:spcAft>
-              <a:defRPr sz="1800" b="1">
+                <a:spcPts val="1200"/>
+              </a:spcAft>
+              <a:defRPr sz="1700" b="1">
                 <a:solidFill>
                   <a:srgbClr val="38BDF8"/>
                 </a:solidFill>
@@ -5310,61 +5439,97 @@
           <a:p>
             <a:pPr>
               <a:spcAft>
-                <a:spcPts val="800"/>
-              </a:spcAft>
-              <a:defRPr sz="1300">
-                <a:solidFill>
-                  <a:srgbClr val="F8FAFC"/>
-                </a:solidFill>
-                <a:latin typeface="Segoe UI"/>
-              </a:defRPr>
-            </a:pPr>
-            <a:r>
-              <a:t>• Verify container status is active:</a:t>
-            </a:r>
-            <a:br/>
-            <a:r>
-              <a:t>docker ps</a:t>
-            </a:r>
-          </a:p>
-          <a:p>
-            <a:pPr>
-              <a:spcAft>
-                <a:spcPts val="800"/>
-              </a:spcAft>
-              <a:defRPr sz="1300">
-                <a:solidFill>
-                  <a:srgbClr val="F8FAFC"/>
-                </a:solidFill>
-                <a:latin typeface="Segoe UI"/>
-              </a:defRPr>
-            </a:pPr>
-            <a:r>
-              <a:t>• Monitor container execution logs:</a:t>
-            </a:r>
-            <a:br/>
-            <a:r>
-              <a:t>docker logs pothole-segmentation-app</a:t>
-            </a:r>
-          </a:p>
-          <a:p>
-            <a:pPr>
-              <a:spcAft>
-                <a:spcPts val="800"/>
-              </a:spcAft>
-              <a:defRPr sz="1300">
-                <a:solidFill>
-                  <a:srgbClr val="F8FAFC"/>
-                </a:solidFill>
-                <a:latin typeface="Segoe UI"/>
-              </a:defRPr>
-            </a:pPr>
-            <a:r>
-              <a:t>• Verify GPU acceleration is loaded:</a:t>
-            </a:r>
-            <a:br/>
-            <a:r>
-              <a:t>docker exec -it pothole-segmentation-app python -c "import torch; print(torch.cuda.is_available())"</a:t>
+                <a:spcPts val="700"/>
+              </a:spcAft>
+              <a:defRPr sz="1250">
+                <a:solidFill>
+                  <a:srgbClr val="F8FAFC"/>
+                </a:solidFill>
+                <a:latin typeface="Segoe UI"/>
+              </a:defRPr>
+            </a:pPr>
+            <a:r>
+              <a:t>• docker ps  -- confirms container is running</a:t>
+            </a:r>
+          </a:p>
+          <a:p>
+            <a:pPr>
+              <a:spcAft>
+                <a:spcPts val="700"/>
+              </a:spcAft>
+              <a:defRPr sz="1250">
+                <a:solidFill>
+                  <a:srgbClr val="F8FAFC"/>
+                </a:solidFill>
+                <a:latin typeface="Segoe UI"/>
+              </a:defRPr>
+            </a:pPr>
+            <a:r>
+              <a:t>• docker logs -f pothole-segmentation-app</a:t>
+            </a:r>
+          </a:p>
+          <a:p>
+            <a:pPr>
+              <a:spcAft>
+                <a:spcPts val="700"/>
+              </a:spcAft>
+              <a:defRPr sz="1250">
+                <a:solidFill>
+                  <a:srgbClr val="F8FAFC"/>
+                </a:solidFill>
+                <a:latin typeface="Segoe UI"/>
+              </a:defRPr>
+            </a:pPr>
+            <a:r>
+              <a:t>• Exec into container to check GPU:</a:t>
+            </a:r>
+          </a:p>
+          <a:p>
+            <a:pPr>
+              <a:spcAft>
+                <a:spcPts val="700"/>
+              </a:spcAft>
+              <a:defRPr sz="1250">
+                <a:solidFill>
+                  <a:srgbClr val="F8FAFC"/>
+                </a:solidFill>
+                <a:latin typeface="Segoe UI"/>
+              </a:defRPr>
+            </a:pPr>
+            <a:r>
+              <a:t>• docker exec -it pothole-segmentation-app python -c</a:t>
+            </a:r>
+          </a:p>
+          <a:p>
+            <a:pPr>
+              <a:spcAft>
+                <a:spcPts val="700"/>
+              </a:spcAft>
+              <a:defRPr sz="1250">
+                <a:solidFill>
+                  <a:srgbClr val="F8FAFC"/>
+                </a:solidFill>
+                <a:latin typeface="Segoe UI"/>
+              </a:defRPr>
+            </a:pPr>
+            <a:r>
+              <a:t>•   import torch; print(torch.cuda.is_available())</a:t>
+            </a:r>
+          </a:p>
+          <a:p>
+            <a:pPr>
+              <a:spcAft>
+                <a:spcPts val="700"/>
+              </a:spcAft>
+              <a:defRPr sz="1250">
+                <a:solidFill>
+                  <a:srgbClr val="F8FAFC"/>
+                </a:solidFill>
+                <a:latin typeface="Segoe UI"/>
+              </a:defRPr>
+            </a:pPr>
+            <a:r>
+              <a:t>• Expected: True (GPU) or False (CPU fallback)</a:t>
             </a:r>
           </a:p>
         </p:txBody>
@@ -5377,7 +5542,7 @@
 </p:sld>
 </file>
 
-<file path=ppt/slides/slide7.xml><?xml version="1.0" encoding="utf-8"?>
+<file path=ppt/slides/slide6.xml><?xml version="1.0" encoding="utf-8"?>
 <p:sld xmlns:a="http://schemas.openxmlformats.org/drawingml/2006/main" xmlns:p="http://schemas.openxmlformats.org/presentationml/2006/main" xmlns:r="http://schemas.openxmlformats.org/officeDocument/2006/relationships">
   <p:cSld>
     <p:bg>
@@ -5403,7 +5568,7 @@
         </p:nvSpPr>
         <p:spPr>
           <a:xfrm>
-            <a:off x="731520" y="365760"/>
+            <a:off x="731520" y="320040"/>
             <a:ext cx="10698480" cy="365760"/>
           </a:xfrm>
           <a:prstGeom prst="rect">
@@ -5412,7 +5577,7 @@
           <a:noFill/>
         </p:spPr>
         <p:txBody>
-          <a:bodyPr wrap="square" lIns="0" rIns="0" tIns="0" bIns="0">
+          <a:bodyPr wrap="none">
             <a:spAutoFit/>
           </a:bodyPr>
           <a:lstStyle/>
@@ -5426,7 +5591,7 @@
               </a:defRPr>
             </a:pPr>
             <a:r>
-              <a:t>RUNPOD DEPLOYMENT</a:t>
+              <a:t>OPTION 1 : NGINX + SSL</a:t>
             </a:r>
           </a:p>
         </p:txBody>
@@ -5439,8 +5604,8 @@
         </p:nvSpPr>
         <p:spPr>
           <a:xfrm>
-            <a:off x="731520" y="640080"/>
-            <a:ext cx="10698480" cy="731520"/>
+            <a:off x="731520" y="658368"/>
+            <a:ext cx="10698480" cy="777240"/>
           </a:xfrm>
           <a:prstGeom prst="rect">
             <a:avLst/>
@@ -5448,21 +5613,21 @@
           <a:noFill/>
         </p:spPr>
         <p:txBody>
-          <a:bodyPr wrap="square" lIns="0" rIns="0" tIns="0" bIns="0">
+          <a:bodyPr wrap="square">
             <a:spAutoFit/>
           </a:bodyPr>
           <a:lstStyle/>
           <a:p>
             <a:pPr>
-              <a:defRPr sz="3200" b="1">
-                <a:solidFill>
-                  <a:srgbClr val="F8FAFC"/>
-                </a:solidFill>
-                <a:latin typeface="Segoe UI"/>
-              </a:defRPr>
-            </a:pPr>
-            <a:r>
-              <a:t>Step 2: Deploying on RunPod Cloud</a:t>
+              <a:defRPr sz="3100" b="1">
+                <a:solidFill>
+                  <a:srgbClr val="F8FAFC"/>
+                </a:solidFill>
+                <a:latin typeface="Segoe UI"/>
+              </a:defRPr>
+            </a:pPr>
+            <a:r>
+              <a:t>Step 3 - Install Nginx &amp; Certbot</a:t>
             </a:r>
           </a:p>
         </p:txBody>
@@ -5475,8 +5640,8 @@
         </p:nvSpPr>
         <p:spPr>
           <a:xfrm>
-            <a:off x="731520" y="1645920"/>
-            <a:ext cx="5120640" cy="4114800"/>
+            <a:off x="731520" y="1600200"/>
+            <a:ext cx="5120640" cy="4297680"/>
           </a:xfrm>
           <a:prstGeom prst="rect">
             <a:avLst/>
@@ -5505,14 +5670,14 @@
           </a:fontRef>
         </p:style>
         <p:txBody>
-          <a:bodyPr rtlCol="0" anchor="ctr" wrap="square" lIns="274320" rIns="274320" tIns="274320" bIns="274320"/>
+          <a:bodyPr rtlCol="0" anchor="ctr" wrap="square" lIns="256032" rIns="256032" tIns="201168" bIns="201168"/>
           <a:lstStyle/>
           <a:p>
             <a:pPr algn="ctr">
               <a:spcAft>
-                <a:spcPts val="1400"/>
-              </a:spcAft>
-              <a:defRPr sz="1800" b="1">
+                <a:spcPts val="1200"/>
+              </a:spcAft>
+              <a:defRPr sz="1700" b="1">
                 <a:solidFill>
                   <a:srgbClr val="38BDF8"/>
                 </a:solidFill>
@@ -5520,71 +5685,87 @@
               </a:defRPr>
             </a:pPr>
             <a:r>
-              <a:t>RunPod Pods (Interactive Mode)</a:t>
-            </a:r>
-          </a:p>
-          <a:p>
-            <a:pPr>
-              <a:spcAft>
-                <a:spcPts val="800"/>
-              </a:spcAft>
-              <a:defRPr sz="1300">
-                <a:solidFill>
-                  <a:srgbClr val="F8FAFC"/>
-                </a:solidFill>
-                <a:latin typeface="Segoe UI"/>
-              </a:defRPr>
-            </a:pPr>
-            <a:r>
-              <a:t>• Features: Full terminal access, Jupyter environment, GPU instances</a:t>
-            </a:r>
-          </a:p>
-          <a:p>
-            <a:pPr>
-              <a:spcAft>
-                <a:spcPts val="800"/>
-              </a:spcAft>
-              <a:defRPr sz="1300">
-                <a:solidFill>
-                  <a:srgbClr val="F8FAFC"/>
-                </a:solidFill>
-                <a:latin typeface="Segoe UI"/>
-              </a:defRPr>
-            </a:pPr>
-            <a:r>
-              <a:t>• Storage: Persistent Network Volumes keep model files safe during restarts</a:t>
-            </a:r>
-          </a:p>
-          <a:p>
-            <a:pPr>
-              <a:spcAft>
-                <a:spcPts val="800"/>
-              </a:spcAft>
-              <a:defRPr sz="1300">
-                <a:solidFill>
-                  <a:srgbClr val="F8FAFC"/>
-                </a:solidFill>
-                <a:latin typeface="Segoe UI"/>
-              </a:defRPr>
-            </a:pPr>
-            <a:r>
-              <a:t>• Port Exposure: Routes internal container port 8501 out securely</a:t>
-            </a:r>
-          </a:p>
-          <a:p>
-            <a:pPr>
-              <a:spcAft>
-                <a:spcPts val="800"/>
-              </a:spcAft>
-              <a:defRPr sz="1300">
-                <a:solidFill>
-                  <a:srgbClr val="F8FAFC"/>
-                </a:solidFill>
-                <a:latin typeface="Segoe UI"/>
-              </a:defRPr>
-            </a:pPr>
-            <a:r>
-              <a:t>• Best for: Interactive interfaces, client dashboard checks, active testing</a:t>
+              <a:t>Why Nginx?</a:t>
+            </a:r>
+          </a:p>
+          <a:p>
+            <a:pPr>
+              <a:spcAft>
+                <a:spcPts val="700"/>
+              </a:spcAft>
+              <a:defRPr sz="1250">
+                <a:solidFill>
+                  <a:srgbClr val="F8FAFC"/>
+                </a:solidFill>
+                <a:latin typeface="Segoe UI"/>
+              </a:defRPr>
+            </a:pPr>
+            <a:r>
+              <a:t>• Acts as a reverse proxy in front of Streamlit</a:t>
+            </a:r>
+          </a:p>
+          <a:p>
+            <a:pPr>
+              <a:spcAft>
+                <a:spcPts val="700"/>
+              </a:spcAft>
+              <a:defRPr sz="1250">
+                <a:solidFill>
+                  <a:srgbClr val="F8FAFC"/>
+                </a:solidFill>
+                <a:latin typeface="Segoe UI"/>
+              </a:defRPr>
+            </a:pPr>
+            <a:r>
+              <a:t>• Routes public port 80/443 to internal port 8501</a:t>
+            </a:r>
+          </a:p>
+          <a:p>
+            <a:pPr>
+              <a:spcAft>
+                <a:spcPts val="700"/>
+              </a:spcAft>
+              <a:defRPr sz="1250">
+                <a:solidFill>
+                  <a:srgbClr val="F8FAFC"/>
+                </a:solidFill>
+                <a:latin typeface="Segoe UI"/>
+              </a:defRPr>
+            </a:pPr>
+            <a:r>
+              <a:t>• Handles SSL termination (HTTPS encryption)</a:t>
+            </a:r>
+          </a:p>
+          <a:p>
+            <a:pPr>
+              <a:spcAft>
+                <a:spcPts val="700"/>
+              </a:spcAft>
+              <a:defRPr sz="1250">
+                <a:solidFill>
+                  <a:srgbClr val="F8FAFC"/>
+                </a:solidFill>
+                <a:latin typeface="Segoe UI"/>
+              </a:defRPr>
+            </a:pPr>
+            <a:r>
+              <a:t>• Supports WebSocket headers required by Streamlit</a:t>
+            </a:r>
+          </a:p>
+          <a:p>
+            <a:pPr>
+              <a:spcAft>
+                <a:spcPts val="700"/>
+              </a:spcAft>
+              <a:defRPr sz="1250">
+                <a:solidFill>
+                  <a:srgbClr val="F8FAFC"/>
+                </a:solidFill>
+                <a:latin typeface="Segoe UI"/>
+              </a:defRPr>
+            </a:pPr>
+            <a:r>
+              <a:t>• Controls upload size limits (client_max_body_size 50M)</a:t>
             </a:r>
           </a:p>
         </p:txBody>
@@ -5597,8 +5778,8 @@
         </p:nvSpPr>
         <p:spPr>
           <a:xfrm>
-            <a:off x="6309360" y="1645920"/>
-            <a:ext cx="5120640" cy="4114800"/>
+            <a:off x="6309360" y="1600200"/>
+            <a:ext cx="5120640" cy="4297680"/>
           </a:xfrm>
           <a:prstGeom prst="rect">
             <a:avLst/>
@@ -5627,14 +5808,14 @@
           </a:fontRef>
         </p:style>
         <p:txBody>
-          <a:bodyPr rtlCol="0" anchor="ctr" wrap="square" lIns="274320" rIns="274320" tIns="274320" bIns="274320"/>
+          <a:bodyPr rtlCol="0" anchor="ctr" wrap="square" lIns="256032" rIns="256032" tIns="201168" bIns="201168"/>
           <a:lstStyle/>
           <a:p>
             <a:pPr algn="ctr">
               <a:spcAft>
-                <a:spcPts val="1400"/>
-              </a:spcAft>
-              <a:defRPr sz="1800" b="1">
+                <a:spcPts val="1200"/>
+              </a:spcAft>
+              <a:defRPr sz="1700" b="1">
                 <a:solidFill>
                   <a:srgbClr val="38BDF8"/>
                 </a:solidFill>
@@ -5642,71 +5823,87 @@
               </a:defRPr>
             </a:pPr>
             <a:r>
-              <a:t>RunPod Serverless (Elastic API)</a:t>
-            </a:r>
-          </a:p>
-          <a:p>
-            <a:pPr>
-              <a:spcAft>
-                <a:spcPts val="800"/>
-              </a:spcAft>
-              <a:defRPr sz="1300">
-                <a:solidFill>
-                  <a:srgbClr val="F8FAFC"/>
-                </a:solidFill>
-                <a:latin typeface="Segoe UI"/>
-              </a:defRPr>
-            </a:pPr>
-            <a:r>
-              <a:t>• Features: Scales container workers automatically based on traffic</a:t>
-            </a:r>
-          </a:p>
-          <a:p>
-            <a:pPr>
-              <a:spcAft>
-                <a:spcPts val="800"/>
-              </a:spcAft>
-              <a:defRPr sz="1300">
-                <a:solidFill>
-                  <a:srgbClr val="F8FAFC"/>
-                </a:solidFill>
-                <a:latin typeface="Segoe UI"/>
-              </a:defRPr>
-            </a:pPr>
-            <a:r>
-              <a:t>• Autoscaling limits: 0 to N worker containers</a:t>
-            </a:r>
-          </a:p>
-          <a:p>
-            <a:pPr>
-              <a:spcAft>
-                <a:spcPts val="800"/>
-              </a:spcAft>
-              <a:defRPr sz="1300">
-                <a:solidFill>
-                  <a:srgbClr val="F8FAFC"/>
-                </a:solidFill>
-                <a:latin typeface="Segoe UI"/>
-              </a:defRPr>
-            </a:pPr>
-            <a:r>
-              <a:t>• Idle Cost: $0.00 when system has no requests in queue</a:t>
-            </a:r>
-          </a:p>
-          <a:p>
-            <a:pPr>
-              <a:spcAft>
-                <a:spcPts val="800"/>
-              </a:spcAft>
-              <a:defRPr sz="1300">
-                <a:solidFill>
-                  <a:srgbClr val="F8FAFC"/>
-                </a:solidFill>
-                <a:latin typeface="Segoe UI"/>
-              </a:defRPr>
-            </a:pPr>
-            <a:r>
-              <a:t>• Requires: Building custom API wrapper (handler.py) and pushing image to Docker Hub</a:t>
+              <a:t>Installation Commands</a:t>
+            </a:r>
+          </a:p>
+          <a:p>
+            <a:pPr>
+              <a:spcAft>
+                <a:spcPts val="700"/>
+              </a:spcAft>
+              <a:defRPr sz="1250">
+                <a:solidFill>
+                  <a:srgbClr val="F8FAFC"/>
+                </a:solidFill>
+                <a:latin typeface="Segoe UI"/>
+              </a:defRPr>
+            </a:pPr>
+            <a:r>
+              <a:t>• sudo apt update</a:t>
+            </a:r>
+          </a:p>
+          <a:p>
+            <a:pPr>
+              <a:spcAft>
+                <a:spcPts val="700"/>
+              </a:spcAft>
+              <a:defRPr sz="1250">
+                <a:solidFill>
+                  <a:srgbClr val="F8FAFC"/>
+                </a:solidFill>
+                <a:latin typeface="Segoe UI"/>
+              </a:defRPr>
+            </a:pPr>
+            <a:r>
+              <a:t>• sudo apt install -y nginx certbot python3-certbot-nginx</a:t>
+            </a:r>
+          </a:p>
+          <a:p>
+            <a:pPr>
+              <a:spcAft>
+                <a:spcPts val="700"/>
+              </a:spcAft>
+              <a:defRPr sz="1250">
+                <a:solidFill>
+                  <a:srgbClr val="F8FAFC"/>
+                </a:solidFill>
+                <a:latin typeface="Segoe UI"/>
+              </a:defRPr>
+            </a:pPr>
+            <a:r>
+              <a:t>• sudo systemctl start nginx</a:t>
+            </a:r>
+          </a:p>
+          <a:p>
+            <a:pPr>
+              <a:spcAft>
+                <a:spcPts val="700"/>
+              </a:spcAft>
+              <a:defRPr sz="1250">
+                <a:solidFill>
+                  <a:srgbClr val="F8FAFC"/>
+                </a:solidFill>
+                <a:latin typeface="Segoe UI"/>
+              </a:defRPr>
+            </a:pPr>
+            <a:r>
+              <a:t>• sudo systemctl enable nginx</a:t>
+            </a:r>
+          </a:p>
+          <a:p>
+            <a:pPr>
+              <a:spcAft>
+                <a:spcPts val="700"/>
+              </a:spcAft>
+              <a:defRPr sz="1250">
+                <a:solidFill>
+                  <a:srgbClr val="F8FAFC"/>
+                </a:solidFill>
+                <a:latin typeface="Segoe UI"/>
+              </a:defRPr>
+            </a:pPr>
+            <a:r>
+              <a:t>• Nginx now listens on port 80 - visible from the internet</a:t>
             </a:r>
           </a:p>
         </p:txBody>
@@ -5719,7 +5916,7 @@
 </p:sld>
 </file>
 
-<file path=ppt/slides/slide8.xml><?xml version="1.0" encoding="utf-8"?>
+<file path=ppt/slides/slide7.xml><?xml version="1.0" encoding="utf-8"?>
 <p:sld xmlns:a="http://schemas.openxmlformats.org/drawingml/2006/main" xmlns:p="http://schemas.openxmlformats.org/presentationml/2006/main" xmlns:r="http://schemas.openxmlformats.org/officeDocument/2006/relationships">
   <p:cSld>
     <p:bg>
@@ -5745,7 +5942,7 @@
         </p:nvSpPr>
         <p:spPr>
           <a:xfrm>
-            <a:off x="731520" y="365760"/>
+            <a:off x="731520" y="320040"/>
             <a:ext cx="10698480" cy="365760"/>
           </a:xfrm>
           <a:prstGeom prst="rect">
@@ -5754,7 +5951,7 @@
           <a:noFill/>
         </p:spPr>
         <p:txBody>
-          <a:bodyPr wrap="square" lIns="0" rIns="0" tIns="0" bIns="0">
+          <a:bodyPr wrap="none">
             <a:spAutoFit/>
           </a:bodyPr>
           <a:lstStyle/>
@@ -5768,7 +5965,7 @@
               </a:defRPr>
             </a:pPr>
             <a:r>
-              <a:t>RUNPOD DEPLOYMENT</a:t>
+              <a:t>OPTION 1 : NGINX + SSL</a:t>
             </a:r>
           </a:p>
         </p:txBody>
@@ -5781,8 +5978,8 @@
         </p:nvSpPr>
         <p:spPr>
           <a:xfrm>
-            <a:off x="731520" y="640080"/>
-            <a:ext cx="10698480" cy="731520"/>
+            <a:off x="731520" y="658368"/>
+            <a:ext cx="10698480" cy="777240"/>
           </a:xfrm>
           <a:prstGeom prst="rect">
             <a:avLst/>
@@ -5790,21 +5987,21 @@
           <a:noFill/>
         </p:spPr>
         <p:txBody>
-          <a:bodyPr wrap="square" lIns="0" rIns="0" tIns="0" bIns="0">
+          <a:bodyPr wrap="square">
             <a:spAutoFit/>
           </a:bodyPr>
           <a:lstStyle/>
           <a:p>
             <a:pPr>
-              <a:defRPr sz="3200" b="1">
-                <a:solidFill>
-                  <a:srgbClr val="F8FAFC"/>
-                </a:solidFill>
-                <a:latin typeface="Segoe UI"/>
-              </a:defRPr>
-            </a:pPr>
-            <a:r>
-              <a:t>RunPod Serverless Deployment Steps</a:t>
+              <a:defRPr sz="3100" b="1">
+                <a:solidFill>
+                  <a:srgbClr val="F8FAFC"/>
+                </a:solidFill>
+                <a:latin typeface="Segoe UI"/>
+              </a:defRPr>
+            </a:pPr>
+            <a:r>
+              <a:t>Steps 4 &amp; 5 - Configure &amp; Enable Nginx</a:t>
             </a:r>
           </a:p>
         </p:txBody>
@@ -5817,8 +6014,8 @@
         </p:nvSpPr>
         <p:spPr>
           <a:xfrm>
-            <a:off x="731520" y="1645920"/>
-            <a:ext cx="5120640" cy="4114800"/>
+            <a:off x="731520" y="1600200"/>
+            <a:ext cx="5120640" cy="4297680"/>
           </a:xfrm>
           <a:prstGeom prst="rect">
             <a:avLst/>
@@ -5847,14 +6044,14 @@
           </a:fontRef>
         </p:style>
         <p:txBody>
-          <a:bodyPr rtlCol="0" anchor="ctr" wrap="square" lIns="274320" rIns="274320" tIns="274320" bIns="274320"/>
+          <a:bodyPr rtlCol="0" anchor="ctr" wrap="square" lIns="256032" rIns="256032" tIns="201168" bIns="201168"/>
           <a:lstStyle/>
           <a:p>
             <a:pPr algn="ctr">
               <a:spcAft>
-                <a:spcPts val="1400"/>
-              </a:spcAft>
-              <a:defRPr sz="1800" b="1">
+                <a:spcPts val="1200"/>
+              </a:spcAft>
+              <a:defRPr sz="1700" b="1">
                 <a:solidFill>
                   <a:srgbClr val="38BDF8"/>
                 </a:solidFill>
@@ -5862,91 +6059,87 @@
               </a:defRPr>
             </a:pPr>
             <a:r>
-              <a:t>1. API Handler (handler.py)</a:t>
-            </a:r>
-          </a:p>
-          <a:p>
-            <a:pPr>
-              <a:spcAft>
-                <a:spcPts val="800"/>
-              </a:spcAft>
-              <a:defRPr sz="1300">
-                <a:solidFill>
-                  <a:srgbClr val="F8FAFC"/>
-                </a:solidFill>
-                <a:latin typeface="Segoe UI"/>
-              </a:defRPr>
-            </a:pPr>
-            <a:r>
-              <a:t>• Add python script using runpod SDK</a:t>
-            </a:r>
-          </a:p>
-          <a:p>
-            <a:pPr>
-              <a:spcAft>
-                <a:spcPts val="800"/>
-              </a:spcAft>
-              <a:defRPr sz="1300">
-                <a:solidFill>
-                  <a:srgbClr val="F8FAFC"/>
-                </a:solidFill>
-                <a:latin typeface="Segoe UI"/>
-              </a:defRPr>
-            </a:pPr>
-            <a:r>
-              <a:t>• Load YOLO11 model weights globally at container start</a:t>
-            </a:r>
-          </a:p>
-          <a:p>
-            <a:pPr>
-              <a:spcAft>
-                <a:spcPts val="800"/>
-              </a:spcAft>
-              <a:defRPr sz="1300">
-                <a:solidFill>
-                  <a:srgbClr val="F8FAFC"/>
-                </a:solidFill>
-                <a:latin typeface="Segoe UI"/>
-              </a:defRPr>
-            </a:pPr>
-            <a:r>
-              <a:t>• Define inference method to extract request data</a:t>
-            </a:r>
-          </a:p>
-          <a:p>
-            <a:pPr>
-              <a:spcAft>
-                <a:spcPts val="800"/>
-              </a:spcAft>
-              <a:defRPr sz="1300">
-                <a:solidFill>
-                  <a:srgbClr val="F8FAFC"/>
-                </a:solidFill>
-                <a:latin typeface="Segoe UI"/>
-              </a:defRPr>
-            </a:pPr>
-            <a:r>
-              <a:t>• Receive base64 input image, decode, run inference, format output coordinates, and return results</a:t>
-            </a:r>
-          </a:p>
-          <a:p>
-            <a:pPr>
-              <a:spcAft>
-                <a:spcPts val="800"/>
-              </a:spcAft>
-              <a:defRPr sz="1300">
-                <a:solidFill>
-                  <a:srgbClr val="F8FAFC"/>
-                </a:solidFill>
-                <a:latin typeface="Segoe UI"/>
-              </a:defRPr>
-            </a:pPr>
-            <a:r>
-              <a:t>• Call worker agent:</a:t>
-            </a:r>
-            <a:br/>
-            <a:r>
-              <a:t>runpod.serverless.start({'handler': run_inference})</a:t>
+              <a:t>Step 4 - Server Block Content</a:t>
+            </a:r>
+          </a:p>
+          <a:p>
+            <a:pPr>
+              <a:spcAft>
+                <a:spcPts val="700"/>
+              </a:spcAft>
+              <a:defRPr sz="1250">
+                <a:solidFill>
+                  <a:srgbClr val="F8FAFC"/>
+                </a:solidFill>
+                <a:latin typeface="Segoe UI"/>
+              </a:defRPr>
+            </a:pPr>
+            <a:r>
+              <a:t>• sudo nano /etc/nginx/sites-available/pothole-segmentation</a:t>
+            </a:r>
+          </a:p>
+          <a:p>
+            <a:pPr>
+              <a:spcAft>
+                <a:spcPts val="700"/>
+              </a:spcAft>
+              <a:defRPr sz="1250">
+                <a:solidFill>
+                  <a:srgbClr val="F8FAFC"/>
+                </a:solidFill>
+                <a:latin typeface="Segoe UI"/>
+              </a:defRPr>
+            </a:pPr>
+            <a:r>
+              <a:t>• server { listen 80; server_name your-domain.com; }</a:t>
+            </a:r>
+          </a:p>
+          <a:p>
+            <a:pPr>
+              <a:spcAft>
+                <a:spcPts val="700"/>
+              </a:spcAft>
+              <a:defRPr sz="1250">
+                <a:solidFill>
+                  <a:srgbClr val="F8FAFC"/>
+                </a:solidFill>
+                <a:latin typeface="Segoe UI"/>
+              </a:defRPr>
+            </a:pPr>
+            <a:r>
+              <a:t>• proxy_pass http://localhost:8501;</a:t>
+            </a:r>
+          </a:p>
+          <a:p>
+            <a:pPr>
+              <a:spcAft>
+                <a:spcPts val="700"/>
+              </a:spcAft>
+              <a:defRPr sz="1250">
+                <a:solidFill>
+                  <a:srgbClr val="F8FAFC"/>
+                </a:solidFill>
+                <a:latin typeface="Segoe UI"/>
+              </a:defRPr>
+            </a:pPr>
+            <a:r>
+              <a:t>• proxy_set_header Upgrade + Connection (WebSocket support)</a:t>
+            </a:r>
+          </a:p>
+          <a:p>
+            <a:pPr>
+              <a:spcAft>
+                <a:spcPts val="700"/>
+              </a:spcAft>
+              <a:defRPr sz="1250">
+                <a:solidFill>
+                  <a:srgbClr val="F8FAFC"/>
+                </a:solidFill>
+                <a:latin typeface="Segoe UI"/>
+              </a:defRPr>
+            </a:pPr>
+            <a:r>
+              <a:t>• client_max_body_size 50M; (for image uploads)</a:t>
             </a:r>
           </a:p>
         </p:txBody>
@@ -5959,8 +6152,8 @@
         </p:nvSpPr>
         <p:spPr>
           <a:xfrm>
-            <a:off x="6309360" y="1645920"/>
-            <a:ext cx="5120640" cy="4114800"/>
+            <a:off x="6309360" y="1600200"/>
+            <a:ext cx="5120640" cy="4297680"/>
           </a:xfrm>
           <a:prstGeom prst="rect">
             <a:avLst/>
@@ -5989,14 +6182,14 @@
           </a:fontRef>
         </p:style>
         <p:txBody>
-          <a:bodyPr rtlCol="0" anchor="ctr" wrap="square" lIns="274320" rIns="274320" tIns="274320" bIns="274320"/>
+          <a:bodyPr rtlCol="0" anchor="ctr" wrap="square" lIns="256032" rIns="256032" tIns="201168" bIns="201168"/>
           <a:lstStyle/>
           <a:p>
             <a:pPr algn="ctr">
               <a:spcAft>
-                <a:spcPts val="1400"/>
-              </a:spcAft>
-              <a:defRPr sz="1800" b="1">
+                <a:spcPts val="1200"/>
+              </a:spcAft>
+              <a:defRPr sz="1700" b="1">
                 <a:solidFill>
                   <a:srgbClr val="38BDF8"/>
                 </a:solidFill>
@@ -6004,103 +6197,103 @@
               </a:defRPr>
             </a:pPr>
             <a:r>
-              <a:t>2. Container Pushing &amp; Configuration</a:t>
-            </a:r>
-          </a:p>
-          <a:p>
-            <a:pPr>
-              <a:spcAft>
-                <a:spcPts val="800"/>
-              </a:spcAft>
-              <a:defRPr sz="1300">
-                <a:solidFill>
-                  <a:srgbClr val="F8FAFC"/>
-                </a:solidFill>
-                <a:latin typeface="Segoe UI"/>
-              </a:defRPr>
-            </a:pPr>
-            <a:r>
-              <a:t>• Create Dockerfile with handler script and weights</a:t>
-            </a:r>
-          </a:p>
-          <a:p>
-            <a:pPr>
-              <a:spcAft>
-                <a:spcPts val="800"/>
-              </a:spcAft>
-              <a:defRPr sz="1300">
-                <a:solidFill>
-                  <a:srgbClr val="F8FAFC"/>
-                </a:solidFill>
-                <a:latin typeface="Segoe UI"/>
-              </a:defRPr>
-            </a:pPr>
-            <a:r>
-              <a:t>• Build and tag image: docker build -t username/yolo-app:latest .</a:t>
-            </a:r>
-          </a:p>
-          <a:p>
-            <a:pPr>
-              <a:spcAft>
-                <a:spcPts val="800"/>
-              </a:spcAft>
-              <a:defRPr sz="1300">
-                <a:solidFill>
-                  <a:srgbClr val="F8FAFC"/>
-                </a:solidFill>
-                <a:latin typeface="Segoe UI"/>
-              </a:defRPr>
-            </a:pPr>
-            <a:r>
-              <a:t>• Push image to Docker Hub registry</a:t>
-            </a:r>
-          </a:p>
-          <a:p>
-            <a:pPr>
-              <a:spcAft>
-                <a:spcPts val="800"/>
-              </a:spcAft>
-              <a:defRPr sz="1300">
-                <a:solidFill>
-                  <a:srgbClr val="F8FAFC"/>
-                </a:solidFill>
-                <a:latin typeface="Segoe UI"/>
-              </a:defRPr>
-            </a:pPr>
-            <a:r>
-              <a:t>• Create Serverless Endpoint in RunPod console using image name</a:t>
-            </a:r>
-          </a:p>
-          <a:p>
-            <a:pPr>
-              <a:spcAft>
-                <a:spcPts val="800"/>
-              </a:spcAft>
-              <a:defRPr sz="1300">
-                <a:solidFill>
-                  <a:srgbClr val="F8FAFC"/>
-                </a:solidFill>
-                <a:latin typeface="Segoe UI"/>
-              </a:defRPr>
-            </a:pPr>
-            <a:r>
-              <a:t>• Set scale boundaries: Min Workers: 0, Max Workers: 10</a:t>
-            </a:r>
-          </a:p>
-          <a:p>
-            <a:pPr>
-              <a:spcAft>
-                <a:spcPts val="800"/>
-              </a:spcAft>
-              <a:defRPr sz="1300">
-                <a:solidFill>
-                  <a:srgbClr val="F8FAFC"/>
-                </a:solidFill>
-                <a:latin typeface="Segoe UI"/>
-              </a:defRPr>
-            </a:pPr>
-            <a:r>
-              <a:t>• API calls are billed per second and autoscale instantly</a:t>
+              <a:t>Step 5 - Enable &amp; Restart</a:t>
+            </a:r>
+          </a:p>
+          <a:p>
+            <a:pPr>
+              <a:spcAft>
+                <a:spcPts val="700"/>
+              </a:spcAft>
+              <a:defRPr sz="1250">
+                <a:solidFill>
+                  <a:srgbClr val="F8FAFC"/>
+                </a:solidFill>
+                <a:latin typeface="Segoe UI"/>
+              </a:defRPr>
+            </a:pPr>
+            <a:r>
+              <a:t>• Create symlink to activate the config:</a:t>
+            </a:r>
+          </a:p>
+          <a:p>
+            <a:pPr>
+              <a:spcAft>
+                <a:spcPts val="700"/>
+              </a:spcAft>
+              <a:defRPr sz="1250">
+                <a:solidFill>
+                  <a:srgbClr val="F8FAFC"/>
+                </a:solidFill>
+                <a:latin typeface="Segoe UI"/>
+              </a:defRPr>
+            </a:pPr>
+            <a:r>
+              <a:t>• sudo ln -s /etc/nginx/sites-available/pothole-segmentation</a:t>
+            </a:r>
+          </a:p>
+          <a:p>
+            <a:pPr>
+              <a:spcAft>
+                <a:spcPts val="700"/>
+              </a:spcAft>
+              <a:defRPr sz="1250">
+                <a:solidFill>
+                  <a:srgbClr val="F8FAFC"/>
+                </a:solidFill>
+                <a:latin typeface="Segoe UI"/>
+              </a:defRPr>
+            </a:pPr>
+            <a:r>
+              <a:t>•   /etc/nginx/sites-enabled/</a:t>
+            </a:r>
+          </a:p>
+          <a:p>
+            <a:pPr>
+              <a:spcAft>
+                <a:spcPts val="700"/>
+              </a:spcAft>
+              <a:defRPr sz="1250">
+                <a:solidFill>
+                  <a:srgbClr val="F8FAFC"/>
+                </a:solidFill>
+                <a:latin typeface="Segoe UI"/>
+              </a:defRPr>
+            </a:pPr>
+            <a:r>
+              <a:t>• sudo nginx -t  -- test for syntax errors</a:t>
+            </a:r>
+          </a:p>
+          <a:p>
+            <a:pPr>
+              <a:spcAft>
+                <a:spcPts val="700"/>
+              </a:spcAft>
+              <a:defRPr sz="1250">
+                <a:solidFill>
+                  <a:srgbClr val="F8FAFC"/>
+                </a:solidFill>
+                <a:latin typeface="Segoe UI"/>
+              </a:defRPr>
+            </a:pPr>
+            <a:r>
+              <a:t>• sudo systemctl restart nginx</a:t>
+            </a:r>
+          </a:p>
+          <a:p>
+            <a:pPr>
+              <a:spcAft>
+                <a:spcPts val="700"/>
+              </a:spcAft>
+              <a:defRPr sz="1250">
+                <a:solidFill>
+                  <a:srgbClr val="F8FAFC"/>
+                </a:solidFill>
+                <a:latin typeface="Segoe UI"/>
+              </a:defRPr>
+            </a:pPr>
+            <a:r>
+              <a:t>• App now accessible at http://your-domain.com</a:t>
             </a:r>
           </a:p>
         </p:txBody>
@@ -6113,7 +6306,7 @@
 </p:sld>
 </file>
 
-<file path=ppt/slides/slide9.xml><?xml version="1.0" encoding="utf-8"?>
+<file path=ppt/slides/slide8.xml><?xml version="1.0" encoding="utf-8"?>
 <p:sld xmlns:a="http://schemas.openxmlformats.org/drawingml/2006/main" xmlns:p="http://schemas.openxmlformats.org/presentationml/2006/main" xmlns:r="http://schemas.openxmlformats.org/officeDocument/2006/relationships">
   <p:cSld>
     <p:bg>
@@ -6139,7 +6332,7 @@
         </p:nvSpPr>
         <p:spPr>
           <a:xfrm>
-            <a:off x="731520" y="365760"/>
+            <a:off x="731520" y="320040"/>
             <a:ext cx="10698480" cy="365760"/>
           </a:xfrm>
           <a:prstGeom prst="rect">
@@ -6148,7 +6341,7 @@
           <a:noFill/>
         </p:spPr>
         <p:txBody>
-          <a:bodyPr wrap="square" lIns="0" rIns="0" tIns="0" bIns="0">
+          <a:bodyPr wrap="none">
             <a:spAutoFit/>
           </a:bodyPr>
           <a:lstStyle/>
@@ -6162,7 +6355,7 @@
               </a:defRPr>
             </a:pPr>
             <a:r>
-              <a:t>MLOPS PIPELINES</a:t>
+              <a:t>OPTION 1 : NGINX + SSL</a:t>
             </a:r>
           </a:p>
         </p:txBody>
@@ -6175,8 +6368,8 @@
         </p:nvSpPr>
         <p:spPr>
           <a:xfrm>
-            <a:off x="731520" y="640080"/>
-            <a:ext cx="10698480" cy="731520"/>
+            <a:off x="731520" y="658368"/>
+            <a:ext cx="10698480" cy="777240"/>
           </a:xfrm>
           <a:prstGeom prst="rect">
             <a:avLst/>
@@ -6184,21 +6377,21 @@
           <a:noFill/>
         </p:spPr>
         <p:txBody>
-          <a:bodyPr wrap="square" lIns="0" rIns="0" tIns="0" bIns="0">
+          <a:bodyPr wrap="square">
             <a:spAutoFit/>
           </a:bodyPr>
           <a:lstStyle/>
           <a:p>
             <a:pPr>
-              <a:defRPr sz="3200" b="1">
-                <a:solidFill>
-                  <a:srgbClr val="F8FAFC"/>
-                </a:solidFill>
-                <a:latin typeface="Segoe UI"/>
-              </a:defRPr>
-            </a:pPr>
-            <a:r>
-              <a:t>CI/CD Pipeline (Continuous Delivery for ML)</a:t>
+              <a:defRPr sz="3100" b="1">
+                <a:solidFill>
+                  <a:srgbClr val="F8FAFC"/>
+                </a:solidFill>
+                <a:latin typeface="Segoe UI"/>
+              </a:defRPr>
+            </a:pPr>
+            <a:r>
+              <a:t>Step 6 - Issue SSL Certificate (HTTPS)</a:t>
             </a:r>
           </a:p>
         </p:txBody>
@@ -6211,8 +6404,8 @@
         </p:nvSpPr>
         <p:spPr>
           <a:xfrm>
-            <a:off x="731520" y="1645920"/>
-            <a:ext cx="5120640" cy="4114800"/>
+            <a:off x="731520" y="1600200"/>
+            <a:ext cx="5120640" cy="4297680"/>
           </a:xfrm>
           <a:prstGeom prst="rect">
             <a:avLst/>
@@ -6241,122 +6434,102 @@
           </a:fontRef>
         </p:style>
         <p:txBody>
-          <a:bodyPr rtlCol="0" anchor="ctr" wrap="square" lIns="274320" rIns="274320" tIns="274320" bIns="274320"/>
+          <a:bodyPr rtlCol="0" anchor="ctr" wrap="square" lIns="256032" rIns="256032" tIns="201168" bIns="201168"/>
           <a:lstStyle/>
           <a:p>
             <a:pPr algn="ctr">
               <a:spcAft>
-                <a:spcPts val="1400"/>
-              </a:spcAft>
-              <a:defRPr sz="1800" b="1">
-                <a:solidFill>
-                  <a:srgbClr val="38BDF8"/>
-                </a:solidFill>
-                <a:latin typeface="Segoe UI"/>
-              </a:defRPr>
-            </a:pPr>
-            <a:r>
-              <a:t>CI/CD Workflow Steps</a:t>
-            </a:r>
-          </a:p>
-          <a:p>
-            <a:pPr>
-              <a:spcAft>
-                <a:spcPts val="800"/>
-              </a:spcAft>
-              <a:defRPr sz="1300">
-                <a:solidFill>
-                  <a:srgbClr val="F8FAFC"/>
-                </a:solidFill>
-                <a:latin typeface="Segoe UI"/>
-              </a:defRPr>
-            </a:pPr>
-            <a:r>
-              <a:t>• 1. Push Code:</a:t>
-            </a:r>
-            <a:br/>
-            <a:r>
-              <a:t>Developer pushes edits or references to Git</a:t>
-            </a:r>
-          </a:p>
-          <a:p>
-            <a:pPr>
-              <a:spcAft>
-                <a:spcPts val="800"/>
-              </a:spcAft>
-              <a:defRPr sz="1300">
-                <a:solidFill>
-                  <a:srgbClr val="F8FAFC"/>
-                </a:solidFill>
-                <a:latin typeface="Segoe UI"/>
-              </a:defRPr>
-            </a:pPr>
-            <a:r>
-              <a:t>• 2. Test Model:</a:t>
-            </a:r>
-            <a:br/>
-            <a:r>
-              <a:t>CI runs python tests verifying model weights load successfully</a:t>
-            </a:r>
-          </a:p>
-          <a:p>
-            <a:pPr>
-              <a:spcAft>
-                <a:spcPts val="800"/>
-              </a:spcAft>
-              <a:defRPr sz="1300">
-                <a:solidFill>
-                  <a:srgbClr val="F8FAFC"/>
-                </a:solidFill>
-                <a:latin typeface="Segoe UI"/>
-              </a:defRPr>
-            </a:pPr>
-            <a:r>
-              <a:t>• 3. Package Container:</a:t>
-            </a:r>
-            <a:br/>
-            <a:r>
-              <a:t>Builds the Docker image caching the weights file</a:t>
-            </a:r>
-          </a:p>
-          <a:p>
-            <a:pPr>
-              <a:spcAft>
-                <a:spcPts val="800"/>
-              </a:spcAft>
-              <a:defRPr sz="1300">
-                <a:solidFill>
-                  <a:srgbClr val="F8FAFC"/>
-                </a:solidFill>
-                <a:latin typeface="Segoe UI"/>
-              </a:defRPr>
-            </a:pPr>
-            <a:r>
-              <a:t>• 4. Publish Image:</a:t>
-            </a:r>
-            <a:br/>
-            <a:r>
-              <a:t>Docker image is pushed to central Docker Hub</a:t>
-            </a:r>
-          </a:p>
-          <a:p>
-            <a:pPr>
-              <a:spcAft>
-                <a:spcPts val="800"/>
-              </a:spcAft>
-              <a:defRPr sz="1300">
-                <a:solidFill>
-                  <a:srgbClr val="F8FAFC"/>
-                </a:solidFill>
-                <a:latin typeface="Segoe UI"/>
-              </a:defRPr>
-            </a:pPr>
-            <a:r>
-              <a:t>• 5. Deploy Server:</a:t>
-            </a:r>
-            <a:br/>
-            <a:r>
-              <a:t>SSH command triggers target server to pull and restart</a:t>
+                <a:spcPts val="1200"/>
+              </a:spcAft>
+              <a:defRPr sz="1700" b="1">
+                <a:solidFill>
+                  <a:srgbClr val="22C55E"/>
+                </a:solidFill>
+                <a:latin typeface="Segoe UI"/>
+              </a:defRPr>
+            </a:pPr>
+            <a:r>
+              <a:t>Certbot Command</a:t>
+            </a:r>
+          </a:p>
+          <a:p>
+            <a:pPr>
+              <a:spcAft>
+                <a:spcPts val="700"/>
+              </a:spcAft>
+              <a:defRPr sz="1250">
+                <a:solidFill>
+                  <a:srgbClr val="F8FAFC"/>
+                </a:solidFill>
+                <a:latin typeface="Segoe UI"/>
+              </a:defRPr>
+            </a:pPr>
+            <a:r>
+              <a:t>• sudo certbot --nginx -d your-domain.com</a:t>
+            </a:r>
+          </a:p>
+          <a:p>
+            <a:pPr>
+              <a:spcAft>
+                <a:spcPts val="700"/>
+              </a:spcAft>
+              <a:defRPr sz="1250">
+                <a:solidFill>
+                  <a:srgbClr val="F8FAFC"/>
+                </a:solidFill>
+                <a:latin typeface="Segoe UI"/>
+              </a:defRPr>
+            </a:pPr>
+            <a:r>
+              <a:t>• Certbot contacts Let's Encrypt CA automatically</a:t>
+            </a:r>
+          </a:p>
+          <a:p>
+            <a:pPr>
+              <a:spcAft>
+                <a:spcPts val="700"/>
+              </a:spcAft>
+              <a:defRPr sz="1250">
+                <a:solidFill>
+                  <a:srgbClr val="F8FAFC"/>
+                </a:solidFill>
+                <a:latin typeface="Segoe UI"/>
+              </a:defRPr>
+            </a:pPr>
+            <a:r>
+              <a:t>• Installs certificate files into Nginx config</a:t>
+            </a:r>
+          </a:p>
+          <a:p>
+            <a:pPr>
+              <a:spcAft>
+                <a:spcPts val="700"/>
+              </a:spcAft>
+              <a:defRPr sz="1250">
+                <a:solidFill>
+                  <a:srgbClr val="F8FAFC"/>
+                </a:solidFill>
+                <a:latin typeface="Segoe UI"/>
+              </a:defRPr>
+            </a:pPr>
+            <a:r>
+              <a:t>• Enables automatic HTTP to HTTPS redirect</a:t>
+            </a:r>
+          </a:p>
+          <a:p>
+            <a:pPr>
+              <a:spcAft>
+                <a:spcPts val="700"/>
+              </a:spcAft>
+              <a:defRPr sz="1250">
+                <a:solidFill>
+                  <a:srgbClr val="F8FAFC"/>
+                </a:solidFill>
+                <a:latin typeface="Segoe UI"/>
+              </a:defRPr>
+            </a:pPr>
+            <a:r>
+              <a:t>• App is now live at https://your-domain.com</a:t>
             </a:r>
           </a:p>
         </p:txBody>
@@ -6369,8 +6542,8 @@
         </p:nvSpPr>
         <p:spPr>
           <a:xfrm>
-            <a:off x="6309360" y="1645920"/>
-            <a:ext cx="5120640" cy="4114800"/>
+            <a:off x="6309360" y="1600200"/>
+            <a:ext cx="5120640" cy="4297680"/>
           </a:xfrm>
           <a:prstGeom prst="rect">
             <a:avLst/>
@@ -6399,14 +6572,14 @@
           </a:fontRef>
         </p:style>
         <p:txBody>
-          <a:bodyPr rtlCol="0" anchor="ctr" wrap="square" lIns="274320" rIns="274320" tIns="274320" bIns="274320"/>
+          <a:bodyPr rtlCol="0" anchor="ctr" wrap="square" lIns="256032" rIns="256032" tIns="201168" bIns="201168"/>
           <a:lstStyle/>
           <a:p>
             <a:pPr algn="ctr">
               <a:spcAft>
-                <a:spcPts val="1400"/>
-              </a:spcAft>
-              <a:defRPr sz="1800" b="1">
+                <a:spcPts val="1200"/>
+              </a:spcAft>
+              <a:defRPr sz="1700" b="1">
                 <a:solidFill>
                   <a:srgbClr val="38BDF8"/>
                 </a:solidFill>
@@ -6414,63 +6587,477 @@
               </a:defRPr>
             </a:pPr>
             <a:r>
-              <a:t>Handling Model Weights</a:t>
-            </a:r>
-          </a:p>
-          <a:p>
-            <a:pPr>
-              <a:spcAft>
-                <a:spcPts val="800"/>
-              </a:spcAft>
-              <a:defRPr sz="1300">
-                <a:solidFill>
-                  <a:srgbClr val="F8FAFC"/>
-                </a:solidFill>
-                <a:latin typeface="Segoe UI"/>
-              </a:defRPr>
-            </a:pPr>
-            <a:r>
-              <a:t>• Weights files (.pt) are too large for GitHub repositories</a:t>
-            </a:r>
-          </a:p>
-          <a:p>
-            <a:pPr>
-              <a:spcAft>
-                <a:spcPts val="800"/>
-              </a:spcAft>
-              <a:defRPr sz="1300">
-                <a:solidFill>
-                  <a:srgbClr val="F8FAFC"/>
-                </a:solidFill>
-                <a:latin typeface="Segoe UI"/>
-              </a:defRPr>
-            </a:pPr>
-            <a:r>
-              <a:t>• S3 / DVC integration:</a:t>
-            </a:r>
-            <a:br/>
-            <a:r>
-              <a:t>Store weights files in S3 or Google Cloud storage</a:t>
-            </a:r>
-          </a:p>
-          <a:p>
-            <a:pPr>
-              <a:spcAft>
-                <a:spcPts val="800"/>
-              </a:spcAft>
-              <a:defRPr sz="1300">
-                <a:solidFill>
-                  <a:srgbClr val="F8FAFC"/>
-                </a:solidFill>
-                <a:latin typeface="Segoe UI"/>
-              </a:defRPr>
-            </a:pPr>
-            <a:r>
-              <a:t>• Build-time fetch:</a:t>
-            </a:r>
-            <a:br/>
-            <a:r>
-              <a:t>The GitHub Actions build runner downloads the weights from storage and bakes them directly into the Docker image before pushing to the hub.</a:t>
+              <a:t>Auto-Renewal &amp; Security</a:t>
+            </a:r>
+          </a:p>
+          <a:p>
+            <a:pPr>
+              <a:spcAft>
+                <a:spcPts val="700"/>
+              </a:spcAft>
+              <a:defRPr sz="1250">
+                <a:solidFill>
+                  <a:srgbClr val="F8FAFC"/>
+                </a:solidFill>
+                <a:latin typeface="Segoe UI"/>
+              </a:defRPr>
+            </a:pPr>
+            <a:r>
+              <a:t>• Certbot sets up a system cron/timer job automatically</a:t>
+            </a:r>
+          </a:p>
+          <a:p>
+            <a:pPr>
+              <a:spcAft>
+                <a:spcPts val="700"/>
+              </a:spcAft>
+              <a:defRPr sz="1250">
+                <a:solidFill>
+                  <a:srgbClr val="F8FAFC"/>
+                </a:solidFill>
+                <a:latin typeface="Segoe UI"/>
+              </a:defRPr>
+            </a:pPr>
+            <a:r>
+              <a:t>• Certificate renews every 90 days without manual action</a:t>
+            </a:r>
+          </a:p>
+          <a:p>
+            <a:pPr>
+              <a:spcAft>
+                <a:spcPts val="700"/>
+              </a:spcAft>
+              <a:defRPr sz="1250">
+                <a:solidFill>
+                  <a:srgbClr val="F8FAFC"/>
+                </a:solidFill>
+                <a:latin typeface="Segoe UI"/>
+              </a:defRPr>
+            </a:pPr>
+            <a:r>
+              <a:t>• All user uploads &amp; predictions are encrypted in transit</a:t>
+            </a:r>
+          </a:p>
+          <a:p>
+            <a:pPr>
+              <a:spcAft>
+                <a:spcPts val="700"/>
+              </a:spcAft>
+              <a:defRPr sz="1250">
+                <a:solidFill>
+                  <a:srgbClr val="F8FAFC"/>
+                </a:solidFill>
+                <a:latin typeface="Segoe UI"/>
+              </a:defRPr>
+            </a:pPr>
+            <a:r>
+              <a:t>• Browser shows trusted padlock icon (no SSL warnings)</a:t>
+            </a:r>
+          </a:p>
+        </p:txBody>
+      </p:sp>
+    </p:spTree>
+  </p:cSld>
+  <p:clrMapOvr>
+    <a:masterClrMapping/>
+  </p:clrMapOvr>
+</p:sld>
+</file>
+
+<file path=ppt/slides/slide9.xml><?xml version="1.0" encoding="utf-8"?>
+<p:sld xmlns:a="http://schemas.openxmlformats.org/drawingml/2006/main" xmlns:p="http://schemas.openxmlformats.org/presentationml/2006/main" xmlns:r="http://schemas.openxmlformats.org/officeDocument/2006/relationships">
+  <p:cSld>
+    <p:bg>
+      <p:bgPr>
+        <a:solidFill>
+          <a:srgbClr val="0F172A"/>
+        </a:solidFill>
+        <a:effectLst/>
+      </p:bgPr>
+    </p:bg>
+    <p:spTree>
+      <p:nvGrpSpPr>
+        <p:cNvPr id="1" name=""/>
+        <p:cNvGrpSpPr/>
+        <p:nvPr/>
+      </p:nvGrpSpPr>
+      <p:grpSpPr/>
+      <p:sp>
+        <p:nvSpPr>
+          <p:cNvPr id="2" name="TextBox 1"/>
+          <p:cNvSpPr txBox="1"/>
+          <p:nvPr/>
+        </p:nvSpPr>
+        <p:spPr>
+          <a:xfrm>
+            <a:off x="731520" y="320040"/>
+            <a:ext cx="10698480" cy="365760"/>
+          </a:xfrm>
+          <a:prstGeom prst="rect">
+            <a:avLst/>
+          </a:prstGeom>
+          <a:noFill/>
+        </p:spPr>
+        <p:txBody>
+          <a:bodyPr wrap="none">
+            <a:spAutoFit/>
+          </a:bodyPr>
+          <a:lstStyle/>
+          <a:p>
+            <a:pPr>
+              <a:defRPr sz="1000" b="1">
+                <a:solidFill>
+                  <a:srgbClr val="38BDF8"/>
+                </a:solidFill>
+                <a:latin typeface="Segoe UI"/>
+              </a:defRPr>
+            </a:pPr>
+            <a:r>
+              <a:t>RUNPOD</a:t>
+            </a:r>
+          </a:p>
+        </p:txBody>
+      </p:sp>
+      <p:sp>
+        <p:nvSpPr>
+          <p:cNvPr id="3" name="TextBox 2"/>
+          <p:cNvSpPr txBox="1"/>
+          <p:nvPr/>
+        </p:nvSpPr>
+        <p:spPr>
+          <a:xfrm>
+            <a:off x="731520" y="658368"/>
+            <a:ext cx="10698480" cy="777240"/>
+          </a:xfrm>
+          <a:prstGeom prst="rect">
+            <a:avLst/>
+          </a:prstGeom>
+          <a:noFill/>
+        </p:spPr>
+        <p:txBody>
+          <a:bodyPr wrap="square">
+            <a:spAutoFit/>
+          </a:bodyPr>
+          <a:lstStyle/>
+          <a:p>
+            <a:pPr>
+              <a:defRPr sz="3100" b="1">
+                <a:solidFill>
+                  <a:srgbClr val="F8FAFC"/>
+                </a:solidFill>
+                <a:latin typeface="Segoe UI"/>
+              </a:defRPr>
+            </a:pPr>
+            <a:r>
+              <a:t>Option 2 - RunPod Cloud GPU Deployment</a:t>
+            </a:r>
+          </a:p>
+        </p:txBody>
+      </p:sp>
+      <p:sp>
+        <p:nvSpPr>
+          <p:cNvPr id="4" name="Rectangle 3"/>
+          <p:cNvSpPr/>
+          <p:nvPr/>
+        </p:nvSpPr>
+        <p:spPr>
+          <a:xfrm>
+            <a:off x="731520" y="1600200"/>
+            <a:ext cx="5120640" cy="4297680"/>
+          </a:xfrm>
+          <a:prstGeom prst="rect">
+            <a:avLst/>
+          </a:prstGeom>
+          <a:solidFill>
+            <a:srgbClr val="1E293B"/>
+          </a:solidFill>
+          <a:ln>
+            <a:solidFill>
+              <a:srgbClr val="1E293B"/>
+            </a:solidFill>
+          </a:ln>
+        </p:spPr>
+        <p:style>
+          <a:lnRef idx="1">
+            <a:schemeClr val="accent1"/>
+          </a:lnRef>
+          <a:fillRef idx="3">
+            <a:schemeClr val="accent1"/>
+          </a:fillRef>
+          <a:effectRef idx="2">
+            <a:schemeClr val="accent1"/>
+          </a:effectRef>
+          <a:fontRef idx="minor">
+            <a:schemeClr val="lt1"/>
+          </a:fontRef>
+        </p:style>
+        <p:txBody>
+          <a:bodyPr rtlCol="0" anchor="ctr" wrap="square" lIns="256032" rIns="256032" tIns="201168" bIns="201168"/>
+          <a:lstStyle/>
+          <a:p>
+            <a:pPr algn="ctr">
+              <a:spcAft>
+                <a:spcPts val="1200"/>
+              </a:spcAft>
+              <a:defRPr sz="1700" b="1">
+                <a:solidFill>
+                  <a:srgbClr val="38BDF8"/>
+                </a:solidFill>
+                <a:latin typeface="Segoe UI"/>
+              </a:defRPr>
+            </a:pPr>
+            <a:r>
+              <a:t>Method A: RunPod Pods</a:t>
+            </a:r>
+          </a:p>
+          <a:p>
+            <a:pPr>
+              <a:spcAft>
+                <a:spcPts val="700"/>
+              </a:spcAft>
+              <a:defRPr sz="1250">
+                <a:solidFill>
+                  <a:srgbClr val="F8FAFC"/>
+                </a:solidFill>
+                <a:latin typeface="Segoe UI"/>
+              </a:defRPr>
+            </a:pPr>
+            <a:r>
+              <a:t>• Persistent GPU instances billed hourly</a:t>
+            </a:r>
+          </a:p>
+          <a:p>
+            <a:pPr>
+              <a:spcAft>
+                <a:spcPts val="700"/>
+              </a:spcAft>
+              <a:defRPr sz="1250">
+                <a:solidFill>
+                  <a:srgbClr val="F8FAFC"/>
+                </a:solidFill>
+                <a:latin typeface="Segoe UI"/>
+              </a:defRPr>
+            </a:pPr>
+            <a:r>
+              <a:t>• Full terminal access via SSH or Jupyter Lab</a:t>
+            </a:r>
+          </a:p>
+          <a:p>
+            <a:pPr>
+              <a:spcAft>
+                <a:spcPts val="700"/>
+              </a:spcAft>
+              <a:defRPr sz="1250">
+                <a:solidFill>
+                  <a:srgbClr val="F8FAFC"/>
+                </a:solidFill>
+                <a:latin typeface="Segoe UI"/>
+              </a:defRPr>
+            </a:pPr>
+            <a:r>
+              <a:t>• Persistent Network Volume keeps data across restarts</a:t>
+            </a:r>
+          </a:p>
+          <a:p>
+            <a:pPr>
+              <a:spcAft>
+                <a:spcPts val="700"/>
+              </a:spcAft>
+              <a:defRPr sz="1250">
+                <a:solidFill>
+                  <a:srgbClr val="F8FAFC"/>
+                </a:solidFill>
+                <a:latin typeface="Segoe UI"/>
+              </a:defRPr>
+            </a:pPr>
+            <a:r>
+              <a:t>• cd /workspace, clone repo, pip install, streamlit run</a:t>
+            </a:r>
+          </a:p>
+          <a:p>
+            <a:pPr>
+              <a:spcAft>
+                <a:spcPts val="700"/>
+              </a:spcAft>
+              <a:defRPr sz="1250">
+                <a:solidFill>
+                  <a:srgbClr val="F8FAFC"/>
+                </a:solidFill>
+                <a:latin typeface="Segoe UI"/>
+              </a:defRPr>
+            </a:pPr>
+            <a:r>
+              <a:t>• Connect - HTTP [Port 8501] gives a public HTTPS URL</a:t>
+            </a:r>
+          </a:p>
+          <a:p>
+            <a:pPr>
+              <a:spcAft>
+                <a:spcPts val="700"/>
+              </a:spcAft>
+              <a:defRPr sz="1250">
+                <a:solidFill>
+                  <a:srgbClr val="F8FAFC"/>
+                </a:solidFill>
+                <a:latin typeface="Segoe UI"/>
+              </a:defRPr>
+            </a:pPr>
+            <a:r>
+              <a:t>• Best for: dashboards, demos, interactive testing</a:t>
+            </a:r>
+          </a:p>
+        </p:txBody>
+      </p:sp>
+      <p:sp>
+        <p:nvSpPr>
+          <p:cNvPr id="5" name="Rectangle 4"/>
+          <p:cNvSpPr/>
+          <p:nvPr/>
+        </p:nvSpPr>
+        <p:spPr>
+          <a:xfrm>
+            <a:off x="6309360" y="1600200"/>
+            <a:ext cx="5120640" cy="4297680"/>
+          </a:xfrm>
+          <a:prstGeom prst="rect">
+            <a:avLst/>
+          </a:prstGeom>
+          <a:solidFill>
+            <a:srgbClr val="1E293B"/>
+          </a:solidFill>
+          <a:ln>
+            <a:solidFill>
+              <a:srgbClr val="1E293B"/>
+            </a:solidFill>
+          </a:ln>
+        </p:spPr>
+        <p:style>
+          <a:lnRef idx="1">
+            <a:schemeClr val="accent1"/>
+          </a:lnRef>
+          <a:fillRef idx="3">
+            <a:schemeClr val="accent1"/>
+          </a:fillRef>
+          <a:effectRef idx="2">
+            <a:schemeClr val="accent1"/>
+          </a:effectRef>
+          <a:fontRef idx="minor">
+            <a:schemeClr val="lt1"/>
+          </a:fontRef>
+        </p:style>
+        <p:txBody>
+          <a:bodyPr rtlCol="0" anchor="ctr" wrap="square" lIns="256032" rIns="256032" tIns="201168" bIns="201168"/>
+          <a:lstStyle/>
+          <a:p>
+            <a:pPr algn="ctr">
+              <a:spcAft>
+                <a:spcPts val="1200"/>
+              </a:spcAft>
+              <a:defRPr sz="1700" b="1">
+                <a:solidFill>
+                  <a:srgbClr val="38BDF8"/>
+                </a:solidFill>
+                <a:latin typeface="Segoe UI"/>
+              </a:defRPr>
+            </a:pPr>
+            <a:r>
+              <a:t>Method B: RunPod Serverless</a:t>
+            </a:r>
+          </a:p>
+          <a:p>
+            <a:pPr>
+              <a:spcAft>
+                <a:spcPts val="700"/>
+              </a:spcAft>
+              <a:defRPr sz="1250">
+                <a:solidFill>
+                  <a:srgbClr val="F8FAFC"/>
+                </a:solidFill>
+                <a:latin typeface="Segoe UI"/>
+              </a:defRPr>
+            </a:pPr>
+            <a:r>
+              <a:t>• Billed per-second only when handling requests</a:t>
+            </a:r>
+          </a:p>
+          <a:p>
+            <a:pPr>
+              <a:spcAft>
+                <a:spcPts val="700"/>
+              </a:spcAft>
+              <a:defRPr sz="1250">
+                <a:solidFill>
+                  <a:srgbClr val="F8FAFC"/>
+                </a:solidFill>
+                <a:latin typeface="Segoe UI"/>
+              </a:defRPr>
+            </a:pPr>
+            <a:r>
+              <a:t>• $0.00 idle cost when no traffic</a:t>
+            </a:r>
+          </a:p>
+          <a:p>
+            <a:pPr>
+              <a:spcAft>
+                <a:spcPts val="700"/>
+              </a:spcAft>
+              <a:defRPr sz="1250">
+                <a:solidFill>
+                  <a:srgbClr val="F8FAFC"/>
+                </a:solidFill>
+                <a:latin typeface="Segoe UI"/>
+              </a:defRPr>
+            </a:pPr>
+            <a:r>
+              <a:t>• Autoscales 0 to N workers on demand</a:t>
+            </a:r>
+          </a:p>
+          <a:p>
+            <a:pPr>
+              <a:spcAft>
+                <a:spcPts val="700"/>
+              </a:spcAft>
+              <a:defRPr sz="1250">
+                <a:solidFill>
+                  <a:srgbClr val="F8FAFC"/>
+                </a:solidFill>
+                <a:latin typeface="Segoe UI"/>
+              </a:defRPr>
+            </a:pPr>
+            <a:r>
+              <a:t>• Requires a handler.py wrapping YOLO inference logic</a:t>
+            </a:r>
+          </a:p>
+          <a:p>
+            <a:pPr>
+              <a:spcAft>
+                <a:spcPts val="700"/>
+              </a:spcAft>
+              <a:defRPr sz="1250">
+                <a:solidFill>
+                  <a:srgbClr val="F8FAFC"/>
+                </a:solidFill>
+                <a:latin typeface="Segoe UI"/>
+              </a:defRPr>
+            </a:pPr>
+            <a:r>
+              <a:t>• Build + push Docker image to Docker Hub</a:t>
+            </a:r>
+          </a:p>
+          <a:p>
+            <a:pPr>
+              <a:spcAft>
+                <a:spcPts val="700"/>
+              </a:spcAft>
+              <a:defRPr sz="1250">
+                <a:solidFill>
+                  <a:srgbClr val="F8FAFC"/>
+                </a:solidFill>
+                <a:latin typeface="Segoe UI"/>
+              </a:defRPr>
+            </a:pPr>
+            <a:r>
+              <a:t>• Best for: production APIs with variable traffic</a:t>
             </a:r>
           </a:p>
         </p:txBody>

--- a/AI-Deployment/AI_Deployment_Guide.pptx
+++ b/AI-Deployment/AI_Deployment_Guide.pptx
@@ -5,19 +5,19 @@
     <p:sldMasterId id="2147483648" r:id="rId1"/>
   </p:sldMasterIdLst>
   <p:sldIdLst>
-    <p:sldId id="256" r:id="rId7"/>
-    <p:sldId id="257" r:id="rId8"/>
-    <p:sldId id="258" r:id="rId9"/>
-    <p:sldId id="259" r:id="rId10"/>
-    <p:sldId id="260" r:id="rId11"/>
-    <p:sldId id="261" r:id="rId12"/>
-    <p:sldId id="262" r:id="rId13"/>
-    <p:sldId id="263" r:id="rId14"/>
-    <p:sldId id="264" r:id="rId15"/>
-    <p:sldId id="265" r:id="rId16"/>
-    <p:sldId id="266" r:id="rId17"/>
+    <p:sldId id="256" r:id="rId2"/>
+    <p:sldId id="257" r:id="rId3"/>
+    <p:sldId id="258" r:id="rId4"/>
+    <p:sldId id="259" r:id="rId5"/>
+    <p:sldId id="260" r:id="rId6"/>
+    <p:sldId id="261" r:id="rId7"/>
+    <p:sldId id="262" r:id="rId8"/>
+    <p:sldId id="263" r:id="rId9"/>
+    <p:sldId id="264" r:id="rId10"/>
+    <p:sldId id="265" r:id="rId11"/>
+    <p:sldId id="266" r:id="rId12"/>
   </p:sldIdLst>
-  <p:sldSz cx="12188952" cy="6858000" type="screen4x3"/>
+  <p:sldSz cx="12188825" cy="6858000"/>
   <p:notesSz cx="6858000" cy="9144000"/>
   <p:defaultTextStyle>
     <a:defPPr>
@@ -114,6 +114,22 @@
       </a:defRPr>
     </a:lvl9pPr>
   </p:defaultTextStyle>
+  <p:extLst>
+    <p:ext uri="{EFAFB233-063F-42B5-8137-9DF3F51BA10A}">
+      <p15:sldGuideLst xmlns:p15="http://schemas.microsoft.com/office/powerpoint/2012/main">
+        <p15:guide id="1" orient="horz" pos="2160">
+          <p15:clr>
+            <a:srgbClr val="A4A3A4"/>
+          </p15:clr>
+        </p15:guide>
+        <p15:guide id="2" pos="2880">
+          <p15:clr>
+            <a:srgbClr val="A4A3A4"/>
+          </p15:clr>
+        </p15:guide>
+      </p15:sldGuideLst>
+    </p:ext>
+  </p:extLst>
 </p:presentation>
 </file>
 
@@ -155,10 +171,9 @@
           <a:lstStyle/>
           <a:p>
             <a:r>
-              <a:rPr lang="en-US" smtClean="0"/>
+              <a:rPr lang="en-US"/>
               <a:t>Click to edit Master title style</a:t>
             </a:r>
-            <a:endParaRPr lang="en-US"/>
           </a:p>
         </p:txBody>
       </p:sp>
@@ -274,10 +289,9 @@
           </a:lstStyle>
           <a:p>
             <a:r>
-              <a:rPr lang="en-US" smtClean="0"/>
+              <a:rPr lang="en-US"/>
               <a:t>Click to edit Master subtitle style</a:t>
             </a:r>
-            <a:endParaRPr lang="en-US"/>
           </a:p>
         </p:txBody>
       </p:sp>
@@ -298,7 +312,7 @@
           <a:p>
             <a:fld id="{5BCAD085-E8A6-8845-BD4E-CB4CCA059FC4}" type="datetimeFigureOut">
               <a:rPr lang="en-US" smtClean="0"/>
-              <a:t>1/27/13</a:t>
+              <a:t>6/24/2026</a:t>
             </a:fld>
             <a:endParaRPr lang="en-US"/>
           </a:p>
@@ -392,10 +406,9 @@
           <a:lstStyle/>
           <a:p>
             <a:r>
-              <a:rPr lang="en-US" smtClean="0"/>
+              <a:rPr lang="en-US"/>
               <a:t>Click to edit Master title style</a:t>
             </a:r>
-            <a:endParaRPr lang="en-US"/>
           </a:p>
         </p:txBody>
       </p:sp>
@@ -416,38 +429,37 @@
           <a:p>
             <a:pPr lvl="0"/>
             <a:r>
-              <a:rPr lang="en-US" smtClean="0"/>
+              <a:rPr lang="en-US"/>
               <a:t>Click to edit Master text styles</a:t>
             </a:r>
           </a:p>
           <a:p>
             <a:pPr lvl="1"/>
             <a:r>
-              <a:rPr lang="en-US" smtClean="0"/>
+              <a:rPr lang="en-US"/>
               <a:t>Second level</a:t>
             </a:r>
           </a:p>
           <a:p>
             <a:pPr lvl="2"/>
             <a:r>
-              <a:rPr lang="en-US" smtClean="0"/>
+              <a:rPr lang="en-US"/>
               <a:t>Third level</a:t>
             </a:r>
           </a:p>
           <a:p>
             <a:pPr lvl="3"/>
             <a:r>
-              <a:rPr lang="en-US" smtClean="0"/>
+              <a:rPr lang="en-US"/>
               <a:t>Fourth level</a:t>
             </a:r>
           </a:p>
           <a:p>
             <a:pPr lvl="4"/>
             <a:r>
-              <a:rPr lang="en-US" smtClean="0"/>
+              <a:rPr lang="en-US"/>
               <a:t>Fifth level</a:t>
             </a:r>
-            <a:endParaRPr lang="en-US"/>
           </a:p>
         </p:txBody>
       </p:sp>
@@ -468,7 +480,7 @@
           <a:p>
             <a:fld id="{5BCAD085-E8A6-8845-BD4E-CB4CCA059FC4}" type="datetimeFigureOut">
               <a:rPr lang="en-US" smtClean="0"/>
-              <a:t>1/27/13</a:t>
+              <a:t>6/24/2026</a:t>
             </a:fld>
             <a:endParaRPr lang="en-US"/>
           </a:p>
@@ -567,10 +579,9 @@
           <a:lstStyle/>
           <a:p>
             <a:r>
-              <a:rPr lang="en-US" smtClean="0"/>
+              <a:rPr lang="en-US"/>
               <a:t>Click to edit Master title style</a:t>
             </a:r>
-            <a:endParaRPr lang="en-US"/>
           </a:p>
         </p:txBody>
       </p:sp>
@@ -596,38 +607,37 @@
           <a:p>
             <a:pPr lvl="0"/>
             <a:r>
-              <a:rPr lang="en-US" smtClean="0"/>
+              <a:rPr lang="en-US"/>
               <a:t>Click to edit Master text styles</a:t>
             </a:r>
           </a:p>
           <a:p>
             <a:pPr lvl="1"/>
             <a:r>
-              <a:rPr lang="en-US" smtClean="0"/>
+              <a:rPr lang="en-US"/>
               <a:t>Second level</a:t>
             </a:r>
           </a:p>
           <a:p>
             <a:pPr lvl="2"/>
             <a:r>
-              <a:rPr lang="en-US" smtClean="0"/>
+              <a:rPr lang="en-US"/>
               <a:t>Third level</a:t>
             </a:r>
           </a:p>
           <a:p>
             <a:pPr lvl="3"/>
             <a:r>
-              <a:rPr lang="en-US" smtClean="0"/>
+              <a:rPr lang="en-US"/>
               <a:t>Fourth level</a:t>
             </a:r>
           </a:p>
           <a:p>
             <a:pPr lvl="4"/>
             <a:r>
-              <a:rPr lang="en-US" smtClean="0"/>
+              <a:rPr lang="en-US"/>
               <a:t>Fifth level</a:t>
             </a:r>
-            <a:endParaRPr lang="en-US"/>
           </a:p>
         </p:txBody>
       </p:sp>
@@ -648,7 +658,7 @@
           <a:p>
             <a:fld id="{5BCAD085-E8A6-8845-BD4E-CB4CCA059FC4}" type="datetimeFigureOut">
               <a:rPr lang="en-US" smtClean="0"/>
-              <a:t>1/27/13</a:t>
+              <a:t>6/24/2026</a:t>
             </a:fld>
             <a:endParaRPr lang="en-US"/>
           </a:p>
@@ -742,10 +752,9 @@
           <a:lstStyle/>
           <a:p>
             <a:r>
-              <a:rPr lang="en-US" smtClean="0"/>
+              <a:rPr lang="en-US"/>
               <a:t>Click to edit Master title style</a:t>
             </a:r>
-            <a:endParaRPr lang="en-US"/>
           </a:p>
         </p:txBody>
       </p:sp>
@@ -766,38 +775,37 @@
           <a:p>
             <a:pPr lvl="0"/>
             <a:r>
-              <a:rPr lang="en-US" smtClean="0"/>
+              <a:rPr lang="en-US"/>
               <a:t>Click to edit Master text styles</a:t>
             </a:r>
           </a:p>
           <a:p>
             <a:pPr lvl="1"/>
             <a:r>
-              <a:rPr lang="en-US" smtClean="0"/>
+              <a:rPr lang="en-US"/>
               <a:t>Second level</a:t>
             </a:r>
           </a:p>
           <a:p>
             <a:pPr lvl="2"/>
             <a:r>
-              <a:rPr lang="en-US" smtClean="0"/>
+              <a:rPr lang="en-US"/>
               <a:t>Third level</a:t>
             </a:r>
           </a:p>
           <a:p>
             <a:pPr lvl="3"/>
             <a:r>
-              <a:rPr lang="en-US" smtClean="0"/>
+              <a:rPr lang="en-US"/>
               <a:t>Fourth level</a:t>
             </a:r>
           </a:p>
           <a:p>
             <a:pPr lvl="4"/>
             <a:r>
-              <a:rPr lang="en-US" smtClean="0"/>
+              <a:rPr lang="en-US"/>
               <a:t>Fifth level</a:t>
             </a:r>
-            <a:endParaRPr lang="en-US"/>
           </a:p>
         </p:txBody>
       </p:sp>
@@ -818,7 +826,7 @@
           <a:p>
             <a:fld id="{5BCAD085-E8A6-8845-BD4E-CB4CCA059FC4}" type="datetimeFigureOut">
               <a:rPr lang="en-US" smtClean="0"/>
-              <a:t>1/27/13</a:t>
+              <a:t>6/24/2026</a:t>
             </a:fld>
             <a:endParaRPr lang="en-US"/>
           </a:p>
@@ -921,10 +929,9 @@
           </a:lstStyle>
           <a:p>
             <a:r>
-              <a:rPr lang="en-US" smtClean="0"/>
+              <a:rPr lang="en-US"/>
               <a:t>Click to edit Master title style</a:t>
             </a:r>
-            <a:endParaRPr lang="en-US"/>
           </a:p>
         </p:txBody>
       </p:sp>
@@ -1041,7 +1048,7 @@
           <a:p>
             <a:pPr lvl="0"/>
             <a:r>
-              <a:rPr lang="en-US" smtClean="0"/>
+              <a:rPr lang="en-US"/>
               <a:t>Click to edit Master text styles</a:t>
             </a:r>
           </a:p>
@@ -1064,7 +1071,7 @@
           <a:p>
             <a:fld id="{5BCAD085-E8A6-8845-BD4E-CB4CCA059FC4}" type="datetimeFigureOut">
               <a:rPr lang="en-US" smtClean="0"/>
-              <a:t>1/27/13</a:t>
+              <a:t>6/24/2026</a:t>
             </a:fld>
             <a:endParaRPr lang="en-US"/>
           </a:p>
@@ -1158,10 +1165,9 @@
           <a:lstStyle/>
           <a:p>
             <a:r>
-              <a:rPr lang="en-US" smtClean="0"/>
+              <a:rPr lang="en-US"/>
               <a:t>Click to edit Master title style</a:t>
             </a:r>
-            <a:endParaRPr lang="en-US"/>
           </a:p>
         </p:txBody>
       </p:sp>
@@ -1215,38 +1221,37 @@
           <a:p>
             <a:pPr lvl="0"/>
             <a:r>
-              <a:rPr lang="en-US" smtClean="0"/>
+              <a:rPr lang="en-US"/>
               <a:t>Click to edit Master text styles</a:t>
             </a:r>
           </a:p>
           <a:p>
             <a:pPr lvl="1"/>
             <a:r>
-              <a:rPr lang="en-US" smtClean="0"/>
+              <a:rPr lang="en-US"/>
               <a:t>Second level</a:t>
             </a:r>
           </a:p>
           <a:p>
             <a:pPr lvl="2"/>
             <a:r>
-              <a:rPr lang="en-US" smtClean="0"/>
+              <a:rPr lang="en-US"/>
               <a:t>Third level</a:t>
             </a:r>
           </a:p>
           <a:p>
             <a:pPr lvl="3"/>
             <a:r>
-              <a:rPr lang="en-US" smtClean="0"/>
+              <a:rPr lang="en-US"/>
               <a:t>Fourth level</a:t>
             </a:r>
           </a:p>
           <a:p>
             <a:pPr lvl="4"/>
             <a:r>
-              <a:rPr lang="en-US" smtClean="0"/>
+              <a:rPr lang="en-US"/>
               <a:t>Fifth level</a:t>
             </a:r>
-            <a:endParaRPr lang="en-US"/>
           </a:p>
         </p:txBody>
       </p:sp>
@@ -1300,38 +1305,37 @@
           <a:p>
             <a:pPr lvl="0"/>
             <a:r>
-              <a:rPr lang="en-US" smtClean="0"/>
+              <a:rPr lang="en-US"/>
               <a:t>Click to edit Master text styles</a:t>
             </a:r>
           </a:p>
           <a:p>
             <a:pPr lvl="1"/>
             <a:r>
-              <a:rPr lang="en-US" smtClean="0"/>
+              <a:rPr lang="en-US"/>
               <a:t>Second level</a:t>
             </a:r>
           </a:p>
           <a:p>
             <a:pPr lvl="2"/>
             <a:r>
-              <a:rPr lang="en-US" smtClean="0"/>
+              <a:rPr lang="en-US"/>
               <a:t>Third level</a:t>
             </a:r>
           </a:p>
           <a:p>
             <a:pPr lvl="3"/>
             <a:r>
-              <a:rPr lang="en-US" smtClean="0"/>
+              <a:rPr lang="en-US"/>
               <a:t>Fourth level</a:t>
             </a:r>
           </a:p>
           <a:p>
             <a:pPr lvl="4"/>
             <a:r>
-              <a:rPr lang="en-US" smtClean="0"/>
+              <a:rPr lang="en-US"/>
               <a:t>Fifth level</a:t>
             </a:r>
-            <a:endParaRPr lang="en-US"/>
           </a:p>
         </p:txBody>
       </p:sp>
@@ -1352,7 +1356,7 @@
           <a:p>
             <a:fld id="{5BCAD085-E8A6-8845-BD4E-CB4CCA059FC4}" type="datetimeFigureOut">
               <a:rPr lang="en-US" smtClean="0"/>
-              <a:t>1/27/13</a:t>
+              <a:t>6/24/2026</a:t>
             </a:fld>
             <a:endParaRPr lang="en-US"/>
           </a:p>
@@ -1450,10 +1454,9 @@
           </a:lstStyle>
           <a:p>
             <a:r>
-              <a:rPr lang="en-US" smtClean="0"/>
+              <a:rPr lang="en-US"/>
               <a:t>Click to edit Master title style</a:t>
             </a:r>
-            <a:endParaRPr lang="en-US"/>
           </a:p>
         </p:txBody>
       </p:sp>
@@ -1516,7 +1519,7 @@
           <a:p>
             <a:pPr lvl="0"/>
             <a:r>
-              <a:rPr lang="en-US" smtClean="0"/>
+              <a:rPr lang="en-US"/>
               <a:t>Click to edit Master text styles</a:t>
             </a:r>
           </a:p>
@@ -1572,38 +1575,37 @@
           <a:p>
             <a:pPr lvl="0"/>
             <a:r>
-              <a:rPr lang="en-US" smtClean="0"/>
+              <a:rPr lang="en-US"/>
               <a:t>Click to edit Master text styles</a:t>
             </a:r>
           </a:p>
           <a:p>
             <a:pPr lvl="1"/>
             <a:r>
-              <a:rPr lang="en-US" smtClean="0"/>
+              <a:rPr lang="en-US"/>
               <a:t>Second level</a:t>
             </a:r>
           </a:p>
           <a:p>
             <a:pPr lvl="2"/>
             <a:r>
-              <a:rPr lang="en-US" smtClean="0"/>
+              <a:rPr lang="en-US"/>
               <a:t>Third level</a:t>
             </a:r>
           </a:p>
           <a:p>
             <a:pPr lvl="3"/>
             <a:r>
-              <a:rPr lang="en-US" smtClean="0"/>
+              <a:rPr lang="en-US"/>
               <a:t>Fourth level</a:t>
             </a:r>
           </a:p>
           <a:p>
             <a:pPr lvl="4"/>
             <a:r>
-              <a:rPr lang="en-US" smtClean="0"/>
+              <a:rPr lang="en-US"/>
               <a:t>Fifth level</a:t>
             </a:r>
-            <a:endParaRPr lang="en-US"/>
           </a:p>
         </p:txBody>
       </p:sp>
@@ -1666,7 +1668,7 @@
           <a:p>
             <a:pPr lvl="0"/>
             <a:r>
-              <a:rPr lang="en-US" smtClean="0"/>
+              <a:rPr lang="en-US"/>
               <a:t>Click to edit Master text styles</a:t>
             </a:r>
           </a:p>
@@ -1722,38 +1724,37 @@
           <a:p>
             <a:pPr lvl="0"/>
             <a:r>
-              <a:rPr lang="en-US" smtClean="0"/>
+              <a:rPr lang="en-US"/>
               <a:t>Click to edit Master text styles</a:t>
             </a:r>
           </a:p>
           <a:p>
             <a:pPr lvl="1"/>
             <a:r>
-              <a:rPr lang="en-US" smtClean="0"/>
+              <a:rPr lang="en-US"/>
               <a:t>Second level</a:t>
             </a:r>
           </a:p>
           <a:p>
             <a:pPr lvl="2"/>
             <a:r>
-              <a:rPr lang="en-US" smtClean="0"/>
+              <a:rPr lang="en-US"/>
               <a:t>Third level</a:t>
             </a:r>
           </a:p>
           <a:p>
             <a:pPr lvl="3"/>
             <a:r>
-              <a:rPr lang="en-US" smtClean="0"/>
+              <a:rPr lang="en-US"/>
               <a:t>Fourth level</a:t>
             </a:r>
           </a:p>
           <a:p>
             <a:pPr lvl="4"/>
             <a:r>
-              <a:rPr lang="en-US" smtClean="0"/>
+              <a:rPr lang="en-US"/>
               <a:t>Fifth level</a:t>
             </a:r>
-            <a:endParaRPr lang="en-US"/>
           </a:p>
         </p:txBody>
       </p:sp>
@@ -1774,7 +1775,7 @@
           <a:p>
             <a:fld id="{5BCAD085-E8A6-8845-BD4E-CB4CCA059FC4}" type="datetimeFigureOut">
               <a:rPr lang="en-US" smtClean="0"/>
-              <a:t>1/27/13</a:t>
+              <a:t>6/24/2026</a:t>
             </a:fld>
             <a:endParaRPr lang="en-US"/>
           </a:p>
@@ -1868,10 +1869,9 @@
           <a:lstStyle/>
           <a:p>
             <a:r>
-              <a:rPr lang="en-US" smtClean="0"/>
+              <a:rPr lang="en-US"/>
               <a:t>Click to edit Master title style</a:t>
             </a:r>
-            <a:endParaRPr lang="en-US"/>
           </a:p>
         </p:txBody>
       </p:sp>
@@ -1892,7 +1892,7 @@
           <a:p>
             <a:fld id="{5BCAD085-E8A6-8845-BD4E-CB4CCA059FC4}" type="datetimeFigureOut">
               <a:rPr lang="en-US" smtClean="0"/>
-              <a:t>1/27/13</a:t>
+              <a:t>6/24/2026</a:t>
             </a:fld>
             <a:endParaRPr lang="en-US"/>
           </a:p>
@@ -1987,7 +1987,7 @@
           <a:p>
             <a:fld id="{5BCAD085-E8A6-8845-BD4E-CB4CCA059FC4}" type="datetimeFigureOut">
               <a:rPr lang="en-US" smtClean="0"/>
-              <a:t>1/27/13</a:t>
+              <a:t>6/24/2026</a:t>
             </a:fld>
             <a:endParaRPr lang="en-US"/>
           </a:p>
@@ -2090,10 +2090,9 @@
           </a:lstStyle>
           <a:p>
             <a:r>
-              <a:rPr lang="en-US" smtClean="0"/>
+              <a:rPr lang="en-US"/>
               <a:t>Click to edit Master title style</a:t>
             </a:r>
-            <a:endParaRPr lang="en-US"/>
           </a:p>
         </p:txBody>
       </p:sp>
@@ -2147,38 +2146,37 @@
           <a:p>
             <a:pPr lvl="0"/>
             <a:r>
-              <a:rPr lang="en-US" smtClean="0"/>
+              <a:rPr lang="en-US"/>
               <a:t>Click to edit Master text styles</a:t>
             </a:r>
           </a:p>
           <a:p>
             <a:pPr lvl="1"/>
             <a:r>
-              <a:rPr lang="en-US" smtClean="0"/>
+              <a:rPr lang="en-US"/>
               <a:t>Second level</a:t>
             </a:r>
           </a:p>
           <a:p>
             <a:pPr lvl="2"/>
             <a:r>
-              <a:rPr lang="en-US" smtClean="0"/>
+              <a:rPr lang="en-US"/>
               <a:t>Third level</a:t>
             </a:r>
           </a:p>
           <a:p>
             <a:pPr lvl="3"/>
             <a:r>
-              <a:rPr lang="en-US" smtClean="0"/>
+              <a:rPr lang="en-US"/>
               <a:t>Fourth level</a:t>
             </a:r>
           </a:p>
           <a:p>
             <a:pPr lvl="4"/>
             <a:r>
-              <a:rPr lang="en-US" smtClean="0"/>
+              <a:rPr lang="en-US"/>
               <a:t>Fifth level</a:t>
             </a:r>
-            <a:endParaRPr lang="en-US"/>
           </a:p>
         </p:txBody>
       </p:sp>
@@ -2241,7 +2239,7 @@
           <a:p>
             <a:pPr lvl="0"/>
             <a:r>
-              <a:rPr lang="en-US" smtClean="0"/>
+              <a:rPr lang="en-US"/>
               <a:t>Click to edit Master text styles</a:t>
             </a:r>
           </a:p>
@@ -2264,7 +2262,7 @@
           <a:p>
             <a:fld id="{5BCAD085-E8A6-8845-BD4E-CB4CCA059FC4}" type="datetimeFigureOut">
               <a:rPr lang="en-US" smtClean="0"/>
-              <a:t>1/27/13</a:t>
+              <a:t>6/24/2026</a:t>
             </a:fld>
             <a:endParaRPr lang="en-US"/>
           </a:p>
@@ -2367,10 +2365,9 @@
           </a:lstStyle>
           <a:p>
             <a:r>
-              <a:rPr lang="en-US" smtClean="0"/>
+              <a:rPr lang="en-US"/>
               <a:t>Click to edit Master title style</a:t>
             </a:r>
-            <a:endParaRPr lang="en-US"/>
           </a:p>
         </p:txBody>
       </p:sp>
@@ -2494,7 +2491,7 @@
           <a:p>
             <a:pPr lvl="0"/>
             <a:r>
-              <a:rPr lang="en-US" smtClean="0"/>
+              <a:rPr lang="en-US"/>
               <a:t>Click to edit Master text styles</a:t>
             </a:r>
           </a:p>
@@ -2517,7 +2514,7 @@
           <a:p>
             <a:fld id="{5BCAD085-E8A6-8845-BD4E-CB4CCA059FC4}" type="datetimeFigureOut">
               <a:rPr lang="en-US" smtClean="0"/>
-              <a:t>1/27/13</a:t>
+              <a:t>6/24/2026</a:t>
             </a:fld>
             <a:endParaRPr lang="en-US"/>
           </a:p>
@@ -2626,10 +2623,9 @@
           <a:lstStyle/>
           <a:p>
             <a:r>
-              <a:rPr lang="en-US" smtClean="0"/>
+              <a:rPr lang="en-US"/>
               <a:t>Click to edit Master title style</a:t>
             </a:r>
-            <a:endParaRPr lang="en-US"/>
           </a:p>
         </p:txBody>
       </p:sp>
@@ -2660,38 +2656,37 @@
           <a:p>
             <a:pPr lvl="0"/>
             <a:r>
-              <a:rPr lang="en-US" smtClean="0"/>
+              <a:rPr lang="en-US"/>
               <a:t>Click to edit Master text styles</a:t>
             </a:r>
           </a:p>
           <a:p>
             <a:pPr lvl="1"/>
             <a:r>
-              <a:rPr lang="en-US" smtClean="0"/>
+              <a:rPr lang="en-US"/>
               <a:t>Second level</a:t>
             </a:r>
           </a:p>
           <a:p>
             <a:pPr lvl="2"/>
             <a:r>
-              <a:rPr lang="en-US" smtClean="0"/>
+              <a:rPr lang="en-US"/>
               <a:t>Third level</a:t>
             </a:r>
           </a:p>
           <a:p>
             <a:pPr lvl="3"/>
             <a:r>
-              <a:rPr lang="en-US" smtClean="0"/>
+              <a:rPr lang="en-US"/>
               <a:t>Fourth level</a:t>
             </a:r>
           </a:p>
           <a:p>
             <a:pPr lvl="4"/>
             <a:r>
-              <a:rPr lang="en-US" smtClean="0"/>
+              <a:rPr lang="en-US"/>
               <a:t>Fifth level</a:t>
             </a:r>
-            <a:endParaRPr lang="en-US"/>
           </a:p>
         </p:txBody>
       </p:sp>
@@ -2730,7 +2725,7 @@
           <a:p>
             <a:fld id="{5BCAD085-E8A6-8845-BD4E-CB4CCA059FC4}" type="datetimeFigureOut">
               <a:rPr lang="en-US" smtClean="0"/>
-              <a:t>1/27/13</a:t>
+              <a:t>6/24/2026</a:t>
             </a:fld>
             <a:endParaRPr lang="en-US"/>
           </a:p>
@@ -3089,7 +3084,7 @@
 </file>
 
 <file path=ppt/slides/slide1.xml><?xml version="1.0" encoding="utf-8"?>
-<p:sld xmlns:a="http://schemas.openxmlformats.org/drawingml/2006/main" xmlns:p="http://schemas.openxmlformats.org/presentationml/2006/main" xmlns:r="http://schemas.openxmlformats.org/officeDocument/2006/relationships">
+<p:sld xmlns:a="http://schemas.openxmlformats.org/drawingml/2006/main" xmlns:r="http://schemas.openxmlformats.org/officeDocument/2006/relationships" xmlns:p="http://schemas.openxmlformats.org/presentationml/2006/main">
   <p:cSld>
     <p:bg>
       <p:bgPr>
@@ -3105,7 +3100,14 @@
         <p:cNvGrpSpPr/>
         <p:nvPr/>
       </p:nvGrpSpPr>
-      <p:grpSpPr/>
+      <p:grpSpPr>
+        <a:xfrm>
+          <a:off x="0" y="0"/>
+          <a:ext cx="0" cy="0"/>
+          <a:chOff x="0" y="0"/>
+          <a:chExt cx="0" cy="0"/>
+        </a:xfrm>
+      </p:grpSpPr>
       <p:sp>
         <p:nvSpPr>
           <p:cNvPr id="2" name="TextBox 1"/>
@@ -3219,7 +3221,7 @@
 </file>
 
 <file path=ppt/slides/slide10.xml><?xml version="1.0" encoding="utf-8"?>
-<p:sld xmlns:a="http://schemas.openxmlformats.org/drawingml/2006/main" xmlns:p="http://schemas.openxmlformats.org/presentationml/2006/main" xmlns:r="http://schemas.openxmlformats.org/officeDocument/2006/relationships">
+<p:sld xmlns:a="http://schemas.openxmlformats.org/drawingml/2006/main" xmlns:r="http://schemas.openxmlformats.org/officeDocument/2006/relationships" xmlns:p="http://schemas.openxmlformats.org/presentationml/2006/main">
   <p:cSld>
     <p:bg>
       <p:bgPr>
@@ -3235,7 +3237,14 @@
         <p:cNvGrpSpPr/>
         <p:nvPr/>
       </p:nvGrpSpPr>
-      <p:grpSpPr/>
+      <p:grpSpPr>
+        <a:xfrm>
+          <a:off x="0" y="0"/>
+          <a:ext cx="0" cy="0"/>
+          <a:chOff x="0" y="0"/>
+          <a:chExt cx="0" cy="0"/>
+        </a:xfrm>
+      </p:grpSpPr>
       <p:sp>
         <p:nvSpPr>
           <p:cNvPr id="2" name="TextBox 1"/>
@@ -3346,7 +3355,7 @@
           </a:fontRef>
         </p:style>
         <p:txBody>
-          <a:bodyPr rtlCol="0" anchor="ctr" wrap="square" lIns="256032" rIns="256032" tIns="201168" bIns="201168"/>
+          <a:bodyPr wrap="square" lIns="256032" tIns="201168" rIns="256032" bIns="201168" rtlCol="0" anchor="ctr"/>
           <a:lstStyle/>
           <a:p>
             <a:pPr algn="ctr">
@@ -3484,7 +3493,7 @@
           </a:fontRef>
         </p:style>
         <p:txBody>
-          <a:bodyPr rtlCol="0" anchor="ctr" wrap="square" lIns="256032" rIns="256032" tIns="201168" bIns="201168"/>
+          <a:bodyPr wrap="square" lIns="256032" tIns="201168" rIns="256032" bIns="201168" rtlCol="0" anchor="ctr"/>
           <a:lstStyle/>
           <a:p>
             <a:pPr algn="ctr">
@@ -3593,7 +3602,7 @@
 </file>
 
 <file path=ppt/slides/slide11.xml><?xml version="1.0" encoding="utf-8"?>
-<p:sld xmlns:a="http://schemas.openxmlformats.org/drawingml/2006/main" xmlns:p="http://schemas.openxmlformats.org/presentationml/2006/main" xmlns:r="http://schemas.openxmlformats.org/officeDocument/2006/relationships">
+<p:sld xmlns:a="http://schemas.openxmlformats.org/drawingml/2006/main" xmlns:r="http://schemas.openxmlformats.org/officeDocument/2006/relationships" xmlns:p="http://schemas.openxmlformats.org/presentationml/2006/main">
   <p:cSld>
     <p:bg>
       <p:bgPr>
@@ -3609,7 +3618,14 @@
         <p:cNvGrpSpPr/>
         <p:nvPr/>
       </p:nvGrpSpPr>
-      <p:grpSpPr/>
+      <p:grpSpPr>
+        <a:xfrm>
+          <a:off x="0" y="0"/>
+          <a:ext cx="0" cy="0"/>
+          <a:chOff x="0" y="0"/>
+          <a:chExt cx="0" cy="0"/>
+        </a:xfrm>
+      </p:grpSpPr>
       <p:sp>
         <p:nvSpPr>
           <p:cNvPr id="2" name="TextBox 1"/>
@@ -3720,7 +3736,7 @@
           </a:fontRef>
         </p:style>
         <p:txBody>
-          <a:bodyPr rtlCol="0" anchor="ctr" wrap="square" lIns="256032" rIns="256032" tIns="201168" bIns="201168"/>
+          <a:bodyPr wrap="square" lIns="256032" tIns="201168" rIns="256032" bIns="201168" rtlCol="0" anchor="ctr"/>
           <a:lstStyle/>
           <a:p>
             <a:pPr algn="ctr">
@@ -3858,7 +3874,7 @@
           </a:fontRef>
         </p:style>
         <p:txBody>
-          <a:bodyPr rtlCol="0" anchor="ctr" wrap="square" lIns="256032" rIns="256032" tIns="201168" bIns="201168"/>
+          <a:bodyPr wrap="square" lIns="256032" tIns="201168" rIns="256032" bIns="201168" rtlCol="0" anchor="ctr"/>
           <a:lstStyle/>
           <a:p>
             <a:pPr algn="ctr">
@@ -3967,7 +3983,7 @@
 </file>
 
 <file path=ppt/slides/slide2.xml><?xml version="1.0" encoding="utf-8"?>
-<p:sld xmlns:a="http://schemas.openxmlformats.org/drawingml/2006/main" xmlns:p="http://schemas.openxmlformats.org/presentationml/2006/main" xmlns:r="http://schemas.openxmlformats.org/officeDocument/2006/relationships">
+<p:sld xmlns:a="http://schemas.openxmlformats.org/drawingml/2006/main" xmlns:r="http://schemas.openxmlformats.org/officeDocument/2006/relationships" xmlns:p="http://schemas.openxmlformats.org/presentationml/2006/main">
   <p:cSld>
     <p:bg>
       <p:bgPr>
@@ -3983,7 +3999,14 @@
         <p:cNvGrpSpPr/>
         <p:nvPr/>
       </p:nvGrpSpPr>
-      <p:grpSpPr/>
+      <p:grpSpPr>
+        <a:xfrm>
+          <a:off x="0" y="0"/>
+          <a:ext cx="0" cy="0"/>
+          <a:chOff x="0" y="0"/>
+          <a:chExt cx="0" cy="0"/>
+        </a:xfrm>
+      </p:grpSpPr>
       <p:sp>
         <p:nvSpPr>
           <p:cNvPr id="2" name="TextBox 1"/>
@@ -4094,7 +4117,7 @@
           </a:fontRef>
         </p:style>
         <p:txBody>
-          <a:bodyPr rtlCol="0" anchor="ctr" wrap="square" lIns="256032" rIns="256032" tIns="201168" bIns="201168"/>
+          <a:bodyPr wrap="square" lIns="256032" tIns="201168" rIns="256032" bIns="201168" rtlCol="0" anchor="ctr"/>
           <a:lstStyle/>
           <a:p>
             <a:pPr algn="ctr">
@@ -4248,7 +4271,7 @@
           </a:fontRef>
         </p:style>
         <p:txBody>
-          <a:bodyPr rtlCol="0" anchor="ctr" wrap="square" lIns="256032" rIns="256032" tIns="201168" bIns="201168"/>
+          <a:bodyPr wrap="square" lIns="256032" tIns="201168" rIns="256032" bIns="201168" rtlCol="0" anchor="ctr"/>
           <a:lstStyle/>
           <a:p>
             <a:pPr algn="ctr">
@@ -4357,7 +4380,7 @@
 </file>
 
 <file path=ppt/slides/slide3.xml><?xml version="1.0" encoding="utf-8"?>
-<p:sld xmlns:a="http://schemas.openxmlformats.org/drawingml/2006/main" xmlns:p="http://schemas.openxmlformats.org/presentationml/2006/main" xmlns:r="http://schemas.openxmlformats.org/officeDocument/2006/relationships">
+<p:sld xmlns:a="http://schemas.openxmlformats.org/drawingml/2006/main" xmlns:r="http://schemas.openxmlformats.org/officeDocument/2006/relationships" xmlns:p="http://schemas.openxmlformats.org/presentationml/2006/main">
   <p:cSld>
     <p:bg>
       <p:bgPr>
@@ -4373,7 +4396,14 @@
         <p:cNvGrpSpPr/>
         <p:nvPr/>
       </p:nvGrpSpPr>
-      <p:grpSpPr/>
+      <p:grpSpPr>
+        <a:xfrm>
+          <a:off x="0" y="0"/>
+          <a:ext cx="0" cy="0"/>
+          <a:chOff x="0" y="0"/>
+          <a:chExt cx="0" cy="0"/>
+        </a:xfrm>
+      </p:grpSpPr>
       <p:sp>
         <p:nvSpPr>
           <p:cNvPr id="2" name="TextBox 1"/>
@@ -4484,7 +4514,7 @@
           </a:fontRef>
         </p:style>
         <p:txBody>
-          <a:bodyPr rtlCol="0" anchor="ctr" wrap="square" lIns="256032" rIns="256032" tIns="201168" bIns="201168"/>
+          <a:bodyPr wrap="square" lIns="256032" tIns="201168" rIns="256032" bIns="201168" rtlCol="0" anchor="ctr"/>
           <a:lstStyle/>
           <a:p>
             <a:pPr algn="ctr">
@@ -4638,7 +4668,7 @@
           </a:fontRef>
         </p:style>
         <p:txBody>
-          <a:bodyPr rtlCol="0" anchor="ctr" wrap="square" lIns="256032" rIns="256032" tIns="201168" bIns="201168"/>
+          <a:bodyPr wrap="square" lIns="256032" tIns="201168" rIns="256032" bIns="201168" rtlCol="0" anchor="ctr"/>
           <a:lstStyle/>
           <a:p>
             <a:pPr algn="ctr">
@@ -4747,7 +4777,7 @@
 </file>
 
 <file path=ppt/slides/slide4.xml><?xml version="1.0" encoding="utf-8"?>
-<p:sld xmlns:a="http://schemas.openxmlformats.org/drawingml/2006/main" xmlns:p="http://schemas.openxmlformats.org/presentationml/2006/main" xmlns:r="http://schemas.openxmlformats.org/officeDocument/2006/relationships">
+<p:sld xmlns:a="http://schemas.openxmlformats.org/drawingml/2006/main" xmlns:r="http://schemas.openxmlformats.org/officeDocument/2006/relationships" xmlns:p="http://schemas.openxmlformats.org/presentationml/2006/main">
   <p:cSld>
     <p:bg>
       <p:bgPr>
@@ -4763,7 +4793,14 @@
         <p:cNvGrpSpPr/>
         <p:nvPr/>
       </p:nvGrpSpPr>
-      <p:grpSpPr/>
+      <p:grpSpPr>
+        <a:xfrm>
+          <a:off x="0" y="0"/>
+          <a:ext cx="0" cy="0"/>
+          <a:chOff x="0" y="0"/>
+          <a:chExt cx="0" cy="0"/>
+        </a:xfrm>
+      </p:grpSpPr>
       <p:sp>
         <p:nvSpPr>
           <p:cNvPr id="2" name="TextBox 1"/>
@@ -4874,7 +4911,7 @@
           </a:fontRef>
         </p:style>
         <p:txBody>
-          <a:bodyPr rtlCol="0" anchor="ctr" wrap="square" lIns="256032" rIns="256032" tIns="201168" bIns="201168"/>
+          <a:bodyPr wrap="square" lIns="256032" tIns="201168" rIns="256032" bIns="201168" rtlCol="0" anchor="ctr"/>
           <a:lstStyle/>
           <a:p>
             <a:pPr algn="ctr">
@@ -5028,7 +5065,7 @@
           </a:fontRef>
         </p:style>
         <p:txBody>
-          <a:bodyPr rtlCol="0" anchor="ctr" wrap="square" lIns="256032" rIns="256032" tIns="201168" bIns="201168"/>
+          <a:bodyPr wrap="square" lIns="256032" tIns="201168" rIns="256032" bIns="201168" rtlCol="0" anchor="ctr"/>
           <a:lstStyle/>
           <a:p>
             <a:pPr algn="ctr">
@@ -5153,7 +5190,7 @@
 </file>
 
 <file path=ppt/slides/slide5.xml><?xml version="1.0" encoding="utf-8"?>
-<p:sld xmlns:a="http://schemas.openxmlformats.org/drawingml/2006/main" xmlns:p="http://schemas.openxmlformats.org/presentationml/2006/main" xmlns:r="http://schemas.openxmlformats.org/officeDocument/2006/relationships">
+<p:sld xmlns:a="http://schemas.openxmlformats.org/drawingml/2006/main" xmlns:r="http://schemas.openxmlformats.org/officeDocument/2006/relationships" xmlns:p="http://schemas.openxmlformats.org/presentationml/2006/main">
   <p:cSld>
     <p:bg>
       <p:bgPr>
@@ -5169,7 +5206,14 @@
         <p:cNvGrpSpPr/>
         <p:nvPr/>
       </p:nvGrpSpPr>
-      <p:grpSpPr/>
+      <p:grpSpPr>
+        <a:xfrm>
+          <a:off x="0" y="0"/>
+          <a:ext cx="0" cy="0"/>
+          <a:chOff x="0" y="0"/>
+          <a:chExt cx="0" cy="0"/>
+        </a:xfrm>
+      </p:grpSpPr>
       <p:sp>
         <p:nvSpPr>
           <p:cNvPr id="2" name="TextBox 1"/>
@@ -5238,6 +5282,414 @@
             </a:pPr>
             <a:r>
               <a:t>Step 2 - Build &amp; Launch the Application</a:t>
+            </a:r>
+          </a:p>
+        </p:txBody>
+      </p:sp>
+      <p:sp>
+        <p:nvSpPr>
+          <p:cNvPr id="4" name="Rectangle 3"/>
+          <p:cNvSpPr/>
+          <p:nvPr/>
+        </p:nvSpPr>
+        <p:spPr>
+          <a:xfrm>
+            <a:off x="228600" y="1600200"/>
+            <a:ext cx="5788152" cy="4297680"/>
+          </a:xfrm>
+          <a:prstGeom prst="rect">
+            <a:avLst/>
+          </a:prstGeom>
+          <a:solidFill>
+            <a:srgbClr val="1E293B"/>
+          </a:solidFill>
+          <a:ln>
+            <a:solidFill>
+              <a:srgbClr val="1E293B"/>
+            </a:solidFill>
+          </a:ln>
+        </p:spPr>
+        <p:style>
+          <a:lnRef idx="1">
+            <a:schemeClr val="accent1"/>
+          </a:lnRef>
+          <a:fillRef idx="3">
+            <a:schemeClr val="accent1"/>
+          </a:fillRef>
+          <a:effectRef idx="2">
+            <a:schemeClr val="accent1"/>
+          </a:effectRef>
+          <a:fontRef idx="minor">
+            <a:schemeClr val="lt1"/>
+          </a:fontRef>
+        </p:style>
+        <p:txBody>
+          <a:bodyPr wrap="square" lIns="256032" tIns="201168" rIns="256032" bIns="201168" rtlCol="0" anchor="ctr"/>
+          <a:lstStyle/>
+          <a:p>
+            <a:pPr algn="ctr">
+              <a:spcAft>
+                <a:spcPts val="1200"/>
+              </a:spcAft>
+              <a:defRPr sz="1700" b="1">
+                <a:solidFill>
+                  <a:srgbClr val="38BDF8"/>
+                </a:solidFill>
+                <a:latin typeface="Segoe UI"/>
+              </a:defRPr>
+            </a:pPr>
+            <a:r>
+              <a:rPr dirty="0"/>
+              <a:t>Deploy Commands</a:t>
+            </a:r>
+          </a:p>
+          <a:p>
+            <a:pPr>
+              <a:spcAft>
+                <a:spcPts val="700"/>
+              </a:spcAft>
+              <a:defRPr sz="1250">
+                <a:solidFill>
+                  <a:srgbClr val="F8FAFC"/>
+                </a:solidFill>
+                <a:latin typeface="Segoe UI"/>
+              </a:defRPr>
+            </a:pPr>
+            <a:r>
+              <a:rPr dirty="0"/>
+              <a:t>• SSH into the server</a:t>
+            </a:r>
+          </a:p>
+          <a:p>
+            <a:pPr>
+              <a:spcAft>
+                <a:spcPts val="700"/>
+              </a:spcAft>
+              <a:defRPr sz="1250">
+                <a:solidFill>
+                  <a:srgbClr val="F8FAFC"/>
+                </a:solidFill>
+                <a:latin typeface="Segoe UI"/>
+              </a:defRPr>
+            </a:pPr>
+            <a:r>
+              <a:rPr dirty="0"/>
+              <a:t>• git clone https://github.com/.../your-ai-</a:t>
+            </a:r>
+            <a:r>
+              <a:rPr dirty="0" err="1"/>
+              <a:t>project.git</a:t>
+            </a:r>
+            <a:endParaRPr dirty="0"/>
+          </a:p>
+          <a:p>
+            <a:pPr>
+              <a:spcAft>
+                <a:spcPts val="700"/>
+              </a:spcAft>
+              <a:defRPr sz="1250">
+                <a:solidFill>
+                  <a:srgbClr val="F8FAFC"/>
+                </a:solidFill>
+                <a:latin typeface="Segoe UI"/>
+              </a:defRPr>
+            </a:pPr>
+            <a:r>
+              <a:rPr dirty="0"/>
+              <a:t>• cd your-ai-project</a:t>
+            </a:r>
+          </a:p>
+          <a:p>
+            <a:pPr>
+              <a:spcAft>
+                <a:spcPts val="700"/>
+              </a:spcAft>
+              <a:defRPr sz="1250">
+                <a:solidFill>
+                  <a:srgbClr val="F8FAFC"/>
+                </a:solidFill>
+                <a:latin typeface="Segoe UI"/>
+              </a:defRPr>
+            </a:pPr>
+            <a:r>
+              <a:rPr dirty="0"/>
+              <a:t>• docker compose up -d --build</a:t>
+            </a:r>
+          </a:p>
+          <a:p>
+            <a:pPr>
+              <a:spcAft>
+                <a:spcPts val="700"/>
+              </a:spcAft>
+              <a:defRPr sz="1250">
+                <a:solidFill>
+                  <a:srgbClr val="F8FAFC"/>
+                </a:solidFill>
+                <a:latin typeface="Segoe UI"/>
+              </a:defRPr>
+            </a:pPr>
+            <a:r>
+              <a:rPr dirty="0"/>
+              <a:t>• -d = background, --build = rebuild image</a:t>
+            </a:r>
+          </a:p>
+        </p:txBody>
+      </p:sp>
+      <p:sp>
+        <p:nvSpPr>
+          <p:cNvPr id="5" name="Rectangle 4"/>
+          <p:cNvSpPr/>
+          <p:nvPr/>
+        </p:nvSpPr>
+        <p:spPr>
+          <a:xfrm>
+            <a:off x="6309360" y="1600200"/>
+            <a:ext cx="5120640" cy="4297680"/>
+          </a:xfrm>
+          <a:prstGeom prst="rect">
+            <a:avLst/>
+          </a:prstGeom>
+          <a:solidFill>
+            <a:srgbClr val="1E293B"/>
+          </a:solidFill>
+          <a:ln>
+            <a:solidFill>
+              <a:srgbClr val="1E293B"/>
+            </a:solidFill>
+          </a:ln>
+        </p:spPr>
+        <p:style>
+          <a:lnRef idx="1">
+            <a:schemeClr val="accent1"/>
+          </a:lnRef>
+          <a:fillRef idx="3">
+            <a:schemeClr val="accent1"/>
+          </a:fillRef>
+          <a:effectRef idx="2">
+            <a:schemeClr val="accent1"/>
+          </a:effectRef>
+          <a:fontRef idx="minor">
+            <a:schemeClr val="lt1"/>
+          </a:fontRef>
+        </p:style>
+        <p:txBody>
+          <a:bodyPr wrap="square" lIns="256032" tIns="201168" rIns="256032" bIns="201168" rtlCol="0" anchor="ctr"/>
+          <a:lstStyle/>
+          <a:p>
+            <a:pPr algn="ctr">
+              <a:spcAft>
+                <a:spcPts val="1200"/>
+              </a:spcAft>
+              <a:defRPr sz="1700" b="1">
+                <a:solidFill>
+                  <a:srgbClr val="38BDF8"/>
+                </a:solidFill>
+                <a:latin typeface="Segoe UI"/>
+              </a:defRPr>
+            </a:pPr>
+            <a:r>
+              <a:t>Verification Commands</a:t>
+            </a:r>
+          </a:p>
+          <a:p>
+            <a:pPr>
+              <a:spcAft>
+                <a:spcPts val="700"/>
+              </a:spcAft>
+              <a:defRPr sz="1250">
+                <a:solidFill>
+                  <a:srgbClr val="F8FAFC"/>
+                </a:solidFill>
+                <a:latin typeface="Segoe UI"/>
+              </a:defRPr>
+            </a:pPr>
+            <a:r>
+              <a:t>• docker ps  -- confirms container is running</a:t>
+            </a:r>
+          </a:p>
+          <a:p>
+            <a:pPr>
+              <a:spcAft>
+                <a:spcPts val="700"/>
+              </a:spcAft>
+              <a:defRPr sz="1250">
+                <a:solidFill>
+                  <a:srgbClr val="F8FAFC"/>
+                </a:solidFill>
+                <a:latin typeface="Segoe UI"/>
+              </a:defRPr>
+            </a:pPr>
+            <a:r>
+              <a:t>• docker logs -f pothole-segmentation-app</a:t>
+            </a:r>
+          </a:p>
+          <a:p>
+            <a:pPr>
+              <a:spcAft>
+                <a:spcPts val="700"/>
+              </a:spcAft>
+              <a:defRPr sz="1250">
+                <a:solidFill>
+                  <a:srgbClr val="F8FAFC"/>
+                </a:solidFill>
+                <a:latin typeface="Segoe UI"/>
+              </a:defRPr>
+            </a:pPr>
+            <a:r>
+              <a:t>• Exec into container to check GPU:</a:t>
+            </a:r>
+          </a:p>
+          <a:p>
+            <a:pPr>
+              <a:spcAft>
+                <a:spcPts val="700"/>
+              </a:spcAft>
+              <a:defRPr sz="1250">
+                <a:solidFill>
+                  <a:srgbClr val="F8FAFC"/>
+                </a:solidFill>
+                <a:latin typeface="Segoe UI"/>
+              </a:defRPr>
+            </a:pPr>
+            <a:r>
+              <a:t>• docker exec -it pothole-segmentation-app python -c</a:t>
+            </a:r>
+          </a:p>
+          <a:p>
+            <a:pPr>
+              <a:spcAft>
+                <a:spcPts val="700"/>
+              </a:spcAft>
+              <a:defRPr sz="1250">
+                <a:solidFill>
+                  <a:srgbClr val="F8FAFC"/>
+                </a:solidFill>
+                <a:latin typeface="Segoe UI"/>
+              </a:defRPr>
+            </a:pPr>
+            <a:r>
+              <a:t>•   import torch; print(torch.cuda.is_available())</a:t>
+            </a:r>
+          </a:p>
+          <a:p>
+            <a:pPr>
+              <a:spcAft>
+                <a:spcPts val="700"/>
+              </a:spcAft>
+              <a:defRPr sz="1250">
+                <a:solidFill>
+                  <a:srgbClr val="F8FAFC"/>
+                </a:solidFill>
+                <a:latin typeface="Segoe UI"/>
+              </a:defRPr>
+            </a:pPr>
+            <a:r>
+              <a:t>• Expected: True (GPU) or False (CPU fallback)</a:t>
+            </a:r>
+          </a:p>
+        </p:txBody>
+      </p:sp>
+    </p:spTree>
+  </p:cSld>
+  <p:clrMapOvr>
+    <a:masterClrMapping/>
+  </p:clrMapOvr>
+</p:sld>
+</file>
+
+<file path=ppt/slides/slide6.xml><?xml version="1.0" encoding="utf-8"?>
+<p:sld xmlns:a="http://schemas.openxmlformats.org/drawingml/2006/main" xmlns:r="http://schemas.openxmlformats.org/officeDocument/2006/relationships" xmlns:p="http://schemas.openxmlformats.org/presentationml/2006/main">
+  <p:cSld>
+    <p:bg>
+      <p:bgPr>
+        <a:solidFill>
+          <a:srgbClr val="0F172A"/>
+        </a:solidFill>
+        <a:effectLst/>
+      </p:bgPr>
+    </p:bg>
+    <p:spTree>
+      <p:nvGrpSpPr>
+        <p:cNvPr id="1" name=""/>
+        <p:cNvGrpSpPr/>
+        <p:nvPr/>
+      </p:nvGrpSpPr>
+      <p:grpSpPr>
+        <a:xfrm>
+          <a:off x="0" y="0"/>
+          <a:ext cx="0" cy="0"/>
+          <a:chOff x="0" y="0"/>
+          <a:chExt cx="0" cy="0"/>
+        </a:xfrm>
+      </p:grpSpPr>
+      <p:sp>
+        <p:nvSpPr>
+          <p:cNvPr id="2" name="TextBox 1"/>
+          <p:cNvSpPr txBox="1"/>
+          <p:nvPr/>
+        </p:nvSpPr>
+        <p:spPr>
+          <a:xfrm>
+            <a:off x="731520" y="320040"/>
+            <a:ext cx="10698480" cy="365760"/>
+          </a:xfrm>
+          <a:prstGeom prst="rect">
+            <a:avLst/>
+          </a:prstGeom>
+          <a:noFill/>
+        </p:spPr>
+        <p:txBody>
+          <a:bodyPr wrap="none">
+            <a:spAutoFit/>
+          </a:bodyPr>
+          <a:lstStyle/>
+          <a:p>
+            <a:pPr>
+              <a:defRPr sz="1000" b="1">
+                <a:solidFill>
+                  <a:srgbClr val="38BDF8"/>
+                </a:solidFill>
+                <a:latin typeface="Segoe UI"/>
+              </a:defRPr>
+            </a:pPr>
+            <a:r>
+              <a:t>OPTION 1 : NGINX + SSL</a:t>
+            </a:r>
+          </a:p>
+        </p:txBody>
+      </p:sp>
+      <p:sp>
+        <p:nvSpPr>
+          <p:cNvPr id="3" name="TextBox 2"/>
+          <p:cNvSpPr txBox="1"/>
+          <p:nvPr/>
+        </p:nvSpPr>
+        <p:spPr>
+          <a:xfrm>
+            <a:off x="731520" y="658368"/>
+            <a:ext cx="10698480" cy="777240"/>
+          </a:xfrm>
+          <a:prstGeom prst="rect">
+            <a:avLst/>
+          </a:prstGeom>
+          <a:noFill/>
+        </p:spPr>
+        <p:txBody>
+          <a:bodyPr wrap="square">
+            <a:spAutoFit/>
+          </a:bodyPr>
+          <a:lstStyle/>
+          <a:p>
+            <a:pPr>
+              <a:defRPr sz="3100" b="1">
+                <a:solidFill>
+                  <a:srgbClr val="F8FAFC"/>
+                </a:solidFill>
+                <a:latin typeface="Segoe UI"/>
+              </a:defRPr>
+            </a:pPr>
+            <a:r>
+              <a:t>Step 3 - Install Nginx &amp; Certbot</a:t>
             </a:r>
           </a:p>
         </p:txBody>
@@ -5280,7 +5732,7 @@
           </a:fontRef>
         </p:style>
         <p:txBody>
-          <a:bodyPr rtlCol="0" anchor="ctr" wrap="square" lIns="256032" rIns="256032" tIns="201168" bIns="201168"/>
+          <a:bodyPr wrap="square" lIns="256032" tIns="201168" rIns="256032" bIns="201168" rtlCol="0" anchor="ctr"/>
           <a:lstStyle/>
           <a:p>
             <a:pPr algn="ctr">
@@ -5295,87 +5747,87 @@
               </a:defRPr>
             </a:pPr>
             <a:r>
-              <a:t>Deploy Commands</a:t>
-            </a:r>
-          </a:p>
-          <a:p>
-            <a:pPr>
-              <a:spcAft>
-                <a:spcPts val="700"/>
-              </a:spcAft>
-              <a:defRPr sz="1250">
-                <a:solidFill>
-                  <a:srgbClr val="F8FAFC"/>
-                </a:solidFill>
-                <a:latin typeface="Segoe UI"/>
-              </a:defRPr>
-            </a:pPr>
-            <a:r>
-              <a:t>• SSH into the server</a:t>
-            </a:r>
-          </a:p>
-          <a:p>
-            <a:pPr>
-              <a:spcAft>
-                <a:spcPts val="700"/>
-              </a:spcAft>
-              <a:defRPr sz="1250">
-                <a:solidFill>
-                  <a:srgbClr val="F8FAFC"/>
-                </a:solidFill>
-                <a:latin typeface="Segoe UI"/>
-              </a:defRPr>
-            </a:pPr>
-            <a:r>
-              <a:t>• git clone https://github.com/.../your-ai-project.git</a:t>
-            </a:r>
-          </a:p>
-          <a:p>
-            <a:pPr>
-              <a:spcAft>
-                <a:spcPts val="700"/>
-              </a:spcAft>
-              <a:defRPr sz="1250">
-                <a:solidFill>
-                  <a:srgbClr val="F8FAFC"/>
-                </a:solidFill>
-                <a:latin typeface="Segoe UI"/>
-              </a:defRPr>
-            </a:pPr>
-            <a:r>
-              <a:t>• cd your-ai-project</a:t>
-            </a:r>
-          </a:p>
-          <a:p>
-            <a:pPr>
-              <a:spcAft>
-                <a:spcPts val="700"/>
-              </a:spcAft>
-              <a:defRPr sz="1250">
-                <a:solidFill>
-                  <a:srgbClr val="F8FAFC"/>
-                </a:solidFill>
-                <a:latin typeface="Segoe UI"/>
-              </a:defRPr>
-            </a:pPr>
-            <a:r>
-              <a:t>• docker compose up -d --build</a:t>
-            </a:r>
-          </a:p>
-          <a:p>
-            <a:pPr>
-              <a:spcAft>
-                <a:spcPts val="700"/>
-              </a:spcAft>
-              <a:defRPr sz="1250">
-                <a:solidFill>
-                  <a:srgbClr val="F8FAFC"/>
-                </a:solidFill>
-                <a:latin typeface="Segoe UI"/>
-              </a:defRPr>
-            </a:pPr>
-            <a:r>
-              <a:t>• -d = background, --build = rebuild image</a:t>
+              <a:t>Why Nginx?</a:t>
+            </a:r>
+          </a:p>
+          <a:p>
+            <a:pPr>
+              <a:spcAft>
+                <a:spcPts val="700"/>
+              </a:spcAft>
+              <a:defRPr sz="1250">
+                <a:solidFill>
+                  <a:srgbClr val="F8FAFC"/>
+                </a:solidFill>
+                <a:latin typeface="Segoe UI"/>
+              </a:defRPr>
+            </a:pPr>
+            <a:r>
+              <a:t>• Acts as a reverse proxy in front of Streamlit</a:t>
+            </a:r>
+          </a:p>
+          <a:p>
+            <a:pPr>
+              <a:spcAft>
+                <a:spcPts val="700"/>
+              </a:spcAft>
+              <a:defRPr sz="1250">
+                <a:solidFill>
+                  <a:srgbClr val="F8FAFC"/>
+                </a:solidFill>
+                <a:latin typeface="Segoe UI"/>
+              </a:defRPr>
+            </a:pPr>
+            <a:r>
+              <a:t>• Routes public port 80/443 to internal port 8501</a:t>
+            </a:r>
+          </a:p>
+          <a:p>
+            <a:pPr>
+              <a:spcAft>
+                <a:spcPts val="700"/>
+              </a:spcAft>
+              <a:defRPr sz="1250">
+                <a:solidFill>
+                  <a:srgbClr val="F8FAFC"/>
+                </a:solidFill>
+                <a:latin typeface="Segoe UI"/>
+              </a:defRPr>
+            </a:pPr>
+            <a:r>
+              <a:t>• Handles SSL termination (HTTPS encryption)</a:t>
+            </a:r>
+          </a:p>
+          <a:p>
+            <a:pPr>
+              <a:spcAft>
+                <a:spcPts val="700"/>
+              </a:spcAft>
+              <a:defRPr sz="1250">
+                <a:solidFill>
+                  <a:srgbClr val="F8FAFC"/>
+                </a:solidFill>
+                <a:latin typeface="Segoe UI"/>
+              </a:defRPr>
+            </a:pPr>
+            <a:r>
+              <a:t>• Supports WebSocket headers required by Streamlit</a:t>
+            </a:r>
+          </a:p>
+          <a:p>
+            <a:pPr>
+              <a:spcAft>
+                <a:spcPts val="700"/>
+              </a:spcAft>
+              <a:defRPr sz="1250">
+                <a:solidFill>
+                  <a:srgbClr val="F8FAFC"/>
+                </a:solidFill>
+                <a:latin typeface="Segoe UI"/>
+              </a:defRPr>
+            </a:pPr>
+            <a:r>
+              <a:t>• Controls upload size limits (client_max_body_size 50M)</a:t>
             </a:r>
           </a:p>
         </p:txBody>
@@ -5418,7 +5870,7 @@
           </a:fontRef>
         </p:style>
         <p:txBody>
-          <a:bodyPr rtlCol="0" anchor="ctr" wrap="square" lIns="256032" rIns="256032" tIns="201168" bIns="201168"/>
+          <a:bodyPr wrap="square" lIns="256032" tIns="201168" rIns="256032" bIns="201168" rtlCol="0" anchor="ctr"/>
           <a:lstStyle/>
           <a:p>
             <a:pPr algn="ctr">
@@ -5433,103 +5885,87 @@
               </a:defRPr>
             </a:pPr>
             <a:r>
-              <a:t>Verification Commands</a:t>
-            </a:r>
-          </a:p>
-          <a:p>
-            <a:pPr>
-              <a:spcAft>
-                <a:spcPts val="700"/>
-              </a:spcAft>
-              <a:defRPr sz="1250">
-                <a:solidFill>
-                  <a:srgbClr val="F8FAFC"/>
-                </a:solidFill>
-                <a:latin typeface="Segoe UI"/>
-              </a:defRPr>
-            </a:pPr>
-            <a:r>
-              <a:t>• docker ps  -- confirms container is running</a:t>
-            </a:r>
-          </a:p>
-          <a:p>
-            <a:pPr>
-              <a:spcAft>
-                <a:spcPts val="700"/>
-              </a:spcAft>
-              <a:defRPr sz="1250">
-                <a:solidFill>
-                  <a:srgbClr val="F8FAFC"/>
-                </a:solidFill>
-                <a:latin typeface="Segoe UI"/>
-              </a:defRPr>
-            </a:pPr>
-            <a:r>
-              <a:t>• docker logs -f pothole-segmentation-app</a:t>
-            </a:r>
-          </a:p>
-          <a:p>
-            <a:pPr>
-              <a:spcAft>
-                <a:spcPts val="700"/>
-              </a:spcAft>
-              <a:defRPr sz="1250">
-                <a:solidFill>
-                  <a:srgbClr val="F8FAFC"/>
-                </a:solidFill>
-                <a:latin typeface="Segoe UI"/>
-              </a:defRPr>
-            </a:pPr>
-            <a:r>
-              <a:t>• Exec into container to check GPU:</a:t>
-            </a:r>
-          </a:p>
-          <a:p>
-            <a:pPr>
-              <a:spcAft>
-                <a:spcPts val="700"/>
-              </a:spcAft>
-              <a:defRPr sz="1250">
-                <a:solidFill>
-                  <a:srgbClr val="F8FAFC"/>
-                </a:solidFill>
-                <a:latin typeface="Segoe UI"/>
-              </a:defRPr>
-            </a:pPr>
-            <a:r>
-              <a:t>• docker exec -it pothole-segmentation-app python -c</a:t>
-            </a:r>
-          </a:p>
-          <a:p>
-            <a:pPr>
-              <a:spcAft>
-                <a:spcPts val="700"/>
-              </a:spcAft>
-              <a:defRPr sz="1250">
-                <a:solidFill>
-                  <a:srgbClr val="F8FAFC"/>
-                </a:solidFill>
-                <a:latin typeface="Segoe UI"/>
-              </a:defRPr>
-            </a:pPr>
-            <a:r>
-              <a:t>•   import torch; print(torch.cuda.is_available())</a:t>
-            </a:r>
-          </a:p>
-          <a:p>
-            <a:pPr>
-              <a:spcAft>
-                <a:spcPts val="700"/>
-              </a:spcAft>
-              <a:defRPr sz="1250">
-                <a:solidFill>
-                  <a:srgbClr val="F8FAFC"/>
-                </a:solidFill>
-                <a:latin typeface="Segoe UI"/>
-              </a:defRPr>
-            </a:pPr>
-            <a:r>
-              <a:t>• Expected: True (GPU) or False (CPU fallback)</a:t>
+              <a:t>Installation Commands</a:t>
+            </a:r>
+          </a:p>
+          <a:p>
+            <a:pPr>
+              <a:spcAft>
+                <a:spcPts val="700"/>
+              </a:spcAft>
+              <a:defRPr sz="1250">
+                <a:solidFill>
+                  <a:srgbClr val="F8FAFC"/>
+                </a:solidFill>
+                <a:latin typeface="Segoe UI"/>
+              </a:defRPr>
+            </a:pPr>
+            <a:r>
+              <a:t>• sudo apt update</a:t>
+            </a:r>
+          </a:p>
+          <a:p>
+            <a:pPr>
+              <a:spcAft>
+                <a:spcPts val="700"/>
+              </a:spcAft>
+              <a:defRPr sz="1250">
+                <a:solidFill>
+                  <a:srgbClr val="F8FAFC"/>
+                </a:solidFill>
+                <a:latin typeface="Segoe UI"/>
+              </a:defRPr>
+            </a:pPr>
+            <a:r>
+              <a:t>• sudo apt install -y nginx certbot python3-certbot-nginx</a:t>
+            </a:r>
+          </a:p>
+          <a:p>
+            <a:pPr>
+              <a:spcAft>
+                <a:spcPts val="700"/>
+              </a:spcAft>
+              <a:defRPr sz="1250">
+                <a:solidFill>
+                  <a:srgbClr val="F8FAFC"/>
+                </a:solidFill>
+                <a:latin typeface="Segoe UI"/>
+              </a:defRPr>
+            </a:pPr>
+            <a:r>
+              <a:t>• sudo systemctl start nginx</a:t>
+            </a:r>
+          </a:p>
+          <a:p>
+            <a:pPr>
+              <a:spcAft>
+                <a:spcPts val="700"/>
+              </a:spcAft>
+              <a:defRPr sz="1250">
+                <a:solidFill>
+                  <a:srgbClr val="F8FAFC"/>
+                </a:solidFill>
+                <a:latin typeface="Segoe UI"/>
+              </a:defRPr>
+            </a:pPr>
+            <a:r>
+              <a:t>• sudo systemctl enable nginx</a:t>
+            </a:r>
+          </a:p>
+          <a:p>
+            <a:pPr>
+              <a:spcAft>
+                <a:spcPts val="700"/>
+              </a:spcAft>
+              <a:defRPr sz="1250">
+                <a:solidFill>
+                  <a:srgbClr val="F8FAFC"/>
+                </a:solidFill>
+                <a:latin typeface="Segoe UI"/>
+              </a:defRPr>
+            </a:pPr>
+            <a:r>
+              <a:t>• Nginx now listens on port 80 - visible from the internet</a:t>
             </a:r>
           </a:p>
         </p:txBody>
@@ -5542,8 +5978,8 @@
 </p:sld>
 </file>
 
-<file path=ppt/slides/slide6.xml><?xml version="1.0" encoding="utf-8"?>
-<p:sld xmlns:a="http://schemas.openxmlformats.org/drawingml/2006/main" xmlns:p="http://schemas.openxmlformats.org/presentationml/2006/main" xmlns:r="http://schemas.openxmlformats.org/officeDocument/2006/relationships">
+<file path=ppt/slides/slide7.xml><?xml version="1.0" encoding="utf-8"?>
+<p:sld xmlns:a="http://schemas.openxmlformats.org/drawingml/2006/main" xmlns:r="http://schemas.openxmlformats.org/officeDocument/2006/relationships" xmlns:p="http://schemas.openxmlformats.org/presentationml/2006/main">
   <p:cSld>
     <p:bg>
       <p:bgPr>
@@ -5559,7 +5995,14 @@
         <p:cNvGrpSpPr/>
         <p:nvPr/>
       </p:nvGrpSpPr>
-      <p:grpSpPr/>
+      <p:grpSpPr>
+        <a:xfrm>
+          <a:off x="0" y="0"/>
+          <a:ext cx="0" cy="0"/>
+          <a:chOff x="0" y="0"/>
+          <a:chExt cx="0" cy="0"/>
+        </a:xfrm>
+      </p:grpSpPr>
       <p:sp>
         <p:nvSpPr>
           <p:cNvPr id="2" name="TextBox 1"/>
@@ -5627,7 +6070,7 @@
               </a:defRPr>
             </a:pPr>
             <a:r>
-              <a:t>Step 3 - Install Nginx &amp; Certbot</a:t>
+              <a:t>Steps 4 &amp; 5 - Configure &amp; Enable Nginx</a:t>
             </a:r>
           </a:p>
         </p:txBody>
@@ -5670,7 +6113,7 @@
           </a:fontRef>
         </p:style>
         <p:txBody>
-          <a:bodyPr rtlCol="0" anchor="ctr" wrap="square" lIns="256032" rIns="256032" tIns="201168" bIns="201168"/>
+          <a:bodyPr wrap="square" lIns="256032" tIns="201168" rIns="256032" bIns="201168" rtlCol="0" anchor="ctr"/>
           <a:lstStyle/>
           <a:p>
             <a:pPr algn="ctr">
@@ -5685,87 +6128,87 @@
               </a:defRPr>
             </a:pPr>
             <a:r>
-              <a:t>Why Nginx?</a:t>
-            </a:r>
-          </a:p>
-          <a:p>
-            <a:pPr>
-              <a:spcAft>
-                <a:spcPts val="700"/>
-              </a:spcAft>
-              <a:defRPr sz="1250">
-                <a:solidFill>
-                  <a:srgbClr val="F8FAFC"/>
-                </a:solidFill>
-                <a:latin typeface="Segoe UI"/>
-              </a:defRPr>
-            </a:pPr>
-            <a:r>
-              <a:t>• Acts as a reverse proxy in front of Streamlit</a:t>
-            </a:r>
-          </a:p>
-          <a:p>
-            <a:pPr>
-              <a:spcAft>
-                <a:spcPts val="700"/>
-              </a:spcAft>
-              <a:defRPr sz="1250">
-                <a:solidFill>
-                  <a:srgbClr val="F8FAFC"/>
-                </a:solidFill>
-                <a:latin typeface="Segoe UI"/>
-              </a:defRPr>
-            </a:pPr>
-            <a:r>
-              <a:t>• Routes public port 80/443 to internal port 8501</a:t>
-            </a:r>
-          </a:p>
-          <a:p>
-            <a:pPr>
-              <a:spcAft>
-                <a:spcPts val="700"/>
-              </a:spcAft>
-              <a:defRPr sz="1250">
-                <a:solidFill>
-                  <a:srgbClr val="F8FAFC"/>
-                </a:solidFill>
-                <a:latin typeface="Segoe UI"/>
-              </a:defRPr>
-            </a:pPr>
-            <a:r>
-              <a:t>• Handles SSL termination (HTTPS encryption)</a:t>
-            </a:r>
-          </a:p>
-          <a:p>
-            <a:pPr>
-              <a:spcAft>
-                <a:spcPts val="700"/>
-              </a:spcAft>
-              <a:defRPr sz="1250">
-                <a:solidFill>
-                  <a:srgbClr val="F8FAFC"/>
-                </a:solidFill>
-                <a:latin typeface="Segoe UI"/>
-              </a:defRPr>
-            </a:pPr>
-            <a:r>
-              <a:t>• Supports WebSocket headers required by Streamlit</a:t>
-            </a:r>
-          </a:p>
-          <a:p>
-            <a:pPr>
-              <a:spcAft>
-                <a:spcPts val="700"/>
-              </a:spcAft>
-              <a:defRPr sz="1250">
-                <a:solidFill>
-                  <a:srgbClr val="F8FAFC"/>
-                </a:solidFill>
-                <a:latin typeface="Segoe UI"/>
-              </a:defRPr>
-            </a:pPr>
-            <a:r>
-              <a:t>• Controls upload size limits (client_max_body_size 50M)</a:t>
+              <a:t>Step 4 - Server Block Content</a:t>
+            </a:r>
+          </a:p>
+          <a:p>
+            <a:pPr>
+              <a:spcAft>
+                <a:spcPts val="700"/>
+              </a:spcAft>
+              <a:defRPr sz="1250">
+                <a:solidFill>
+                  <a:srgbClr val="F8FAFC"/>
+                </a:solidFill>
+                <a:latin typeface="Segoe UI"/>
+              </a:defRPr>
+            </a:pPr>
+            <a:r>
+              <a:t>• sudo nano /etc/nginx/sites-available/pothole-segmentation</a:t>
+            </a:r>
+          </a:p>
+          <a:p>
+            <a:pPr>
+              <a:spcAft>
+                <a:spcPts val="700"/>
+              </a:spcAft>
+              <a:defRPr sz="1250">
+                <a:solidFill>
+                  <a:srgbClr val="F8FAFC"/>
+                </a:solidFill>
+                <a:latin typeface="Segoe UI"/>
+              </a:defRPr>
+            </a:pPr>
+            <a:r>
+              <a:t>• server { listen 80; server_name your-domain.com; }</a:t>
+            </a:r>
+          </a:p>
+          <a:p>
+            <a:pPr>
+              <a:spcAft>
+                <a:spcPts val="700"/>
+              </a:spcAft>
+              <a:defRPr sz="1250">
+                <a:solidFill>
+                  <a:srgbClr val="F8FAFC"/>
+                </a:solidFill>
+                <a:latin typeface="Segoe UI"/>
+              </a:defRPr>
+            </a:pPr>
+            <a:r>
+              <a:t>• proxy_pass http://localhost:8501;</a:t>
+            </a:r>
+          </a:p>
+          <a:p>
+            <a:pPr>
+              <a:spcAft>
+                <a:spcPts val="700"/>
+              </a:spcAft>
+              <a:defRPr sz="1250">
+                <a:solidFill>
+                  <a:srgbClr val="F8FAFC"/>
+                </a:solidFill>
+                <a:latin typeface="Segoe UI"/>
+              </a:defRPr>
+            </a:pPr>
+            <a:r>
+              <a:t>• proxy_set_header Upgrade + Connection (WebSocket support)</a:t>
+            </a:r>
+          </a:p>
+          <a:p>
+            <a:pPr>
+              <a:spcAft>
+                <a:spcPts val="700"/>
+              </a:spcAft>
+              <a:defRPr sz="1250">
+                <a:solidFill>
+                  <a:srgbClr val="F8FAFC"/>
+                </a:solidFill>
+                <a:latin typeface="Segoe UI"/>
+              </a:defRPr>
+            </a:pPr>
+            <a:r>
+              <a:t>• client_max_body_size 50M; (for image uploads)</a:t>
             </a:r>
           </a:p>
         </p:txBody>
@@ -5808,7 +6251,7 @@
           </a:fontRef>
         </p:style>
         <p:txBody>
-          <a:bodyPr rtlCol="0" anchor="ctr" wrap="square" lIns="256032" rIns="256032" tIns="201168" bIns="201168"/>
+          <a:bodyPr wrap="square" lIns="256032" tIns="201168" rIns="256032" bIns="201168" rtlCol="0" anchor="ctr"/>
           <a:lstStyle/>
           <a:p>
             <a:pPr algn="ctr">
@@ -5823,87 +6266,103 @@
               </a:defRPr>
             </a:pPr>
             <a:r>
-              <a:t>Installation Commands</a:t>
-            </a:r>
-          </a:p>
-          <a:p>
-            <a:pPr>
-              <a:spcAft>
-                <a:spcPts val="700"/>
-              </a:spcAft>
-              <a:defRPr sz="1250">
-                <a:solidFill>
-                  <a:srgbClr val="F8FAFC"/>
-                </a:solidFill>
-                <a:latin typeface="Segoe UI"/>
-              </a:defRPr>
-            </a:pPr>
-            <a:r>
-              <a:t>• sudo apt update</a:t>
-            </a:r>
-          </a:p>
-          <a:p>
-            <a:pPr>
-              <a:spcAft>
-                <a:spcPts val="700"/>
-              </a:spcAft>
-              <a:defRPr sz="1250">
-                <a:solidFill>
-                  <a:srgbClr val="F8FAFC"/>
-                </a:solidFill>
-                <a:latin typeface="Segoe UI"/>
-              </a:defRPr>
-            </a:pPr>
-            <a:r>
-              <a:t>• sudo apt install -y nginx certbot python3-certbot-nginx</a:t>
-            </a:r>
-          </a:p>
-          <a:p>
-            <a:pPr>
-              <a:spcAft>
-                <a:spcPts val="700"/>
-              </a:spcAft>
-              <a:defRPr sz="1250">
-                <a:solidFill>
-                  <a:srgbClr val="F8FAFC"/>
-                </a:solidFill>
-                <a:latin typeface="Segoe UI"/>
-              </a:defRPr>
-            </a:pPr>
-            <a:r>
-              <a:t>• sudo systemctl start nginx</a:t>
-            </a:r>
-          </a:p>
-          <a:p>
-            <a:pPr>
-              <a:spcAft>
-                <a:spcPts val="700"/>
-              </a:spcAft>
-              <a:defRPr sz="1250">
-                <a:solidFill>
-                  <a:srgbClr val="F8FAFC"/>
-                </a:solidFill>
-                <a:latin typeface="Segoe UI"/>
-              </a:defRPr>
-            </a:pPr>
-            <a:r>
-              <a:t>• sudo systemctl enable nginx</a:t>
-            </a:r>
-          </a:p>
-          <a:p>
-            <a:pPr>
-              <a:spcAft>
-                <a:spcPts val="700"/>
-              </a:spcAft>
-              <a:defRPr sz="1250">
-                <a:solidFill>
-                  <a:srgbClr val="F8FAFC"/>
-                </a:solidFill>
-                <a:latin typeface="Segoe UI"/>
-              </a:defRPr>
-            </a:pPr>
-            <a:r>
-              <a:t>• Nginx now listens on port 80 - visible from the internet</a:t>
+              <a:t>Step 5 - Enable &amp; Restart</a:t>
+            </a:r>
+          </a:p>
+          <a:p>
+            <a:pPr>
+              <a:spcAft>
+                <a:spcPts val="700"/>
+              </a:spcAft>
+              <a:defRPr sz="1250">
+                <a:solidFill>
+                  <a:srgbClr val="F8FAFC"/>
+                </a:solidFill>
+                <a:latin typeface="Segoe UI"/>
+              </a:defRPr>
+            </a:pPr>
+            <a:r>
+              <a:t>• Create symlink to activate the config:</a:t>
+            </a:r>
+          </a:p>
+          <a:p>
+            <a:pPr>
+              <a:spcAft>
+                <a:spcPts val="700"/>
+              </a:spcAft>
+              <a:defRPr sz="1250">
+                <a:solidFill>
+                  <a:srgbClr val="F8FAFC"/>
+                </a:solidFill>
+                <a:latin typeface="Segoe UI"/>
+              </a:defRPr>
+            </a:pPr>
+            <a:r>
+              <a:t>• sudo ln -s /etc/nginx/sites-available/pothole-segmentation</a:t>
+            </a:r>
+          </a:p>
+          <a:p>
+            <a:pPr>
+              <a:spcAft>
+                <a:spcPts val="700"/>
+              </a:spcAft>
+              <a:defRPr sz="1250">
+                <a:solidFill>
+                  <a:srgbClr val="F8FAFC"/>
+                </a:solidFill>
+                <a:latin typeface="Segoe UI"/>
+              </a:defRPr>
+            </a:pPr>
+            <a:r>
+              <a:t>•   /etc/nginx/sites-enabled/</a:t>
+            </a:r>
+          </a:p>
+          <a:p>
+            <a:pPr>
+              <a:spcAft>
+                <a:spcPts val="700"/>
+              </a:spcAft>
+              <a:defRPr sz="1250">
+                <a:solidFill>
+                  <a:srgbClr val="F8FAFC"/>
+                </a:solidFill>
+                <a:latin typeface="Segoe UI"/>
+              </a:defRPr>
+            </a:pPr>
+            <a:r>
+              <a:t>• sudo nginx -t  -- test for syntax errors</a:t>
+            </a:r>
+          </a:p>
+          <a:p>
+            <a:pPr>
+              <a:spcAft>
+                <a:spcPts val="700"/>
+              </a:spcAft>
+              <a:defRPr sz="1250">
+                <a:solidFill>
+                  <a:srgbClr val="F8FAFC"/>
+                </a:solidFill>
+                <a:latin typeface="Segoe UI"/>
+              </a:defRPr>
+            </a:pPr>
+            <a:r>
+              <a:t>• sudo systemctl restart nginx</a:t>
+            </a:r>
+          </a:p>
+          <a:p>
+            <a:pPr>
+              <a:spcAft>
+                <a:spcPts val="700"/>
+              </a:spcAft>
+              <a:defRPr sz="1250">
+                <a:solidFill>
+                  <a:srgbClr val="F8FAFC"/>
+                </a:solidFill>
+                <a:latin typeface="Segoe UI"/>
+              </a:defRPr>
+            </a:pPr>
+            <a:r>
+              <a:t>• App now accessible at http://your-domain.com</a:t>
             </a:r>
           </a:p>
         </p:txBody>
@@ -5916,8 +6375,8 @@
 </p:sld>
 </file>
 
-<file path=ppt/slides/slide7.xml><?xml version="1.0" encoding="utf-8"?>
-<p:sld xmlns:a="http://schemas.openxmlformats.org/drawingml/2006/main" xmlns:p="http://schemas.openxmlformats.org/presentationml/2006/main" xmlns:r="http://schemas.openxmlformats.org/officeDocument/2006/relationships">
+<file path=ppt/slides/slide8.xml><?xml version="1.0" encoding="utf-8"?>
+<p:sld xmlns:a="http://schemas.openxmlformats.org/drawingml/2006/main" xmlns:r="http://schemas.openxmlformats.org/officeDocument/2006/relationships" xmlns:p="http://schemas.openxmlformats.org/presentationml/2006/main">
   <p:cSld>
     <p:bg>
       <p:bgPr>
@@ -5933,7 +6392,14 @@
         <p:cNvGrpSpPr/>
         <p:nvPr/>
       </p:nvGrpSpPr>
-      <p:grpSpPr/>
+      <p:grpSpPr>
+        <a:xfrm>
+          <a:off x="0" y="0"/>
+          <a:ext cx="0" cy="0"/>
+          <a:chOff x="0" y="0"/>
+          <a:chExt cx="0" cy="0"/>
+        </a:xfrm>
+      </p:grpSpPr>
       <p:sp>
         <p:nvSpPr>
           <p:cNvPr id="2" name="TextBox 1"/>
@@ -6001,7 +6467,7 @@
               </a:defRPr>
             </a:pPr>
             <a:r>
-              <a:t>Steps 4 &amp; 5 - Configure &amp; Enable Nginx</a:t>
+              <a:t>Step 6 - Issue SSL Certificate (HTTPS)</a:t>
             </a:r>
           </a:p>
         </p:txBody>
@@ -6044,7 +6510,7 @@
           </a:fontRef>
         </p:style>
         <p:txBody>
-          <a:bodyPr rtlCol="0" anchor="ctr" wrap="square" lIns="256032" rIns="256032" tIns="201168" bIns="201168"/>
+          <a:bodyPr wrap="square" lIns="256032" tIns="201168" rIns="256032" bIns="201168" rtlCol="0" anchor="ctr"/>
           <a:lstStyle/>
           <a:p>
             <a:pPr algn="ctr">
@@ -6053,93 +6519,93 @@
               </a:spcAft>
               <a:defRPr sz="1700" b="1">
                 <a:solidFill>
-                  <a:srgbClr val="38BDF8"/>
-                </a:solidFill>
-                <a:latin typeface="Segoe UI"/>
-              </a:defRPr>
-            </a:pPr>
-            <a:r>
-              <a:t>Step 4 - Server Block Content</a:t>
-            </a:r>
-          </a:p>
-          <a:p>
-            <a:pPr>
-              <a:spcAft>
-                <a:spcPts val="700"/>
-              </a:spcAft>
-              <a:defRPr sz="1250">
-                <a:solidFill>
-                  <a:srgbClr val="F8FAFC"/>
-                </a:solidFill>
-                <a:latin typeface="Segoe UI"/>
-              </a:defRPr>
-            </a:pPr>
-            <a:r>
-              <a:t>• sudo nano /etc/nginx/sites-available/pothole-segmentation</a:t>
-            </a:r>
-          </a:p>
-          <a:p>
-            <a:pPr>
-              <a:spcAft>
-                <a:spcPts val="700"/>
-              </a:spcAft>
-              <a:defRPr sz="1250">
-                <a:solidFill>
-                  <a:srgbClr val="F8FAFC"/>
-                </a:solidFill>
-                <a:latin typeface="Segoe UI"/>
-              </a:defRPr>
-            </a:pPr>
-            <a:r>
-              <a:t>• server { listen 80; server_name your-domain.com; }</a:t>
-            </a:r>
-          </a:p>
-          <a:p>
-            <a:pPr>
-              <a:spcAft>
-                <a:spcPts val="700"/>
-              </a:spcAft>
-              <a:defRPr sz="1250">
-                <a:solidFill>
-                  <a:srgbClr val="F8FAFC"/>
-                </a:solidFill>
-                <a:latin typeface="Segoe UI"/>
-              </a:defRPr>
-            </a:pPr>
-            <a:r>
-              <a:t>• proxy_pass http://localhost:8501;</a:t>
-            </a:r>
-          </a:p>
-          <a:p>
-            <a:pPr>
-              <a:spcAft>
-                <a:spcPts val="700"/>
-              </a:spcAft>
-              <a:defRPr sz="1250">
-                <a:solidFill>
-                  <a:srgbClr val="F8FAFC"/>
-                </a:solidFill>
-                <a:latin typeface="Segoe UI"/>
-              </a:defRPr>
-            </a:pPr>
-            <a:r>
-              <a:t>• proxy_set_header Upgrade + Connection (WebSocket support)</a:t>
-            </a:r>
-          </a:p>
-          <a:p>
-            <a:pPr>
-              <a:spcAft>
-                <a:spcPts val="700"/>
-              </a:spcAft>
-              <a:defRPr sz="1250">
-                <a:solidFill>
-                  <a:srgbClr val="F8FAFC"/>
-                </a:solidFill>
-                <a:latin typeface="Segoe UI"/>
-              </a:defRPr>
-            </a:pPr>
-            <a:r>
-              <a:t>• client_max_body_size 50M; (for image uploads)</a:t>
+                  <a:srgbClr val="22C55E"/>
+                </a:solidFill>
+                <a:latin typeface="Segoe UI"/>
+              </a:defRPr>
+            </a:pPr>
+            <a:r>
+              <a:t>Certbot Command</a:t>
+            </a:r>
+          </a:p>
+          <a:p>
+            <a:pPr>
+              <a:spcAft>
+                <a:spcPts val="700"/>
+              </a:spcAft>
+              <a:defRPr sz="1250">
+                <a:solidFill>
+                  <a:srgbClr val="F8FAFC"/>
+                </a:solidFill>
+                <a:latin typeface="Segoe UI"/>
+              </a:defRPr>
+            </a:pPr>
+            <a:r>
+              <a:t>• sudo certbot --nginx -d your-domain.com</a:t>
+            </a:r>
+          </a:p>
+          <a:p>
+            <a:pPr>
+              <a:spcAft>
+                <a:spcPts val="700"/>
+              </a:spcAft>
+              <a:defRPr sz="1250">
+                <a:solidFill>
+                  <a:srgbClr val="F8FAFC"/>
+                </a:solidFill>
+                <a:latin typeface="Segoe UI"/>
+              </a:defRPr>
+            </a:pPr>
+            <a:r>
+              <a:t>• Certbot contacts Let's Encrypt CA automatically</a:t>
+            </a:r>
+          </a:p>
+          <a:p>
+            <a:pPr>
+              <a:spcAft>
+                <a:spcPts val="700"/>
+              </a:spcAft>
+              <a:defRPr sz="1250">
+                <a:solidFill>
+                  <a:srgbClr val="F8FAFC"/>
+                </a:solidFill>
+                <a:latin typeface="Segoe UI"/>
+              </a:defRPr>
+            </a:pPr>
+            <a:r>
+              <a:t>• Installs certificate files into Nginx config</a:t>
+            </a:r>
+          </a:p>
+          <a:p>
+            <a:pPr>
+              <a:spcAft>
+                <a:spcPts val="700"/>
+              </a:spcAft>
+              <a:defRPr sz="1250">
+                <a:solidFill>
+                  <a:srgbClr val="F8FAFC"/>
+                </a:solidFill>
+                <a:latin typeface="Segoe UI"/>
+              </a:defRPr>
+            </a:pPr>
+            <a:r>
+              <a:t>• Enables automatic HTTP to HTTPS redirect</a:t>
+            </a:r>
+          </a:p>
+          <a:p>
+            <a:pPr>
+              <a:spcAft>
+                <a:spcPts val="700"/>
+              </a:spcAft>
+              <a:defRPr sz="1250">
+                <a:solidFill>
+                  <a:srgbClr val="F8FAFC"/>
+                </a:solidFill>
+                <a:latin typeface="Segoe UI"/>
+              </a:defRPr>
+            </a:pPr>
+            <a:r>
+              <a:t>• App is now live at https://your-domain.com</a:t>
             </a:r>
           </a:p>
         </p:txBody>
@@ -6182,7 +6648,7 @@
           </a:fontRef>
         </p:style>
         <p:txBody>
-          <a:bodyPr rtlCol="0" anchor="ctr" wrap="square" lIns="256032" rIns="256032" tIns="201168" bIns="201168"/>
+          <a:bodyPr wrap="square" lIns="256032" tIns="201168" rIns="256032" bIns="201168" rtlCol="0" anchor="ctr"/>
           <a:lstStyle/>
           <a:p>
             <a:pPr algn="ctr">
@@ -6197,103 +6663,71 @@
               </a:defRPr>
             </a:pPr>
             <a:r>
-              <a:t>Step 5 - Enable &amp; Restart</a:t>
-            </a:r>
-          </a:p>
-          <a:p>
-            <a:pPr>
-              <a:spcAft>
-                <a:spcPts val="700"/>
-              </a:spcAft>
-              <a:defRPr sz="1250">
-                <a:solidFill>
-                  <a:srgbClr val="F8FAFC"/>
-                </a:solidFill>
-                <a:latin typeface="Segoe UI"/>
-              </a:defRPr>
-            </a:pPr>
-            <a:r>
-              <a:t>• Create symlink to activate the config:</a:t>
-            </a:r>
-          </a:p>
-          <a:p>
-            <a:pPr>
-              <a:spcAft>
-                <a:spcPts val="700"/>
-              </a:spcAft>
-              <a:defRPr sz="1250">
-                <a:solidFill>
-                  <a:srgbClr val="F8FAFC"/>
-                </a:solidFill>
-                <a:latin typeface="Segoe UI"/>
-              </a:defRPr>
-            </a:pPr>
-            <a:r>
-              <a:t>• sudo ln -s /etc/nginx/sites-available/pothole-segmentation</a:t>
-            </a:r>
-          </a:p>
-          <a:p>
-            <a:pPr>
-              <a:spcAft>
-                <a:spcPts val="700"/>
-              </a:spcAft>
-              <a:defRPr sz="1250">
-                <a:solidFill>
-                  <a:srgbClr val="F8FAFC"/>
-                </a:solidFill>
-                <a:latin typeface="Segoe UI"/>
-              </a:defRPr>
-            </a:pPr>
-            <a:r>
-              <a:t>•   /etc/nginx/sites-enabled/</a:t>
-            </a:r>
-          </a:p>
-          <a:p>
-            <a:pPr>
-              <a:spcAft>
-                <a:spcPts val="700"/>
-              </a:spcAft>
-              <a:defRPr sz="1250">
-                <a:solidFill>
-                  <a:srgbClr val="F8FAFC"/>
-                </a:solidFill>
-                <a:latin typeface="Segoe UI"/>
-              </a:defRPr>
-            </a:pPr>
-            <a:r>
-              <a:t>• sudo nginx -t  -- test for syntax errors</a:t>
-            </a:r>
-          </a:p>
-          <a:p>
-            <a:pPr>
-              <a:spcAft>
-                <a:spcPts val="700"/>
-              </a:spcAft>
-              <a:defRPr sz="1250">
-                <a:solidFill>
-                  <a:srgbClr val="F8FAFC"/>
-                </a:solidFill>
-                <a:latin typeface="Segoe UI"/>
-              </a:defRPr>
-            </a:pPr>
-            <a:r>
-              <a:t>• sudo systemctl restart nginx</a:t>
-            </a:r>
-          </a:p>
-          <a:p>
-            <a:pPr>
-              <a:spcAft>
-                <a:spcPts val="700"/>
-              </a:spcAft>
-              <a:defRPr sz="1250">
-                <a:solidFill>
-                  <a:srgbClr val="F8FAFC"/>
-                </a:solidFill>
-                <a:latin typeface="Segoe UI"/>
-              </a:defRPr>
-            </a:pPr>
-            <a:r>
-              <a:t>• App now accessible at http://your-domain.com</a:t>
+              <a:t>Auto-Renewal &amp; Security</a:t>
+            </a:r>
+          </a:p>
+          <a:p>
+            <a:pPr>
+              <a:spcAft>
+                <a:spcPts val="700"/>
+              </a:spcAft>
+              <a:defRPr sz="1250">
+                <a:solidFill>
+                  <a:srgbClr val="F8FAFC"/>
+                </a:solidFill>
+                <a:latin typeface="Segoe UI"/>
+              </a:defRPr>
+            </a:pPr>
+            <a:r>
+              <a:t>• Certbot sets up a system cron/timer job automatically</a:t>
+            </a:r>
+          </a:p>
+          <a:p>
+            <a:pPr>
+              <a:spcAft>
+                <a:spcPts val="700"/>
+              </a:spcAft>
+              <a:defRPr sz="1250">
+                <a:solidFill>
+                  <a:srgbClr val="F8FAFC"/>
+                </a:solidFill>
+                <a:latin typeface="Segoe UI"/>
+              </a:defRPr>
+            </a:pPr>
+            <a:r>
+              <a:t>• Certificate renews every 90 days without manual action</a:t>
+            </a:r>
+          </a:p>
+          <a:p>
+            <a:pPr>
+              <a:spcAft>
+                <a:spcPts val="700"/>
+              </a:spcAft>
+              <a:defRPr sz="1250">
+                <a:solidFill>
+                  <a:srgbClr val="F8FAFC"/>
+                </a:solidFill>
+                <a:latin typeface="Segoe UI"/>
+              </a:defRPr>
+            </a:pPr>
+            <a:r>
+              <a:t>• All user uploads &amp; predictions are encrypted in transit</a:t>
+            </a:r>
+          </a:p>
+          <a:p>
+            <a:pPr>
+              <a:spcAft>
+                <a:spcPts val="700"/>
+              </a:spcAft>
+              <a:defRPr sz="1250">
+                <a:solidFill>
+                  <a:srgbClr val="F8FAFC"/>
+                </a:solidFill>
+                <a:latin typeface="Segoe UI"/>
+              </a:defRPr>
+            </a:pPr>
+            <a:r>
+              <a:t>• Browser shows trusted padlock icon (no SSL warnings)</a:t>
             </a:r>
           </a:p>
         </p:txBody>
@@ -6306,8 +6740,8 @@
 </p:sld>
 </file>
 
-<file path=ppt/slides/slide8.xml><?xml version="1.0" encoding="utf-8"?>
-<p:sld xmlns:a="http://schemas.openxmlformats.org/drawingml/2006/main" xmlns:p="http://schemas.openxmlformats.org/presentationml/2006/main" xmlns:r="http://schemas.openxmlformats.org/officeDocument/2006/relationships">
+<file path=ppt/slides/slide9.xml><?xml version="1.0" encoding="utf-8"?>
+<p:sld xmlns:a="http://schemas.openxmlformats.org/drawingml/2006/main" xmlns:r="http://schemas.openxmlformats.org/officeDocument/2006/relationships" xmlns:p="http://schemas.openxmlformats.org/presentationml/2006/main">
   <p:cSld>
     <p:bg>
       <p:bgPr>
@@ -6323,7 +6757,14 @@
         <p:cNvGrpSpPr/>
         <p:nvPr/>
       </p:nvGrpSpPr>
-      <p:grpSpPr/>
+      <p:grpSpPr>
+        <a:xfrm>
+          <a:off x="0" y="0"/>
+          <a:ext cx="0" cy="0"/>
+          <a:chOff x="0" y="0"/>
+          <a:chExt cx="0" cy="0"/>
+        </a:xfrm>
+      </p:grpSpPr>
       <p:sp>
         <p:nvSpPr>
           <p:cNvPr id="2" name="TextBox 1"/>
@@ -6355,7 +6796,7 @@
               </a:defRPr>
             </a:pPr>
             <a:r>
-              <a:t>OPTION 1 : NGINX + SSL</a:t>
+              <a:t>RUNPOD</a:t>
             </a:r>
           </a:p>
         </p:txBody>
@@ -6391,7 +6832,7 @@
               </a:defRPr>
             </a:pPr>
             <a:r>
-              <a:t>Step 6 - Issue SSL Certificate (HTTPS)</a:t>
+              <a:t>Option 2 - RunPod Cloud GPU Deployment</a:t>
             </a:r>
           </a:p>
         </p:txBody>
@@ -6434,7 +6875,7 @@
           </a:fontRef>
         </p:style>
         <p:txBody>
-          <a:bodyPr rtlCol="0" anchor="ctr" wrap="square" lIns="256032" rIns="256032" tIns="201168" bIns="201168"/>
+          <a:bodyPr wrap="square" lIns="256032" tIns="201168" rIns="256032" bIns="201168" rtlCol="0" anchor="ctr"/>
           <a:lstStyle/>
           <a:p>
             <a:pPr algn="ctr">
@@ -6443,93 +6884,109 @@
               </a:spcAft>
               <a:defRPr sz="1700" b="1">
                 <a:solidFill>
-                  <a:srgbClr val="22C55E"/>
-                </a:solidFill>
-                <a:latin typeface="Segoe UI"/>
-              </a:defRPr>
-            </a:pPr>
-            <a:r>
-              <a:t>Certbot Command</a:t>
-            </a:r>
-          </a:p>
-          <a:p>
-            <a:pPr>
-              <a:spcAft>
-                <a:spcPts val="700"/>
-              </a:spcAft>
-              <a:defRPr sz="1250">
-                <a:solidFill>
-                  <a:srgbClr val="F8FAFC"/>
-                </a:solidFill>
-                <a:latin typeface="Segoe UI"/>
-              </a:defRPr>
-            </a:pPr>
-            <a:r>
-              <a:t>• sudo certbot --nginx -d your-domain.com</a:t>
-            </a:r>
-          </a:p>
-          <a:p>
-            <a:pPr>
-              <a:spcAft>
-                <a:spcPts val="700"/>
-              </a:spcAft>
-              <a:defRPr sz="1250">
-                <a:solidFill>
-                  <a:srgbClr val="F8FAFC"/>
-                </a:solidFill>
-                <a:latin typeface="Segoe UI"/>
-              </a:defRPr>
-            </a:pPr>
-            <a:r>
-              <a:t>• Certbot contacts Let's Encrypt CA automatically</a:t>
-            </a:r>
-          </a:p>
-          <a:p>
-            <a:pPr>
-              <a:spcAft>
-                <a:spcPts val="700"/>
-              </a:spcAft>
-              <a:defRPr sz="1250">
-                <a:solidFill>
-                  <a:srgbClr val="F8FAFC"/>
-                </a:solidFill>
-                <a:latin typeface="Segoe UI"/>
-              </a:defRPr>
-            </a:pPr>
-            <a:r>
-              <a:t>• Installs certificate files into Nginx config</a:t>
-            </a:r>
-          </a:p>
-          <a:p>
-            <a:pPr>
-              <a:spcAft>
-                <a:spcPts val="700"/>
-              </a:spcAft>
-              <a:defRPr sz="1250">
-                <a:solidFill>
-                  <a:srgbClr val="F8FAFC"/>
-                </a:solidFill>
-                <a:latin typeface="Segoe UI"/>
-              </a:defRPr>
-            </a:pPr>
-            <a:r>
-              <a:t>• Enables automatic HTTP to HTTPS redirect</a:t>
-            </a:r>
-          </a:p>
-          <a:p>
-            <a:pPr>
-              <a:spcAft>
-                <a:spcPts val="700"/>
-              </a:spcAft>
-              <a:defRPr sz="1250">
-                <a:solidFill>
-                  <a:srgbClr val="F8FAFC"/>
-                </a:solidFill>
-                <a:latin typeface="Segoe UI"/>
-              </a:defRPr>
-            </a:pPr>
-            <a:r>
-              <a:t>• App is now live at https://your-domain.com</a:t>
+                  <a:srgbClr val="38BDF8"/>
+                </a:solidFill>
+                <a:latin typeface="Segoe UI"/>
+              </a:defRPr>
+            </a:pPr>
+            <a:r>
+              <a:t>Method A: RunPod Pods</a:t>
+            </a:r>
+          </a:p>
+          <a:p>
+            <a:pPr>
+              <a:spcAft>
+                <a:spcPts val="700"/>
+              </a:spcAft>
+              <a:defRPr sz="1250">
+                <a:solidFill>
+                  <a:srgbClr val="F8FAFC"/>
+                </a:solidFill>
+                <a:latin typeface="Segoe UI"/>
+              </a:defRPr>
+            </a:pPr>
+            <a:r>
+              <a:t>• Persistent GPU instances billed hourly</a:t>
+            </a:r>
+          </a:p>
+          <a:p>
+            <a:pPr>
+              <a:spcAft>
+                <a:spcPts val="700"/>
+              </a:spcAft>
+              <a:defRPr sz="1250">
+                <a:solidFill>
+                  <a:srgbClr val="F8FAFC"/>
+                </a:solidFill>
+                <a:latin typeface="Segoe UI"/>
+              </a:defRPr>
+            </a:pPr>
+            <a:r>
+              <a:t>• Full terminal access via SSH or Jupyter Lab</a:t>
+            </a:r>
+          </a:p>
+          <a:p>
+            <a:pPr>
+              <a:spcAft>
+                <a:spcPts val="700"/>
+              </a:spcAft>
+              <a:defRPr sz="1250">
+                <a:solidFill>
+                  <a:srgbClr val="F8FAFC"/>
+                </a:solidFill>
+                <a:latin typeface="Segoe UI"/>
+              </a:defRPr>
+            </a:pPr>
+            <a:r>
+              <a:t>• Persistent Network Volume keeps data across restarts</a:t>
+            </a:r>
+          </a:p>
+          <a:p>
+            <a:pPr>
+              <a:spcAft>
+                <a:spcPts val="700"/>
+              </a:spcAft>
+              <a:defRPr sz="1250">
+                <a:solidFill>
+                  <a:srgbClr val="F8FAFC"/>
+                </a:solidFill>
+                <a:latin typeface="Segoe UI"/>
+              </a:defRPr>
+            </a:pPr>
+            <a:r>
+              <a:t>• cd /workspace, clone repo, pip install, streamlit run</a:t>
+            </a:r>
+          </a:p>
+          <a:p>
+            <a:pPr>
+              <a:spcAft>
+                <a:spcPts val="700"/>
+              </a:spcAft>
+              <a:defRPr sz="1250">
+                <a:solidFill>
+                  <a:srgbClr val="F8FAFC"/>
+                </a:solidFill>
+                <a:latin typeface="Segoe UI"/>
+              </a:defRPr>
+            </a:pPr>
+            <a:r>
+              <a:t>• Connect - HTTP [Port 8501] gives a public HTTPS URL</a:t>
+            </a:r>
+          </a:p>
+          <a:p>
+            <a:pPr>
+              <a:spcAft>
+                <a:spcPts val="700"/>
+              </a:spcAft>
+              <a:defRPr sz="1250">
+                <a:solidFill>
+                  <a:srgbClr val="F8FAFC"/>
+                </a:solidFill>
+                <a:latin typeface="Segoe UI"/>
+              </a:defRPr>
+            </a:pPr>
+            <a:r>
+              <a:t>• Best for: dashboards, demos, interactive testing</a:t>
             </a:r>
           </a:p>
         </p:txBody>
@@ -6572,381 +7029,7 @@
           </a:fontRef>
         </p:style>
         <p:txBody>
-          <a:bodyPr rtlCol="0" anchor="ctr" wrap="square" lIns="256032" rIns="256032" tIns="201168" bIns="201168"/>
-          <a:lstStyle/>
-          <a:p>
-            <a:pPr algn="ctr">
-              <a:spcAft>
-                <a:spcPts val="1200"/>
-              </a:spcAft>
-              <a:defRPr sz="1700" b="1">
-                <a:solidFill>
-                  <a:srgbClr val="38BDF8"/>
-                </a:solidFill>
-                <a:latin typeface="Segoe UI"/>
-              </a:defRPr>
-            </a:pPr>
-            <a:r>
-              <a:t>Auto-Renewal &amp; Security</a:t>
-            </a:r>
-          </a:p>
-          <a:p>
-            <a:pPr>
-              <a:spcAft>
-                <a:spcPts val="700"/>
-              </a:spcAft>
-              <a:defRPr sz="1250">
-                <a:solidFill>
-                  <a:srgbClr val="F8FAFC"/>
-                </a:solidFill>
-                <a:latin typeface="Segoe UI"/>
-              </a:defRPr>
-            </a:pPr>
-            <a:r>
-              <a:t>• Certbot sets up a system cron/timer job automatically</a:t>
-            </a:r>
-          </a:p>
-          <a:p>
-            <a:pPr>
-              <a:spcAft>
-                <a:spcPts val="700"/>
-              </a:spcAft>
-              <a:defRPr sz="1250">
-                <a:solidFill>
-                  <a:srgbClr val="F8FAFC"/>
-                </a:solidFill>
-                <a:latin typeface="Segoe UI"/>
-              </a:defRPr>
-            </a:pPr>
-            <a:r>
-              <a:t>• Certificate renews every 90 days without manual action</a:t>
-            </a:r>
-          </a:p>
-          <a:p>
-            <a:pPr>
-              <a:spcAft>
-                <a:spcPts val="700"/>
-              </a:spcAft>
-              <a:defRPr sz="1250">
-                <a:solidFill>
-                  <a:srgbClr val="F8FAFC"/>
-                </a:solidFill>
-                <a:latin typeface="Segoe UI"/>
-              </a:defRPr>
-            </a:pPr>
-            <a:r>
-              <a:t>• All user uploads &amp; predictions are encrypted in transit</a:t>
-            </a:r>
-          </a:p>
-          <a:p>
-            <a:pPr>
-              <a:spcAft>
-                <a:spcPts val="700"/>
-              </a:spcAft>
-              <a:defRPr sz="1250">
-                <a:solidFill>
-                  <a:srgbClr val="F8FAFC"/>
-                </a:solidFill>
-                <a:latin typeface="Segoe UI"/>
-              </a:defRPr>
-            </a:pPr>
-            <a:r>
-              <a:t>• Browser shows trusted padlock icon (no SSL warnings)</a:t>
-            </a:r>
-          </a:p>
-        </p:txBody>
-      </p:sp>
-    </p:spTree>
-  </p:cSld>
-  <p:clrMapOvr>
-    <a:masterClrMapping/>
-  </p:clrMapOvr>
-</p:sld>
-</file>
-
-<file path=ppt/slides/slide9.xml><?xml version="1.0" encoding="utf-8"?>
-<p:sld xmlns:a="http://schemas.openxmlformats.org/drawingml/2006/main" xmlns:p="http://schemas.openxmlformats.org/presentationml/2006/main" xmlns:r="http://schemas.openxmlformats.org/officeDocument/2006/relationships">
-  <p:cSld>
-    <p:bg>
-      <p:bgPr>
-        <a:solidFill>
-          <a:srgbClr val="0F172A"/>
-        </a:solidFill>
-        <a:effectLst/>
-      </p:bgPr>
-    </p:bg>
-    <p:spTree>
-      <p:nvGrpSpPr>
-        <p:cNvPr id="1" name=""/>
-        <p:cNvGrpSpPr/>
-        <p:nvPr/>
-      </p:nvGrpSpPr>
-      <p:grpSpPr/>
-      <p:sp>
-        <p:nvSpPr>
-          <p:cNvPr id="2" name="TextBox 1"/>
-          <p:cNvSpPr txBox="1"/>
-          <p:nvPr/>
-        </p:nvSpPr>
-        <p:spPr>
-          <a:xfrm>
-            <a:off x="731520" y="320040"/>
-            <a:ext cx="10698480" cy="365760"/>
-          </a:xfrm>
-          <a:prstGeom prst="rect">
-            <a:avLst/>
-          </a:prstGeom>
-          <a:noFill/>
-        </p:spPr>
-        <p:txBody>
-          <a:bodyPr wrap="none">
-            <a:spAutoFit/>
-          </a:bodyPr>
-          <a:lstStyle/>
-          <a:p>
-            <a:pPr>
-              <a:defRPr sz="1000" b="1">
-                <a:solidFill>
-                  <a:srgbClr val="38BDF8"/>
-                </a:solidFill>
-                <a:latin typeface="Segoe UI"/>
-              </a:defRPr>
-            </a:pPr>
-            <a:r>
-              <a:t>RUNPOD</a:t>
-            </a:r>
-          </a:p>
-        </p:txBody>
-      </p:sp>
-      <p:sp>
-        <p:nvSpPr>
-          <p:cNvPr id="3" name="TextBox 2"/>
-          <p:cNvSpPr txBox="1"/>
-          <p:nvPr/>
-        </p:nvSpPr>
-        <p:spPr>
-          <a:xfrm>
-            <a:off x="731520" y="658368"/>
-            <a:ext cx="10698480" cy="777240"/>
-          </a:xfrm>
-          <a:prstGeom prst="rect">
-            <a:avLst/>
-          </a:prstGeom>
-          <a:noFill/>
-        </p:spPr>
-        <p:txBody>
-          <a:bodyPr wrap="square">
-            <a:spAutoFit/>
-          </a:bodyPr>
-          <a:lstStyle/>
-          <a:p>
-            <a:pPr>
-              <a:defRPr sz="3100" b="1">
-                <a:solidFill>
-                  <a:srgbClr val="F8FAFC"/>
-                </a:solidFill>
-                <a:latin typeface="Segoe UI"/>
-              </a:defRPr>
-            </a:pPr>
-            <a:r>
-              <a:t>Option 2 - RunPod Cloud GPU Deployment</a:t>
-            </a:r>
-          </a:p>
-        </p:txBody>
-      </p:sp>
-      <p:sp>
-        <p:nvSpPr>
-          <p:cNvPr id="4" name="Rectangle 3"/>
-          <p:cNvSpPr/>
-          <p:nvPr/>
-        </p:nvSpPr>
-        <p:spPr>
-          <a:xfrm>
-            <a:off x="731520" y="1600200"/>
-            <a:ext cx="5120640" cy="4297680"/>
-          </a:xfrm>
-          <a:prstGeom prst="rect">
-            <a:avLst/>
-          </a:prstGeom>
-          <a:solidFill>
-            <a:srgbClr val="1E293B"/>
-          </a:solidFill>
-          <a:ln>
-            <a:solidFill>
-              <a:srgbClr val="1E293B"/>
-            </a:solidFill>
-          </a:ln>
-        </p:spPr>
-        <p:style>
-          <a:lnRef idx="1">
-            <a:schemeClr val="accent1"/>
-          </a:lnRef>
-          <a:fillRef idx="3">
-            <a:schemeClr val="accent1"/>
-          </a:fillRef>
-          <a:effectRef idx="2">
-            <a:schemeClr val="accent1"/>
-          </a:effectRef>
-          <a:fontRef idx="minor">
-            <a:schemeClr val="lt1"/>
-          </a:fontRef>
-        </p:style>
-        <p:txBody>
-          <a:bodyPr rtlCol="0" anchor="ctr" wrap="square" lIns="256032" rIns="256032" tIns="201168" bIns="201168"/>
-          <a:lstStyle/>
-          <a:p>
-            <a:pPr algn="ctr">
-              <a:spcAft>
-                <a:spcPts val="1200"/>
-              </a:spcAft>
-              <a:defRPr sz="1700" b="1">
-                <a:solidFill>
-                  <a:srgbClr val="38BDF8"/>
-                </a:solidFill>
-                <a:latin typeface="Segoe UI"/>
-              </a:defRPr>
-            </a:pPr>
-            <a:r>
-              <a:t>Method A: RunPod Pods</a:t>
-            </a:r>
-          </a:p>
-          <a:p>
-            <a:pPr>
-              <a:spcAft>
-                <a:spcPts val="700"/>
-              </a:spcAft>
-              <a:defRPr sz="1250">
-                <a:solidFill>
-                  <a:srgbClr val="F8FAFC"/>
-                </a:solidFill>
-                <a:latin typeface="Segoe UI"/>
-              </a:defRPr>
-            </a:pPr>
-            <a:r>
-              <a:t>• Persistent GPU instances billed hourly</a:t>
-            </a:r>
-          </a:p>
-          <a:p>
-            <a:pPr>
-              <a:spcAft>
-                <a:spcPts val="700"/>
-              </a:spcAft>
-              <a:defRPr sz="1250">
-                <a:solidFill>
-                  <a:srgbClr val="F8FAFC"/>
-                </a:solidFill>
-                <a:latin typeface="Segoe UI"/>
-              </a:defRPr>
-            </a:pPr>
-            <a:r>
-              <a:t>• Full terminal access via SSH or Jupyter Lab</a:t>
-            </a:r>
-          </a:p>
-          <a:p>
-            <a:pPr>
-              <a:spcAft>
-                <a:spcPts val="700"/>
-              </a:spcAft>
-              <a:defRPr sz="1250">
-                <a:solidFill>
-                  <a:srgbClr val="F8FAFC"/>
-                </a:solidFill>
-                <a:latin typeface="Segoe UI"/>
-              </a:defRPr>
-            </a:pPr>
-            <a:r>
-              <a:t>• Persistent Network Volume keeps data across restarts</a:t>
-            </a:r>
-          </a:p>
-          <a:p>
-            <a:pPr>
-              <a:spcAft>
-                <a:spcPts val="700"/>
-              </a:spcAft>
-              <a:defRPr sz="1250">
-                <a:solidFill>
-                  <a:srgbClr val="F8FAFC"/>
-                </a:solidFill>
-                <a:latin typeface="Segoe UI"/>
-              </a:defRPr>
-            </a:pPr>
-            <a:r>
-              <a:t>• cd /workspace, clone repo, pip install, streamlit run</a:t>
-            </a:r>
-          </a:p>
-          <a:p>
-            <a:pPr>
-              <a:spcAft>
-                <a:spcPts val="700"/>
-              </a:spcAft>
-              <a:defRPr sz="1250">
-                <a:solidFill>
-                  <a:srgbClr val="F8FAFC"/>
-                </a:solidFill>
-                <a:latin typeface="Segoe UI"/>
-              </a:defRPr>
-            </a:pPr>
-            <a:r>
-              <a:t>• Connect - HTTP [Port 8501] gives a public HTTPS URL</a:t>
-            </a:r>
-          </a:p>
-          <a:p>
-            <a:pPr>
-              <a:spcAft>
-                <a:spcPts val="700"/>
-              </a:spcAft>
-              <a:defRPr sz="1250">
-                <a:solidFill>
-                  <a:srgbClr val="F8FAFC"/>
-                </a:solidFill>
-                <a:latin typeface="Segoe UI"/>
-              </a:defRPr>
-            </a:pPr>
-            <a:r>
-              <a:t>• Best for: dashboards, demos, interactive testing</a:t>
-            </a:r>
-          </a:p>
-        </p:txBody>
-      </p:sp>
-      <p:sp>
-        <p:nvSpPr>
-          <p:cNvPr id="5" name="Rectangle 4"/>
-          <p:cNvSpPr/>
-          <p:nvPr/>
-        </p:nvSpPr>
-        <p:spPr>
-          <a:xfrm>
-            <a:off x="6309360" y="1600200"/>
-            <a:ext cx="5120640" cy="4297680"/>
-          </a:xfrm>
-          <a:prstGeom prst="rect">
-            <a:avLst/>
-          </a:prstGeom>
-          <a:solidFill>
-            <a:srgbClr val="1E293B"/>
-          </a:solidFill>
-          <a:ln>
-            <a:solidFill>
-              <a:srgbClr val="1E293B"/>
-            </a:solidFill>
-          </a:ln>
-        </p:spPr>
-        <p:style>
-          <a:lnRef idx="1">
-            <a:schemeClr val="accent1"/>
-          </a:lnRef>
-          <a:fillRef idx="3">
-            <a:schemeClr val="accent1"/>
-          </a:fillRef>
-          <a:effectRef idx="2">
-            <a:schemeClr val="accent1"/>
-          </a:effectRef>
-          <a:fontRef idx="minor">
-            <a:schemeClr val="lt1"/>
-          </a:fontRef>
-        </p:style>
-        <p:txBody>
-          <a:bodyPr rtlCol="0" anchor="ctr" wrap="square" lIns="256032" rIns="256032" tIns="201168" bIns="201168"/>
+          <a:bodyPr wrap="square" lIns="256032" tIns="201168" rIns="256032" bIns="201168" rtlCol="0" anchor="ctr"/>
           <a:lstStyle/>
           <a:p>
             <a:pPr algn="ctr">
